--- a/examples/recreations/04_Box_Treasurer__SLG_CheckoutDotCom_RequestedInfo_Rev1/out_mat2ppt.pptx
+++ b/examples/recreations/04_Box_Treasurer__SLG_CheckoutDotCom_RequestedInfo_Rev1/out_mat2ppt.pptx
@@ -3098,9 +3098,57 @@
         <p:nvPr/>
       </p:nvGrpSpPr>
       <p:grpSpPr/>
-      <p:sp>
-        <p:nvSpPr>
-          <p:cNvPr id="2" name="Rectangle 1"/>
+      <p:pic>
+        <p:nvPicPr>
+          <p:cNvPr id="2" name="Picture 1" descr="image1.jpg"/>
+          <p:cNvPicPr>
+            <a:picLocks noChangeAspect="1"/>
+          </p:cNvPicPr>
+          <p:nvPr/>
+        </p:nvPicPr>
+        <p:blipFill>
+          <a:blip r:embed="rId2"/>
+          <a:stretch>
+            <a:fillRect/>
+          </a:stretch>
+        </p:blipFill>
+        <p:spPr>
+          <a:xfrm>
+            <a:off x="0" y="6126480"/>
+            <a:ext cx="12192000" cy="742950"/>
+          </a:xfrm>
+          <a:prstGeom prst="rect">
+            <a:avLst/>
+          </a:prstGeom>
+        </p:spPr>
+      </p:pic>
+      <p:pic>
+        <p:nvPicPr>
+          <p:cNvPr id="3" name="Picture 2" descr="image2.png"/>
+          <p:cNvPicPr>
+            <a:picLocks noChangeAspect="1"/>
+          </p:cNvPicPr>
+          <p:nvPr/>
+        </p:nvPicPr>
+        <p:blipFill>
+          <a:blip r:embed="rId3"/>
+          <a:stretch>
+            <a:fillRect/>
+          </a:stretch>
+        </p:blipFill>
+        <p:spPr>
+          <a:xfrm>
+            <a:off x="0" y="0"/>
+            <a:ext cx="12192000" cy="6858000"/>
+          </a:xfrm>
+          <a:prstGeom prst="rect">
+            <a:avLst/>
+          </a:prstGeom>
+        </p:spPr>
+      </p:pic>
+      <p:sp>
+        <p:nvSpPr>
+          <p:cNvPr id="4" name="Rectangle 3"/>
           <p:cNvSpPr/>
           <p:nvPr/>
         </p:nvSpPr>
@@ -3139,7 +3187,7 @@
       </p:sp>
       <p:sp>
         <p:nvSpPr>
-          <p:cNvPr id="3" name="Rectangle 2"/>
+          <p:cNvPr id="5" name="Rectangle 4"/>
           <p:cNvSpPr/>
           <p:nvPr/>
         </p:nvSpPr>
@@ -3194,6 +3242,132 @@
         <p:nvPr/>
       </p:nvGrpSpPr>
       <p:grpSpPr/>
+      <p:pic>
+        <p:nvPicPr>
+          <p:cNvPr id="2" name="Picture 1" descr="image1.jpg"/>
+          <p:cNvPicPr>
+            <a:picLocks noChangeAspect="1"/>
+          </p:cNvPicPr>
+          <p:nvPr/>
+        </p:nvPicPr>
+        <p:blipFill>
+          <a:blip r:embed="rId2"/>
+          <a:stretch>
+            <a:fillRect/>
+          </a:stretch>
+        </p:blipFill>
+        <p:spPr>
+          <a:xfrm>
+            <a:off x="0" y="6126480"/>
+            <a:ext cx="12192000" cy="742950"/>
+          </a:xfrm>
+          <a:prstGeom prst="rect">
+            <a:avLst/>
+          </a:prstGeom>
+        </p:spPr>
+      </p:pic>
+      <p:pic>
+        <p:nvPicPr>
+          <p:cNvPr id="3" name="Picture 2" descr="image2.png"/>
+          <p:cNvPicPr>
+            <a:picLocks noChangeAspect="1"/>
+          </p:cNvPicPr>
+          <p:nvPr/>
+        </p:nvPicPr>
+        <p:blipFill>
+          <a:blip r:embed="rId3"/>
+          <a:stretch>
+            <a:fillRect/>
+          </a:stretch>
+        </p:blipFill>
+        <p:spPr>
+          <a:xfrm>
+            <a:off x="0" y="0"/>
+            <a:ext cx="12192000" cy="6858000"/>
+          </a:xfrm>
+          <a:prstGeom prst="rect">
+            <a:avLst/>
+          </a:prstGeom>
+        </p:spPr>
+      </p:pic>
+      <p:sp>
+        <p:nvSpPr>
+          <p:cNvPr id="4" name="Rectangle 3"/>
+          <p:cNvSpPr/>
+          <p:nvPr/>
+        </p:nvSpPr>
+        <p:spPr>
+          <a:xfrm>
+            <a:off x="838200" y="365125"/>
+            <a:ext cx="10515600" cy="1325563"/>
+          </a:xfrm>
+          <a:prstGeom prst="rect">
+            <a:avLst/>
+          </a:prstGeom>
+        </p:spPr>
+        <p:style>
+          <a:lnRef idx="1">
+            <a:schemeClr val="accent1"/>
+          </a:lnRef>
+          <a:fillRef idx="3">
+            <a:schemeClr val="accent1"/>
+          </a:fillRef>
+          <a:effectRef idx="2">
+            <a:schemeClr val="accent1"/>
+          </a:effectRef>
+          <a:fontRef idx="minor">
+            <a:schemeClr val="lt1"/>
+          </a:fontRef>
+        </p:style>
+        <p:txBody>
+          <a:bodyPr rtlCol="0" anchor="ctr"/>
+          <a:lstStyle/>
+          <a:p>
+            <a:r>
+              <a:t>Regulatory Documents</a:t>
+            </a:r>
+          </a:p>
+        </p:txBody>
+      </p:sp>
+      <p:sp>
+        <p:nvSpPr>
+          <p:cNvPr id="5" name="Rectangle 4"/>
+          <p:cNvSpPr/>
+          <p:nvPr/>
+        </p:nvSpPr>
+        <p:spPr>
+          <a:xfrm>
+            <a:off x="838200" y="365125"/>
+            <a:ext cx="10515600" cy="1325563"/>
+          </a:xfrm>
+          <a:prstGeom prst="rect">
+            <a:avLst/>
+          </a:prstGeom>
+        </p:spPr>
+        <p:style>
+          <a:lnRef idx="1">
+            <a:schemeClr val="accent1"/>
+          </a:lnRef>
+          <a:fillRef idx="3">
+            <a:schemeClr val="accent1"/>
+          </a:fillRef>
+          <a:effectRef idx="2">
+            <a:schemeClr val="accent1"/>
+          </a:effectRef>
+          <a:fontRef idx="minor">
+            <a:schemeClr val="lt1"/>
+          </a:fontRef>
+        </p:style>
+        <p:txBody>
+          <a:bodyPr rtlCol="0" anchor="ctr"/>
+          <a:lstStyle/>
+          <a:p>
+            <a:r>
+              <a:t>License required to operate the businessNM_SoS_InitialReport_2016917025-502856.pdfNM_ArticlesOfIncorporation_AoI_Approved.pdfLicenses for all jurisdictions in which you intend to provide your services.Starting in NM.  Other locations unknown, so far.  Copy of AML/KYC policy and proceduresNot sure what this would look like.  Are there examples?Completed AML QuestionnaireHas this been done?</a:t>
+            </a:r>
+          </a:p>
+        </p:txBody>
+      </p:sp>
     </p:spTree>
   </p:cSld>
   <p:clrMapOvr>
@@ -3212,6 +3386,132 @@
         <p:nvPr/>
       </p:nvGrpSpPr>
       <p:grpSpPr/>
+      <p:pic>
+        <p:nvPicPr>
+          <p:cNvPr id="2" name="Picture 1" descr="image1.jpg"/>
+          <p:cNvPicPr>
+            <a:picLocks noChangeAspect="1"/>
+          </p:cNvPicPr>
+          <p:nvPr/>
+        </p:nvPicPr>
+        <p:blipFill>
+          <a:blip r:embed="rId2"/>
+          <a:stretch>
+            <a:fillRect/>
+          </a:stretch>
+        </p:blipFill>
+        <p:spPr>
+          <a:xfrm>
+            <a:off x="0" y="6126480"/>
+            <a:ext cx="12192000" cy="742950"/>
+          </a:xfrm>
+          <a:prstGeom prst="rect">
+            <a:avLst/>
+          </a:prstGeom>
+        </p:spPr>
+      </p:pic>
+      <p:pic>
+        <p:nvPicPr>
+          <p:cNvPr id="3" name="Picture 2" descr="image2.png"/>
+          <p:cNvPicPr>
+            <a:picLocks noChangeAspect="1"/>
+          </p:cNvPicPr>
+          <p:nvPr/>
+        </p:nvPicPr>
+        <p:blipFill>
+          <a:blip r:embed="rId3"/>
+          <a:stretch>
+            <a:fillRect/>
+          </a:stretch>
+        </p:blipFill>
+        <p:spPr>
+          <a:xfrm>
+            <a:off x="0" y="0"/>
+            <a:ext cx="12192000" cy="6858000"/>
+          </a:xfrm>
+          <a:prstGeom prst="rect">
+            <a:avLst/>
+          </a:prstGeom>
+        </p:spPr>
+      </p:pic>
+      <p:sp>
+        <p:nvSpPr>
+          <p:cNvPr id="4" name="Rectangle 3"/>
+          <p:cNvSpPr/>
+          <p:nvPr/>
+        </p:nvSpPr>
+        <p:spPr>
+          <a:xfrm>
+            <a:off x="838200" y="365125"/>
+            <a:ext cx="10515600" cy="1325563"/>
+          </a:xfrm>
+          <a:prstGeom prst="rect">
+            <a:avLst/>
+          </a:prstGeom>
+        </p:spPr>
+        <p:style>
+          <a:lnRef idx="1">
+            <a:schemeClr val="accent1"/>
+          </a:lnRef>
+          <a:fillRef idx="3">
+            <a:schemeClr val="accent1"/>
+          </a:fillRef>
+          <a:effectRef idx="2">
+            <a:schemeClr val="accent1"/>
+          </a:effectRef>
+          <a:fontRef idx="minor">
+            <a:schemeClr val="lt1"/>
+          </a:fontRef>
+        </p:style>
+        <p:txBody>
+          <a:bodyPr rtlCol="0" anchor="ctr"/>
+          <a:lstStyle/>
+          <a:p>
+            <a:r>
+              <a:t>Corporate Documents</a:t>
+            </a:r>
+          </a:p>
+        </p:txBody>
+      </p:sp>
+      <p:sp>
+        <p:nvSpPr>
+          <p:cNvPr id="5" name="Rectangle 4"/>
+          <p:cNvSpPr/>
+          <p:nvPr/>
+        </p:nvSpPr>
+        <p:spPr>
+          <a:xfrm>
+            <a:off x="838200" y="365125"/>
+            <a:ext cx="10515600" cy="1325563"/>
+          </a:xfrm>
+          <a:prstGeom prst="rect">
+            <a:avLst/>
+          </a:prstGeom>
+        </p:spPr>
+        <p:style>
+          <a:lnRef idx="1">
+            <a:schemeClr val="accent1"/>
+          </a:lnRef>
+          <a:fillRef idx="3">
+            <a:schemeClr val="accent1"/>
+          </a:fillRef>
+          <a:effectRef idx="2">
+            <a:schemeClr val="accent1"/>
+          </a:effectRef>
+          <a:fontRef idx="minor">
+            <a:schemeClr val="lt1"/>
+          </a:fontRef>
+        </p:style>
+        <p:txBody>
+          <a:bodyPr rtlCol="0" anchor="ctr"/>
+          <a:lstStyle/>
+          <a:p>
+            <a:r>
+              <a:t>Please provide 501c3 document to confirm tax exempt statusThe following are attachedIRS_f1023ez_SaintLukeGuild_20210711_AsSubmitted.pdfIRS_fSS4_EIN_Letter_CP575Notice_1622224687610.pdf</a:t>
+            </a:r>
+          </a:p>
+        </p:txBody>
+      </p:sp>
     </p:spTree>
   </p:cSld>
   <p:clrMapOvr>
@@ -3230,9 +3530,96 @@
         <p:nvPr/>
       </p:nvGrpSpPr>
       <p:grpSpPr/>
-      <p:sp>
-        <p:nvSpPr>
-          <p:cNvPr id="2" name="Rectangle 1"/>
+      <p:pic>
+        <p:nvPicPr>
+          <p:cNvPr id="2" name="Picture 1" descr="image1.jpg"/>
+          <p:cNvPicPr>
+            <a:picLocks noChangeAspect="1"/>
+          </p:cNvPicPr>
+          <p:nvPr/>
+        </p:nvPicPr>
+        <p:blipFill>
+          <a:blip r:embed="rId2"/>
+          <a:stretch>
+            <a:fillRect/>
+          </a:stretch>
+        </p:blipFill>
+        <p:spPr>
+          <a:xfrm>
+            <a:off x="0" y="6126480"/>
+            <a:ext cx="12192000" cy="742950"/>
+          </a:xfrm>
+          <a:prstGeom prst="rect">
+            <a:avLst/>
+          </a:prstGeom>
+        </p:spPr>
+      </p:pic>
+      <p:pic>
+        <p:nvPicPr>
+          <p:cNvPr id="3" name="Picture 2" descr="image2.png"/>
+          <p:cNvPicPr>
+            <a:picLocks noChangeAspect="1"/>
+          </p:cNvPicPr>
+          <p:nvPr/>
+        </p:nvPicPr>
+        <p:blipFill>
+          <a:blip r:embed="rId3"/>
+          <a:stretch>
+            <a:fillRect/>
+          </a:stretch>
+        </p:blipFill>
+        <p:spPr>
+          <a:xfrm>
+            <a:off x="0" y="0"/>
+            <a:ext cx="12192000" cy="6858000"/>
+          </a:xfrm>
+          <a:prstGeom prst="rect">
+            <a:avLst/>
+          </a:prstGeom>
+        </p:spPr>
+      </p:pic>
+      <p:sp>
+        <p:nvSpPr>
+          <p:cNvPr id="4" name="Rectangle 3"/>
+          <p:cNvSpPr/>
+          <p:nvPr/>
+        </p:nvSpPr>
+        <p:spPr>
+          <a:xfrm>
+            <a:off x="838200" y="365125"/>
+            <a:ext cx="10515600" cy="1325563"/>
+          </a:xfrm>
+          <a:prstGeom prst="rect">
+            <a:avLst/>
+          </a:prstGeom>
+        </p:spPr>
+        <p:style>
+          <a:lnRef idx="1">
+            <a:schemeClr val="accent1"/>
+          </a:lnRef>
+          <a:fillRef idx="3">
+            <a:schemeClr val="accent1"/>
+          </a:fillRef>
+          <a:effectRef idx="2">
+            <a:schemeClr val="accent1"/>
+          </a:effectRef>
+          <a:fontRef idx="minor">
+            <a:schemeClr val="lt1"/>
+          </a:fontRef>
+        </p:style>
+        <p:txBody>
+          <a:bodyPr rtlCol="0" anchor="ctr"/>
+          <a:lstStyle/>
+          <a:p>
+            <a:r>
+              <a:t>Transaction InformationData Request</a:t>
+            </a:r>
+          </a:p>
+        </p:txBody>
+      </p:sp>
+      <p:sp>
+        <p:nvSpPr>
+          <p:cNvPr id="5" name="Rectangle 4"/>
           <p:cNvSpPr/>
           <p:nvPr/>
         </p:nvSpPr>
@@ -3287,9 +3674,57 @@
         <p:nvPr/>
       </p:nvGrpSpPr>
       <p:grpSpPr/>
+      <p:pic>
+        <p:nvPicPr>
+          <p:cNvPr id="2" name="Picture 1" descr="image1.jpg"/>
+          <p:cNvPicPr>
+            <a:picLocks noChangeAspect="1"/>
+          </p:cNvPicPr>
+          <p:nvPr/>
+        </p:nvPicPr>
+        <p:blipFill>
+          <a:blip r:embed="rId2"/>
+          <a:stretch>
+            <a:fillRect/>
+          </a:stretch>
+        </p:blipFill>
+        <p:spPr>
+          <a:xfrm>
+            <a:off x="0" y="6126480"/>
+            <a:ext cx="12192000" cy="742950"/>
+          </a:xfrm>
+          <a:prstGeom prst="rect">
+            <a:avLst/>
+          </a:prstGeom>
+        </p:spPr>
+      </p:pic>
+      <p:pic>
+        <p:nvPicPr>
+          <p:cNvPr id="3" name="Picture 2" descr="image2.png"/>
+          <p:cNvPicPr>
+            <a:picLocks noChangeAspect="1"/>
+          </p:cNvPicPr>
+          <p:nvPr/>
+        </p:nvPicPr>
+        <p:blipFill>
+          <a:blip r:embed="rId3"/>
+          <a:stretch>
+            <a:fillRect/>
+          </a:stretch>
+        </p:blipFill>
+        <p:spPr>
+          <a:xfrm>
+            <a:off x="0" y="0"/>
+            <a:ext cx="12192000" cy="6858000"/>
+          </a:xfrm>
+          <a:prstGeom prst="rect">
+            <a:avLst/>
+          </a:prstGeom>
+        </p:spPr>
+      </p:pic>
       <p:cxnSp>
         <p:nvCxnSpPr>
-          <p:cNvPr id="2" name="Connector 1"/>
+          <p:cNvPr id="4" name="Connector 3"/>
           <p:cNvCxnSpPr/>
           <p:nvPr/>
         </p:nvCxnSpPr>
@@ -3319,7 +3754,7 @@
       </p:cxnSp>
       <p:sp>
         <p:nvSpPr>
-          <p:cNvPr id="3" name="Rectangle 2"/>
+          <p:cNvPr id="5" name="Rectangle 4"/>
           <p:cNvSpPr/>
           <p:nvPr/>
         </p:nvSpPr>
@@ -3358,7 +3793,7 @@
       </p:sp>
       <p:sp>
         <p:nvSpPr>
-          <p:cNvPr id="4" name="Rectangle 3"/>
+          <p:cNvPr id="6" name="Rectangle 5"/>
           <p:cNvSpPr/>
           <p:nvPr/>
         </p:nvSpPr>
@@ -3397,7 +3832,7 @@
       </p:sp>
       <p:sp>
         <p:nvSpPr>
-          <p:cNvPr id="5" name="Rounded Rectangle 4"/>
+          <p:cNvPr id="7" name="Rounded Rectangle 6"/>
           <p:cNvSpPr/>
           <p:nvPr/>
         </p:nvSpPr>
@@ -3436,7 +3871,7 @@
       </p:sp>
       <p:sp>
         <p:nvSpPr>
-          <p:cNvPr id="6" name="Rounded Rectangle 5"/>
+          <p:cNvPr id="8" name="Rounded Rectangle 7"/>
           <p:cNvSpPr/>
           <p:nvPr/>
         </p:nvSpPr>
@@ -3475,7 +3910,7 @@
       </p:sp>
       <p:sp>
         <p:nvSpPr>
-          <p:cNvPr id="7" name="Rounded Rectangle 6"/>
+          <p:cNvPr id="9" name="Rounded Rectangle 8"/>
           <p:cNvSpPr/>
           <p:nvPr/>
         </p:nvSpPr>
@@ -3514,7 +3949,7 @@
       </p:sp>
       <p:cxnSp>
         <p:nvCxnSpPr>
-          <p:cNvPr id="8" name="Connector 7"/>
+          <p:cNvPr id="10" name="Connector 9"/>
           <p:cNvCxnSpPr/>
           <p:nvPr/>
         </p:nvCxnSpPr>
@@ -3544,7 +3979,7 @@
       </p:cxnSp>
       <p:cxnSp>
         <p:nvCxnSpPr>
-          <p:cNvPr id="9" name="Connector 8"/>
+          <p:cNvPr id="11" name="Connector 10"/>
           <p:cNvCxnSpPr/>
           <p:nvPr/>
         </p:nvCxnSpPr>
@@ -3574,7 +4009,7 @@
       </p:cxnSp>
       <p:sp>
         <p:nvSpPr>
-          <p:cNvPr id="10" name="Rounded Rectangle 9"/>
+          <p:cNvPr id="12" name="Rounded Rectangle 11"/>
           <p:cNvSpPr/>
           <p:nvPr/>
         </p:nvSpPr>
@@ -3613,7 +4048,7 @@
       </p:sp>
       <p:sp>
         <p:nvSpPr>
-          <p:cNvPr id="11" name="Rounded Rectangle 10"/>
+          <p:cNvPr id="13" name="Rounded Rectangle 12"/>
           <p:cNvSpPr/>
           <p:nvPr/>
         </p:nvSpPr>
@@ -3652,7 +4087,7 @@
       </p:sp>
       <p:cxnSp>
         <p:nvCxnSpPr>
-          <p:cNvPr id="12" name="Connector 11"/>
+          <p:cNvPr id="14" name="Connector 13"/>
           <p:cNvCxnSpPr/>
           <p:nvPr/>
         </p:nvCxnSpPr>
@@ -3682,7 +4117,7 @@
       </p:cxnSp>
       <p:cxnSp>
         <p:nvCxnSpPr>
-          <p:cNvPr id="13" name="Connector 12"/>
+          <p:cNvPr id="15" name="Connector 14"/>
           <p:cNvCxnSpPr/>
           <p:nvPr/>
         </p:nvCxnSpPr>
@@ -3712,7 +4147,7 @@
       </p:cxnSp>
       <p:cxnSp>
         <p:nvCxnSpPr>
-          <p:cNvPr id="14" name="Connector 13"/>
+          <p:cNvPr id="16" name="Connector 15"/>
           <p:cNvCxnSpPr/>
           <p:nvPr/>
         </p:nvCxnSpPr>
@@ -3758,9 +4193,57 @@
         <p:nvPr/>
       </p:nvGrpSpPr>
       <p:grpSpPr/>
-      <p:sp>
-        <p:nvSpPr>
-          <p:cNvPr id="2" name="Rectangle 1"/>
+      <p:pic>
+        <p:nvPicPr>
+          <p:cNvPr id="2" name="Picture 1" descr="image1.jpg"/>
+          <p:cNvPicPr>
+            <a:picLocks noChangeAspect="1"/>
+          </p:cNvPicPr>
+          <p:nvPr/>
+        </p:nvPicPr>
+        <p:blipFill>
+          <a:blip r:embed="rId2"/>
+          <a:stretch>
+            <a:fillRect/>
+          </a:stretch>
+        </p:blipFill>
+        <p:spPr>
+          <a:xfrm>
+            <a:off x="0" y="6126480"/>
+            <a:ext cx="12192000" cy="742950"/>
+          </a:xfrm>
+          <a:prstGeom prst="rect">
+            <a:avLst/>
+          </a:prstGeom>
+        </p:spPr>
+      </p:pic>
+      <p:pic>
+        <p:nvPicPr>
+          <p:cNvPr id="3" name="Picture 2" descr="image2.png"/>
+          <p:cNvPicPr>
+            <a:picLocks noChangeAspect="1"/>
+          </p:cNvPicPr>
+          <p:nvPr/>
+        </p:nvPicPr>
+        <p:blipFill>
+          <a:blip r:embed="rId3"/>
+          <a:stretch>
+            <a:fillRect/>
+          </a:stretch>
+        </p:blipFill>
+        <p:spPr>
+          <a:xfrm>
+            <a:off x="0" y="0"/>
+            <a:ext cx="12192000" cy="6858000"/>
+          </a:xfrm>
+          <a:prstGeom prst="rect">
+            <a:avLst/>
+          </a:prstGeom>
+        </p:spPr>
+      </p:pic>
+      <p:sp>
+        <p:nvSpPr>
+          <p:cNvPr id="4" name="Rectangle 3"/>
           <p:cNvSpPr/>
           <p:nvPr/>
         </p:nvSpPr>
@@ -3799,7 +4282,7 @@
       </p:sp>
       <p:sp>
         <p:nvSpPr>
-          <p:cNvPr id="3" name="Rectangle 2"/>
+          <p:cNvPr id="5" name="Rectangle 4"/>
           <p:cNvSpPr/>
           <p:nvPr/>
         </p:nvSpPr>
@@ -3838,7 +4321,7 @@
       </p:sp>
       <p:sp>
         <p:nvSpPr>
-          <p:cNvPr id="4" name="Rounded Rectangle 3"/>
+          <p:cNvPr id="6" name="Rounded Rectangle 5"/>
           <p:cNvSpPr/>
           <p:nvPr/>
         </p:nvSpPr>
@@ -3877,7 +4360,83 @@
       </p:sp>
       <p:sp>
         <p:nvSpPr>
-          <p:cNvPr id="5" name="Right Arrow 4"/>
+          <p:cNvPr id="7" name="Rounded Rectangle 6"/>
+          <p:cNvSpPr/>
+          <p:nvPr/>
+        </p:nvSpPr>
+        <p:spPr>
+          <a:xfrm>
+            <a:off x="5122711" y="1473267"/>
+            <a:ext cx="5970494" cy="5513521"/>
+          </a:xfrm>
+          <a:prstGeom prst="roundRect">
+            <a:avLst/>
+          </a:prstGeom>
+        </p:spPr>
+        <p:style>
+          <a:lnRef idx="1">
+            <a:schemeClr val="accent1"/>
+          </a:lnRef>
+          <a:fillRef idx="3">
+            <a:schemeClr val="accent1"/>
+          </a:fillRef>
+          <a:effectRef idx="2">
+            <a:schemeClr val="accent1"/>
+          </a:effectRef>
+          <a:fontRef idx="minor">
+            <a:schemeClr val="lt1"/>
+          </a:fontRef>
+        </p:style>
+        <p:txBody>
+          <a:bodyPr rtlCol="0" anchor="ctr"/>
+          <a:lstStyle/>
+          <a:p>
+            <a:pPr algn="ctr"/>
+          </a:p>
+        </p:txBody>
+      </p:sp>
+      <p:sp>
+        <p:nvSpPr>
+          <p:cNvPr id="8" name="Rectangle 7"/>
+          <p:cNvSpPr/>
+          <p:nvPr/>
+        </p:nvSpPr>
+        <p:spPr>
+          <a:xfrm>
+            <a:off x="5673421" y="1474189"/>
+            <a:ext cx="5419783" cy="5512599"/>
+          </a:xfrm>
+          <a:prstGeom prst="rect">
+            <a:avLst/>
+          </a:prstGeom>
+        </p:spPr>
+        <p:style>
+          <a:lnRef idx="1">
+            <a:schemeClr val="accent1"/>
+          </a:lnRef>
+          <a:fillRef idx="3">
+            <a:schemeClr val="accent1"/>
+          </a:fillRef>
+          <a:effectRef idx="2">
+            <a:schemeClr val="accent1"/>
+          </a:effectRef>
+          <a:fontRef idx="minor">
+            <a:schemeClr val="lt1"/>
+          </a:fontRef>
+        </p:style>
+        <p:txBody>
+          <a:bodyPr rtlCol="0" anchor="ctr"/>
+          <a:lstStyle/>
+          <a:p>
+            <a:r>
+              <a:t>First Name: _______________________Last Name: _______________________Address: _________________________City: ____________________________State:  [Drop Down ]         Zip: ___________  Keep me anonymous to project schools.Project: [Drop Down List]Pledge Amount: $  ___________Credit Card Info</a:t>
+            </a:r>
+          </a:p>
+        </p:txBody>
+      </p:sp>
+      <p:sp>
+        <p:nvSpPr>
+          <p:cNvPr id="9" name="Right Arrow 8"/>
           <p:cNvSpPr/>
           <p:nvPr/>
         </p:nvSpPr>
@@ -3930,9 +4489,57 @@
         <p:nvPr/>
       </p:nvGrpSpPr>
       <p:grpSpPr/>
-      <p:sp>
-        <p:nvSpPr>
-          <p:cNvPr id="2" name="Rectangle 1"/>
+      <p:pic>
+        <p:nvPicPr>
+          <p:cNvPr id="2" name="Picture 1" descr="image1.jpg"/>
+          <p:cNvPicPr>
+            <a:picLocks noChangeAspect="1"/>
+          </p:cNvPicPr>
+          <p:nvPr/>
+        </p:nvPicPr>
+        <p:blipFill>
+          <a:blip r:embed="rId2"/>
+          <a:stretch>
+            <a:fillRect/>
+          </a:stretch>
+        </p:blipFill>
+        <p:spPr>
+          <a:xfrm>
+            <a:off x="0" y="6126480"/>
+            <a:ext cx="12192000" cy="742950"/>
+          </a:xfrm>
+          <a:prstGeom prst="rect">
+            <a:avLst/>
+          </a:prstGeom>
+        </p:spPr>
+      </p:pic>
+      <p:pic>
+        <p:nvPicPr>
+          <p:cNvPr id="3" name="Picture 2" descr="image2.png"/>
+          <p:cNvPicPr>
+            <a:picLocks noChangeAspect="1"/>
+          </p:cNvPicPr>
+          <p:nvPr/>
+        </p:nvPicPr>
+        <p:blipFill>
+          <a:blip r:embed="rId3"/>
+          <a:stretch>
+            <a:fillRect/>
+          </a:stretch>
+        </p:blipFill>
+        <p:spPr>
+          <a:xfrm>
+            <a:off x="0" y="0"/>
+            <a:ext cx="12192000" cy="6858000"/>
+          </a:xfrm>
+          <a:prstGeom prst="rect">
+            <a:avLst/>
+          </a:prstGeom>
+        </p:spPr>
+      </p:pic>
+      <p:sp>
+        <p:nvSpPr>
+          <p:cNvPr id="4" name="Rectangle 3"/>
           <p:cNvSpPr/>
           <p:nvPr/>
         </p:nvSpPr>
@@ -3971,7 +4578,7 @@
       </p:sp>
       <p:sp>
         <p:nvSpPr>
-          <p:cNvPr id="3" name="Rectangle 2"/>
+          <p:cNvPr id="5" name="Rectangle 4"/>
           <p:cNvSpPr/>
           <p:nvPr/>
         </p:nvSpPr>
@@ -4010,7 +4617,7 @@
       </p:sp>
       <p:sp>
         <p:nvSpPr>
-          <p:cNvPr id="4" name="Rounded Rectangle 3"/>
+          <p:cNvPr id="6" name="Rounded Rectangle 5"/>
           <p:cNvSpPr/>
           <p:nvPr/>
         </p:nvSpPr>
@@ -4049,16 +4656,16 @@
       </p:sp>
       <p:sp>
         <p:nvSpPr>
-          <p:cNvPr id="5" name="Right Arrow 4"/>
+          <p:cNvPr id="7" name="Rounded Rectangle 6"/>
           <p:cNvSpPr/>
           <p:nvPr/>
         </p:nvSpPr>
         <p:spPr>
           <a:xfrm>
-            <a:off x="4255368" y="5334618"/>
-            <a:ext cx="932325" cy="487183"/>
-          </a:xfrm>
-          <a:prstGeom prst="rightArrow">
+            <a:off x="5122711" y="1473267"/>
+            <a:ext cx="5970494" cy="5236522"/>
+          </a:xfrm>
+          <a:prstGeom prst="roundRect">
             <a:avLst/>
           </a:prstGeom>
         </p:spPr>
@@ -4081,6 +4688,382 @@
           <a:lstStyle/>
           <a:p>
             <a:pPr algn="ctr"/>
+          </a:p>
+        </p:txBody>
+      </p:sp>
+      <p:sp>
+        <p:nvSpPr>
+          <p:cNvPr id="8" name="Rectangle 7"/>
+          <p:cNvSpPr/>
+          <p:nvPr/>
+        </p:nvSpPr>
+        <p:spPr>
+          <a:xfrm>
+            <a:off x="5673422" y="1474189"/>
+            <a:ext cx="4869072" cy="5235600"/>
+          </a:xfrm>
+          <a:prstGeom prst="rect">
+            <a:avLst/>
+          </a:prstGeom>
+        </p:spPr>
+        <p:style>
+          <a:lnRef idx="1">
+            <a:schemeClr val="accent1"/>
+          </a:lnRef>
+          <a:fillRef idx="3">
+            <a:schemeClr val="accent1"/>
+          </a:fillRef>
+          <a:effectRef idx="2">
+            <a:schemeClr val="accent1"/>
+          </a:effectRef>
+          <a:fontRef idx="minor">
+            <a:schemeClr val="lt1"/>
+          </a:fontRef>
+        </p:style>
+        <p:txBody>
+          <a:bodyPr rtlCol="0" anchor="ctr"/>
+          <a:lstStyle/>
+          <a:p>
+            <a:r>
+              <a:t>Project: Holy Child Catholic SchoolFirst Name: _______________________Last Name: _______________________Address: _________________________City: ____________________________State:  [Drop Down ]         Zip: ___________ Keep me anonymous to the above school.Pledge Amount: $  ___________Credit Card Info</a:t>
+            </a:r>
+          </a:p>
+        </p:txBody>
+      </p:sp>
+      <p:sp>
+        <p:nvSpPr>
+          <p:cNvPr id="9" name="Right Arrow 8"/>
+          <p:cNvSpPr/>
+          <p:nvPr/>
+        </p:nvSpPr>
+        <p:spPr>
+          <a:xfrm>
+            <a:off x="4255368" y="5334618"/>
+            <a:ext cx="932325" cy="487183"/>
+          </a:xfrm>
+          <a:prstGeom prst="rightArrow">
+            <a:avLst/>
+          </a:prstGeom>
+        </p:spPr>
+        <p:style>
+          <a:lnRef idx="1">
+            <a:schemeClr val="accent1"/>
+          </a:lnRef>
+          <a:fillRef idx="3">
+            <a:schemeClr val="accent1"/>
+          </a:fillRef>
+          <a:effectRef idx="2">
+            <a:schemeClr val="accent1"/>
+          </a:effectRef>
+          <a:fontRef idx="minor">
+            <a:schemeClr val="lt1"/>
+          </a:fontRef>
+        </p:style>
+        <p:txBody>
+          <a:bodyPr rtlCol="0" anchor="ctr"/>
+          <a:lstStyle/>
+          <a:p>
+            <a:pPr algn="ctr"/>
+          </a:p>
+        </p:txBody>
+      </p:sp>
+      <p:sp>
+        <p:nvSpPr>
+          <p:cNvPr id="10" name="Oval 9"/>
+          <p:cNvSpPr/>
+          <p:nvPr/>
+        </p:nvSpPr>
+        <p:spPr>
+          <a:xfrm>
+            <a:off x="6060142" y="914404"/>
+            <a:ext cx="594360" cy="594360"/>
+          </a:xfrm>
+          <a:prstGeom prst="ellipse">
+            <a:avLst/>
+          </a:prstGeom>
+        </p:spPr>
+        <p:style>
+          <a:lnRef idx="1">
+            <a:schemeClr val="accent1"/>
+          </a:lnRef>
+          <a:fillRef idx="3">
+            <a:schemeClr val="accent1"/>
+          </a:fillRef>
+          <a:effectRef idx="2">
+            <a:schemeClr val="accent1"/>
+          </a:effectRef>
+          <a:fontRef idx="minor">
+            <a:schemeClr val="lt1"/>
+          </a:fontRef>
+        </p:style>
+        <p:txBody>
+          <a:bodyPr rtlCol="0" anchor="ctr"/>
+          <a:lstStyle/>
+          <a:p>
+            <a:pPr algn="ctr"/>
+          </a:p>
+        </p:txBody>
+      </p:sp>
+      <p:sp>
+        <p:nvSpPr>
+          <p:cNvPr id="11" name="Rectangle 10"/>
+          <p:cNvSpPr/>
+          <p:nvPr/>
+        </p:nvSpPr>
+        <p:spPr>
+          <a:xfrm>
+            <a:off x="6338048" y="1050772"/>
+            <a:ext cx="1882588" cy="321624"/>
+          </a:xfrm>
+          <a:prstGeom prst="rect">
+            <a:avLst/>
+          </a:prstGeom>
+        </p:spPr>
+        <p:style>
+          <a:lnRef idx="1">
+            <a:schemeClr val="accent1"/>
+          </a:lnRef>
+          <a:fillRef idx="3">
+            <a:schemeClr val="accent1"/>
+          </a:fillRef>
+          <a:effectRef idx="2">
+            <a:schemeClr val="accent1"/>
+          </a:effectRef>
+          <a:fontRef idx="minor">
+            <a:schemeClr val="lt1"/>
+          </a:fontRef>
+        </p:style>
+        <p:txBody>
+          <a:bodyPr rtlCol="0" anchor="ctr"/>
+          <a:lstStyle/>
+          <a:p>
+            <a:pPr algn="ctr"/>
+          </a:p>
+        </p:txBody>
+      </p:sp>
+      <p:sp>
+        <p:nvSpPr>
+          <p:cNvPr id="12" name="Rectangle 11"/>
+          <p:cNvSpPr/>
+          <p:nvPr/>
+        </p:nvSpPr>
+        <p:spPr>
+          <a:xfrm>
+            <a:off x="8086165" y="1050772"/>
+            <a:ext cx="1828800" cy="321624"/>
+          </a:xfrm>
+          <a:prstGeom prst="rect">
+            <a:avLst/>
+          </a:prstGeom>
+        </p:spPr>
+        <p:style>
+          <a:lnRef idx="1">
+            <a:schemeClr val="accent1"/>
+          </a:lnRef>
+          <a:fillRef idx="3">
+            <a:schemeClr val="accent1"/>
+          </a:fillRef>
+          <a:effectRef idx="2">
+            <a:schemeClr val="accent1"/>
+          </a:effectRef>
+          <a:fontRef idx="minor">
+            <a:schemeClr val="lt1"/>
+          </a:fontRef>
+        </p:style>
+        <p:txBody>
+          <a:bodyPr rtlCol="0" anchor="ctr"/>
+          <a:lstStyle/>
+          <a:p>
+            <a:pPr algn="ctr"/>
+          </a:p>
+        </p:txBody>
+      </p:sp>
+      <p:sp>
+        <p:nvSpPr>
+          <p:cNvPr id="13" name="Rectangle 12"/>
+          <p:cNvSpPr/>
+          <p:nvPr/>
+        </p:nvSpPr>
+        <p:spPr>
+          <a:xfrm>
+            <a:off x="9914965" y="857186"/>
+            <a:ext cx="1890320" cy="646331"/>
+          </a:xfrm>
+          <a:prstGeom prst="rect">
+            <a:avLst/>
+          </a:prstGeom>
+        </p:spPr>
+        <p:style>
+          <a:lnRef idx="1">
+            <a:schemeClr val="accent1"/>
+          </a:lnRef>
+          <a:fillRef idx="3">
+            <a:schemeClr val="accent1"/>
+          </a:fillRef>
+          <a:effectRef idx="2">
+            <a:schemeClr val="accent1"/>
+          </a:effectRef>
+          <a:fontRef idx="minor">
+            <a:schemeClr val="lt1"/>
+          </a:fontRef>
+        </p:style>
+        <p:txBody>
+          <a:bodyPr rtlCol="0" anchor="ctr"/>
+          <a:lstStyle/>
+          <a:p>
+            <a:r>
+              <a:t>$15,250 of $30,000 Raised</a:t>
+            </a:r>
+          </a:p>
+        </p:txBody>
+      </p:sp>
+      <p:sp>
+        <p:nvSpPr>
+          <p:cNvPr id="14" name="Oval 13"/>
+          <p:cNvSpPr/>
+          <p:nvPr/>
+        </p:nvSpPr>
+        <p:spPr>
+          <a:xfrm>
+            <a:off x="6060142" y="914404"/>
+            <a:ext cx="594360" cy="594360"/>
+          </a:xfrm>
+          <a:prstGeom prst="ellipse">
+            <a:avLst/>
+          </a:prstGeom>
+        </p:spPr>
+        <p:style>
+          <a:lnRef idx="1">
+            <a:schemeClr val="accent1"/>
+          </a:lnRef>
+          <a:fillRef idx="3">
+            <a:schemeClr val="accent1"/>
+          </a:fillRef>
+          <a:effectRef idx="2">
+            <a:schemeClr val="accent1"/>
+          </a:effectRef>
+          <a:fontRef idx="minor">
+            <a:schemeClr val="lt1"/>
+          </a:fontRef>
+        </p:style>
+        <p:txBody>
+          <a:bodyPr rtlCol="0" anchor="ctr"/>
+          <a:lstStyle/>
+          <a:p>
+            <a:pPr algn="ctr"/>
+          </a:p>
+        </p:txBody>
+      </p:sp>
+      <p:sp>
+        <p:nvSpPr>
+          <p:cNvPr id="15" name="Rectangle 14"/>
+          <p:cNvSpPr/>
+          <p:nvPr/>
+        </p:nvSpPr>
+        <p:spPr>
+          <a:xfrm>
+            <a:off x="6338048" y="1050772"/>
+            <a:ext cx="1882588" cy="321624"/>
+          </a:xfrm>
+          <a:prstGeom prst="rect">
+            <a:avLst/>
+          </a:prstGeom>
+        </p:spPr>
+        <p:style>
+          <a:lnRef idx="1">
+            <a:schemeClr val="accent1"/>
+          </a:lnRef>
+          <a:fillRef idx="3">
+            <a:schemeClr val="accent1"/>
+          </a:fillRef>
+          <a:effectRef idx="2">
+            <a:schemeClr val="accent1"/>
+          </a:effectRef>
+          <a:fontRef idx="minor">
+            <a:schemeClr val="lt1"/>
+          </a:fontRef>
+        </p:style>
+        <p:txBody>
+          <a:bodyPr rtlCol="0" anchor="ctr"/>
+          <a:lstStyle/>
+          <a:p>
+            <a:pPr algn="ctr"/>
+          </a:p>
+        </p:txBody>
+      </p:sp>
+      <p:sp>
+        <p:nvSpPr>
+          <p:cNvPr id="16" name="Rectangle 15"/>
+          <p:cNvSpPr/>
+          <p:nvPr/>
+        </p:nvSpPr>
+        <p:spPr>
+          <a:xfrm>
+            <a:off x="8086165" y="1050772"/>
+            <a:ext cx="1828800" cy="321624"/>
+          </a:xfrm>
+          <a:prstGeom prst="rect">
+            <a:avLst/>
+          </a:prstGeom>
+        </p:spPr>
+        <p:style>
+          <a:lnRef idx="1">
+            <a:schemeClr val="accent1"/>
+          </a:lnRef>
+          <a:fillRef idx="3">
+            <a:schemeClr val="accent1"/>
+          </a:fillRef>
+          <a:effectRef idx="2">
+            <a:schemeClr val="accent1"/>
+          </a:effectRef>
+          <a:fontRef idx="minor">
+            <a:schemeClr val="lt1"/>
+          </a:fontRef>
+        </p:style>
+        <p:txBody>
+          <a:bodyPr rtlCol="0" anchor="ctr"/>
+          <a:lstStyle/>
+          <a:p>
+            <a:pPr algn="ctr"/>
+          </a:p>
+        </p:txBody>
+      </p:sp>
+      <p:sp>
+        <p:nvSpPr>
+          <p:cNvPr id="17" name="Rectangle 16"/>
+          <p:cNvSpPr/>
+          <p:nvPr/>
+        </p:nvSpPr>
+        <p:spPr>
+          <a:xfrm>
+            <a:off x="9914965" y="857186"/>
+            <a:ext cx="1890320" cy="646331"/>
+          </a:xfrm>
+          <a:prstGeom prst="rect">
+            <a:avLst/>
+          </a:prstGeom>
+        </p:spPr>
+        <p:style>
+          <a:lnRef idx="1">
+            <a:schemeClr val="accent1"/>
+          </a:lnRef>
+          <a:fillRef idx="3">
+            <a:schemeClr val="accent1"/>
+          </a:fillRef>
+          <a:effectRef idx="2">
+            <a:schemeClr val="accent1"/>
+          </a:effectRef>
+          <a:fontRef idx="minor">
+            <a:schemeClr val="lt1"/>
+          </a:fontRef>
+        </p:style>
+        <p:txBody>
+          <a:bodyPr rtlCol="0" anchor="ctr"/>
+          <a:lstStyle/>
+          <a:p>
+            <a:r>
+              <a:t>$15,250 of $30,000 Raised</a:t>
+            </a:r>
           </a:p>
         </p:txBody>
       </p:sp>
@@ -4102,16 +5085,64 @@
         <p:nvPr/>
       </p:nvGrpSpPr>
       <p:grpSpPr/>
-      <p:sp>
-        <p:nvSpPr>
-          <p:cNvPr id="2" name="Rectangle 1"/>
+      <p:pic>
+        <p:nvPicPr>
+          <p:cNvPr id="2" name="Picture 1" descr="image1.jpg"/>
+          <p:cNvPicPr>
+            <a:picLocks noChangeAspect="1"/>
+          </p:cNvPicPr>
+          <p:nvPr/>
+        </p:nvPicPr>
+        <p:blipFill>
+          <a:blip r:embed="rId2"/>
+          <a:stretch>
+            <a:fillRect/>
+          </a:stretch>
+        </p:blipFill>
+        <p:spPr>
+          <a:xfrm>
+            <a:off x="0" y="6126480"/>
+            <a:ext cx="12192000" cy="742950"/>
+          </a:xfrm>
+          <a:prstGeom prst="rect">
+            <a:avLst/>
+          </a:prstGeom>
+        </p:spPr>
+      </p:pic>
+      <p:pic>
+        <p:nvPicPr>
+          <p:cNvPr id="3" name="Picture 2" descr="image2.png"/>
+          <p:cNvPicPr>
+            <a:picLocks noChangeAspect="1"/>
+          </p:cNvPicPr>
+          <p:nvPr/>
+        </p:nvPicPr>
+        <p:blipFill>
+          <a:blip r:embed="rId3"/>
+          <a:stretch>
+            <a:fillRect/>
+          </a:stretch>
+        </p:blipFill>
+        <p:spPr>
+          <a:xfrm>
+            <a:off x="0" y="0"/>
+            <a:ext cx="12192000" cy="6858000"/>
+          </a:xfrm>
+          <a:prstGeom prst="rect">
+            <a:avLst/>
+          </a:prstGeom>
+        </p:spPr>
+      </p:pic>
+      <p:sp>
+        <p:nvSpPr>
+          <p:cNvPr id="4" name="Rectangle 3"/>
           <p:cNvSpPr/>
           <p:nvPr/>
         </p:nvSpPr>
         <p:spPr>
           <a:xfrm>
-            <a:off x="129981" y="938440"/>
-            <a:ext cx="4459948" cy="5687646"/>
+            <a:off x="838200" y="365125"/>
+            <a:ext cx="10515600" cy="1325563"/>
           </a:xfrm>
           <a:prstGeom prst="rect">
             <a:avLst/>
@@ -4136,6 +5167,45 @@
           <a:lstStyle/>
           <a:p>
             <a:r>
+              <a:t>Bank Account Info</a:t>
+            </a:r>
+          </a:p>
+        </p:txBody>
+      </p:sp>
+      <p:sp>
+        <p:nvSpPr>
+          <p:cNvPr id="5" name="Rectangle 4"/>
+          <p:cNvSpPr/>
+          <p:nvPr/>
+        </p:nvSpPr>
+        <p:spPr>
+          <a:xfrm>
+            <a:off x="129981" y="938440"/>
+            <a:ext cx="4459948" cy="5687646"/>
+          </a:xfrm>
+          <a:prstGeom prst="rect">
+            <a:avLst/>
+          </a:prstGeom>
+        </p:spPr>
+        <p:style>
+          <a:lnRef idx="1">
+            <a:schemeClr val="accent1"/>
+          </a:lnRef>
+          <a:fillRef idx="3">
+            <a:schemeClr val="accent1"/>
+          </a:fillRef>
+          <a:effectRef idx="2">
+            <a:schemeClr val="accent1"/>
+          </a:effectRef>
+          <a:fontRef idx="minor">
+            <a:schemeClr val="lt1"/>
+          </a:fontRef>
+        </p:style>
+        <p:txBody>
+          <a:bodyPr rtlCol="0" anchor="ctr"/>
+          <a:lstStyle/>
+          <a:p>
+            <a:r>
               <a:t>Routing #: 307083911Auto WD and Direct Deposit #: 9225000161Account #: 10422500-9001Not used for electronic transactions</a:t>
             </a:r>
           </a:p>
@@ -4143,14 +5213,14 @@
       </p:sp>
       <p:pic>
         <p:nvPicPr>
-          <p:cNvPr id="3" name="Picture 2" descr="image3.png"/>
+          <p:cNvPr id="6" name="Picture 5" descr="image3.png"/>
           <p:cNvPicPr>
             <a:picLocks noChangeAspect="1"/>
           </p:cNvPicPr>
           <p:nvPr/>
         </p:nvPicPr>
         <p:blipFill>
-          <a:blip r:embed="rId2"/>
+          <a:blip r:embed="rId4"/>
           <a:stretch>
             <a:fillRect/>
           </a:stretch>
@@ -4183,48 +5253,9 @@
         <p:nvPr/>
       </p:nvGrpSpPr>
       <p:grpSpPr/>
-      <p:sp>
-        <p:nvSpPr>
-          <p:cNvPr id="2" name="Rectangle 1"/>
-          <p:cNvSpPr/>
-          <p:nvPr/>
-        </p:nvSpPr>
-        <p:spPr>
-          <a:xfrm>
-            <a:off x="480061" y="938440"/>
-            <a:ext cx="10386722" cy="675207"/>
-          </a:xfrm>
-          <a:prstGeom prst="rect">
-            <a:avLst/>
-          </a:prstGeom>
-        </p:spPr>
-        <p:style>
-          <a:lnRef idx="1">
-            <a:schemeClr val="accent1"/>
-          </a:lnRef>
-          <a:fillRef idx="3">
-            <a:schemeClr val="accent1"/>
-          </a:fillRef>
-          <a:effectRef idx="2">
-            <a:schemeClr val="accent1"/>
-          </a:effectRef>
-          <a:fontRef idx="minor">
-            <a:schemeClr val="lt1"/>
-          </a:fontRef>
-        </p:style>
-        <p:txBody>
-          <a:bodyPr rtlCol="0" anchor="ctr"/>
-          <a:lstStyle/>
-          <a:p>
-            <a:r>
-              <a:t>Passport/Driver’s License for Douglas Coombs</a:t>
-            </a:r>
-          </a:p>
-        </p:txBody>
-      </p:sp>
       <p:pic>
         <p:nvPicPr>
-          <p:cNvPr id="3" name="Picture 2" descr="image4.jpg"/>
+          <p:cNvPr id="2" name="Picture 1" descr="image1.jpg"/>
           <p:cNvPicPr>
             <a:picLocks noChangeAspect="1"/>
           </p:cNvPicPr>
@@ -4238,8 +5269,8 @@
         </p:blipFill>
         <p:spPr>
           <a:xfrm>
-            <a:off x="67047" y="1683381"/>
-            <a:ext cx="6042212" cy="3729317"/>
+            <a:off x="0" y="6126480"/>
+            <a:ext cx="12192000" cy="742950"/>
           </a:xfrm>
           <a:prstGeom prst="rect">
             <a:avLst/>
@@ -4248,7 +5279,7 @@
       </p:pic>
       <p:pic>
         <p:nvPicPr>
-          <p:cNvPr id="4" name="Picture 3" descr="image5.jpg"/>
+          <p:cNvPr id="3" name="Picture 2" descr="image2.png"/>
           <p:cNvPicPr>
             <a:picLocks noChangeAspect="1"/>
           </p:cNvPicPr>
@@ -4256,6 +5287,132 @@
         </p:nvPicPr>
         <p:blipFill>
           <a:blip r:embed="rId3"/>
+          <a:stretch>
+            <a:fillRect/>
+          </a:stretch>
+        </p:blipFill>
+        <p:spPr>
+          <a:xfrm>
+            <a:off x="0" y="0"/>
+            <a:ext cx="12192000" cy="6858000"/>
+          </a:xfrm>
+          <a:prstGeom prst="rect">
+            <a:avLst/>
+          </a:prstGeom>
+        </p:spPr>
+      </p:pic>
+      <p:sp>
+        <p:nvSpPr>
+          <p:cNvPr id="4" name="Rectangle 3"/>
+          <p:cNvSpPr/>
+          <p:nvPr/>
+        </p:nvSpPr>
+        <p:spPr>
+          <a:xfrm>
+            <a:off x="838200" y="365125"/>
+            <a:ext cx="10515600" cy="1325563"/>
+          </a:xfrm>
+          <a:prstGeom prst="rect">
+            <a:avLst/>
+          </a:prstGeom>
+        </p:spPr>
+        <p:style>
+          <a:lnRef idx="1">
+            <a:schemeClr val="accent1"/>
+          </a:lnRef>
+          <a:fillRef idx="3">
+            <a:schemeClr val="accent1"/>
+          </a:fillRef>
+          <a:effectRef idx="2">
+            <a:schemeClr val="accent1"/>
+          </a:effectRef>
+          <a:fontRef idx="minor">
+            <a:schemeClr val="lt1"/>
+          </a:fontRef>
+        </p:style>
+        <p:txBody>
+          <a:bodyPr rtlCol="0" anchor="ctr"/>
+          <a:lstStyle/>
+          <a:p>
+            <a:r>
+              <a:t>KYC documentation</a:t>
+            </a:r>
+          </a:p>
+        </p:txBody>
+      </p:sp>
+      <p:sp>
+        <p:nvSpPr>
+          <p:cNvPr id="5" name="Rectangle 4"/>
+          <p:cNvSpPr/>
+          <p:nvPr/>
+        </p:nvSpPr>
+        <p:spPr>
+          <a:xfrm>
+            <a:off x="480061" y="938440"/>
+            <a:ext cx="10386722" cy="675207"/>
+          </a:xfrm>
+          <a:prstGeom prst="rect">
+            <a:avLst/>
+          </a:prstGeom>
+        </p:spPr>
+        <p:style>
+          <a:lnRef idx="1">
+            <a:schemeClr val="accent1"/>
+          </a:lnRef>
+          <a:fillRef idx="3">
+            <a:schemeClr val="accent1"/>
+          </a:fillRef>
+          <a:effectRef idx="2">
+            <a:schemeClr val="accent1"/>
+          </a:effectRef>
+          <a:fontRef idx="minor">
+            <a:schemeClr val="lt1"/>
+          </a:fontRef>
+        </p:style>
+        <p:txBody>
+          <a:bodyPr rtlCol="0" anchor="ctr"/>
+          <a:lstStyle/>
+          <a:p>
+            <a:r>
+              <a:t>Passport/Driver’s License for Douglas Coombs</a:t>
+            </a:r>
+          </a:p>
+        </p:txBody>
+      </p:sp>
+      <p:pic>
+        <p:nvPicPr>
+          <p:cNvPr id="6" name="Picture 5" descr="image4.jpg"/>
+          <p:cNvPicPr>
+            <a:picLocks noChangeAspect="1"/>
+          </p:cNvPicPr>
+          <p:nvPr/>
+        </p:nvPicPr>
+        <p:blipFill>
+          <a:blip r:embed="rId4"/>
+          <a:stretch>
+            <a:fillRect/>
+          </a:stretch>
+        </p:blipFill>
+        <p:spPr>
+          <a:xfrm>
+            <a:off x="67047" y="1683381"/>
+            <a:ext cx="6042212" cy="3729317"/>
+          </a:xfrm>
+          <a:prstGeom prst="rect">
+            <a:avLst/>
+          </a:prstGeom>
+        </p:spPr>
+      </p:pic>
+      <p:pic>
+        <p:nvPicPr>
+          <p:cNvPr id="7" name="Picture 6" descr="image5.jpg"/>
+          <p:cNvPicPr>
+            <a:picLocks noChangeAspect="1"/>
+          </p:cNvPicPr>
+          <p:nvPr/>
+        </p:nvPicPr>
+        <p:blipFill>
+          <a:blip r:embed="rId5"/>
           <a:stretch>
             <a:fillRect/>
           </a:stretch>
@@ -4288,9 +5445,96 @@
         <p:nvPr/>
       </p:nvGrpSpPr>
       <p:grpSpPr/>
-      <p:sp>
-        <p:nvSpPr>
-          <p:cNvPr id="2" name="Rectangle 1"/>
+      <p:pic>
+        <p:nvPicPr>
+          <p:cNvPr id="2" name="Picture 1" descr="image1.jpg"/>
+          <p:cNvPicPr>
+            <a:picLocks noChangeAspect="1"/>
+          </p:cNvPicPr>
+          <p:nvPr/>
+        </p:nvPicPr>
+        <p:blipFill>
+          <a:blip r:embed="rId2"/>
+          <a:stretch>
+            <a:fillRect/>
+          </a:stretch>
+        </p:blipFill>
+        <p:spPr>
+          <a:xfrm>
+            <a:off x="0" y="6126480"/>
+            <a:ext cx="12192000" cy="742950"/>
+          </a:xfrm>
+          <a:prstGeom prst="rect">
+            <a:avLst/>
+          </a:prstGeom>
+        </p:spPr>
+      </p:pic>
+      <p:pic>
+        <p:nvPicPr>
+          <p:cNvPr id="3" name="Picture 2" descr="image2.png"/>
+          <p:cNvPicPr>
+            <a:picLocks noChangeAspect="1"/>
+          </p:cNvPicPr>
+          <p:nvPr/>
+        </p:nvPicPr>
+        <p:blipFill>
+          <a:blip r:embed="rId3"/>
+          <a:stretch>
+            <a:fillRect/>
+          </a:stretch>
+        </p:blipFill>
+        <p:spPr>
+          <a:xfrm>
+            <a:off x="0" y="0"/>
+            <a:ext cx="12192000" cy="6858000"/>
+          </a:xfrm>
+          <a:prstGeom prst="rect">
+            <a:avLst/>
+          </a:prstGeom>
+        </p:spPr>
+      </p:pic>
+      <p:sp>
+        <p:nvSpPr>
+          <p:cNvPr id="4" name="Rectangle 3"/>
+          <p:cNvSpPr/>
+          <p:nvPr/>
+        </p:nvSpPr>
+        <p:spPr>
+          <a:xfrm>
+            <a:off x="838200" y="365125"/>
+            <a:ext cx="10515600" cy="1325563"/>
+          </a:xfrm>
+          <a:prstGeom prst="rect">
+            <a:avLst/>
+          </a:prstGeom>
+        </p:spPr>
+        <p:style>
+          <a:lnRef idx="1">
+            <a:schemeClr val="accent1"/>
+          </a:lnRef>
+          <a:fillRef idx="3">
+            <a:schemeClr val="accent1"/>
+          </a:fillRef>
+          <a:effectRef idx="2">
+            <a:schemeClr val="accent1"/>
+          </a:effectRef>
+          <a:fontRef idx="minor">
+            <a:schemeClr val="lt1"/>
+          </a:fontRef>
+        </p:style>
+        <p:txBody>
+          <a:bodyPr rtlCol="0" anchor="ctr"/>
+          <a:lstStyle/>
+          <a:p>
+            <a:r>
+              <a:t>Legalese on Website</a:t>
+            </a:r>
+          </a:p>
+        </p:txBody>
+      </p:sp>
+      <p:sp>
+        <p:nvSpPr>
+          <p:cNvPr id="5" name="Rectangle 4"/>
           <p:cNvSpPr/>
           <p:nvPr/>
         </p:nvSpPr>
@@ -4345,9 +5589,96 @@
         <p:nvPr/>
       </p:nvGrpSpPr>
       <p:grpSpPr/>
-      <p:sp>
-        <p:nvSpPr>
-          <p:cNvPr id="2" name="Rectangle 1"/>
+      <p:pic>
+        <p:nvPicPr>
+          <p:cNvPr id="2" name="Picture 1" descr="image1.jpg"/>
+          <p:cNvPicPr>
+            <a:picLocks noChangeAspect="1"/>
+          </p:cNvPicPr>
+          <p:nvPr/>
+        </p:nvPicPr>
+        <p:blipFill>
+          <a:blip r:embed="rId2"/>
+          <a:stretch>
+            <a:fillRect/>
+          </a:stretch>
+        </p:blipFill>
+        <p:spPr>
+          <a:xfrm>
+            <a:off x="0" y="6126480"/>
+            <a:ext cx="12192000" cy="742950"/>
+          </a:xfrm>
+          <a:prstGeom prst="rect">
+            <a:avLst/>
+          </a:prstGeom>
+        </p:spPr>
+      </p:pic>
+      <p:pic>
+        <p:nvPicPr>
+          <p:cNvPr id="3" name="Picture 2" descr="image2.png"/>
+          <p:cNvPicPr>
+            <a:picLocks noChangeAspect="1"/>
+          </p:cNvPicPr>
+          <p:nvPr/>
+        </p:nvPicPr>
+        <p:blipFill>
+          <a:blip r:embed="rId3"/>
+          <a:stretch>
+            <a:fillRect/>
+          </a:stretch>
+        </p:blipFill>
+        <p:spPr>
+          <a:xfrm>
+            <a:off x="0" y="0"/>
+            <a:ext cx="12192000" cy="6858000"/>
+          </a:xfrm>
+          <a:prstGeom prst="rect">
+            <a:avLst/>
+          </a:prstGeom>
+        </p:spPr>
+      </p:pic>
+      <p:sp>
+        <p:nvSpPr>
+          <p:cNvPr id="4" name="Rectangle 3"/>
+          <p:cNvSpPr/>
+          <p:nvPr/>
+        </p:nvSpPr>
+        <p:spPr>
+          <a:xfrm>
+            <a:off x="838200" y="365125"/>
+            <a:ext cx="10515600" cy="1325563"/>
+          </a:xfrm>
+          <a:prstGeom prst="rect">
+            <a:avLst/>
+          </a:prstGeom>
+        </p:spPr>
+        <p:style>
+          <a:lnRef idx="1">
+            <a:schemeClr val="accent1"/>
+          </a:lnRef>
+          <a:fillRef idx="3">
+            <a:schemeClr val="accent1"/>
+          </a:fillRef>
+          <a:effectRef idx="2">
+            <a:schemeClr val="accent1"/>
+          </a:effectRef>
+          <a:fontRef idx="minor">
+            <a:schemeClr val="lt1"/>
+          </a:fontRef>
+        </p:style>
+        <p:txBody>
+          <a:bodyPr rtlCol="0" anchor="ctr"/>
+          <a:lstStyle/>
+          <a:p>
+            <a:r>
+              <a:t>Privacy and Refund Policy</a:t>
+            </a:r>
+          </a:p>
+        </p:txBody>
+      </p:sp>
+      <p:sp>
+        <p:nvSpPr>
+          <p:cNvPr id="5" name="Rectangle 4"/>
           <p:cNvSpPr/>
           <p:nvPr/>
         </p:nvSpPr>

--- a/examples/recreations/04_Box_Treasurer__SLG_CheckoutDotCom_RequestedInfo_Rev1/out_mat2ppt.pptx
+++ b/examples/recreations/04_Box_Treasurer__SLG_CheckoutDotCom_RequestedInfo_Rev1/out_mat2ppt.pptx
@@ -3242,57 +3242,9 @@
         <p:nvPr/>
       </p:nvGrpSpPr>
       <p:grpSpPr/>
-      <p:pic>
-        <p:nvPicPr>
-          <p:cNvPr id="2" name="Picture 1" descr="image1.jpg"/>
-          <p:cNvPicPr>
-            <a:picLocks noChangeAspect="1"/>
-          </p:cNvPicPr>
-          <p:nvPr/>
-        </p:nvPicPr>
-        <p:blipFill>
-          <a:blip r:embed="rId2"/>
-          <a:stretch>
-            <a:fillRect/>
-          </a:stretch>
-        </p:blipFill>
-        <p:spPr>
-          <a:xfrm>
-            <a:off x="0" y="6126480"/>
-            <a:ext cx="12192000" cy="742950"/>
-          </a:xfrm>
-          <a:prstGeom prst="rect">
-            <a:avLst/>
-          </a:prstGeom>
-        </p:spPr>
-      </p:pic>
-      <p:pic>
-        <p:nvPicPr>
-          <p:cNvPr id="3" name="Picture 2" descr="image2.png"/>
-          <p:cNvPicPr>
-            <a:picLocks noChangeAspect="1"/>
-          </p:cNvPicPr>
-          <p:nvPr/>
-        </p:nvPicPr>
-        <p:blipFill>
-          <a:blip r:embed="rId3"/>
-          <a:stretch>
-            <a:fillRect/>
-          </a:stretch>
-        </p:blipFill>
-        <p:spPr>
-          <a:xfrm>
-            <a:off x="0" y="0"/>
-            <a:ext cx="12192000" cy="6858000"/>
-          </a:xfrm>
-          <a:prstGeom prst="rect">
-            <a:avLst/>
-          </a:prstGeom>
-        </p:spPr>
-      </p:pic>
-      <p:sp>
-        <p:nvSpPr>
-          <p:cNvPr id="4" name="Rectangle 3"/>
+      <p:sp>
+        <p:nvSpPr>
+          <p:cNvPr id="2" name="Rectangle 1"/>
           <p:cNvSpPr/>
           <p:nvPr/>
         </p:nvSpPr>
@@ -3331,7 +3283,7 @@
       </p:sp>
       <p:sp>
         <p:nvSpPr>
-          <p:cNvPr id="5" name="Rectangle 4"/>
+          <p:cNvPr id="3" name="Rectangle 2"/>
           <p:cNvSpPr/>
           <p:nvPr/>
         </p:nvSpPr>
@@ -3386,57 +3338,9 @@
         <p:nvPr/>
       </p:nvGrpSpPr>
       <p:grpSpPr/>
-      <p:pic>
-        <p:nvPicPr>
-          <p:cNvPr id="2" name="Picture 1" descr="image1.jpg"/>
-          <p:cNvPicPr>
-            <a:picLocks noChangeAspect="1"/>
-          </p:cNvPicPr>
-          <p:nvPr/>
-        </p:nvPicPr>
-        <p:blipFill>
-          <a:blip r:embed="rId2"/>
-          <a:stretch>
-            <a:fillRect/>
-          </a:stretch>
-        </p:blipFill>
-        <p:spPr>
-          <a:xfrm>
-            <a:off x="0" y="6126480"/>
-            <a:ext cx="12192000" cy="742950"/>
-          </a:xfrm>
-          <a:prstGeom prst="rect">
-            <a:avLst/>
-          </a:prstGeom>
-        </p:spPr>
-      </p:pic>
-      <p:pic>
-        <p:nvPicPr>
-          <p:cNvPr id="3" name="Picture 2" descr="image2.png"/>
-          <p:cNvPicPr>
-            <a:picLocks noChangeAspect="1"/>
-          </p:cNvPicPr>
-          <p:nvPr/>
-        </p:nvPicPr>
-        <p:blipFill>
-          <a:blip r:embed="rId3"/>
-          <a:stretch>
-            <a:fillRect/>
-          </a:stretch>
-        </p:blipFill>
-        <p:spPr>
-          <a:xfrm>
-            <a:off x="0" y="0"/>
-            <a:ext cx="12192000" cy="6858000"/>
-          </a:xfrm>
-          <a:prstGeom prst="rect">
-            <a:avLst/>
-          </a:prstGeom>
-        </p:spPr>
-      </p:pic>
-      <p:sp>
-        <p:nvSpPr>
-          <p:cNvPr id="4" name="Rectangle 3"/>
+      <p:sp>
+        <p:nvSpPr>
+          <p:cNvPr id="2" name="Rectangle 1"/>
           <p:cNvSpPr/>
           <p:nvPr/>
         </p:nvSpPr>
@@ -3475,7 +3379,7 @@
       </p:sp>
       <p:sp>
         <p:nvSpPr>
-          <p:cNvPr id="5" name="Rectangle 4"/>
+          <p:cNvPr id="3" name="Rectangle 2"/>
           <p:cNvSpPr/>
           <p:nvPr/>
         </p:nvSpPr>
@@ -3530,57 +3434,9 @@
         <p:nvPr/>
       </p:nvGrpSpPr>
       <p:grpSpPr/>
-      <p:pic>
-        <p:nvPicPr>
-          <p:cNvPr id="2" name="Picture 1" descr="image1.jpg"/>
-          <p:cNvPicPr>
-            <a:picLocks noChangeAspect="1"/>
-          </p:cNvPicPr>
-          <p:nvPr/>
-        </p:nvPicPr>
-        <p:blipFill>
-          <a:blip r:embed="rId2"/>
-          <a:stretch>
-            <a:fillRect/>
-          </a:stretch>
-        </p:blipFill>
-        <p:spPr>
-          <a:xfrm>
-            <a:off x="0" y="6126480"/>
-            <a:ext cx="12192000" cy="742950"/>
-          </a:xfrm>
-          <a:prstGeom prst="rect">
-            <a:avLst/>
-          </a:prstGeom>
-        </p:spPr>
-      </p:pic>
-      <p:pic>
-        <p:nvPicPr>
-          <p:cNvPr id="3" name="Picture 2" descr="image2.png"/>
-          <p:cNvPicPr>
-            <a:picLocks noChangeAspect="1"/>
-          </p:cNvPicPr>
-          <p:nvPr/>
-        </p:nvPicPr>
-        <p:blipFill>
-          <a:blip r:embed="rId3"/>
-          <a:stretch>
-            <a:fillRect/>
-          </a:stretch>
-        </p:blipFill>
-        <p:spPr>
-          <a:xfrm>
-            <a:off x="0" y="0"/>
-            <a:ext cx="12192000" cy="6858000"/>
-          </a:xfrm>
-          <a:prstGeom prst="rect">
-            <a:avLst/>
-          </a:prstGeom>
-        </p:spPr>
-      </p:pic>
-      <p:sp>
-        <p:nvSpPr>
-          <p:cNvPr id="4" name="Rectangle 3"/>
+      <p:sp>
+        <p:nvSpPr>
+          <p:cNvPr id="2" name="Rectangle 1"/>
           <p:cNvSpPr/>
           <p:nvPr/>
         </p:nvSpPr>
@@ -3619,7 +3475,7 @@
       </p:sp>
       <p:sp>
         <p:nvSpPr>
-          <p:cNvPr id="5" name="Rectangle 4"/>
+          <p:cNvPr id="3" name="Rectangle 2"/>
           <p:cNvSpPr/>
           <p:nvPr/>
         </p:nvSpPr>
@@ -3674,57 +3530,9 @@
         <p:nvPr/>
       </p:nvGrpSpPr>
       <p:grpSpPr/>
-      <p:pic>
-        <p:nvPicPr>
-          <p:cNvPr id="2" name="Picture 1" descr="image1.jpg"/>
-          <p:cNvPicPr>
-            <a:picLocks noChangeAspect="1"/>
-          </p:cNvPicPr>
-          <p:nvPr/>
-        </p:nvPicPr>
-        <p:blipFill>
-          <a:blip r:embed="rId2"/>
-          <a:stretch>
-            <a:fillRect/>
-          </a:stretch>
-        </p:blipFill>
-        <p:spPr>
-          <a:xfrm>
-            <a:off x="0" y="6126480"/>
-            <a:ext cx="12192000" cy="742950"/>
-          </a:xfrm>
-          <a:prstGeom prst="rect">
-            <a:avLst/>
-          </a:prstGeom>
-        </p:spPr>
-      </p:pic>
-      <p:pic>
-        <p:nvPicPr>
-          <p:cNvPr id="3" name="Picture 2" descr="image2.png"/>
-          <p:cNvPicPr>
-            <a:picLocks noChangeAspect="1"/>
-          </p:cNvPicPr>
-          <p:nvPr/>
-        </p:nvPicPr>
-        <p:blipFill>
-          <a:blip r:embed="rId3"/>
-          <a:stretch>
-            <a:fillRect/>
-          </a:stretch>
-        </p:blipFill>
-        <p:spPr>
-          <a:xfrm>
-            <a:off x="0" y="0"/>
-            <a:ext cx="12192000" cy="6858000"/>
-          </a:xfrm>
-          <a:prstGeom prst="rect">
-            <a:avLst/>
-          </a:prstGeom>
-        </p:spPr>
-      </p:pic>
       <p:cxnSp>
         <p:nvCxnSpPr>
-          <p:cNvPr id="4" name="Connector 3"/>
+          <p:cNvPr id="2" name="Connector 1"/>
           <p:cNvCxnSpPr/>
           <p:nvPr/>
         </p:nvCxnSpPr>
@@ -3754,7 +3562,7 @@
       </p:cxnSp>
       <p:sp>
         <p:nvSpPr>
-          <p:cNvPr id="5" name="Rectangle 4"/>
+          <p:cNvPr id="3" name="Rectangle 2"/>
           <p:cNvSpPr/>
           <p:nvPr/>
         </p:nvSpPr>
@@ -3793,7 +3601,7 @@
       </p:sp>
       <p:sp>
         <p:nvSpPr>
-          <p:cNvPr id="6" name="Rectangle 5"/>
+          <p:cNvPr id="4" name="Rectangle 3"/>
           <p:cNvSpPr/>
           <p:nvPr/>
         </p:nvSpPr>
@@ -3832,7 +3640,7 @@
       </p:sp>
       <p:sp>
         <p:nvSpPr>
-          <p:cNvPr id="7" name="Rounded Rectangle 6"/>
+          <p:cNvPr id="5" name="Rounded Rectangle 4"/>
           <p:cNvSpPr/>
           <p:nvPr/>
         </p:nvSpPr>
@@ -3871,7 +3679,7 @@
       </p:sp>
       <p:sp>
         <p:nvSpPr>
-          <p:cNvPr id="8" name="Rounded Rectangle 7"/>
+          <p:cNvPr id="6" name="Rounded Rectangle 5"/>
           <p:cNvSpPr/>
           <p:nvPr/>
         </p:nvSpPr>
@@ -3910,7 +3718,7 @@
       </p:sp>
       <p:sp>
         <p:nvSpPr>
-          <p:cNvPr id="9" name="Rounded Rectangle 8"/>
+          <p:cNvPr id="7" name="Rounded Rectangle 6"/>
           <p:cNvSpPr/>
           <p:nvPr/>
         </p:nvSpPr>
@@ -3949,7 +3757,7 @@
       </p:sp>
       <p:cxnSp>
         <p:nvCxnSpPr>
-          <p:cNvPr id="10" name="Connector 9"/>
+          <p:cNvPr id="8" name="Connector 7"/>
           <p:cNvCxnSpPr/>
           <p:nvPr/>
         </p:nvCxnSpPr>
@@ -3979,7 +3787,7 @@
       </p:cxnSp>
       <p:cxnSp>
         <p:nvCxnSpPr>
-          <p:cNvPr id="11" name="Connector 10"/>
+          <p:cNvPr id="9" name="Connector 8"/>
           <p:cNvCxnSpPr/>
           <p:nvPr/>
         </p:nvCxnSpPr>
@@ -4009,7 +3817,7 @@
       </p:cxnSp>
       <p:sp>
         <p:nvSpPr>
-          <p:cNvPr id="12" name="Rounded Rectangle 11"/>
+          <p:cNvPr id="10" name="Rounded Rectangle 9"/>
           <p:cNvSpPr/>
           <p:nvPr/>
         </p:nvSpPr>
@@ -4048,7 +3856,7 @@
       </p:sp>
       <p:sp>
         <p:nvSpPr>
-          <p:cNvPr id="13" name="Rounded Rectangle 12"/>
+          <p:cNvPr id="11" name="Rounded Rectangle 10"/>
           <p:cNvSpPr/>
           <p:nvPr/>
         </p:nvSpPr>
@@ -4087,7 +3895,7 @@
       </p:sp>
       <p:cxnSp>
         <p:nvCxnSpPr>
-          <p:cNvPr id="14" name="Connector 13"/>
+          <p:cNvPr id="12" name="Connector 11"/>
           <p:cNvCxnSpPr/>
           <p:nvPr/>
         </p:nvCxnSpPr>
@@ -4117,7 +3925,7 @@
       </p:cxnSp>
       <p:cxnSp>
         <p:nvCxnSpPr>
-          <p:cNvPr id="15" name="Connector 14"/>
+          <p:cNvPr id="13" name="Connector 12"/>
           <p:cNvCxnSpPr/>
           <p:nvPr/>
         </p:nvCxnSpPr>
@@ -4147,7 +3955,7 @@
       </p:cxnSp>
       <p:cxnSp>
         <p:nvCxnSpPr>
-          <p:cNvPr id="16" name="Connector 15"/>
+          <p:cNvPr id="14" name="Connector 13"/>
           <p:cNvCxnSpPr/>
           <p:nvPr/>
         </p:nvCxnSpPr>
@@ -4193,57 +4001,9 @@
         <p:nvPr/>
       </p:nvGrpSpPr>
       <p:grpSpPr/>
-      <p:pic>
-        <p:nvPicPr>
-          <p:cNvPr id="2" name="Picture 1" descr="image1.jpg"/>
-          <p:cNvPicPr>
-            <a:picLocks noChangeAspect="1"/>
-          </p:cNvPicPr>
-          <p:nvPr/>
-        </p:nvPicPr>
-        <p:blipFill>
-          <a:blip r:embed="rId2"/>
-          <a:stretch>
-            <a:fillRect/>
-          </a:stretch>
-        </p:blipFill>
-        <p:spPr>
-          <a:xfrm>
-            <a:off x="0" y="6126480"/>
-            <a:ext cx="12192000" cy="742950"/>
-          </a:xfrm>
-          <a:prstGeom prst="rect">
-            <a:avLst/>
-          </a:prstGeom>
-        </p:spPr>
-      </p:pic>
-      <p:pic>
-        <p:nvPicPr>
-          <p:cNvPr id="3" name="Picture 2" descr="image2.png"/>
-          <p:cNvPicPr>
-            <a:picLocks noChangeAspect="1"/>
-          </p:cNvPicPr>
-          <p:nvPr/>
-        </p:nvPicPr>
-        <p:blipFill>
-          <a:blip r:embed="rId3"/>
-          <a:stretch>
-            <a:fillRect/>
-          </a:stretch>
-        </p:blipFill>
-        <p:spPr>
-          <a:xfrm>
-            <a:off x="0" y="0"/>
-            <a:ext cx="12192000" cy="6858000"/>
-          </a:xfrm>
-          <a:prstGeom prst="rect">
-            <a:avLst/>
-          </a:prstGeom>
-        </p:spPr>
-      </p:pic>
-      <p:sp>
-        <p:nvSpPr>
-          <p:cNvPr id="4" name="Rectangle 3"/>
+      <p:sp>
+        <p:nvSpPr>
+          <p:cNvPr id="2" name="Rectangle 1"/>
           <p:cNvSpPr/>
           <p:nvPr/>
         </p:nvSpPr>
@@ -4282,7 +4042,7 @@
       </p:sp>
       <p:sp>
         <p:nvSpPr>
-          <p:cNvPr id="5" name="Rectangle 4"/>
+          <p:cNvPr id="3" name="Rectangle 2"/>
           <p:cNvSpPr/>
           <p:nvPr/>
         </p:nvSpPr>
@@ -4321,7 +4081,7 @@
       </p:sp>
       <p:sp>
         <p:nvSpPr>
-          <p:cNvPr id="6" name="Rounded Rectangle 5"/>
+          <p:cNvPr id="4" name="Rounded Rectangle 3"/>
           <p:cNvSpPr/>
           <p:nvPr/>
         </p:nvSpPr>
@@ -4360,7 +4120,7 @@
       </p:sp>
       <p:sp>
         <p:nvSpPr>
-          <p:cNvPr id="7" name="Rounded Rectangle 6"/>
+          <p:cNvPr id="5" name="Rounded Rectangle 4"/>
           <p:cNvSpPr/>
           <p:nvPr/>
         </p:nvSpPr>
@@ -4397,7 +4157,7 @@
       </p:sp>
       <p:sp>
         <p:nvSpPr>
-          <p:cNvPr id="8" name="Rectangle 7"/>
+          <p:cNvPr id="6" name="Rectangle 5"/>
           <p:cNvSpPr/>
           <p:nvPr/>
         </p:nvSpPr>
@@ -4436,7 +4196,7 @@
       </p:sp>
       <p:sp>
         <p:nvSpPr>
-          <p:cNvPr id="9" name="Right Arrow 8"/>
+          <p:cNvPr id="7" name="Right Arrow 6"/>
           <p:cNvSpPr/>
           <p:nvPr/>
         </p:nvSpPr>
@@ -4489,57 +4249,9 @@
         <p:nvPr/>
       </p:nvGrpSpPr>
       <p:grpSpPr/>
-      <p:pic>
-        <p:nvPicPr>
-          <p:cNvPr id="2" name="Picture 1" descr="image1.jpg"/>
-          <p:cNvPicPr>
-            <a:picLocks noChangeAspect="1"/>
-          </p:cNvPicPr>
-          <p:nvPr/>
-        </p:nvPicPr>
-        <p:blipFill>
-          <a:blip r:embed="rId2"/>
-          <a:stretch>
-            <a:fillRect/>
-          </a:stretch>
-        </p:blipFill>
-        <p:spPr>
-          <a:xfrm>
-            <a:off x="0" y="6126480"/>
-            <a:ext cx="12192000" cy="742950"/>
-          </a:xfrm>
-          <a:prstGeom prst="rect">
-            <a:avLst/>
-          </a:prstGeom>
-        </p:spPr>
-      </p:pic>
-      <p:pic>
-        <p:nvPicPr>
-          <p:cNvPr id="3" name="Picture 2" descr="image2.png"/>
-          <p:cNvPicPr>
-            <a:picLocks noChangeAspect="1"/>
-          </p:cNvPicPr>
-          <p:nvPr/>
-        </p:nvPicPr>
-        <p:blipFill>
-          <a:blip r:embed="rId3"/>
-          <a:stretch>
-            <a:fillRect/>
-          </a:stretch>
-        </p:blipFill>
-        <p:spPr>
-          <a:xfrm>
-            <a:off x="0" y="0"/>
-            <a:ext cx="12192000" cy="6858000"/>
-          </a:xfrm>
-          <a:prstGeom prst="rect">
-            <a:avLst/>
-          </a:prstGeom>
-        </p:spPr>
-      </p:pic>
-      <p:sp>
-        <p:nvSpPr>
-          <p:cNvPr id="4" name="Rectangle 3"/>
+      <p:sp>
+        <p:nvSpPr>
+          <p:cNvPr id="2" name="Rectangle 1"/>
           <p:cNvSpPr/>
           <p:nvPr/>
         </p:nvSpPr>
@@ -4578,7 +4290,7 @@
       </p:sp>
       <p:sp>
         <p:nvSpPr>
-          <p:cNvPr id="5" name="Rectangle 4"/>
+          <p:cNvPr id="3" name="Rectangle 2"/>
           <p:cNvSpPr/>
           <p:nvPr/>
         </p:nvSpPr>
@@ -4617,7 +4329,7 @@
       </p:sp>
       <p:sp>
         <p:nvSpPr>
-          <p:cNvPr id="6" name="Rounded Rectangle 5"/>
+          <p:cNvPr id="4" name="Rounded Rectangle 3"/>
           <p:cNvSpPr/>
           <p:nvPr/>
         </p:nvSpPr>
@@ -4656,7 +4368,7 @@
       </p:sp>
       <p:sp>
         <p:nvSpPr>
-          <p:cNvPr id="7" name="Rounded Rectangle 6"/>
+          <p:cNvPr id="5" name="Rounded Rectangle 4"/>
           <p:cNvSpPr/>
           <p:nvPr/>
         </p:nvSpPr>
@@ -4693,7 +4405,7 @@
       </p:sp>
       <p:sp>
         <p:nvSpPr>
-          <p:cNvPr id="8" name="Rectangle 7"/>
+          <p:cNvPr id="6" name="Rectangle 5"/>
           <p:cNvSpPr/>
           <p:nvPr/>
         </p:nvSpPr>
@@ -4732,7 +4444,7 @@
       </p:sp>
       <p:sp>
         <p:nvSpPr>
-          <p:cNvPr id="9" name="Right Arrow 8"/>
+          <p:cNvPr id="7" name="Right Arrow 6"/>
           <p:cNvSpPr/>
           <p:nvPr/>
         </p:nvSpPr>
@@ -4769,7 +4481,7 @@
       </p:sp>
       <p:sp>
         <p:nvSpPr>
-          <p:cNvPr id="10" name="Oval 9"/>
+          <p:cNvPr id="8" name="Oval 7"/>
           <p:cNvSpPr/>
           <p:nvPr/>
         </p:nvSpPr>
@@ -4806,7 +4518,7 @@
       </p:sp>
       <p:sp>
         <p:nvSpPr>
-          <p:cNvPr id="11" name="Rectangle 10"/>
+          <p:cNvPr id="9" name="Rectangle 8"/>
           <p:cNvSpPr/>
           <p:nvPr/>
         </p:nvSpPr>
@@ -4843,7 +4555,7 @@
       </p:sp>
       <p:sp>
         <p:nvSpPr>
-          <p:cNvPr id="12" name="Rectangle 11"/>
+          <p:cNvPr id="10" name="Rectangle 9"/>
           <p:cNvSpPr/>
           <p:nvPr/>
         </p:nvSpPr>
@@ -4880,7 +4592,7 @@
       </p:sp>
       <p:sp>
         <p:nvSpPr>
-          <p:cNvPr id="13" name="Rectangle 12"/>
+          <p:cNvPr id="11" name="Rectangle 10"/>
           <p:cNvSpPr/>
           <p:nvPr/>
         </p:nvSpPr>
@@ -4919,7 +4631,7 @@
       </p:sp>
       <p:sp>
         <p:nvSpPr>
-          <p:cNvPr id="14" name="Oval 13"/>
+          <p:cNvPr id="12" name="Oval 11"/>
           <p:cNvSpPr/>
           <p:nvPr/>
         </p:nvSpPr>
@@ -4956,7 +4668,7 @@
       </p:sp>
       <p:sp>
         <p:nvSpPr>
-          <p:cNvPr id="15" name="Rectangle 14"/>
+          <p:cNvPr id="13" name="Rectangle 12"/>
           <p:cNvSpPr/>
           <p:nvPr/>
         </p:nvSpPr>
@@ -4993,7 +4705,7 @@
       </p:sp>
       <p:sp>
         <p:nvSpPr>
-          <p:cNvPr id="16" name="Rectangle 15"/>
+          <p:cNvPr id="14" name="Rectangle 13"/>
           <p:cNvSpPr/>
           <p:nvPr/>
         </p:nvSpPr>
@@ -5030,7 +4742,7 @@
       </p:sp>
       <p:sp>
         <p:nvSpPr>
-          <p:cNvPr id="17" name="Rectangle 16"/>
+          <p:cNvPr id="15" name="Rectangle 14"/>
           <p:cNvSpPr/>
           <p:nvPr/>
         </p:nvSpPr>
@@ -5085,9 +4797,87 @@
         <p:nvPr/>
       </p:nvGrpSpPr>
       <p:grpSpPr/>
+      <p:sp>
+        <p:nvSpPr>
+          <p:cNvPr id="2" name="Rectangle 1"/>
+          <p:cNvSpPr/>
+          <p:nvPr/>
+        </p:nvSpPr>
+        <p:spPr>
+          <a:xfrm>
+            <a:off x="838200" y="365125"/>
+            <a:ext cx="10515600" cy="1325563"/>
+          </a:xfrm>
+          <a:prstGeom prst="rect">
+            <a:avLst/>
+          </a:prstGeom>
+        </p:spPr>
+        <p:style>
+          <a:lnRef idx="1">
+            <a:schemeClr val="accent1"/>
+          </a:lnRef>
+          <a:fillRef idx="3">
+            <a:schemeClr val="accent1"/>
+          </a:fillRef>
+          <a:effectRef idx="2">
+            <a:schemeClr val="accent1"/>
+          </a:effectRef>
+          <a:fontRef idx="minor">
+            <a:schemeClr val="lt1"/>
+          </a:fontRef>
+        </p:style>
+        <p:txBody>
+          <a:bodyPr rtlCol="0" anchor="ctr"/>
+          <a:lstStyle/>
+          <a:p>
+            <a:r>
+              <a:t>Bank Account Info</a:t>
+            </a:r>
+          </a:p>
+        </p:txBody>
+      </p:sp>
+      <p:sp>
+        <p:nvSpPr>
+          <p:cNvPr id="3" name="Rectangle 2"/>
+          <p:cNvSpPr/>
+          <p:nvPr/>
+        </p:nvSpPr>
+        <p:spPr>
+          <a:xfrm>
+            <a:off x="129981" y="938440"/>
+            <a:ext cx="4459948" cy="5687646"/>
+          </a:xfrm>
+          <a:prstGeom prst="rect">
+            <a:avLst/>
+          </a:prstGeom>
+        </p:spPr>
+        <p:style>
+          <a:lnRef idx="1">
+            <a:schemeClr val="accent1"/>
+          </a:lnRef>
+          <a:fillRef idx="3">
+            <a:schemeClr val="accent1"/>
+          </a:fillRef>
+          <a:effectRef idx="2">
+            <a:schemeClr val="accent1"/>
+          </a:effectRef>
+          <a:fontRef idx="minor">
+            <a:schemeClr val="lt1"/>
+          </a:fontRef>
+        </p:style>
+        <p:txBody>
+          <a:bodyPr rtlCol="0" anchor="ctr"/>
+          <a:lstStyle/>
+          <a:p>
+            <a:r>
+              <a:t>Routing #: 307083911Auto WD and Direct Deposit #: 9225000161Account #: 10422500-9001Not used for electronic transactions</a:t>
+            </a:r>
+          </a:p>
+        </p:txBody>
+      </p:sp>
       <p:pic>
         <p:nvPicPr>
-          <p:cNvPr id="2" name="Picture 1" descr="image1.jpg"/>
+          <p:cNvPr id="4" name="Picture 3" descr="image3.png"/>
           <p:cNvPicPr>
             <a:picLocks noChangeAspect="1"/>
           </p:cNvPicPr>
@@ -5095,132 +4885,6 @@
         </p:nvPicPr>
         <p:blipFill>
           <a:blip r:embed="rId2"/>
-          <a:stretch>
-            <a:fillRect/>
-          </a:stretch>
-        </p:blipFill>
-        <p:spPr>
-          <a:xfrm>
-            <a:off x="0" y="6126480"/>
-            <a:ext cx="12192000" cy="742950"/>
-          </a:xfrm>
-          <a:prstGeom prst="rect">
-            <a:avLst/>
-          </a:prstGeom>
-        </p:spPr>
-      </p:pic>
-      <p:pic>
-        <p:nvPicPr>
-          <p:cNvPr id="3" name="Picture 2" descr="image2.png"/>
-          <p:cNvPicPr>
-            <a:picLocks noChangeAspect="1"/>
-          </p:cNvPicPr>
-          <p:nvPr/>
-        </p:nvPicPr>
-        <p:blipFill>
-          <a:blip r:embed="rId3"/>
-          <a:stretch>
-            <a:fillRect/>
-          </a:stretch>
-        </p:blipFill>
-        <p:spPr>
-          <a:xfrm>
-            <a:off x="0" y="0"/>
-            <a:ext cx="12192000" cy="6858000"/>
-          </a:xfrm>
-          <a:prstGeom prst="rect">
-            <a:avLst/>
-          </a:prstGeom>
-        </p:spPr>
-      </p:pic>
-      <p:sp>
-        <p:nvSpPr>
-          <p:cNvPr id="4" name="Rectangle 3"/>
-          <p:cNvSpPr/>
-          <p:nvPr/>
-        </p:nvSpPr>
-        <p:spPr>
-          <a:xfrm>
-            <a:off x="838200" y="365125"/>
-            <a:ext cx="10515600" cy="1325563"/>
-          </a:xfrm>
-          <a:prstGeom prst="rect">
-            <a:avLst/>
-          </a:prstGeom>
-        </p:spPr>
-        <p:style>
-          <a:lnRef idx="1">
-            <a:schemeClr val="accent1"/>
-          </a:lnRef>
-          <a:fillRef idx="3">
-            <a:schemeClr val="accent1"/>
-          </a:fillRef>
-          <a:effectRef idx="2">
-            <a:schemeClr val="accent1"/>
-          </a:effectRef>
-          <a:fontRef idx="minor">
-            <a:schemeClr val="lt1"/>
-          </a:fontRef>
-        </p:style>
-        <p:txBody>
-          <a:bodyPr rtlCol="0" anchor="ctr"/>
-          <a:lstStyle/>
-          <a:p>
-            <a:r>
-              <a:t>Bank Account Info</a:t>
-            </a:r>
-          </a:p>
-        </p:txBody>
-      </p:sp>
-      <p:sp>
-        <p:nvSpPr>
-          <p:cNvPr id="5" name="Rectangle 4"/>
-          <p:cNvSpPr/>
-          <p:nvPr/>
-        </p:nvSpPr>
-        <p:spPr>
-          <a:xfrm>
-            <a:off x="129981" y="938440"/>
-            <a:ext cx="4459948" cy="5687646"/>
-          </a:xfrm>
-          <a:prstGeom prst="rect">
-            <a:avLst/>
-          </a:prstGeom>
-        </p:spPr>
-        <p:style>
-          <a:lnRef idx="1">
-            <a:schemeClr val="accent1"/>
-          </a:lnRef>
-          <a:fillRef idx="3">
-            <a:schemeClr val="accent1"/>
-          </a:fillRef>
-          <a:effectRef idx="2">
-            <a:schemeClr val="accent1"/>
-          </a:effectRef>
-          <a:fontRef idx="minor">
-            <a:schemeClr val="lt1"/>
-          </a:fontRef>
-        </p:style>
-        <p:txBody>
-          <a:bodyPr rtlCol="0" anchor="ctr"/>
-          <a:lstStyle/>
-          <a:p>
-            <a:r>
-              <a:t>Routing #: 307083911Auto WD and Direct Deposit #: 9225000161Account #: 10422500-9001Not used for electronic transactions</a:t>
-            </a:r>
-          </a:p>
-        </p:txBody>
-      </p:sp>
-      <p:pic>
-        <p:nvPicPr>
-          <p:cNvPr id="6" name="Picture 5" descr="image3.png"/>
-          <p:cNvPicPr>
-            <a:picLocks noChangeAspect="1"/>
-          </p:cNvPicPr>
-          <p:nvPr/>
-        </p:nvPicPr>
-        <p:blipFill>
-          <a:blip r:embed="rId4"/>
           <a:stretch>
             <a:fillRect/>
           </a:stretch>
@@ -5253,9 +4917,87 @@
         <p:nvPr/>
       </p:nvGrpSpPr>
       <p:grpSpPr/>
+      <p:sp>
+        <p:nvSpPr>
+          <p:cNvPr id="2" name="Rectangle 1"/>
+          <p:cNvSpPr/>
+          <p:nvPr/>
+        </p:nvSpPr>
+        <p:spPr>
+          <a:xfrm>
+            <a:off x="838200" y="365125"/>
+            <a:ext cx="10515600" cy="1325563"/>
+          </a:xfrm>
+          <a:prstGeom prst="rect">
+            <a:avLst/>
+          </a:prstGeom>
+        </p:spPr>
+        <p:style>
+          <a:lnRef idx="1">
+            <a:schemeClr val="accent1"/>
+          </a:lnRef>
+          <a:fillRef idx="3">
+            <a:schemeClr val="accent1"/>
+          </a:fillRef>
+          <a:effectRef idx="2">
+            <a:schemeClr val="accent1"/>
+          </a:effectRef>
+          <a:fontRef idx="minor">
+            <a:schemeClr val="lt1"/>
+          </a:fontRef>
+        </p:style>
+        <p:txBody>
+          <a:bodyPr rtlCol="0" anchor="ctr"/>
+          <a:lstStyle/>
+          <a:p>
+            <a:r>
+              <a:t>KYC documentation</a:t>
+            </a:r>
+          </a:p>
+        </p:txBody>
+      </p:sp>
+      <p:sp>
+        <p:nvSpPr>
+          <p:cNvPr id="3" name="Rectangle 2"/>
+          <p:cNvSpPr/>
+          <p:nvPr/>
+        </p:nvSpPr>
+        <p:spPr>
+          <a:xfrm>
+            <a:off x="480061" y="938440"/>
+            <a:ext cx="10386722" cy="675207"/>
+          </a:xfrm>
+          <a:prstGeom prst="rect">
+            <a:avLst/>
+          </a:prstGeom>
+        </p:spPr>
+        <p:style>
+          <a:lnRef idx="1">
+            <a:schemeClr val="accent1"/>
+          </a:lnRef>
+          <a:fillRef idx="3">
+            <a:schemeClr val="accent1"/>
+          </a:fillRef>
+          <a:effectRef idx="2">
+            <a:schemeClr val="accent1"/>
+          </a:effectRef>
+          <a:fontRef idx="minor">
+            <a:schemeClr val="lt1"/>
+          </a:fontRef>
+        </p:style>
+        <p:txBody>
+          <a:bodyPr rtlCol="0" anchor="ctr"/>
+          <a:lstStyle/>
+          <a:p>
+            <a:r>
+              <a:t>Passport/Driver’s License for Douglas Coombs</a:t>
+            </a:r>
+          </a:p>
+        </p:txBody>
+      </p:sp>
       <p:pic>
         <p:nvPicPr>
-          <p:cNvPr id="2" name="Picture 1" descr="image1.jpg"/>
+          <p:cNvPr id="4" name="Picture 3" descr="image4.jpg"/>
           <p:cNvPicPr>
             <a:picLocks noChangeAspect="1"/>
           </p:cNvPicPr>
@@ -5269,8 +5011,8 @@
         </p:blipFill>
         <p:spPr>
           <a:xfrm>
-            <a:off x="0" y="6126480"/>
-            <a:ext cx="12192000" cy="742950"/>
+            <a:off x="67047" y="1683381"/>
+            <a:ext cx="6042212" cy="3729317"/>
           </a:xfrm>
           <a:prstGeom prst="rect">
             <a:avLst/>
@@ -5279,7 +5021,7 @@
       </p:pic>
       <p:pic>
         <p:nvPicPr>
-          <p:cNvPr id="3" name="Picture 2" descr="image2.png"/>
+          <p:cNvPr id="5" name="Picture 4" descr="image5.jpg"/>
           <p:cNvPicPr>
             <a:picLocks noChangeAspect="1"/>
           </p:cNvPicPr>
@@ -5287,132 +5029,6 @@
         </p:nvPicPr>
         <p:blipFill>
           <a:blip r:embed="rId3"/>
-          <a:stretch>
-            <a:fillRect/>
-          </a:stretch>
-        </p:blipFill>
-        <p:spPr>
-          <a:xfrm>
-            <a:off x="0" y="0"/>
-            <a:ext cx="12192000" cy="6858000"/>
-          </a:xfrm>
-          <a:prstGeom prst="rect">
-            <a:avLst/>
-          </a:prstGeom>
-        </p:spPr>
-      </p:pic>
-      <p:sp>
-        <p:nvSpPr>
-          <p:cNvPr id="4" name="Rectangle 3"/>
-          <p:cNvSpPr/>
-          <p:nvPr/>
-        </p:nvSpPr>
-        <p:spPr>
-          <a:xfrm>
-            <a:off x="838200" y="365125"/>
-            <a:ext cx="10515600" cy="1325563"/>
-          </a:xfrm>
-          <a:prstGeom prst="rect">
-            <a:avLst/>
-          </a:prstGeom>
-        </p:spPr>
-        <p:style>
-          <a:lnRef idx="1">
-            <a:schemeClr val="accent1"/>
-          </a:lnRef>
-          <a:fillRef idx="3">
-            <a:schemeClr val="accent1"/>
-          </a:fillRef>
-          <a:effectRef idx="2">
-            <a:schemeClr val="accent1"/>
-          </a:effectRef>
-          <a:fontRef idx="minor">
-            <a:schemeClr val="lt1"/>
-          </a:fontRef>
-        </p:style>
-        <p:txBody>
-          <a:bodyPr rtlCol="0" anchor="ctr"/>
-          <a:lstStyle/>
-          <a:p>
-            <a:r>
-              <a:t>KYC documentation</a:t>
-            </a:r>
-          </a:p>
-        </p:txBody>
-      </p:sp>
-      <p:sp>
-        <p:nvSpPr>
-          <p:cNvPr id="5" name="Rectangle 4"/>
-          <p:cNvSpPr/>
-          <p:nvPr/>
-        </p:nvSpPr>
-        <p:spPr>
-          <a:xfrm>
-            <a:off x="480061" y="938440"/>
-            <a:ext cx="10386722" cy="675207"/>
-          </a:xfrm>
-          <a:prstGeom prst="rect">
-            <a:avLst/>
-          </a:prstGeom>
-        </p:spPr>
-        <p:style>
-          <a:lnRef idx="1">
-            <a:schemeClr val="accent1"/>
-          </a:lnRef>
-          <a:fillRef idx="3">
-            <a:schemeClr val="accent1"/>
-          </a:fillRef>
-          <a:effectRef idx="2">
-            <a:schemeClr val="accent1"/>
-          </a:effectRef>
-          <a:fontRef idx="minor">
-            <a:schemeClr val="lt1"/>
-          </a:fontRef>
-        </p:style>
-        <p:txBody>
-          <a:bodyPr rtlCol="0" anchor="ctr"/>
-          <a:lstStyle/>
-          <a:p>
-            <a:r>
-              <a:t>Passport/Driver’s License for Douglas Coombs</a:t>
-            </a:r>
-          </a:p>
-        </p:txBody>
-      </p:sp>
-      <p:pic>
-        <p:nvPicPr>
-          <p:cNvPr id="6" name="Picture 5" descr="image4.jpg"/>
-          <p:cNvPicPr>
-            <a:picLocks noChangeAspect="1"/>
-          </p:cNvPicPr>
-          <p:nvPr/>
-        </p:nvPicPr>
-        <p:blipFill>
-          <a:blip r:embed="rId4"/>
-          <a:stretch>
-            <a:fillRect/>
-          </a:stretch>
-        </p:blipFill>
-        <p:spPr>
-          <a:xfrm>
-            <a:off x="67047" y="1683381"/>
-            <a:ext cx="6042212" cy="3729317"/>
-          </a:xfrm>
-          <a:prstGeom prst="rect">
-            <a:avLst/>
-          </a:prstGeom>
-        </p:spPr>
-      </p:pic>
-      <p:pic>
-        <p:nvPicPr>
-          <p:cNvPr id="7" name="Picture 6" descr="image5.jpg"/>
-          <p:cNvPicPr>
-            <a:picLocks noChangeAspect="1"/>
-          </p:cNvPicPr>
-          <p:nvPr/>
-        </p:nvPicPr>
-        <p:blipFill>
-          <a:blip r:embed="rId5"/>
           <a:stretch>
             <a:fillRect/>
           </a:stretch>
@@ -5445,57 +5061,9 @@
         <p:nvPr/>
       </p:nvGrpSpPr>
       <p:grpSpPr/>
-      <p:pic>
-        <p:nvPicPr>
-          <p:cNvPr id="2" name="Picture 1" descr="image1.jpg"/>
-          <p:cNvPicPr>
-            <a:picLocks noChangeAspect="1"/>
-          </p:cNvPicPr>
-          <p:nvPr/>
-        </p:nvPicPr>
-        <p:blipFill>
-          <a:blip r:embed="rId2"/>
-          <a:stretch>
-            <a:fillRect/>
-          </a:stretch>
-        </p:blipFill>
-        <p:spPr>
-          <a:xfrm>
-            <a:off x="0" y="6126480"/>
-            <a:ext cx="12192000" cy="742950"/>
-          </a:xfrm>
-          <a:prstGeom prst="rect">
-            <a:avLst/>
-          </a:prstGeom>
-        </p:spPr>
-      </p:pic>
-      <p:pic>
-        <p:nvPicPr>
-          <p:cNvPr id="3" name="Picture 2" descr="image2.png"/>
-          <p:cNvPicPr>
-            <a:picLocks noChangeAspect="1"/>
-          </p:cNvPicPr>
-          <p:nvPr/>
-        </p:nvPicPr>
-        <p:blipFill>
-          <a:blip r:embed="rId3"/>
-          <a:stretch>
-            <a:fillRect/>
-          </a:stretch>
-        </p:blipFill>
-        <p:spPr>
-          <a:xfrm>
-            <a:off x="0" y="0"/>
-            <a:ext cx="12192000" cy="6858000"/>
-          </a:xfrm>
-          <a:prstGeom prst="rect">
-            <a:avLst/>
-          </a:prstGeom>
-        </p:spPr>
-      </p:pic>
-      <p:sp>
-        <p:nvSpPr>
-          <p:cNvPr id="4" name="Rectangle 3"/>
+      <p:sp>
+        <p:nvSpPr>
+          <p:cNvPr id="2" name="Rectangle 1"/>
           <p:cNvSpPr/>
           <p:nvPr/>
         </p:nvSpPr>
@@ -5534,7 +5102,7 @@
       </p:sp>
       <p:sp>
         <p:nvSpPr>
-          <p:cNvPr id="5" name="Rectangle 4"/>
+          <p:cNvPr id="3" name="Rectangle 2"/>
           <p:cNvSpPr/>
           <p:nvPr/>
         </p:nvSpPr>
@@ -5589,57 +5157,9 @@
         <p:nvPr/>
       </p:nvGrpSpPr>
       <p:grpSpPr/>
-      <p:pic>
-        <p:nvPicPr>
-          <p:cNvPr id="2" name="Picture 1" descr="image1.jpg"/>
-          <p:cNvPicPr>
-            <a:picLocks noChangeAspect="1"/>
-          </p:cNvPicPr>
-          <p:nvPr/>
-        </p:nvPicPr>
-        <p:blipFill>
-          <a:blip r:embed="rId2"/>
-          <a:stretch>
-            <a:fillRect/>
-          </a:stretch>
-        </p:blipFill>
-        <p:spPr>
-          <a:xfrm>
-            <a:off x="0" y="6126480"/>
-            <a:ext cx="12192000" cy="742950"/>
-          </a:xfrm>
-          <a:prstGeom prst="rect">
-            <a:avLst/>
-          </a:prstGeom>
-        </p:spPr>
-      </p:pic>
-      <p:pic>
-        <p:nvPicPr>
-          <p:cNvPr id="3" name="Picture 2" descr="image2.png"/>
-          <p:cNvPicPr>
-            <a:picLocks noChangeAspect="1"/>
-          </p:cNvPicPr>
-          <p:nvPr/>
-        </p:nvPicPr>
-        <p:blipFill>
-          <a:blip r:embed="rId3"/>
-          <a:stretch>
-            <a:fillRect/>
-          </a:stretch>
-        </p:blipFill>
-        <p:spPr>
-          <a:xfrm>
-            <a:off x="0" y="0"/>
-            <a:ext cx="12192000" cy="6858000"/>
-          </a:xfrm>
-          <a:prstGeom prst="rect">
-            <a:avLst/>
-          </a:prstGeom>
-        </p:spPr>
-      </p:pic>
-      <p:sp>
-        <p:nvSpPr>
-          <p:cNvPr id="4" name="Rectangle 3"/>
+      <p:sp>
+        <p:nvSpPr>
+          <p:cNvPr id="2" name="Rectangle 1"/>
           <p:cNvSpPr/>
           <p:nvPr/>
         </p:nvSpPr>
@@ -5678,7 +5198,7 @@
       </p:sp>
       <p:sp>
         <p:nvSpPr>
-          <p:cNvPr id="5" name="Rectangle 4"/>
+          <p:cNvPr id="3" name="Rectangle 2"/>
           <p:cNvSpPr/>
           <p:nvPr/>
         </p:nvSpPr>

--- a/examples/recreations/04_Box_Treasurer__SLG_CheckoutDotCom_RequestedInfo_Rev1/out_mat2ppt.pptx
+++ b/examples/recreations/04_Box_Treasurer__SLG_CheckoutDotCom_RequestedInfo_Rev1/out_mat2ppt.pptx
@@ -3250,8 +3250,8 @@
         </p:nvSpPr>
         <p:spPr>
           <a:xfrm>
-            <a:off x="838200" y="365125"/>
-            <a:ext cx="10515600" cy="1325563"/>
+            <a:off x="318053" y="1"/>
+            <a:ext cx="10736802" cy="868705"/>
           </a:xfrm>
           <a:prstGeom prst="rect">
             <a:avLst/>
@@ -3289,8 +3289,8 @@
         </p:nvSpPr>
         <p:spPr>
           <a:xfrm>
-            <a:off x="838200" y="365125"/>
-            <a:ext cx="10515600" cy="1325563"/>
+            <a:off x="480061" y="938440"/>
+            <a:ext cx="10386722" cy="5687646"/>
           </a:xfrm>
           <a:prstGeom prst="rect">
             <a:avLst/>
@@ -3346,8 +3346,8 @@
         </p:nvSpPr>
         <p:spPr>
           <a:xfrm>
-            <a:off x="838200" y="365125"/>
-            <a:ext cx="10515600" cy="1325563"/>
+            <a:off x="318053" y="1"/>
+            <a:ext cx="10736802" cy="868705"/>
           </a:xfrm>
           <a:prstGeom prst="rect">
             <a:avLst/>
@@ -3385,8 +3385,8 @@
         </p:nvSpPr>
         <p:spPr>
           <a:xfrm>
-            <a:off x="838200" y="365125"/>
-            <a:ext cx="10515600" cy="1325563"/>
+            <a:off x="480061" y="938440"/>
+            <a:ext cx="10386722" cy="5687646"/>
           </a:xfrm>
           <a:prstGeom prst="rect">
             <a:avLst/>
@@ -3442,8 +3442,8 @@
         </p:nvSpPr>
         <p:spPr>
           <a:xfrm>
-            <a:off x="838200" y="365125"/>
-            <a:ext cx="10515600" cy="1325563"/>
+            <a:off x="318053" y="1"/>
+            <a:ext cx="10736802" cy="868705"/>
           </a:xfrm>
           <a:prstGeom prst="rect">
             <a:avLst/>
@@ -4805,8 +4805,8 @@
         </p:nvSpPr>
         <p:spPr>
           <a:xfrm>
-            <a:off x="838200" y="365125"/>
-            <a:ext cx="10515600" cy="1325563"/>
+            <a:off x="318053" y="1"/>
+            <a:ext cx="10736802" cy="868705"/>
           </a:xfrm>
           <a:prstGeom prst="rect">
             <a:avLst/>
@@ -4925,8 +4925,8 @@
         </p:nvSpPr>
         <p:spPr>
           <a:xfrm>
-            <a:off x="838200" y="365125"/>
-            <a:ext cx="10515600" cy="1325563"/>
+            <a:off x="318053" y="1"/>
+            <a:ext cx="10736802" cy="868705"/>
           </a:xfrm>
           <a:prstGeom prst="rect">
             <a:avLst/>
@@ -5069,8 +5069,8 @@
         </p:nvSpPr>
         <p:spPr>
           <a:xfrm>
-            <a:off x="838200" y="365125"/>
-            <a:ext cx="10515600" cy="1325563"/>
+            <a:off x="318053" y="1"/>
+            <a:ext cx="10736802" cy="868705"/>
           </a:xfrm>
           <a:prstGeom prst="rect">
             <a:avLst/>
@@ -5165,8 +5165,8 @@
         </p:nvSpPr>
         <p:spPr>
           <a:xfrm>
-            <a:off x="838200" y="365125"/>
-            <a:ext cx="10515600" cy="1325563"/>
+            <a:off x="318053" y="1"/>
+            <a:ext cx="10736802" cy="868705"/>
           </a:xfrm>
           <a:prstGeom prst="rect">
             <a:avLst/>

--- a/examples/recreations/04_Box_Treasurer__SLG_CheckoutDotCom_RequestedInfo_Rev1/out_mat2ppt.pptx
+++ b/examples/recreations/04_Box_Treasurer__SLG_CheckoutDotCom_RequestedInfo_Rev1/out_mat2ppt.pptx
@@ -1,24 +1,27 @@
 
 <file path=ppt/presentation.xml><?xml version="1.0" encoding="utf-8"?>
-<p:presentation xmlns:a="http://schemas.openxmlformats.org/drawingml/2006/main" xmlns:r="http://schemas.openxmlformats.org/officeDocument/2006/relationships" xmlns:p="http://schemas.openxmlformats.org/presentationml/2006/main" saveSubsetFonts="1" autoCompressPictures="0">
+<p:presentation xmlns:a="http://schemas.openxmlformats.org/drawingml/2006/main" xmlns:r="http://schemas.openxmlformats.org/officeDocument/2006/relationships" xmlns:p="http://schemas.openxmlformats.org/presentationml/2006/main" autoCompressPictures="0">
   <p:sldMasterIdLst>
     <p:sldMasterId id="2147483648" r:id="rId1"/>
   </p:sldMasterIdLst>
+  <p:notesMasterIdLst>
+    <p:notesMasterId r:id="rId13"/>
+  </p:notesMasterIdLst>
   <p:sldIdLst>
-    <p:sldId id="256" r:id="rId7"/>
-    <p:sldId id="257" r:id="rId8"/>
-    <p:sldId id="258" r:id="rId9"/>
-    <p:sldId id="259" r:id="rId10"/>
-    <p:sldId id="260" r:id="rId11"/>
-    <p:sldId id="261" r:id="rId12"/>
-    <p:sldId id="262" r:id="rId13"/>
-    <p:sldId id="263" r:id="rId14"/>
-    <p:sldId id="264" r:id="rId15"/>
-    <p:sldId id="265" r:id="rId16"/>
-    <p:sldId id="266" r:id="rId17"/>
+    <p:sldId id="256" r:id="rId19"/>
+    <p:sldId id="257" r:id="rId20"/>
+    <p:sldId id="258" r:id="rId21"/>
+    <p:sldId id="259" r:id="rId22"/>
+    <p:sldId id="260" r:id="rId23"/>
+    <p:sldId id="261" r:id="rId24"/>
+    <p:sldId id="262" r:id="rId25"/>
+    <p:sldId id="263" r:id="rId26"/>
+    <p:sldId id="264" r:id="rId27"/>
+    <p:sldId id="265" r:id="rId28"/>
+    <p:sldId id="266" r:id="rId29"/>
   </p:sldIdLst>
-  <p:sldSz cx="12192000" cy="6858000" type="screen4x3"/>
-  <p:notesSz cx="6858000" cy="9144000"/>
+  <p:sldSz cx="12192000" cy="6858000"/>
+  <p:notesSz cx="7010400" cy="9296400"/>
   <p:defaultTextStyle>
     <a:defPPr>
       <a:defRPr lang="en-US"/>
@@ -114,7 +117,378 @@
       </a:defRPr>
     </a:lvl9pPr>
   </p:defaultTextStyle>
+  <p:extLst>
+    <p:ext uri="{EFAFB233-063F-42B5-8137-9DF3F51BA10A}">
+      <p15:sldGuideLst xmlns:p15="http://schemas.microsoft.com/office/powerpoint/2012/main">
+        <p15:guide id="1" orient="horz" pos="2160">
+          <p15:clr>
+            <a:srgbClr val="A4A3A4"/>
+          </p15:clr>
+        </p15:guide>
+        <p15:guide id="2" pos="3840">
+          <p15:clr>
+            <a:srgbClr val="A4A3A4"/>
+          </p15:clr>
+        </p15:guide>
+      </p15:sldGuideLst>
+    </p:ext>
+  </p:extLst>
 </p:presentation>
+</file>
+
+<file path=ppt/commentAuthors.xml><?xml version="1.0" encoding="utf-8"?>
+<p:cmAuthorLst xmlns:a="http://schemas.openxmlformats.org/drawingml/2006/main" xmlns:r="http://schemas.openxmlformats.org/officeDocument/2006/relationships" xmlns:p="http://schemas.openxmlformats.org/presentationml/2006/main">
+  <p:cmAuthor id="1" name="Janice Martinez" initials="JM" lastIdx="2" clrIdx="0"/>
+</p:cmAuthorLst>
+</file>
+
+<file path=ppt/notesMasters/notesMaster1.xml><?xml version="1.0" encoding="utf-8"?>
+<p:notesMaster xmlns:a="http://schemas.openxmlformats.org/drawingml/2006/main" xmlns:r="http://schemas.openxmlformats.org/officeDocument/2006/relationships" xmlns:p="http://schemas.openxmlformats.org/presentationml/2006/main">
+  <p:cSld>
+    <p:bg>
+      <p:bgRef idx="1001">
+        <a:schemeClr val="bg1"/>
+      </p:bgRef>
+    </p:bg>
+    <p:spTree>
+      <p:nvGrpSpPr>
+        <p:cNvPr id="1" name=""/>
+        <p:cNvGrpSpPr/>
+        <p:nvPr/>
+      </p:nvGrpSpPr>
+      <p:grpSpPr>
+        <a:xfrm>
+          <a:off x="0" y="0"/>
+          <a:ext cx="0" cy="0"/>
+          <a:chOff x="0" y="0"/>
+          <a:chExt cx="0" cy="0"/>
+        </a:xfrm>
+      </p:grpSpPr>
+      <p:sp>
+        <p:nvSpPr>
+          <p:cNvPr id="2" name="Header Placeholder 1"/>
+          <p:cNvSpPr>
+            <a:spLocks noGrp="1"/>
+          </p:cNvSpPr>
+          <p:nvPr>
+            <p:ph type="hdr" sz="quarter"/>
+          </p:nvPr>
+        </p:nvSpPr>
+        <p:spPr>
+          <a:xfrm>
+            <a:off x="1" y="1"/>
+            <a:ext cx="3037840" cy="466434"/>
+          </a:xfrm>
+          <a:prstGeom prst="rect">
+            <a:avLst/>
+          </a:prstGeom>
+        </p:spPr>
+        <p:txBody>
+          <a:bodyPr vert="horz" lIns="93173" tIns="46586" rIns="93173" bIns="46586" rtlCol="0"/>
+          <a:lstStyle>
+            <a:lvl1pPr algn="l">
+              <a:defRPr sz="1300"/>
+            </a:lvl1pPr>
+          </a:lstStyle>
+          <a:p>
+            <a:endParaRPr lang="en-US"/>
+          </a:p>
+        </p:txBody>
+      </p:sp>
+      <p:sp>
+        <p:nvSpPr>
+          <p:cNvPr id="3" name="Date Placeholder 2"/>
+          <p:cNvSpPr>
+            <a:spLocks noGrp="1"/>
+          </p:cNvSpPr>
+          <p:nvPr>
+            <p:ph type="dt" idx="1"/>
+          </p:nvPr>
+        </p:nvSpPr>
+        <p:spPr>
+          <a:xfrm>
+            <a:off x="3970939" y="1"/>
+            <a:ext cx="3037840" cy="466434"/>
+          </a:xfrm>
+          <a:prstGeom prst="rect">
+            <a:avLst/>
+          </a:prstGeom>
+        </p:spPr>
+        <p:txBody>
+          <a:bodyPr vert="horz" lIns="93173" tIns="46586" rIns="93173" bIns="46586" rtlCol="0"/>
+          <a:lstStyle>
+            <a:lvl1pPr algn="r">
+              <a:defRPr sz="1300"/>
+            </a:lvl1pPr>
+          </a:lstStyle>
+          <a:p>
+            <a:fld id="{631763FF-1AB2-1946-851C-DB0806ADF0B2}" type="datetimeFigureOut">
+              <a:rPr lang="en-US" smtClean="0"/>
+              <a:t>7/1/2022</a:t>
+            </a:fld>
+            <a:endParaRPr lang="en-US"/>
+          </a:p>
+        </p:txBody>
+      </p:sp>
+      <p:sp>
+        <p:nvSpPr>
+          <p:cNvPr id="4" name="Slide Image Placeholder 3"/>
+          <p:cNvSpPr>
+            <a:spLocks noGrp="1" noRot="1" noChangeAspect="1"/>
+          </p:cNvSpPr>
+          <p:nvPr>
+            <p:ph type="sldImg" idx="2"/>
+          </p:nvPr>
+        </p:nvSpPr>
+        <p:spPr>
+          <a:xfrm>
+            <a:off x="719138" y="1162050"/>
+            <a:ext cx="5573712" cy="3136900"/>
+          </a:xfrm>
+          <a:prstGeom prst="rect">
+            <a:avLst/>
+          </a:prstGeom>
+          <a:noFill/>
+          <a:ln w="12700">
+            <a:solidFill>
+              <a:prstClr val="black"/>
+            </a:solidFill>
+          </a:ln>
+        </p:spPr>
+        <p:txBody>
+          <a:bodyPr vert="horz" lIns="93173" tIns="46586" rIns="93173" bIns="46586" rtlCol="0" anchor="ctr"/>
+          <a:lstStyle/>
+          <a:p>
+            <a:endParaRPr lang="en-US"/>
+          </a:p>
+        </p:txBody>
+      </p:sp>
+      <p:sp>
+        <p:nvSpPr>
+          <p:cNvPr id="5" name="Notes Placeholder 4"/>
+          <p:cNvSpPr>
+            <a:spLocks noGrp="1"/>
+          </p:cNvSpPr>
+          <p:nvPr>
+            <p:ph type="body" sz="quarter" idx="3"/>
+          </p:nvPr>
+        </p:nvSpPr>
+        <p:spPr>
+          <a:xfrm>
+            <a:off x="701041" y="4473892"/>
+            <a:ext cx="5608320" cy="3660458"/>
+          </a:xfrm>
+          <a:prstGeom prst="rect">
+            <a:avLst/>
+          </a:prstGeom>
+        </p:spPr>
+        <p:txBody>
+          <a:bodyPr vert="horz" lIns="93173" tIns="46586" rIns="93173" bIns="46586" rtlCol="0"/>
+          <a:lstStyle/>
+          <a:p>
+            <a:pPr lvl="0"/>
+            <a:r>
+              <a:rPr lang="en-US"/>
+              <a:t>Edit Master text styles</a:t>
+            </a:r>
+          </a:p>
+          <a:p>
+            <a:pPr lvl="1"/>
+            <a:r>
+              <a:rPr lang="en-US"/>
+              <a:t>Second level</a:t>
+            </a:r>
+          </a:p>
+          <a:p>
+            <a:pPr lvl="2"/>
+            <a:r>
+              <a:rPr lang="en-US"/>
+              <a:t>Third level</a:t>
+            </a:r>
+          </a:p>
+          <a:p>
+            <a:pPr lvl="3"/>
+            <a:r>
+              <a:rPr lang="en-US"/>
+              <a:t>Fourth level</a:t>
+            </a:r>
+          </a:p>
+          <a:p>
+            <a:pPr lvl="4"/>
+            <a:r>
+              <a:rPr lang="en-US"/>
+              <a:t>Fifth level</a:t>
+            </a:r>
+          </a:p>
+        </p:txBody>
+      </p:sp>
+      <p:sp>
+        <p:nvSpPr>
+          <p:cNvPr id="6" name="Footer Placeholder 5"/>
+          <p:cNvSpPr>
+            <a:spLocks noGrp="1"/>
+          </p:cNvSpPr>
+          <p:nvPr>
+            <p:ph type="ftr" sz="quarter" idx="4"/>
+          </p:nvPr>
+        </p:nvSpPr>
+        <p:spPr>
+          <a:xfrm>
+            <a:off x="1" y="8829968"/>
+            <a:ext cx="3037840" cy="466433"/>
+          </a:xfrm>
+          <a:prstGeom prst="rect">
+            <a:avLst/>
+          </a:prstGeom>
+        </p:spPr>
+        <p:txBody>
+          <a:bodyPr vert="horz" lIns="93173" tIns="46586" rIns="93173" bIns="46586" rtlCol="0" anchor="b"/>
+          <a:lstStyle>
+            <a:lvl1pPr algn="l">
+              <a:defRPr sz="1300"/>
+            </a:lvl1pPr>
+          </a:lstStyle>
+          <a:p>
+            <a:endParaRPr lang="en-US"/>
+          </a:p>
+        </p:txBody>
+      </p:sp>
+      <p:sp>
+        <p:nvSpPr>
+          <p:cNvPr id="7" name="Slide Number Placeholder 6"/>
+          <p:cNvSpPr>
+            <a:spLocks noGrp="1"/>
+          </p:cNvSpPr>
+          <p:nvPr>
+            <p:ph type="sldNum" sz="quarter" idx="5"/>
+          </p:nvPr>
+        </p:nvSpPr>
+        <p:spPr>
+          <a:xfrm>
+            <a:off x="3970939" y="8829968"/>
+            <a:ext cx="3037840" cy="466433"/>
+          </a:xfrm>
+          <a:prstGeom prst="rect">
+            <a:avLst/>
+          </a:prstGeom>
+        </p:spPr>
+        <p:txBody>
+          <a:bodyPr vert="horz" lIns="93173" tIns="46586" rIns="93173" bIns="46586" rtlCol="0" anchor="b"/>
+          <a:lstStyle>
+            <a:lvl1pPr algn="r">
+              <a:defRPr sz="1300"/>
+            </a:lvl1pPr>
+          </a:lstStyle>
+          <a:p>
+            <a:fld id="{25BAF5BC-1DD1-3042-9AB2-550B19EF9856}" type="slidenum">
+              <a:rPr lang="en-US" smtClean="0"/>
+              <a:t>‹#›</a:t>
+            </a:fld>
+            <a:endParaRPr lang="en-US"/>
+          </a:p>
+        </p:txBody>
+      </p:sp>
+    </p:spTree>
+    <p:extLst>
+      <p:ext uri="{BB962C8B-B14F-4D97-AF65-F5344CB8AC3E}">
+        <p14:creationId xmlns:p14="http://schemas.microsoft.com/office/powerpoint/2010/main" val="1924246207"/>
+      </p:ext>
+    </p:extLst>
+  </p:cSld>
+  <p:clrMap bg1="lt1" tx1="dk1" bg2="lt2" tx2="dk2" accent1="accent1" accent2="accent2" accent3="accent3" accent4="accent4" accent5="accent5" accent6="accent6" hlink="hlink" folHlink="folHlink"/>
+  <p:notesStyle>
+    <a:lvl1pPr marL="0" algn="l" defTabSz="914400" rtl="0" eaLnBrk="1" latinLnBrk="0" hangingPunct="1">
+      <a:defRPr sz="1200" kern="1200">
+        <a:solidFill>
+          <a:schemeClr val="tx1"/>
+        </a:solidFill>
+        <a:latin typeface="+mn-lt"/>
+        <a:ea typeface="+mn-ea"/>
+        <a:cs typeface="+mn-cs"/>
+      </a:defRPr>
+    </a:lvl1pPr>
+    <a:lvl2pPr marL="457200" algn="l" defTabSz="914400" rtl="0" eaLnBrk="1" latinLnBrk="0" hangingPunct="1">
+      <a:defRPr sz="1200" kern="1200">
+        <a:solidFill>
+          <a:schemeClr val="tx1"/>
+        </a:solidFill>
+        <a:latin typeface="+mn-lt"/>
+        <a:ea typeface="+mn-ea"/>
+        <a:cs typeface="+mn-cs"/>
+      </a:defRPr>
+    </a:lvl2pPr>
+    <a:lvl3pPr marL="914400" algn="l" defTabSz="914400" rtl="0" eaLnBrk="1" latinLnBrk="0" hangingPunct="1">
+      <a:defRPr sz="1200" kern="1200">
+        <a:solidFill>
+          <a:schemeClr val="tx1"/>
+        </a:solidFill>
+        <a:latin typeface="+mn-lt"/>
+        <a:ea typeface="+mn-ea"/>
+        <a:cs typeface="+mn-cs"/>
+      </a:defRPr>
+    </a:lvl3pPr>
+    <a:lvl4pPr marL="1371600" algn="l" defTabSz="914400" rtl="0" eaLnBrk="1" latinLnBrk="0" hangingPunct="1">
+      <a:defRPr sz="1200" kern="1200">
+        <a:solidFill>
+          <a:schemeClr val="tx1"/>
+        </a:solidFill>
+        <a:latin typeface="+mn-lt"/>
+        <a:ea typeface="+mn-ea"/>
+        <a:cs typeface="+mn-cs"/>
+      </a:defRPr>
+    </a:lvl4pPr>
+    <a:lvl5pPr marL="1828800" algn="l" defTabSz="914400" rtl="0" eaLnBrk="1" latinLnBrk="0" hangingPunct="1">
+      <a:defRPr sz="1200" kern="1200">
+        <a:solidFill>
+          <a:schemeClr val="tx1"/>
+        </a:solidFill>
+        <a:latin typeface="+mn-lt"/>
+        <a:ea typeface="+mn-ea"/>
+        <a:cs typeface="+mn-cs"/>
+      </a:defRPr>
+    </a:lvl5pPr>
+    <a:lvl6pPr marL="2286000" algn="l" defTabSz="914400" rtl="0" eaLnBrk="1" latinLnBrk="0" hangingPunct="1">
+      <a:defRPr sz="1200" kern="1200">
+        <a:solidFill>
+          <a:schemeClr val="tx1"/>
+        </a:solidFill>
+        <a:latin typeface="+mn-lt"/>
+        <a:ea typeface="+mn-ea"/>
+        <a:cs typeface="+mn-cs"/>
+      </a:defRPr>
+    </a:lvl6pPr>
+    <a:lvl7pPr marL="2743200" algn="l" defTabSz="914400" rtl="0" eaLnBrk="1" latinLnBrk="0" hangingPunct="1">
+      <a:defRPr sz="1200" kern="1200">
+        <a:solidFill>
+          <a:schemeClr val="tx1"/>
+        </a:solidFill>
+        <a:latin typeface="+mn-lt"/>
+        <a:ea typeface="+mn-ea"/>
+        <a:cs typeface="+mn-cs"/>
+      </a:defRPr>
+    </a:lvl7pPr>
+    <a:lvl8pPr marL="3200400" algn="l" defTabSz="914400" rtl="0" eaLnBrk="1" latinLnBrk="0" hangingPunct="1">
+      <a:defRPr sz="1200" kern="1200">
+        <a:solidFill>
+          <a:schemeClr val="tx1"/>
+        </a:solidFill>
+        <a:latin typeface="+mn-lt"/>
+        <a:ea typeface="+mn-ea"/>
+        <a:cs typeface="+mn-cs"/>
+      </a:defRPr>
+    </a:lvl8pPr>
+    <a:lvl9pPr marL="3657600" algn="l" defTabSz="914400" rtl="0" eaLnBrk="1" latinLnBrk="0" hangingPunct="1">
+      <a:defRPr sz="1200" kern="1200">
+        <a:solidFill>
+          <a:schemeClr val="tx1"/>
+        </a:solidFill>
+        <a:latin typeface="+mn-lt"/>
+        <a:ea typeface="+mn-ea"/>
+        <a:cs typeface="+mn-cs"/>
+      </a:defRPr>
+    </a:lvl9pPr>
+  </p:notesStyle>
+</p:notesMaster>
 </file>
 
 <file path=ppt/slideLayouts/slideLayout1.xml><?xml version="1.0" encoding="utf-8"?>
@@ -146,19 +520,25 @@
         </p:nvSpPr>
         <p:spPr>
           <a:xfrm>
-            <a:off x="685800" y="2130425"/>
-            <a:ext cx="7772400" cy="1470025"/>
-          </a:xfrm>
-        </p:spPr>
-        <p:txBody>
-          <a:bodyPr/>
-          <a:lstStyle/>
-          <a:p>
-            <a:r>
-              <a:rPr lang="en-US" smtClean="0"/>
+            <a:off x="2417779" y="802298"/>
+            <a:ext cx="8637073" cy="2541431"/>
+          </a:xfrm>
+        </p:spPr>
+        <p:txBody>
+          <a:bodyPr bIns="0" anchor="b">
+            <a:normAutofit/>
+          </a:bodyPr>
+          <a:lstStyle>
+            <a:lvl1pPr algn="l">
+              <a:defRPr sz="6600"/>
+            </a:lvl1pPr>
+          </a:lstStyle>
+          <a:p>
+            <a:r>
+              <a:rPr lang="en-US"/>
               <a:t>Click to edit Master title style</a:t>
             </a:r>
-            <a:endParaRPr lang="en-US"/>
+            <a:endParaRPr lang="en-US" dirty="0"/>
           </a:p>
         </p:txBody>
       </p:sp>
@@ -174,110 +554,62 @@
         </p:nvSpPr>
         <p:spPr>
           <a:xfrm>
-            <a:off x="1371600" y="3886200"/>
-            <a:ext cx="6400800" cy="1752600"/>
-          </a:xfrm>
-        </p:spPr>
-        <p:txBody>
-          <a:bodyPr/>
+            <a:off x="2417780" y="3531204"/>
+            <a:ext cx="8637072" cy="977621"/>
+          </a:xfrm>
+        </p:spPr>
+        <p:txBody>
+          <a:bodyPr tIns="91440" bIns="91440">
+            <a:normAutofit/>
+          </a:bodyPr>
           <a:lstStyle>
-            <a:lvl1pPr marL="0" indent="0" algn="ctr">
-              <a:buNone/>
-              <a:defRPr>
+            <a:lvl1pPr marL="0" indent="0" algn="l">
+              <a:buNone/>
+              <a:defRPr sz="1800" b="0" cap="all" baseline="0">
                 <a:solidFill>
-                  <a:schemeClr val="tx1">
-                    <a:tint val="75000"/>
-                  </a:schemeClr>
+                  <a:schemeClr val="tx1"/>
                 </a:solidFill>
               </a:defRPr>
             </a:lvl1pPr>
             <a:lvl2pPr marL="457200" indent="0" algn="ctr">
               <a:buNone/>
-              <a:defRPr>
-                <a:solidFill>
-                  <a:schemeClr val="tx1">
-                    <a:tint val="75000"/>
-                  </a:schemeClr>
-                </a:solidFill>
-              </a:defRPr>
+              <a:defRPr sz="1800"/>
             </a:lvl2pPr>
             <a:lvl3pPr marL="914400" indent="0" algn="ctr">
               <a:buNone/>
-              <a:defRPr>
-                <a:solidFill>
-                  <a:schemeClr val="tx1">
-                    <a:tint val="75000"/>
-                  </a:schemeClr>
-                </a:solidFill>
-              </a:defRPr>
+              <a:defRPr sz="1800"/>
             </a:lvl3pPr>
             <a:lvl4pPr marL="1371600" indent="0" algn="ctr">
               <a:buNone/>
-              <a:defRPr>
-                <a:solidFill>
-                  <a:schemeClr val="tx1">
-                    <a:tint val="75000"/>
-                  </a:schemeClr>
-                </a:solidFill>
-              </a:defRPr>
+              <a:defRPr sz="1600"/>
             </a:lvl4pPr>
             <a:lvl5pPr marL="1828800" indent="0" algn="ctr">
               <a:buNone/>
-              <a:defRPr>
-                <a:solidFill>
-                  <a:schemeClr val="tx1">
-                    <a:tint val="75000"/>
-                  </a:schemeClr>
-                </a:solidFill>
-              </a:defRPr>
+              <a:defRPr sz="1600"/>
             </a:lvl5pPr>
             <a:lvl6pPr marL="2286000" indent="0" algn="ctr">
               <a:buNone/>
-              <a:defRPr>
-                <a:solidFill>
-                  <a:schemeClr val="tx1">
-                    <a:tint val="75000"/>
-                  </a:schemeClr>
-                </a:solidFill>
-              </a:defRPr>
+              <a:defRPr sz="1600"/>
             </a:lvl6pPr>
             <a:lvl7pPr marL="2743200" indent="0" algn="ctr">
               <a:buNone/>
-              <a:defRPr>
-                <a:solidFill>
-                  <a:schemeClr val="tx1">
-                    <a:tint val="75000"/>
-                  </a:schemeClr>
-                </a:solidFill>
-              </a:defRPr>
+              <a:defRPr sz="1600"/>
             </a:lvl7pPr>
             <a:lvl8pPr marL="3200400" indent="0" algn="ctr">
               <a:buNone/>
-              <a:defRPr>
-                <a:solidFill>
-                  <a:schemeClr val="tx1">
-                    <a:tint val="75000"/>
-                  </a:schemeClr>
-                </a:solidFill>
-              </a:defRPr>
+              <a:defRPr sz="1600"/>
             </a:lvl8pPr>
             <a:lvl9pPr marL="3657600" indent="0" algn="ctr">
               <a:buNone/>
-              <a:defRPr>
-                <a:solidFill>
-                  <a:schemeClr val="tx1">
-                    <a:tint val="75000"/>
-                  </a:schemeClr>
-                </a:solidFill>
-              </a:defRPr>
+              <a:defRPr sz="1600"/>
             </a:lvl9pPr>
           </a:lstStyle>
           <a:p>
             <a:r>
-              <a:rPr lang="en-US" smtClean="0"/>
+              <a:rPr lang="en-US"/>
               <a:t>Click to edit Master subtitle style</a:t>
             </a:r>
-            <a:endParaRPr lang="en-US"/>
+            <a:endParaRPr lang="en-US" dirty="0"/>
           </a:p>
         </p:txBody>
       </p:sp>
@@ -296,11 +628,11 @@
           <a:bodyPr/>
           <a:lstStyle/>
           <a:p>
-            <a:fld id="{5BCAD085-E8A6-8845-BD4E-CB4CCA059FC4}" type="datetimeFigureOut">
-              <a:rPr lang="en-US" smtClean="0"/>
-              <a:t>1/27/13</a:t>
+            <a:fld id="{48A87A34-81AB-432B-8DAE-1953F412C126}" type="datetimeFigureOut">
+              <a:rPr lang="en-US" dirty="0"/>
+              <a:t>7/1/2022</a:t>
             </a:fld>
-            <a:endParaRPr lang="en-US"/>
+            <a:endParaRPr lang="en-US" dirty="0"/>
           </a:p>
         </p:txBody>
       </p:sp>
@@ -314,12 +646,17 @@
             <p:ph type="ftr" sz="quarter" idx="11"/>
           </p:nvPr>
         </p:nvSpPr>
-        <p:spPr/>
+        <p:spPr>
+          <a:xfrm>
+            <a:off x="2416500" y="329307"/>
+            <a:ext cx="4973915" cy="309201"/>
+          </a:xfrm>
+        </p:spPr>
         <p:txBody>
           <a:bodyPr/>
           <a:lstStyle/>
           <a:p>
-            <a:endParaRPr lang="en-US"/>
+            <a:endParaRPr lang="en-US" dirty="0"/>
           </a:p>
         </p:txBody>
       </p:sp>
@@ -333,25 +670,56 @@
             <p:ph type="sldNum" sz="quarter" idx="12"/>
           </p:nvPr>
         </p:nvSpPr>
-        <p:spPr/>
+        <p:spPr>
+          <a:xfrm>
+            <a:off x="1437664" y="798973"/>
+            <a:ext cx="811019" cy="503578"/>
+          </a:xfrm>
+        </p:spPr>
         <p:txBody>
           <a:bodyPr/>
           <a:lstStyle/>
           <a:p>
-            <a:fld id="{C1FF6DA9-008F-8B48-92A6-B652298478BF}" type="slidenum">
-              <a:rPr lang="en-US" smtClean="0"/>
+            <a:fld id="{6D22F896-40B5-4ADD-8801-0D06FADFA095}" type="slidenum">
+              <a:rPr lang="en-US" dirty="0"/>
               <a:t>‹#›</a:t>
             </a:fld>
-            <a:endParaRPr lang="en-US"/>
-          </a:p>
-        </p:txBody>
-      </p:sp>
+            <a:endParaRPr lang="en-US" dirty="0"/>
+          </a:p>
+        </p:txBody>
+      </p:sp>
+      <p:cxnSp>
+        <p:nvCxnSpPr>
+          <p:cNvPr id="15" name="Straight Connector 14"/>
+          <p:cNvCxnSpPr/>
+          <p:nvPr/>
+        </p:nvCxnSpPr>
+        <p:spPr>
+          <a:xfrm>
+            <a:off x="2417780" y="3528542"/>
+            <a:ext cx="8637072" cy="0"/>
+          </a:xfrm>
+          <a:prstGeom prst="line">
+            <a:avLst/>
+          </a:prstGeom>
+          <a:ln w="31750"/>
+        </p:spPr>
+        <p:style>
+          <a:lnRef idx="3">
+            <a:schemeClr val="accent1"/>
+          </a:lnRef>
+          <a:fillRef idx="0">
+            <a:schemeClr val="accent1"/>
+          </a:fillRef>
+          <a:effectRef idx="2">
+            <a:schemeClr val="accent1"/>
+          </a:effectRef>
+          <a:fontRef idx="minor">
+            <a:schemeClr val="tx1"/>
+          </a:fontRef>
+        </p:style>
+      </p:cxnSp>
     </p:spTree>
-    <p:extLst>
-      <p:ext uri="{BB962C8B-B14F-4D97-AF65-F5344CB8AC3E}">
-        <p14:creationId xmlns:p14="http://schemas.microsoft.com/office/powerpoint/2010/main" val="3168075583"/>
-      </p:ext>
-    </p:extLst>
   </p:cSld>
   <p:clrMapOvr>
     <a:masterClrMapping/>
@@ -392,10 +760,10 @@
           <a:lstStyle/>
           <a:p>
             <a:r>
-              <a:rPr lang="en-US" smtClean="0"/>
+              <a:rPr lang="en-US"/>
               <a:t>Click to edit Master title style</a:t>
             </a:r>
-            <a:endParaRPr lang="en-US"/>
+            <a:endParaRPr lang="en-US" dirty="0"/>
           </a:p>
         </p:txBody>
       </p:sp>
@@ -416,38 +784,38 @@
           <a:p>
             <a:pPr lvl="0"/>
             <a:r>
-              <a:rPr lang="en-US" smtClean="0"/>
-              <a:t>Click to edit Master text styles</a:t>
+              <a:rPr lang="en-US"/>
+              <a:t>Edit Master text styles</a:t>
             </a:r>
           </a:p>
           <a:p>
             <a:pPr lvl="1"/>
             <a:r>
-              <a:rPr lang="en-US" smtClean="0"/>
+              <a:rPr lang="en-US"/>
               <a:t>Second level</a:t>
             </a:r>
           </a:p>
           <a:p>
             <a:pPr lvl="2"/>
             <a:r>
-              <a:rPr lang="en-US" smtClean="0"/>
+              <a:rPr lang="en-US"/>
               <a:t>Third level</a:t>
             </a:r>
           </a:p>
           <a:p>
             <a:pPr lvl="3"/>
             <a:r>
-              <a:rPr lang="en-US" smtClean="0"/>
+              <a:rPr lang="en-US"/>
               <a:t>Fourth level</a:t>
             </a:r>
           </a:p>
           <a:p>
             <a:pPr lvl="4"/>
             <a:r>
-              <a:rPr lang="en-US" smtClean="0"/>
+              <a:rPr lang="en-US"/>
               <a:t>Fifth level</a:t>
             </a:r>
-            <a:endParaRPr lang="en-US"/>
+            <a:endParaRPr lang="en-US" dirty="0"/>
           </a:p>
         </p:txBody>
       </p:sp>
@@ -466,11 +834,11 @@
           <a:bodyPr/>
           <a:lstStyle/>
           <a:p>
-            <a:fld id="{5BCAD085-E8A6-8845-BD4E-CB4CCA059FC4}" type="datetimeFigureOut">
-              <a:rPr lang="en-US" smtClean="0"/>
-              <a:t>1/27/13</a:t>
+            <a:fld id="{48A87A34-81AB-432B-8DAE-1953F412C126}" type="datetimeFigureOut">
+              <a:rPr lang="en-US" dirty="0"/>
+              <a:t>7/1/2022</a:t>
             </a:fld>
-            <a:endParaRPr lang="en-US"/>
+            <a:endParaRPr lang="en-US" dirty="0"/>
           </a:p>
         </p:txBody>
       </p:sp>
@@ -489,7 +857,7 @@
           <a:bodyPr/>
           <a:lstStyle/>
           <a:p>
-            <a:endParaRPr lang="en-US"/>
+            <a:endParaRPr lang="en-US" dirty="0"/>
           </a:p>
         </p:txBody>
       </p:sp>
@@ -508,20 +876,46 @@
           <a:bodyPr/>
           <a:lstStyle/>
           <a:p>
-            <a:fld id="{C1FF6DA9-008F-8B48-92A6-B652298478BF}" type="slidenum">
-              <a:rPr lang="en-US" smtClean="0"/>
+            <a:fld id="{6D22F896-40B5-4ADD-8801-0D06FADFA095}" type="slidenum">
+              <a:rPr lang="en-US" dirty="0"/>
               <a:t>‹#›</a:t>
             </a:fld>
-            <a:endParaRPr lang="en-US"/>
-          </a:p>
-        </p:txBody>
-      </p:sp>
+            <a:endParaRPr lang="en-US" dirty="0"/>
+          </a:p>
+        </p:txBody>
+      </p:sp>
+      <p:cxnSp>
+        <p:nvCxnSpPr>
+          <p:cNvPr id="26" name="Straight Connector 25"/>
+          <p:cNvCxnSpPr/>
+          <p:nvPr/>
+        </p:nvCxnSpPr>
+        <p:spPr>
+          <a:xfrm>
+            <a:off x="1453896" y="1847088"/>
+            <a:ext cx="9607522" cy="0"/>
+          </a:xfrm>
+          <a:prstGeom prst="line">
+            <a:avLst/>
+          </a:prstGeom>
+          <a:ln w="31750"/>
+        </p:spPr>
+        <p:style>
+          <a:lnRef idx="3">
+            <a:schemeClr val="accent1"/>
+          </a:lnRef>
+          <a:fillRef idx="0">
+            <a:schemeClr val="accent1"/>
+          </a:fillRef>
+          <a:effectRef idx="2">
+            <a:schemeClr val="accent1"/>
+          </a:effectRef>
+          <a:fontRef idx="minor">
+            <a:schemeClr val="tx1"/>
+          </a:fontRef>
+        </p:style>
+      </p:cxnSp>
     </p:spTree>
-    <p:extLst>
-      <p:ext uri="{BB962C8B-B14F-4D97-AF65-F5344CB8AC3E}">
-        <p14:creationId xmlns:p14="http://schemas.microsoft.com/office/powerpoint/2010/main" val="2910927964"/>
-      </p:ext>
-    </p:extLst>
   </p:cSld>
   <p:clrMapOvr>
     <a:masterClrMapping/>
@@ -558,19 +952,23 @@
         </p:nvSpPr>
         <p:spPr>
           <a:xfrm>
-            <a:off x="6629400" y="274638"/>
-            <a:ext cx="2057400" cy="5851525"/>
+            <a:off x="9439111" y="798973"/>
+            <a:ext cx="1615742" cy="4659889"/>
           </a:xfrm>
         </p:spPr>
         <p:txBody>
           <a:bodyPr vert="eaVert"/>
-          <a:lstStyle/>
-          <a:p>
-            <a:r>
-              <a:rPr lang="en-US" smtClean="0"/>
+          <a:lstStyle>
+            <a:lvl1pPr algn="l">
+              <a:defRPr/>
+            </a:lvl1pPr>
+          </a:lstStyle>
+          <a:p>
+            <a:r>
+              <a:rPr lang="en-US"/>
               <a:t>Click to edit Master title style</a:t>
             </a:r>
-            <a:endParaRPr lang="en-US"/>
+            <a:endParaRPr lang="en-US" dirty="0"/>
           </a:p>
         </p:txBody>
       </p:sp>
@@ -586,8 +984,8 @@
         </p:nvSpPr>
         <p:spPr>
           <a:xfrm>
-            <a:off x="457200" y="274638"/>
-            <a:ext cx="6019800" cy="5851525"/>
+            <a:off x="1444672" y="798973"/>
+            <a:ext cx="7828830" cy="4659889"/>
           </a:xfrm>
         </p:spPr>
         <p:txBody>
@@ -596,38 +994,38 @@
           <a:p>
             <a:pPr lvl="0"/>
             <a:r>
-              <a:rPr lang="en-US" smtClean="0"/>
-              <a:t>Click to edit Master text styles</a:t>
+              <a:rPr lang="en-US"/>
+              <a:t>Edit Master text styles</a:t>
             </a:r>
           </a:p>
           <a:p>
             <a:pPr lvl="1"/>
             <a:r>
-              <a:rPr lang="en-US" smtClean="0"/>
+              <a:rPr lang="en-US"/>
               <a:t>Second level</a:t>
             </a:r>
           </a:p>
           <a:p>
             <a:pPr lvl="2"/>
             <a:r>
-              <a:rPr lang="en-US" smtClean="0"/>
+              <a:rPr lang="en-US"/>
               <a:t>Third level</a:t>
             </a:r>
           </a:p>
           <a:p>
             <a:pPr lvl="3"/>
             <a:r>
-              <a:rPr lang="en-US" smtClean="0"/>
+              <a:rPr lang="en-US"/>
               <a:t>Fourth level</a:t>
             </a:r>
           </a:p>
           <a:p>
             <a:pPr lvl="4"/>
             <a:r>
-              <a:rPr lang="en-US" smtClean="0"/>
+              <a:rPr lang="en-US"/>
               <a:t>Fifth level</a:t>
             </a:r>
-            <a:endParaRPr lang="en-US"/>
+            <a:endParaRPr lang="en-US" dirty="0"/>
           </a:p>
         </p:txBody>
       </p:sp>
@@ -646,11 +1044,11 @@
           <a:bodyPr/>
           <a:lstStyle/>
           <a:p>
-            <a:fld id="{5BCAD085-E8A6-8845-BD4E-CB4CCA059FC4}" type="datetimeFigureOut">
-              <a:rPr lang="en-US" smtClean="0"/>
-              <a:t>1/27/13</a:t>
+            <a:fld id="{48A87A34-81AB-432B-8DAE-1953F412C126}" type="datetimeFigureOut">
+              <a:rPr lang="en-US" dirty="0"/>
+              <a:t>7/1/2022</a:t>
             </a:fld>
-            <a:endParaRPr lang="en-US"/>
+            <a:endParaRPr lang="en-US" dirty="0"/>
           </a:p>
         </p:txBody>
       </p:sp>
@@ -669,7 +1067,7 @@
           <a:bodyPr/>
           <a:lstStyle/>
           <a:p>
-            <a:endParaRPr lang="en-US"/>
+            <a:endParaRPr lang="en-US" dirty="0"/>
           </a:p>
         </p:txBody>
       </p:sp>
@@ -688,18 +1086,249 @@
           <a:bodyPr/>
           <a:lstStyle/>
           <a:p>
-            <a:fld id="{C1FF6DA9-008F-8B48-92A6-B652298478BF}" type="slidenum">
-              <a:rPr lang="en-US" smtClean="0"/>
+            <a:fld id="{6D22F896-40B5-4ADD-8801-0D06FADFA095}" type="slidenum">
+              <a:rPr lang="en-US" dirty="0"/>
               <a:t>‹#›</a:t>
             </a:fld>
-            <a:endParaRPr lang="en-US"/>
+            <a:endParaRPr lang="en-US" dirty="0"/>
+          </a:p>
+        </p:txBody>
+      </p:sp>
+      <p:cxnSp>
+        <p:nvCxnSpPr>
+          <p:cNvPr id="15" name="Straight Connector 14"/>
+          <p:cNvCxnSpPr/>
+          <p:nvPr/>
+        </p:nvCxnSpPr>
+        <p:spPr>
+          <a:xfrm>
+            <a:off x="9439111" y="798973"/>
+            <a:ext cx="0" cy="4659889"/>
+          </a:xfrm>
+          <a:prstGeom prst="line">
+            <a:avLst/>
+          </a:prstGeom>
+          <a:ln w="31750"/>
+        </p:spPr>
+        <p:style>
+          <a:lnRef idx="3">
+            <a:schemeClr val="accent1"/>
+          </a:lnRef>
+          <a:fillRef idx="0">
+            <a:schemeClr val="accent1"/>
+          </a:fillRef>
+          <a:effectRef idx="2">
+            <a:schemeClr val="accent1"/>
+          </a:effectRef>
+          <a:fontRef idx="minor">
+            <a:schemeClr val="tx1"/>
+          </a:fontRef>
+        </p:style>
+      </p:cxnSp>
+    </p:spTree>
+  </p:cSld>
+  <p:clrMapOvr>
+    <a:masterClrMapping/>
+  </p:clrMapOvr>
+</p:sldLayout>
+</file>
+
+<file path=ppt/slideLayouts/slideLayout12.xml><?xml version="1.0" encoding="utf-8"?>
+<p:sldLayout xmlns:a="http://schemas.openxmlformats.org/drawingml/2006/main" xmlns:r="http://schemas.openxmlformats.org/officeDocument/2006/relationships" xmlns:p="http://schemas.openxmlformats.org/presentationml/2006/main" type="obj">
+  <p:cSld name="1_Title and Content">
+    <p:spTree>
+      <p:nvGrpSpPr>
+        <p:cNvPr id="1" name=""/>
+        <p:cNvGrpSpPr/>
+        <p:nvPr/>
+      </p:nvGrpSpPr>
+      <p:grpSpPr>
+        <a:xfrm>
+          <a:off x="0" y="0"/>
+          <a:ext cx="0" cy="0"/>
+          <a:chOff x="0" y="0"/>
+          <a:chExt cx="0" cy="0"/>
+        </a:xfrm>
+      </p:grpSpPr>
+      <p:pic>
+        <p:nvPicPr>
+          <p:cNvPr id="3" name="Picture 2" descr="Droplets-HD-Content-R1d.png"/>
+          <p:cNvPicPr>
+            <a:picLocks noChangeAspect="1"/>
+          </p:cNvPicPr>
+          <p:nvPr/>
+        </p:nvPicPr>
+        <p:blipFill>
+          <a:blip r:embed="rId2">
+            <a:extLst>
+              <a:ext uri="{28A0092B-C50C-407E-A947-70E740481C1C}">
+                <a14:useLocalDpi xmlns:a14="http://schemas.microsoft.com/office/drawing/2010/main" val="0"/>
+              </a:ext>
+            </a:extLst>
+          </a:blip>
+          <a:stretch>
+            <a:fillRect/>
+          </a:stretch>
+        </p:blipFill>
+        <p:spPr>
+          <a:xfrm>
+            <a:off x="0" y="0"/>
+            <a:ext cx="12192000" cy="6858000"/>
+          </a:xfrm>
+          <a:prstGeom prst="rect">
+            <a:avLst/>
+          </a:prstGeom>
+        </p:spPr>
+      </p:pic>
+      <p:sp>
+        <p:nvSpPr>
+          <p:cNvPr id="2" name="Title 1"/>
+          <p:cNvSpPr>
+            <a:spLocks noGrp="1"/>
+          </p:cNvSpPr>
+          <p:nvPr>
+            <p:ph type="title"/>
+          </p:nvPr>
+        </p:nvSpPr>
+        <p:spPr/>
+        <p:txBody>
+          <a:bodyPr/>
+          <a:lstStyle/>
+          <a:p>
+            <a:r>
+              <a:rPr lang="en-US"/>
+              <a:t>Click to edit Master title style</a:t>
+            </a:r>
+            <a:endParaRPr lang="en-US" dirty="0"/>
+          </a:p>
+        </p:txBody>
+      </p:sp>
+      <p:sp>
+        <p:nvSpPr>
+          <p:cNvPr id="12" name="Content Placeholder 2"/>
+          <p:cNvSpPr>
+            <a:spLocks noGrp="1"/>
+          </p:cNvSpPr>
+          <p:nvPr>
+            <p:ph sz="quarter" idx="13"/>
+          </p:nvPr>
+        </p:nvSpPr>
+        <p:spPr>
+          <a:xfrm>
+            <a:off x="913774" y="2367092"/>
+            <a:ext cx="10363826" cy="3424107"/>
+          </a:xfrm>
+        </p:spPr>
+        <p:txBody>
+          <a:bodyPr/>
+          <a:lstStyle/>
+          <a:p>
+            <a:pPr lvl="0"/>
+            <a:r>
+              <a:rPr lang="en-US"/>
+              <a:t>Edit Master text styles</a:t>
+            </a:r>
+          </a:p>
+          <a:p>
+            <a:pPr lvl="1"/>
+            <a:r>
+              <a:rPr lang="en-US"/>
+              <a:t>Second level</a:t>
+            </a:r>
+          </a:p>
+          <a:p>
+            <a:pPr lvl="2"/>
+            <a:r>
+              <a:rPr lang="en-US"/>
+              <a:t>Third level</a:t>
+            </a:r>
+          </a:p>
+          <a:p>
+            <a:pPr lvl="3"/>
+            <a:r>
+              <a:rPr lang="en-US"/>
+              <a:t>Fourth level</a:t>
+            </a:r>
+          </a:p>
+          <a:p>
+            <a:pPr lvl="4"/>
+            <a:r>
+              <a:rPr lang="en-US"/>
+              <a:t>Fifth level</a:t>
+            </a:r>
+            <a:endParaRPr lang="en-US" dirty="0"/>
+          </a:p>
+        </p:txBody>
+      </p:sp>
+      <p:sp>
+        <p:nvSpPr>
+          <p:cNvPr id="4" name="Date Placeholder 3"/>
+          <p:cNvSpPr>
+            <a:spLocks noGrp="1"/>
+          </p:cNvSpPr>
+          <p:nvPr>
+            <p:ph type="dt" sz="half" idx="10"/>
+          </p:nvPr>
+        </p:nvSpPr>
+        <p:spPr/>
+        <p:txBody>
+          <a:bodyPr/>
+          <a:lstStyle/>
+          <a:p>
+            <a:fld id="{48A87A34-81AB-432B-8DAE-1953F412C126}" type="datetimeFigureOut">
+              <a:rPr lang="en-US" dirty="0"/>
+              <a:t>7/1/2022</a:t>
+            </a:fld>
+            <a:endParaRPr lang="en-US" dirty="0"/>
+          </a:p>
+        </p:txBody>
+      </p:sp>
+      <p:sp>
+        <p:nvSpPr>
+          <p:cNvPr id="5" name="Footer Placeholder 4"/>
+          <p:cNvSpPr>
+            <a:spLocks noGrp="1"/>
+          </p:cNvSpPr>
+          <p:nvPr>
+            <p:ph type="ftr" sz="quarter" idx="11"/>
+          </p:nvPr>
+        </p:nvSpPr>
+        <p:spPr/>
+        <p:txBody>
+          <a:bodyPr/>
+          <a:lstStyle/>
+          <a:p>
+            <a:endParaRPr lang="en-US" dirty="0"/>
+          </a:p>
+        </p:txBody>
+      </p:sp>
+      <p:sp>
+        <p:nvSpPr>
+          <p:cNvPr id="6" name="Slide Number Placeholder 5"/>
+          <p:cNvSpPr>
+            <a:spLocks noGrp="1"/>
+          </p:cNvSpPr>
+          <p:nvPr>
+            <p:ph type="sldNum" sz="quarter" idx="12"/>
+          </p:nvPr>
+        </p:nvSpPr>
+        <p:spPr/>
+        <p:txBody>
+          <a:bodyPr/>
+          <a:lstStyle/>
+          <a:p>
+            <a:fld id="{6D22F896-40B5-4ADD-8801-0D06FADFA095}" type="slidenum">
+              <a:rPr lang="en-US" dirty="0"/>
+              <a:t>‹#›</a:t>
+            </a:fld>
+            <a:endParaRPr lang="en-US" dirty="0"/>
           </a:p>
         </p:txBody>
       </p:sp>
     </p:spTree>
     <p:extLst>
       <p:ext uri="{BB962C8B-B14F-4D97-AF65-F5344CB8AC3E}">
-        <p14:creationId xmlns:p14="http://schemas.microsoft.com/office/powerpoint/2010/main" val="3612223792"/>
+        <p14:creationId xmlns:p14="http://schemas.microsoft.com/office/powerpoint/2010/main" val="1578800070"/>
       </p:ext>
     </p:extLst>
   </p:cSld>
@@ -733,19 +1362,34 @@
             <a:spLocks noGrp="1"/>
           </p:cNvSpPr>
           <p:nvPr>
-            <p:ph type="title"/>
-          </p:nvPr>
-        </p:nvSpPr>
-        <p:spPr/>
+            <p:ph type="title" hasCustomPrompt="1"/>
+          </p:nvPr>
+        </p:nvSpPr>
+        <p:spPr>
+          <a:xfrm>
+            <a:off x="318053" y="1"/>
+            <a:ext cx="10736802" cy="868705"/>
+          </a:xfrm>
+        </p:spPr>
         <p:txBody>
           <a:bodyPr/>
-          <a:lstStyle/>
-          <a:p>
-            <a:r>
-              <a:rPr lang="en-US" smtClean="0"/>
+          <a:lstStyle>
+            <a:lvl1pPr>
+              <a:defRPr/>
+            </a:lvl1pPr>
+          </a:lstStyle>
+          <a:p>
+            <a:r>
+              <a:rPr lang="en-US" dirty="0"/>
               <a:t>Click to edit Master title style</a:t>
             </a:r>
-            <a:endParaRPr lang="en-US"/>
+            <a:br>
+              <a:rPr lang="en-US" dirty="0"/>
+            </a:br>
+            <a:r>
+              <a:rPr lang="en-US" dirty="0"/>
+              <a:t>Test</a:t>
+            </a:r>
           </a:p>
         </p:txBody>
       </p:sp>
@@ -759,119 +1403,114 @@
             <p:ph idx="1"/>
           </p:nvPr>
         </p:nvSpPr>
-        <p:spPr/>
+        <p:spPr>
+          <a:xfrm>
+            <a:off x="480061" y="938440"/>
+            <a:ext cx="10386722" cy="5687646"/>
+          </a:xfrm>
+        </p:spPr>
+        <p:txBody>
+          <a:bodyPr anchor="t"/>
+          <a:lstStyle/>
+          <a:p>
+            <a:pPr lvl="0"/>
+            <a:r>
+              <a:rPr lang="en-US" dirty="0"/>
+              <a:t>Edit Master text styles</a:t>
+            </a:r>
+          </a:p>
+          <a:p>
+            <a:pPr lvl="1"/>
+            <a:r>
+              <a:rPr lang="en-US" dirty="0"/>
+              <a:t>Second level</a:t>
+            </a:r>
+          </a:p>
+          <a:p>
+            <a:pPr lvl="2"/>
+            <a:r>
+              <a:rPr lang="en-US" dirty="0"/>
+              <a:t>Third level</a:t>
+            </a:r>
+          </a:p>
+          <a:p>
+            <a:pPr lvl="3"/>
+            <a:r>
+              <a:rPr lang="en-US" dirty="0"/>
+              <a:t>Fourth level</a:t>
+            </a:r>
+          </a:p>
+          <a:p>
+            <a:pPr lvl="4"/>
+            <a:r>
+              <a:rPr lang="en-US" dirty="0"/>
+              <a:t>Fifth level</a:t>
+            </a:r>
+          </a:p>
+        </p:txBody>
+      </p:sp>
+      <p:sp>
+        <p:nvSpPr>
+          <p:cNvPr id="6" name="Slide Number Placeholder 5"/>
+          <p:cNvSpPr>
+            <a:spLocks noGrp="1"/>
+          </p:cNvSpPr>
+          <p:nvPr>
+            <p:ph type="sldNum" sz="quarter" idx="12"/>
+          </p:nvPr>
+        </p:nvSpPr>
+        <p:spPr>
+          <a:xfrm>
+            <a:off x="11451771" y="6354421"/>
+            <a:ext cx="740229" cy="503577"/>
+          </a:xfrm>
+        </p:spPr>
         <p:txBody>
           <a:bodyPr/>
           <a:lstStyle/>
           <a:p>
-            <a:pPr lvl="0"/>
-            <a:r>
-              <a:rPr lang="en-US" smtClean="0"/>
-              <a:t>Click to edit Master text styles</a:t>
-            </a:r>
-          </a:p>
-          <a:p>
-            <a:pPr lvl="1"/>
-            <a:r>
-              <a:rPr lang="en-US" smtClean="0"/>
-              <a:t>Second level</a:t>
-            </a:r>
-          </a:p>
-          <a:p>
-            <a:pPr lvl="2"/>
-            <a:r>
-              <a:rPr lang="en-US" smtClean="0"/>
-              <a:t>Third level</a:t>
-            </a:r>
-          </a:p>
-          <a:p>
-            <a:pPr lvl="3"/>
-            <a:r>
-              <a:rPr lang="en-US" smtClean="0"/>
-              <a:t>Fourth level</a:t>
-            </a:r>
-          </a:p>
-          <a:p>
-            <a:pPr lvl="4"/>
-            <a:r>
-              <a:rPr lang="en-US" smtClean="0"/>
-              <a:t>Fifth level</a:t>
-            </a:r>
-            <a:endParaRPr lang="en-US"/>
-          </a:p>
-        </p:txBody>
-      </p:sp>
-      <p:sp>
-        <p:nvSpPr>
-          <p:cNvPr id="4" name="Date Placeholder 3"/>
-          <p:cNvSpPr>
-            <a:spLocks noGrp="1"/>
-          </p:cNvSpPr>
-          <p:nvPr>
-            <p:ph type="dt" sz="half" idx="10"/>
-          </p:nvPr>
-        </p:nvSpPr>
-        <p:spPr/>
-        <p:txBody>
-          <a:bodyPr/>
-          <a:lstStyle/>
-          <a:p>
-            <a:fld id="{5BCAD085-E8A6-8845-BD4E-CB4CCA059FC4}" type="datetimeFigureOut">
-              <a:rPr lang="en-US" smtClean="0"/>
-              <a:t>1/27/13</a:t>
-            </a:fld>
-            <a:endParaRPr lang="en-US"/>
-          </a:p>
-        </p:txBody>
-      </p:sp>
-      <p:sp>
-        <p:nvSpPr>
-          <p:cNvPr id="5" name="Footer Placeholder 4"/>
-          <p:cNvSpPr>
-            <a:spLocks noGrp="1"/>
-          </p:cNvSpPr>
-          <p:nvPr>
-            <p:ph type="ftr" sz="quarter" idx="11"/>
-          </p:nvPr>
-        </p:nvSpPr>
-        <p:spPr/>
-        <p:txBody>
-          <a:bodyPr/>
-          <a:lstStyle/>
-          <a:p>
-            <a:endParaRPr lang="en-US"/>
-          </a:p>
-        </p:txBody>
-      </p:sp>
-      <p:sp>
-        <p:nvSpPr>
-          <p:cNvPr id="6" name="Slide Number Placeholder 5"/>
-          <p:cNvSpPr>
-            <a:spLocks noGrp="1"/>
-          </p:cNvSpPr>
-          <p:nvPr>
-            <p:ph type="sldNum" sz="quarter" idx="12"/>
-          </p:nvPr>
-        </p:nvSpPr>
-        <p:spPr/>
-        <p:txBody>
-          <a:bodyPr/>
-          <a:lstStyle/>
-          <a:p>
-            <a:fld id="{C1FF6DA9-008F-8B48-92A6-B652298478BF}" type="slidenum">
-              <a:rPr lang="en-US" smtClean="0"/>
+            <a:fld id="{6D22F896-40B5-4ADD-8801-0D06FADFA095}" type="slidenum">
+              <a:rPr lang="en-US" dirty="0"/>
               <a:t>‹#›</a:t>
             </a:fld>
-            <a:endParaRPr lang="en-US"/>
-          </a:p>
-        </p:txBody>
-      </p:sp>
+            <a:endParaRPr lang="en-US" dirty="0"/>
+          </a:p>
+        </p:txBody>
+      </p:sp>
+      <p:cxnSp>
+        <p:nvCxnSpPr>
+          <p:cNvPr id="33" name="Straight Connector 32"/>
+          <p:cNvCxnSpPr>
+            <a:cxnSpLocks/>
+          </p:cNvCxnSpPr>
+          <p:nvPr/>
+        </p:nvCxnSpPr>
+        <p:spPr>
+          <a:xfrm>
+            <a:off x="318053" y="903542"/>
+            <a:ext cx="10743365" cy="0"/>
+          </a:xfrm>
+          <a:prstGeom prst="line">
+            <a:avLst/>
+          </a:prstGeom>
+          <a:ln w="31750"/>
+        </p:spPr>
+        <p:style>
+          <a:lnRef idx="3">
+            <a:schemeClr val="accent1"/>
+          </a:lnRef>
+          <a:fillRef idx="0">
+            <a:schemeClr val="accent1"/>
+          </a:fillRef>
+          <a:effectRef idx="2">
+            <a:schemeClr val="accent1"/>
+          </a:effectRef>
+          <a:fontRef idx="minor">
+            <a:schemeClr val="tx1"/>
+          </a:fontRef>
+        </p:style>
+      </p:cxnSp>
     </p:spTree>
-    <p:extLst>
-      <p:ext uri="{BB962C8B-B14F-4D97-AF65-F5344CB8AC3E}">
-        <p14:creationId xmlns:p14="http://schemas.microsoft.com/office/powerpoint/2010/main" val="2614314258"/>
-      </p:ext>
-    </p:extLst>
   </p:cSld>
   <p:clrMapOvr>
     <a:masterClrMapping/>
@@ -908,23 +1547,25 @@
         </p:nvSpPr>
         <p:spPr>
           <a:xfrm>
-            <a:off x="722313" y="4406900"/>
-            <a:ext cx="7772400" cy="1362075"/>
-          </a:xfrm>
-        </p:spPr>
-        <p:txBody>
-          <a:bodyPr anchor="t"/>
+            <a:off x="1454239" y="1756130"/>
+            <a:ext cx="8643154" cy="1887950"/>
+          </a:xfrm>
+        </p:spPr>
+        <p:txBody>
+          <a:bodyPr anchor="b">
+            <a:normAutofit/>
+          </a:bodyPr>
           <a:lstStyle>
             <a:lvl1pPr algn="l">
-              <a:defRPr sz="4000" b="1" cap="all"/>
+              <a:defRPr sz="3600"/>
             </a:lvl1pPr>
           </a:lstStyle>
           <a:p>
             <a:r>
-              <a:rPr lang="en-US" smtClean="0"/>
+              <a:rPr lang="en-US"/>
               <a:t>Click to edit Master title style</a:t>
             </a:r>
-            <a:endParaRPr lang="en-US"/>
+            <a:endParaRPr lang="en-US" dirty="0"/>
           </a:p>
         </p:txBody>
       </p:sp>
@@ -940,20 +1581,20 @@
         </p:nvSpPr>
         <p:spPr>
           <a:xfrm>
-            <a:off x="722313" y="2906713"/>
-            <a:ext cx="7772400" cy="1500187"/>
-          </a:xfrm>
-        </p:spPr>
-        <p:txBody>
-          <a:bodyPr anchor="b"/>
+            <a:off x="1454239" y="3806195"/>
+            <a:ext cx="8630446" cy="1012929"/>
+          </a:xfrm>
+        </p:spPr>
+        <p:txBody>
+          <a:bodyPr tIns="91440">
+            <a:normAutofit/>
+          </a:bodyPr>
           <a:lstStyle>
-            <a:lvl1pPr marL="0" indent="0">
-              <a:buNone/>
-              <a:defRPr sz="2000">
+            <a:lvl1pPr marL="0" indent="0" algn="l">
+              <a:buNone/>
+              <a:defRPr sz="1800">
                 <a:solidFill>
-                  <a:schemeClr val="tx1">
-                    <a:tint val="75000"/>
-                  </a:schemeClr>
+                  <a:schemeClr val="tx1"/>
                 </a:solidFill>
               </a:defRPr>
             </a:lvl1pPr>
@@ -969,7 +1610,7 @@
             </a:lvl2pPr>
             <a:lvl3pPr marL="914400" indent="0">
               <a:buNone/>
-              <a:defRPr sz="1600">
+              <a:defRPr sz="1800">
                 <a:solidFill>
                   <a:schemeClr val="tx1">
                     <a:tint val="75000"/>
@@ -979,7 +1620,7 @@
             </a:lvl3pPr>
             <a:lvl4pPr marL="1371600" indent="0">
               <a:buNone/>
-              <a:defRPr sz="1400">
+              <a:defRPr sz="1600">
                 <a:solidFill>
                   <a:schemeClr val="tx1">
                     <a:tint val="75000"/>
@@ -989,7 +1630,7 @@
             </a:lvl4pPr>
             <a:lvl5pPr marL="1828800" indent="0">
               <a:buNone/>
-              <a:defRPr sz="1400">
+              <a:defRPr sz="1600">
                 <a:solidFill>
                   <a:schemeClr val="tx1">
                     <a:tint val="75000"/>
@@ -999,7 +1640,7 @@
             </a:lvl5pPr>
             <a:lvl6pPr marL="2286000" indent="0">
               <a:buNone/>
-              <a:defRPr sz="1400">
+              <a:defRPr sz="1600">
                 <a:solidFill>
                   <a:schemeClr val="tx1">
                     <a:tint val="75000"/>
@@ -1009,7 +1650,7 @@
             </a:lvl6pPr>
             <a:lvl7pPr marL="2743200" indent="0">
               <a:buNone/>
-              <a:defRPr sz="1400">
+              <a:defRPr sz="1600">
                 <a:solidFill>
                   <a:schemeClr val="tx1">
                     <a:tint val="75000"/>
@@ -1019,7 +1660,7 @@
             </a:lvl7pPr>
             <a:lvl8pPr marL="3200400" indent="0">
               <a:buNone/>
-              <a:defRPr sz="1400">
+              <a:defRPr sz="1600">
                 <a:solidFill>
                   <a:schemeClr val="tx1">
                     <a:tint val="75000"/>
@@ -1029,7 +1670,7 @@
             </a:lvl8pPr>
             <a:lvl9pPr marL="3657600" indent="0">
               <a:buNone/>
-              <a:defRPr sz="1400">
+              <a:defRPr sz="1600">
                 <a:solidFill>
                   <a:schemeClr val="tx1">
                     <a:tint val="75000"/>
@@ -1041,8 +1682,8 @@
           <a:p>
             <a:pPr lvl="0"/>
             <a:r>
-              <a:rPr lang="en-US" smtClean="0"/>
-              <a:t>Click to edit Master text styles</a:t>
+              <a:rPr lang="en-US"/>
+              <a:t>Edit Master text styles</a:t>
             </a:r>
           </a:p>
         </p:txBody>
@@ -1062,11 +1703,11 @@
           <a:bodyPr/>
           <a:lstStyle/>
           <a:p>
-            <a:fld id="{5BCAD085-E8A6-8845-BD4E-CB4CCA059FC4}" type="datetimeFigureOut">
-              <a:rPr lang="en-US" smtClean="0"/>
-              <a:t>1/27/13</a:t>
+            <a:fld id="{48A87A34-81AB-432B-8DAE-1953F412C126}" type="datetimeFigureOut">
+              <a:rPr lang="en-US" dirty="0"/>
+              <a:t>7/1/2022</a:t>
             </a:fld>
-            <a:endParaRPr lang="en-US"/>
+            <a:endParaRPr lang="en-US" dirty="0"/>
           </a:p>
         </p:txBody>
       </p:sp>
@@ -1085,7 +1726,7 @@
           <a:bodyPr/>
           <a:lstStyle/>
           <a:p>
-            <a:endParaRPr lang="en-US"/>
+            <a:endParaRPr lang="en-US" dirty="0"/>
           </a:p>
         </p:txBody>
       </p:sp>
@@ -1104,20 +1745,46 @@
           <a:bodyPr/>
           <a:lstStyle/>
           <a:p>
-            <a:fld id="{C1FF6DA9-008F-8B48-92A6-B652298478BF}" type="slidenum">
-              <a:rPr lang="en-US" smtClean="0"/>
+            <a:fld id="{6D22F896-40B5-4ADD-8801-0D06FADFA095}" type="slidenum">
+              <a:rPr lang="en-US" dirty="0"/>
               <a:t>‹#›</a:t>
             </a:fld>
-            <a:endParaRPr lang="en-US"/>
-          </a:p>
-        </p:txBody>
-      </p:sp>
+            <a:endParaRPr lang="en-US" dirty="0"/>
+          </a:p>
+        </p:txBody>
+      </p:sp>
+      <p:cxnSp>
+        <p:nvCxnSpPr>
+          <p:cNvPr id="15" name="Straight Connector 14"/>
+          <p:cNvCxnSpPr/>
+          <p:nvPr/>
+        </p:nvCxnSpPr>
+        <p:spPr>
+          <a:xfrm>
+            <a:off x="1454239" y="3804985"/>
+            <a:ext cx="8630446" cy="0"/>
+          </a:xfrm>
+          <a:prstGeom prst="line">
+            <a:avLst/>
+          </a:prstGeom>
+          <a:ln w="31750"/>
+        </p:spPr>
+        <p:style>
+          <a:lnRef idx="3">
+            <a:schemeClr val="accent1"/>
+          </a:lnRef>
+          <a:fillRef idx="0">
+            <a:schemeClr val="accent1"/>
+          </a:fillRef>
+          <a:effectRef idx="2">
+            <a:schemeClr val="accent1"/>
+          </a:effectRef>
+          <a:fontRef idx="minor">
+            <a:schemeClr val="tx1"/>
+          </a:fontRef>
+        </p:style>
+      </p:cxnSp>
     </p:spTree>
-    <p:extLst>
-      <p:ext uri="{BB962C8B-B14F-4D97-AF65-F5344CB8AC3E}">
-        <p14:creationId xmlns:p14="http://schemas.microsoft.com/office/powerpoint/2010/main" val="960648375"/>
-      </p:ext>
-    </p:extLst>
   </p:cSld>
   <p:clrMapOvr>
     <a:masterClrMapping/>
@@ -1152,260 +1819,235 @@
             <p:ph type="title"/>
           </p:nvPr>
         </p:nvSpPr>
+        <p:spPr>
+          <a:xfrm>
+            <a:off x="1449217" y="804889"/>
+            <a:ext cx="9605635" cy="1059305"/>
+          </a:xfrm>
+        </p:spPr>
+        <p:txBody>
+          <a:bodyPr/>
+          <a:lstStyle/>
+          <a:p>
+            <a:r>
+              <a:rPr lang="en-US"/>
+              <a:t>Click to edit Master title style</a:t>
+            </a:r>
+            <a:endParaRPr lang="en-US" dirty="0"/>
+          </a:p>
+        </p:txBody>
+      </p:sp>
+      <p:sp>
+        <p:nvSpPr>
+          <p:cNvPr id="3" name="Content Placeholder 2"/>
+          <p:cNvSpPr>
+            <a:spLocks noGrp="1"/>
+          </p:cNvSpPr>
+          <p:nvPr>
+            <p:ph sz="half" idx="1"/>
+          </p:nvPr>
+        </p:nvSpPr>
+        <p:spPr>
+          <a:xfrm>
+            <a:off x="1447331" y="2010878"/>
+            <a:ext cx="4645152" cy="3448595"/>
+          </a:xfrm>
+        </p:spPr>
+        <p:txBody>
+          <a:bodyPr/>
+          <a:lstStyle/>
+          <a:p>
+            <a:pPr lvl="0"/>
+            <a:r>
+              <a:rPr lang="en-US"/>
+              <a:t>Edit Master text styles</a:t>
+            </a:r>
+          </a:p>
+          <a:p>
+            <a:pPr lvl="1"/>
+            <a:r>
+              <a:rPr lang="en-US"/>
+              <a:t>Second level</a:t>
+            </a:r>
+          </a:p>
+          <a:p>
+            <a:pPr lvl="2"/>
+            <a:r>
+              <a:rPr lang="en-US"/>
+              <a:t>Third level</a:t>
+            </a:r>
+          </a:p>
+          <a:p>
+            <a:pPr lvl="3"/>
+            <a:r>
+              <a:rPr lang="en-US"/>
+              <a:t>Fourth level</a:t>
+            </a:r>
+          </a:p>
+          <a:p>
+            <a:pPr lvl="4"/>
+            <a:r>
+              <a:rPr lang="en-US"/>
+              <a:t>Fifth level</a:t>
+            </a:r>
+            <a:endParaRPr lang="en-US" dirty="0"/>
+          </a:p>
+        </p:txBody>
+      </p:sp>
+      <p:sp>
+        <p:nvSpPr>
+          <p:cNvPr id="4" name="Content Placeholder 3"/>
+          <p:cNvSpPr>
+            <a:spLocks noGrp="1"/>
+          </p:cNvSpPr>
+          <p:nvPr>
+            <p:ph sz="half" idx="2"/>
+          </p:nvPr>
+        </p:nvSpPr>
+        <p:spPr>
+          <a:xfrm>
+            <a:off x="6413771" y="2017343"/>
+            <a:ext cx="4645152" cy="3441520"/>
+          </a:xfrm>
+        </p:spPr>
+        <p:txBody>
+          <a:bodyPr/>
+          <a:lstStyle/>
+          <a:p>
+            <a:pPr lvl="0"/>
+            <a:r>
+              <a:rPr lang="en-US"/>
+              <a:t>Edit Master text styles</a:t>
+            </a:r>
+          </a:p>
+          <a:p>
+            <a:pPr lvl="1"/>
+            <a:r>
+              <a:rPr lang="en-US"/>
+              <a:t>Second level</a:t>
+            </a:r>
+          </a:p>
+          <a:p>
+            <a:pPr lvl="2"/>
+            <a:r>
+              <a:rPr lang="en-US"/>
+              <a:t>Third level</a:t>
+            </a:r>
+          </a:p>
+          <a:p>
+            <a:pPr lvl="3"/>
+            <a:r>
+              <a:rPr lang="en-US"/>
+              <a:t>Fourth level</a:t>
+            </a:r>
+          </a:p>
+          <a:p>
+            <a:pPr lvl="4"/>
+            <a:r>
+              <a:rPr lang="en-US"/>
+              <a:t>Fifth level</a:t>
+            </a:r>
+            <a:endParaRPr lang="en-US" dirty="0"/>
+          </a:p>
+        </p:txBody>
+      </p:sp>
+      <p:sp>
+        <p:nvSpPr>
+          <p:cNvPr id="5" name="Date Placeholder 4"/>
+          <p:cNvSpPr>
+            <a:spLocks noGrp="1"/>
+          </p:cNvSpPr>
+          <p:nvPr>
+            <p:ph type="dt" sz="half" idx="10"/>
+          </p:nvPr>
+        </p:nvSpPr>
         <p:spPr/>
         <p:txBody>
           <a:bodyPr/>
           <a:lstStyle/>
           <a:p>
-            <a:r>
-              <a:rPr lang="en-US" smtClean="0"/>
-              <a:t>Click to edit Master title style</a:t>
-            </a:r>
-            <a:endParaRPr lang="en-US"/>
-          </a:p>
-        </p:txBody>
-      </p:sp>
-      <p:sp>
-        <p:nvSpPr>
-          <p:cNvPr id="3" name="Content Placeholder 2"/>
-          <p:cNvSpPr>
-            <a:spLocks noGrp="1"/>
-          </p:cNvSpPr>
-          <p:nvPr>
-            <p:ph sz="half" idx="1"/>
-          </p:nvPr>
-        </p:nvSpPr>
-        <p:spPr>
-          <a:xfrm>
-            <a:off x="457200" y="1600200"/>
-            <a:ext cx="4038600" cy="4525963"/>
-          </a:xfrm>
-        </p:spPr>
+            <a:fld id="{48A87A34-81AB-432B-8DAE-1953F412C126}" type="datetimeFigureOut">
+              <a:rPr lang="en-US" dirty="0"/>
+              <a:t>7/1/2022</a:t>
+            </a:fld>
+            <a:endParaRPr lang="en-US" dirty="0"/>
+          </a:p>
+        </p:txBody>
+      </p:sp>
+      <p:sp>
+        <p:nvSpPr>
+          <p:cNvPr id="6" name="Footer Placeholder 5"/>
+          <p:cNvSpPr>
+            <a:spLocks noGrp="1"/>
+          </p:cNvSpPr>
+          <p:nvPr>
+            <p:ph type="ftr" sz="quarter" idx="11"/>
+          </p:nvPr>
+        </p:nvSpPr>
+        <p:spPr/>
         <p:txBody>
           <a:bodyPr/>
-          <a:lstStyle>
-            <a:lvl1pPr>
-              <a:defRPr sz="2800"/>
-            </a:lvl1pPr>
-            <a:lvl2pPr>
-              <a:defRPr sz="2400"/>
-            </a:lvl2pPr>
-            <a:lvl3pPr>
-              <a:defRPr sz="2000"/>
-            </a:lvl3pPr>
-            <a:lvl4pPr>
-              <a:defRPr sz="1800"/>
-            </a:lvl4pPr>
-            <a:lvl5pPr>
-              <a:defRPr sz="1800"/>
-            </a:lvl5pPr>
-            <a:lvl6pPr>
-              <a:defRPr sz="1800"/>
-            </a:lvl6pPr>
-            <a:lvl7pPr>
-              <a:defRPr sz="1800"/>
-            </a:lvl7pPr>
-            <a:lvl8pPr>
-              <a:defRPr sz="1800"/>
-            </a:lvl8pPr>
-            <a:lvl9pPr>
-              <a:defRPr sz="1800"/>
-            </a:lvl9pPr>
-          </a:lstStyle>
-          <a:p>
-            <a:pPr lvl="0"/>
-            <a:r>
-              <a:rPr lang="en-US" smtClean="0"/>
-              <a:t>Click to edit Master text styles</a:t>
-            </a:r>
-          </a:p>
-          <a:p>
-            <a:pPr lvl="1"/>
-            <a:r>
-              <a:rPr lang="en-US" smtClean="0"/>
-              <a:t>Second level</a:t>
-            </a:r>
-          </a:p>
-          <a:p>
-            <a:pPr lvl="2"/>
-            <a:r>
-              <a:rPr lang="en-US" smtClean="0"/>
-              <a:t>Third level</a:t>
-            </a:r>
-          </a:p>
-          <a:p>
-            <a:pPr lvl="3"/>
-            <a:r>
-              <a:rPr lang="en-US" smtClean="0"/>
-              <a:t>Fourth level</a:t>
-            </a:r>
-          </a:p>
-          <a:p>
-            <a:pPr lvl="4"/>
-            <a:r>
-              <a:rPr lang="en-US" smtClean="0"/>
-              <a:t>Fifth level</a:t>
-            </a:r>
-            <a:endParaRPr lang="en-US"/>
-          </a:p>
-        </p:txBody>
-      </p:sp>
-      <p:sp>
-        <p:nvSpPr>
-          <p:cNvPr id="4" name="Content Placeholder 3"/>
-          <p:cNvSpPr>
-            <a:spLocks noGrp="1"/>
-          </p:cNvSpPr>
-          <p:nvPr>
-            <p:ph sz="half" idx="2"/>
-          </p:nvPr>
-        </p:nvSpPr>
-        <p:spPr>
-          <a:xfrm>
-            <a:off x="4648200" y="1600200"/>
-            <a:ext cx="4038600" cy="4525963"/>
-          </a:xfrm>
-        </p:spPr>
+          <a:lstStyle/>
+          <a:p>
+            <a:endParaRPr lang="en-US" dirty="0"/>
+          </a:p>
+        </p:txBody>
+      </p:sp>
+      <p:sp>
+        <p:nvSpPr>
+          <p:cNvPr id="7" name="Slide Number Placeholder 6"/>
+          <p:cNvSpPr>
+            <a:spLocks noGrp="1"/>
+          </p:cNvSpPr>
+          <p:nvPr>
+            <p:ph type="sldNum" sz="quarter" idx="12"/>
+          </p:nvPr>
+        </p:nvSpPr>
+        <p:spPr/>
         <p:txBody>
           <a:bodyPr/>
-          <a:lstStyle>
-            <a:lvl1pPr>
-              <a:defRPr sz="2800"/>
-            </a:lvl1pPr>
-            <a:lvl2pPr>
-              <a:defRPr sz="2400"/>
-            </a:lvl2pPr>
-            <a:lvl3pPr>
-              <a:defRPr sz="2000"/>
-            </a:lvl3pPr>
-            <a:lvl4pPr>
-              <a:defRPr sz="1800"/>
-            </a:lvl4pPr>
-            <a:lvl5pPr>
-              <a:defRPr sz="1800"/>
-            </a:lvl5pPr>
-            <a:lvl6pPr>
-              <a:defRPr sz="1800"/>
-            </a:lvl6pPr>
-            <a:lvl7pPr>
-              <a:defRPr sz="1800"/>
-            </a:lvl7pPr>
-            <a:lvl8pPr>
-              <a:defRPr sz="1800"/>
-            </a:lvl8pPr>
-            <a:lvl9pPr>
-              <a:defRPr sz="1800"/>
-            </a:lvl9pPr>
-          </a:lstStyle>
-          <a:p>
-            <a:pPr lvl="0"/>
-            <a:r>
-              <a:rPr lang="en-US" smtClean="0"/>
-              <a:t>Click to edit Master text styles</a:t>
-            </a:r>
-          </a:p>
-          <a:p>
-            <a:pPr lvl="1"/>
-            <a:r>
-              <a:rPr lang="en-US" smtClean="0"/>
-              <a:t>Second level</a:t>
-            </a:r>
-          </a:p>
-          <a:p>
-            <a:pPr lvl="2"/>
-            <a:r>
-              <a:rPr lang="en-US" smtClean="0"/>
-              <a:t>Third level</a:t>
-            </a:r>
-          </a:p>
-          <a:p>
-            <a:pPr lvl="3"/>
-            <a:r>
-              <a:rPr lang="en-US" smtClean="0"/>
-              <a:t>Fourth level</a:t>
-            </a:r>
-          </a:p>
-          <a:p>
-            <a:pPr lvl="4"/>
-            <a:r>
-              <a:rPr lang="en-US" smtClean="0"/>
-              <a:t>Fifth level</a:t>
-            </a:r>
-            <a:endParaRPr lang="en-US"/>
-          </a:p>
-        </p:txBody>
-      </p:sp>
-      <p:sp>
-        <p:nvSpPr>
-          <p:cNvPr id="5" name="Date Placeholder 4"/>
-          <p:cNvSpPr>
-            <a:spLocks noGrp="1"/>
-          </p:cNvSpPr>
-          <p:nvPr>
-            <p:ph type="dt" sz="half" idx="10"/>
-          </p:nvPr>
-        </p:nvSpPr>
-        <p:spPr/>
-        <p:txBody>
-          <a:bodyPr/>
-          <a:lstStyle/>
-          <a:p>
-            <a:fld id="{5BCAD085-E8A6-8845-BD4E-CB4CCA059FC4}" type="datetimeFigureOut">
-              <a:rPr lang="en-US" smtClean="0"/>
-              <a:t>1/27/13</a:t>
-            </a:fld>
-            <a:endParaRPr lang="en-US"/>
-          </a:p>
-        </p:txBody>
-      </p:sp>
-      <p:sp>
-        <p:nvSpPr>
-          <p:cNvPr id="6" name="Footer Placeholder 5"/>
-          <p:cNvSpPr>
-            <a:spLocks noGrp="1"/>
-          </p:cNvSpPr>
-          <p:nvPr>
-            <p:ph type="ftr" sz="quarter" idx="11"/>
-          </p:nvPr>
-        </p:nvSpPr>
-        <p:spPr/>
-        <p:txBody>
-          <a:bodyPr/>
-          <a:lstStyle/>
-          <a:p>
-            <a:endParaRPr lang="en-US"/>
-          </a:p>
-        </p:txBody>
-      </p:sp>
-      <p:sp>
-        <p:nvSpPr>
-          <p:cNvPr id="7" name="Slide Number Placeholder 6"/>
-          <p:cNvSpPr>
-            <a:spLocks noGrp="1"/>
-          </p:cNvSpPr>
-          <p:nvPr>
-            <p:ph type="sldNum" sz="quarter" idx="12"/>
-          </p:nvPr>
-        </p:nvSpPr>
-        <p:spPr/>
-        <p:txBody>
-          <a:bodyPr/>
-          <a:lstStyle/>
-          <a:p>
-            <a:fld id="{C1FF6DA9-008F-8B48-92A6-B652298478BF}" type="slidenum">
-              <a:rPr lang="en-US" smtClean="0"/>
+          <a:lstStyle/>
+          <a:p>
+            <a:fld id="{6D22F896-40B5-4ADD-8801-0D06FADFA095}" type="slidenum">
+              <a:rPr lang="en-US" dirty="0"/>
               <a:t>‹#›</a:t>
             </a:fld>
-            <a:endParaRPr lang="en-US"/>
-          </a:p>
-        </p:txBody>
-      </p:sp>
+            <a:endParaRPr lang="en-US" dirty="0"/>
+          </a:p>
+        </p:txBody>
+      </p:sp>
+      <p:cxnSp>
+        <p:nvCxnSpPr>
+          <p:cNvPr id="35" name="Straight Connector 34"/>
+          <p:cNvCxnSpPr/>
+          <p:nvPr/>
+        </p:nvCxnSpPr>
+        <p:spPr>
+          <a:xfrm>
+            <a:off x="1453896" y="1847088"/>
+            <a:ext cx="9607522" cy="0"/>
+          </a:xfrm>
+          <a:prstGeom prst="line">
+            <a:avLst/>
+          </a:prstGeom>
+          <a:ln w="31750"/>
+        </p:spPr>
+        <p:style>
+          <a:lnRef idx="3">
+            <a:schemeClr val="accent1"/>
+          </a:lnRef>
+          <a:fillRef idx="0">
+            <a:schemeClr val="accent1"/>
+          </a:fillRef>
+          <a:effectRef idx="2">
+            <a:schemeClr val="accent1"/>
+          </a:effectRef>
+          <a:fontRef idx="minor">
+            <a:schemeClr val="tx1"/>
+          </a:fontRef>
+        </p:style>
+      </p:cxnSp>
     </p:spTree>
-    <p:extLst>
-      <p:ext uri="{BB962C8B-B14F-4D97-AF65-F5344CB8AC3E}">
-        <p14:creationId xmlns:p14="http://schemas.microsoft.com/office/powerpoint/2010/main" val="2782244947"/>
-      </p:ext>
-    </p:extLst>
   </p:cSld>
   <p:clrMapOvr>
     <a:masterClrMapping/>
@@ -1440,20 +2082,21 @@
             <p:ph type="title"/>
           </p:nvPr>
         </p:nvSpPr>
-        <p:spPr/>
+        <p:spPr>
+          <a:xfrm>
+            <a:off x="1447191" y="804163"/>
+            <a:ext cx="9607661" cy="1056319"/>
+          </a:xfrm>
+        </p:spPr>
         <p:txBody>
           <a:bodyPr/>
-          <a:lstStyle>
-            <a:lvl1pPr>
-              <a:defRPr/>
-            </a:lvl1pPr>
-          </a:lstStyle>
-          <a:p>
-            <a:r>
-              <a:rPr lang="en-US" smtClean="0"/>
+          <a:lstStyle/>
+          <a:p>
+            <a:r>
+              <a:rPr lang="en-US"/>
               <a:t>Click to edit Master title style</a:t>
             </a:r>
-            <a:endParaRPr lang="en-US"/>
+            <a:endParaRPr lang="en-US" dirty="0"/>
           </a:p>
         </p:txBody>
       </p:sp>
@@ -1469,16 +2112,25 @@
         </p:nvSpPr>
         <p:spPr>
           <a:xfrm>
-            <a:off x="457200" y="1535113"/>
-            <a:ext cx="4040188" cy="639762"/>
-          </a:xfrm>
-        </p:spPr>
-        <p:txBody>
-          <a:bodyPr anchor="b"/>
+            <a:off x="1447191" y="2019549"/>
+            <a:ext cx="4645152" cy="801943"/>
+          </a:xfrm>
+        </p:spPr>
+        <p:txBody>
+          <a:bodyPr anchor="b">
+            <a:normAutofit/>
+          </a:bodyPr>
           <a:lstStyle>
             <a:lvl1pPr marL="0" indent="0">
-              <a:buNone/>
-              <a:defRPr sz="2400" b="1"/>
+              <a:lnSpc>
+                <a:spcPct val="100000"/>
+              </a:lnSpc>
+              <a:buNone/>
+              <a:defRPr sz="2200" b="0" cap="all" baseline="0">
+                <a:solidFill>
+                  <a:schemeClr val="accent1"/>
+                </a:solidFill>
+              </a:defRPr>
             </a:lvl1pPr>
             <a:lvl2pPr marL="457200" indent="0">
               <a:buNone/>
@@ -1516,8 +2168,8 @@
           <a:p>
             <a:pPr lvl="0"/>
             <a:r>
-              <a:rPr lang="en-US" smtClean="0"/>
-              <a:t>Click to edit Master text styles</a:t>
+              <a:rPr lang="en-US"/>
+              <a:t>Edit Master text styles</a:t>
             </a:r>
           </a:p>
         </p:txBody>
@@ -1534,76 +2186,48 @@
         </p:nvSpPr>
         <p:spPr>
           <a:xfrm>
-            <a:off x="457200" y="2174875"/>
-            <a:ext cx="4040188" cy="3951288"/>
+            <a:off x="1447191" y="2824269"/>
+            <a:ext cx="4645152" cy="2644457"/>
           </a:xfrm>
         </p:spPr>
         <p:txBody>
           <a:bodyPr/>
-          <a:lstStyle>
-            <a:lvl1pPr>
-              <a:defRPr sz="2400"/>
-            </a:lvl1pPr>
-            <a:lvl2pPr>
-              <a:defRPr sz="2000"/>
-            </a:lvl2pPr>
-            <a:lvl3pPr>
-              <a:defRPr sz="1800"/>
-            </a:lvl3pPr>
-            <a:lvl4pPr>
-              <a:defRPr sz="1600"/>
-            </a:lvl4pPr>
-            <a:lvl5pPr>
-              <a:defRPr sz="1600"/>
-            </a:lvl5pPr>
-            <a:lvl6pPr>
-              <a:defRPr sz="1600"/>
-            </a:lvl6pPr>
-            <a:lvl7pPr>
-              <a:defRPr sz="1600"/>
-            </a:lvl7pPr>
-            <a:lvl8pPr>
-              <a:defRPr sz="1600"/>
-            </a:lvl8pPr>
-            <a:lvl9pPr>
-              <a:defRPr sz="1600"/>
-            </a:lvl9pPr>
-          </a:lstStyle>
+          <a:lstStyle/>
           <a:p>
             <a:pPr lvl="0"/>
             <a:r>
-              <a:rPr lang="en-US" smtClean="0"/>
-              <a:t>Click to edit Master text styles</a:t>
+              <a:rPr lang="en-US"/>
+              <a:t>Edit Master text styles</a:t>
             </a:r>
           </a:p>
           <a:p>
             <a:pPr lvl="1"/>
             <a:r>
-              <a:rPr lang="en-US" smtClean="0"/>
+              <a:rPr lang="en-US"/>
               <a:t>Second level</a:t>
             </a:r>
           </a:p>
           <a:p>
             <a:pPr lvl="2"/>
             <a:r>
-              <a:rPr lang="en-US" smtClean="0"/>
+              <a:rPr lang="en-US"/>
               <a:t>Third level</a:t>
             </a:r>
           </a:p>
           <a:p>
             <a:pPr lvl="3"/>
             <a:r>
-              <a:rPr lang="en-US" smtClean="0"/>
+              <a:rPr lang="en-US"/>
               <a:t>Fourth level</a:t>
             </a:r>
           </a:p>
           <a:p>
             <a:pPr lvl="4"/>
             <a:r>
-              <a:rPr lang="en-US" smtClean="0"/>
+              <a:rPr lang="en-US"/>
               <a:t>Fifth level</a:t>
             </a:r>
-            <a:endParaRPr lang="en-US"/>
+            <a:endParaRPr lang="en-US" dirty="0"/>
           </a:p>
         </p:txBody>
       </p:sp>
@@ -1619,16 +2243,25 @@
         </p:nvSpPr>
         <p:spPr>
           <a:xfrm>
-            <a:off x="4645025" y="1535113"/>
-            <a:ext cx="4041775" cy="639762"/>
-          </a:xfrm>
-        </p:spPr>
-        <p:txBody>
-          <a:bodyPr anchor="b"/>
+            <a:off x="6412362" y="2023003"/>
+            <a:ext cx="4645152" cy="802237"/>
+          </a:xfrm>
+        </p:spPr>
+        <p:txBody>
+          <a:bodyPr anchor="b">
+            <a:normAutofit/>
+          </a:bodyPr>
           <a:lstStyle>
             <a:lvl1pPr marL="0" indent="0">
-              <a:buNone/>
-              <a:defRPr sz="2400" b="1"/>
+              <a:lnSpc>
+                <a:spcPct val="100000"/>
+              </a:lnSpc>
+              <a:buNone/>
+              <a:defRPr sz="2200" b="0" cap="all" baseline="0">
+                <a:solidFill>
+                  <a:schemeClr val="accent1"/>
+                </a:solidFill>
+              </a:defRPr>
             </a:lvl1pPr>
             <a:lvl2pPr marL="457200" indent="0">
               <a:buNone/>
@@ -1666,8 +2299,8 @@
           <a:p>
             <a:pPr lvl="0"/>
             <a:r>
-              <a:rPr lang="en-US" smtClean="0"/>
-              <a:t>Click to edit Master text styles</a:t>
+              <a:rPr lang="en-US"/>
+              <a:t>Edit Master text styles</a:t>
             </a:r>
           </a:p>
         </p:txBody>
@@ -1684,76 +2317,48 @@
         </p:nvSpPr>
         <p:spPr>
           <a:xfrm>
-            <a:off x="4645025" y="2174875"/>
-            <a:ext cx="4041775" cy="3951288"/>
+            <a:off x="6412362" y="2821491"/>
+            <a:ext cx="4645152" cy="2637371"/>
           </a:xfrm>
         </p:spPr>
         <p:txBody>
           <a:bodyPr/>
-          <a:lstStyle>
-            <a:lvl1pPr>
-              <a:defRPr sz="2400"/>
-            </a:lvl1pPr>
-            <a:lvl2pPr>
-              <a:defRPr sz="2000"/>
-            </a:lvl2pPr>
-            <a:lvl3pPr>
-              <a:defRPr sz="1800"/>
-            </a:lvl3pPr>
-            <a:lvl4pPr>
-              <a:defRPr sz="1600"/>
-            </a:lvl4pPr>
-            <a:lvl5pPr>
-              <a:defRPr sz="1600"/>
-            </a:lvl5pPr>
-            <a:lvl6pPr>
-              <a:defRPr sz="1600"/>
-            </a:lvl6pPr>
-            <a:lvl7pPr>
-              <a:defRPr sz="1600"/>
-            </a:lvl7pPr>
-            <a:lvl8pPr>
-              <a:defRPr sz="1600"/>
-            </a:lvl8pPr>
-            <a:lvl9pPr>
-              <a:defRPr sz="1600"/>
-            </a:lvl9pPr>
-          </a:lstStyle>
+          <a:lstStyle/>
           <a:p>
             <a:pPr lvl="0"/>
             <a:r>
-              <a:rPr lang="en-US" smtClean="0"/>
-              <a:t>Click to edit Master text styles</a:t>
+              <a:rPr lang="en-US"/>
+              <a:t>Edit Master text styles</a:t>
             </a:r>
           </a:p>
           <a:p>
             <a:pPr lvl="1"/>
             <a:r>
-              <a:rPr lang="en-US" smtClean="0"/>
+              <a:rPr lang="en-US"/>
               <a:t>Second level</a:t>
             </a:r>
           </a:p>
           <a:p>
             <a:pPr lvl="2"/>
             <a:r>
-              <a:rPr lang="en-US" smtClean="0"/>
+              <a:rPr lang="en-US"/>
               <a:t>Third level</a:t>
             </a:r>
           </a:p>
           <a:p>
             <a:pPr lvl="3"/>
             <a:r>
-              <a:rPr lang="en-US" smtClean="0"/>
+              <a:rPr lang="en-US"/>
               <a:t>Fourth level</a:t>
             </a:r>
           </a:p>
           <a:p>
             <a:pPr lvl="4"/>
             <a:r>
-              <a:rPr lang="en-US" smtClean="0"/>
+              <a:rPr lang="en-US"/>
               <a:t>Fifth level</a:t>
             </a:r>
-            <a:endParaRPr lang="en-US"/>
+            <a:endParaRPr lang="en-US" dirty="0"/>
           </a:p>
         </p:txBody>
       </p:sp>
@@ -1772,11 +2377,11 @@
           <a:bodyPr/>
           <a:lstStyle/>
           <a:p>
-            <a:fld id="{5BCAD085-E8A6-8845-BD4E-CB4CCA059FC4}" type="datetimeFigureOut">
-              <a:rPr lang="en-US" smtClean="0"/>
-              <a:t>1/27/13</a:t>
+            <a:fld id="{48A87A34-81AB-432B-8DAE-1953F412C126}" type="datetimeFigureOut">
+              <a:rPr lang="en-US" dirty="0"/>
+              <a:t>7/1/2022</a:t>
             </a:fld>
-            <a:endParaRPr lang="en-US"/>
+            <a:endParaRPr lang="en-US" dirty="0"/>
           </a:p>
         </p:txBody>
       </p:sp>
@@ -1795,7 +2400,7 @@
           <a:bodyPr/>
           <a:lstStyle/>
           <a:p>
-            <a:endParaRPr lang="en-US"/>
+            <a:endParaRPr lang="en-US" dirty="0"/>
           </a:p>
         </p:txBody>
       </p:sp>
@@ -1814,20 +2419,46 @@
           <a:bodyPr/>
           <a:lstStyle/>
           <a:p>
-            <a:fld id="{C1FF6DA9-008F-8B48-92A6-B652298478BF}" type="slidenum">
-              <a:rPr lang="en-US" smtClean="0"/>
+            <a:fld id="{6D22F896-40B5-4ADD-8801-0D06FADFA095}" type="slidenum">
+              <a:rPr lang="en-US" dirty="0"/>
               <a:t>‹#›</a:t>
             </a:fld>
-            <a:endParaRPr lang="en-US"/>
-          </a:p>
-        </p:txBody>
-      </p:sp>
+            <a:endParaRPr lang="en-US" dirty="0"/>
+          </a:p>
+        </p:txBody>
+      </p:sp>
+      <p:cxnSp>
+        <p:nvCxnSpPr>
+          <p:cNvPr id="29" name="Straight Connector 28"/>
+          <p:cNvCxnSpPr/>
+          <p:nvPr/>
+        </p:nvCxnSpPr>
+        <p:spPr>
+          <a:xfrm>
+            <a:off x="1453896" y="1847088"/>
+            <a:ext cx="9607522" cy="0"/>
+          </a:xfrm>
+          <a:prstGeom prst="line">
+            <a:avLst/>
+          </a:prstGeom>
+          <a:ln w="31750"/>
+        </p:spPr>
+        <p:style>
+          <a:lnRef idx="3">
+            <a:schemeClr val="accent1"/>
+          </a:lnRef>
+          <a:fillRef idx="0">
+            <a:schemeClr val="accent1"/>
+          </a:fillRef>
+          <a:effectRef idx="2">
+            <a:schemeClr val="accent1"/>
+          </a:effectRef>
+          <a:fontRef idx="minor">
+            <a:schemeClr val="tx1"/>
+          </a:fontRef>
+        </p:style>
+      </p:cxnSp>
     </p:spTree>
-    <p:extLst>
-      <p:ext uri="{BB962C8B-B14F-4D97-AF65-F5344CB8AC3E}">
-        <p14:creationId xmlns:p14="http://schemas.microsoft.com/office/powerpoint/2010/main" val="990158736"/>
-      </p:ext>
-    </p:extLst>
   </p:cSld>
   <p:clrMapOvr>
     <a:masterClrMapping/>
@@ -1868,10 +2499,10 @@
           <a:lstStyle/>
           <a:p>
             <a:r>
-              <a:rPr lang="en-US" smtClean="0"/>
+              <a:rPr lang="en-US"/>
               <a:t>Click to edit Master title style</a:t>
             </a:r>
-            <a:endParaRPr lang="en-US"/>
+            <a:endParaRPr lang="en-US" dirty="0"/>
           </a:p>
         </p:txBody>
       </p:sp>
@@ -1890,11 +2521,11 @@
           <a:bodyPr/>
           <a:lstStyle/>
           <a:p>
-            <a:fld id="{5BCAD085-E8A6-8845-BD4E-CB4CCA059FC4}" type="datetimeFigureOut">
-              <a:rPr lang="en-US" smtClean="0"/>
-              <a:t>1/27/13</a:t>
+            <a:fld id="{48A87A34-81AB-432B-8DAE-1953F412C126}" type="datetimeFigureOut">
+              <a:rPr lang="en-US" dirty="0"/>
+              <a:t>7/1/2022</a:t>
             </a:fld>
-            <a:endParaRPr lang="en-US"/>
+            <a:endParaRPr lang="en-US" dirty="0"/>
           </a:p>
         </p:txBody>
       </p:sp>
@@ -1913,7 +2544,7 @@
           <a:bodyPr/>
           <a:lstStyle/>
           <a:p>
-            <a:endParaRPr lang="en-US"/>
+            <a:endParaRPr lang="en-US" dirty="0"/>
           </a:p>
         </p:txBody>
       </p:sp>
@@ -1932,20 +2563,46 @@
           <a:bodyPr/>
           <a:lstStyle/>
           <a:p>
-            <a:fld id="{C1FF6DA9-008F-8B48-92A6-B652298478BF}" type="slidenum">
-              <a:rPr lang="en-US" smtClean="0"/>
+            <a:fld id="{6D22F896-40B5-4ADD-8801-0D06FADFA095}" type="slidenum">
+              <a:rPr lang="en-US" dirty="0"/>
               <a:t>‹#›</a:t>
             </a:fld>
-            <a:endParaRPr lang="en-US"/>
-          </a:p>
-        </p:txBody>
-      </p:sp>
+            <a:endParaRPr lang="en-US" dirty="0"/>
+          </a:p>
+        </p:txBody>
+      </p:sp>
+      <p:cxnSp>
+        <p:nvCxnSpPr>
+          <p:cNvPr id="25" name="Straight Connector 24"/>
+          <p:cNvCxnSpPr/>
+          <p:nvPr/>
+        </p:nvCxnSpPr>
+        <p:spPr>
+          <a:xfrm>
+            <a:off x="1453896" y="1847088"/>
+            <a:ext cx="9607522" cy="0"/>
+          </a:xfrm>
+          <a:prstGeom prst="line">
+            <a:avLst/>
+          </a:prstGeom>
+          <a:ln w="31750"/>
+        </p:spPr>
+        <p:style>
+          <a:lnRef idx="3">
+            <a:schemeClr val="accent1"/>
+          </a:lnRef>
+          <a:fillRef idx="0">
+            <a:schemeClr val="accent1"/>
+          </a:fillRef>
+          <a:effectRef idx="2">
+            <a:schemeClr val="accent1"/>
+          </a:effectRef>
+          <a:fontRef idx="minor">
+            <a:schemeClr val="tx1"/>
+          </a:fontRef>
+        </p:style>
+      </p:cxnSp>
     </p:spTree>
-    <p:extLst>
-      <p:ext uri="{BB962C8B-B14F-4D97-AF65-F5344CB8AC3E}">
-        <p14:creationId xmlns:p14="http://schemas.microsoft.com/office/powerpoint/2010/main" val="727027711"/>
-      </p:ext>
-    </p:extLst>
   </p:cSld>
   <p:clrMapOvr>
     <a:masterClrMapping/>
@@ -1985,11 +2642,11 @@
           <a:bodyPr/>
           <a:lstStyle/>
           <a:p>
-            <a:fld id="{5BCAD085-E8A6-8845-BD4E-CB4CCA059FC4}" type="datetimeFigureOut">
-              <a:rPr lang="en-US" smtClean="0"/>
-              <a:t>1/27/13</a:t>
+            <a:fld id="{48A87A34-81AB-432B-8DAE-1953F412C126}" type="datetimeFigureOut">
+              <a:rPr lang="en-US" dirty="0"/>
+              <a:t>7/1/2022</a:t>
             </a:fld>
-            <a:endParaRPr lang="en-US"/>
+            <a:endParaRPr lang="en-US" dirty="0"/>
           </a:p>
         </p:txBody>
       </p:sp>
@@ -2008,7 +2665,7 @@
           <a:bodyPr/>
           <a:lstStyle/>
           <a:p>
-            <a:endParaRPr lang="en-US"/>
+            <a:endParaRPr lang="en-US" dirty="0"/>
           </a:p>
         </p:txBody>
       </p:sp>
@@ -2027,20 +2684,15 @@
           <a:bodyPr/>
           <a:lstStyle/>
           <a:p>
-            <a:fld id="{C1FF6DA9-008F-8B48-92A6-B652298478BF}" type="slidenum">
-              <a:rPr lang="en-US" smtClean="0"/>
+            <a:fld id="{6D22F896-40B5-4ADD-8801-0D06FADFA095}" type="slidenum">
+              <a:rPr lang="en-US" dirty="0"/>
               <a:t>‹#›</a:t>
             </a:fld>
-            <a:endParaRPr lang="en-US"/>
+            <a:endParaRPr lang="en-US" dirty="0"/>
           </a:p>
         </p:txBody>
       </p:sp>
     </p:spTree>
-    <p:extLst>
-      <p:ext uri="{BB962C8B-B14F-4D97-AF65-F5344CB8AC3E}">
-        <p14:creationId xmlns:p14="http://schemas.microsoft.com/office/powerpoint/2010/main" val="1212999818"/>
-      </p:ext>
-    </p:extLst>
   </p:cSld>
   <p:clrMapOvr>
     <a:masterClrMapping/>
@@ -2077,23 +2729,25 @@
         </p:nvSpPr>
         <p:spPr>
           <a:xfrm>
-            <a:off x="457200" y="273050"/>
-            <a:ext cx="3008313" cy="1162050"/>
-          </a:xfrm>
-        </p:spPr>
-        <p:txBody>
-          <a:bodyPr anchor="b"/>
+            <a:off x="1444671" y="798973"/>
+            <a:ext cx="3273099" cy="2247117"/>
+          </a:xfrm>
+        </p:spPr>
+        <p:txBody>
+          <a:bodyPr anchor="b">
+            <a:normAutofit/>
+          </a:bodyPr>
           <a:lstStyle>
             <a:lvl1pPr algn="l">
-              <a:defRPr sz="2000" b="1"/>
+              <a:defRPr sz="2400"/>
             </a:lvl1pPr>
           </a:lstStyle>
           <a:p>
             <a:r>
-              <a:rPr lang="en-US" smtClean="0"/>
+              <a:rPr lang="en-US"/>
               <a:t>Click to edit Master title style</a:t>
             </a:r>
-            <a:endParaRPr lang="en-US"/>
+            <a:endParaRPr lang="en-US" dirty="0"/>
           </a:p>
         </p:txBody>
       </p:sp>
@@ -2109,152 +2763,147 @@
         </p:nvSpPr>
         <p:spPr>
           <a:xfrm>
-            <a:off x="3575050" y="273050"/>
-            <a:ext cx="5111750" cy="5853113"/>
+            <a:off x="5043714" y="798974"/>
+            <a:ext cx="6012470" cy="4658826"/>
+          </a:xfrm>
+        </p:spPr>
+        <p:txBody>
+          <a:bodyPr anchor="ctr"/>
+          <a:lstStyle/>
+          <a:p>
+            <a:pPr lvl="0"/>
+            <a:r>
+              <a:rPr lang="en-US"/>
+              <a:t>Edit Master text styles</a:t>
+            </a:r>
+          </a:p>
+          <a:p>
+            <a:pPr lvl="1"/>
+            <a:r>
+              <a:rPr lang="en-US"/>
+              <a:t>Second level</a:t>
+            </a:r>
+          </a:p>
+          <a:p>
+            <a:pPr lvl="2"/>
+            <a:r>
+              <a:rPr lang="en-US"/>
+              <a:t>Third level</a:t>
+            </a:r>
+          </a:p>
+          <a:p>
+            <a:pPr lvl="3"/>
+            <a:r>
+              <a:rPr lang="en-US"/>
+              <a:t>Fourth level</a:t>
+            </a:r>
+          </a:p>
+          <a:p>
+            <a:pPr lvl="4"/>
+            <a:r>
+              <a:rPr lang="en-US"/>
+              <a:t>Fifth level</a:t>
+            </a:r>
+            <a:endParaRPr lang="en-US" dirty="0"/>
+          </a:p>
+        </p:txBody>
+      </p:sp>
+      <p:sp>
+        <p:nvSpPr>
+          <p:cNvPr id="4" name="Text Placeholder 3"/>
+          <p:cNvSpPr>
+            <a:spLocks noGrp="1"/>
+          </p:cNvSpPr>
+          <p:nvPr>
+            <p:ph type="body" sz="half" idx="2"/>
+          </p:nvPr>
+        </p:nvSpPr>
+        <p:spPr>
+          <a:xfrm>
+            <a:off x="1444671" y="3205491"/>
+            <a:ext cx="3275013" cy="2248181"/>
           </a:xfrm>
         </p:spPr>
         <p:txBody>
           <a:bodyPr/>
           <a:lstStyle>
-            <a:lvl1pPr>
-              <a:defRPr sz="3200"/>
+            <a:lvl1pPr marL="0" indent="0" algn="l">
+              <a:buNone/>
+              <a:defRPr sz="1600"/>
             </a:lvl1pPr>
-            <a:lvl2pPr>
-              <a:defRPr sz="2800"/>
+            <a:lvl2pPr marL="457200" indent="0">
+              <a:buNone/>
+              <a:defRPr sz="1400"/>
             </a:lvl2pPr>
-            <a:lvl3pPr>
-              <a:defRPr sz="2400"/>
+            <a:lvl3pPr marL="914400" indent="0">
+              <a:buNone/>
+              <a:defRPr sz="1200"/>
             </a:lvl3pPr>
-            <a:lvl4pPr>
-              <a:defRPr sz="2000"/>
+            <a:lvl4pPr marL="1371600" indent="0">
+              <a:buNone/>
+              <a:defRPr sz="1000"/>
             </a:lvl4pPr>
-            <a:lvl5pPr>
-              <a:defRPr sz="2000"/>
+            <a:lvl5pPr marL="1828800" indent="0">
+              <a:buNone/>
+              <a:defRPr sz="1000"/>
             </a:lvl5pPr>
-            <a:lvl6pPr>
-              <a:defRPr sz="2000"/>
+            <a:lvl6pPr marL="2286000" indent="0">
+              <a:buNone/>
+              <a:defRPr sz="1000"/>
             </a:lvl6pPr>
-            <a:lvl7pPr>
-              <a:defRPr sz="2000"/>
+            <a:lvl7pPr marL="2743200" indent="0">
+              <a:buNone/>
+              <a:defRPr sz="1000"/>
             </a:lvl7pPr>
-            <a:lvl8pPr>
-              <a:defRPr sz="2000"/>
+            <a:lvl8pPr marL="3200400" indent="0">
+              <a:buNone/>
+              <a:defRPr sz="1000"/>
             </a:lvl8pPr>
-            <a:lvl9pPr>
-              <a:defRPr sz="2000"/>
+            <a:lvl9pPr marL="3657600" indent="0">
+              <a:buNone/>
+              <a:defRPr sz="1000"/>
             </a:lvl9pPr>
           </a:lstStyle>
           <a:p>
             <a:pPr lvl="0"/>
             <a:r>
-              <a:rPr lang="en-US" smtClean="0"/>
-              <a:t>Click to edit Master text styles</a:t>
-            </a:r>
-          </a:p>
-          <a:p>
-            <a:pPr lvl="1"/>
-            <a:r>
-              <a:rPr lang="en-US" smtClean="0"/>
-              <a:t>Second level</a:t>
-            </a:r>
-          </a:p>
-          <a:p>
-            <a:pPr lvl="2"/>
-            <a:r>
-              <a:rPr lang="en-US" smtClean="0"/>
-              <a:t>Third level</a:t>
-            </a:r>
-          </a:p>
-          <a:p>
-            <a:pPr lvl="3"/>
-            <a:r>
-              <a:rPr lang="en-US" smtClean="0"/>
-              <a:t>Fourth level</a:t>
-            </a:r>
-          </a:p>
-          <a:p>
-            <a:pPr lvl="4"/>
-            <a:r>
-              <a:rPr lang="en-US" smtClean="0"/>
-              <a:t>Fifth level</a:t>
-            </a:r>
-            <a:endParaRPr lang="en-US"/>
-          </a:p>
-        </p:txBody>
-      </p:sp>
-      <p:sp>
-        <p:nvSpPr>
-          <p:cNvPr id="4" name="Text Placeholder 3"/>
-          <p:cNvSpPr>
-            <a:spLocks noGrp="1"/>
-          </p:cNvSpPr>
-          <p:nvPr>
-            <p:ph type="body" sz="half" idx="2"/>
-          </p:nvPr>
-        </p:nvSpPr>
-        <p:spPr>
-          <a:xfrm>
-            <a:off x="457200" y="1435100"/>
-            <a:ext cx="3008313" cy="4691063"/>
-          </a:xfrm>
-        </p:spPr>
+              <a:rPr lang="en-US"/>
+              <a:t>Edit Master text styles</a:t>
+            </a:r>
+          </a:p>
+        </p:txBody>
+      </p:sp>
+      <p:sp>
+        <p:nvSpPr>
+          <p:cNvPr id="5" name="Date Placeholder 4"/>
+          <p:cNvSpPr>
+            <a:spLocks noGrp="1"/>
+          </p:cNvSpPr>
+          <p:nvPr>
+            <p:ph type="dt" sz="half" idx="10"/>
+          </p:nvPr>
+        </p:nvSpPr>
+        <p:spPr/>
         <p:txBody>
           <a:bodyPr/>
-          <a:lstStyle>
-            <a:lvl1pPr marL="0" indent="0">
-              <a:buNone/>
-              <a:defRPr sz="1400"/>
-            </a:lvl1pPr>
-            <a:lvl2pPr marL="457200" indent="0">
-              <a:buNone/>
-              <a:defRPr sz="1200"/>
-            </a:lvl2pPr>
-            <a:lvl3pPr marL="914400" indent="0">
-              <a:buNone/>
-              <a:defRPr sz="1000"/>
-            </a:lvl3pPr>
-            <a:lvl4pPr marL="1371600" indent="0">
-              <a:buNone/>
-              <a:defRPr sz="900"/>
-            </a:lvl4pPr>
-            <a:lvl5pPr marL="1828800" indent="0">
-              <a:buNone/>
-              <a:defRPr sz="900"/>
-            </a:lvl5pPr>
-            <a:lvl6pPr marL="2286000" indent="0">
-              <a:buNone/>
-              <a:defRPr sz="900"/>
-            </a:lvl6pPr>
-            <a:lvl7pPr marL="2743200" indent="0">
-              <a:buNone/>
-              <a:defRPr sz="900"/>
-            </a:lvl7pPr>
-            <a:lvl8pPr marL="3200400" indent="0">
-              <a:buNone/>
-              <a:defRPr sz="900"/>
-            </a:lvl8pPr>
-            <a:lvl9pPr marL="3657600" indent="0">
-              <a:buNone/>
-              <a:defRPr sz="900"/>
-            </a:lvl9pPr>
-          </a:lstStyle>
-          <a:p>
-            <a:pPr lvl="0"/>
-            <a:r>
-              <a:rPr lang="en-US" smtClean="0"/>
-              <a:t>Click to edit Master text styles</a:t>
-            </a:r>
-          </a:p>
-        </p:txBody>
-      </p:sp>
-      <p:sp>
-        <p:nvSpPr>
-          <p:cNvPr id="5" name="Date Placeholder 4"/>
-          <p:cNvSpPr>
-            <a:spLocks noGrp="1"/>
-          </p:cNvSpPr>
-          <p:nvPr>
-            <p:ph type="dt" sz="half" idx="10"/>
+          <a:lstStyle/>
+          <a:p>
+            <a:fld id="{48A87A34-81AB-432B-8DAE-1953F412C126}" type="datetimeFigureOut">
+              <a:rPr lang="en-US" dirty="0"/>
+              <a:t>7/1/2022</a:t>
+            </a:fld>
+            <a:endParaRPr lang="en-US" dirty="0"/>
+          </a:p>
+        </p:txBody>
+      </p:sp>
+      <p:sp>
+        <p:nvSpPr>
+          <p:cNvPr id="6" name="Footer Placeholder 5"/>
+          <p:cNvSpPr>
+            <a:spLocks noGrp="1"/>
+          </p:cNvSpPr>
+          <p:nvPr>
+            <p:ph type="ftr" sz="quarter" idx="11"/>
           </p:nvPr>
         </p:nvSpPr>
         <p:spPr/>
@@ -2262,22 +2911,18 @@
           <a:bodyPr/>
           <a:lstStyle/>
           <a:p>
-            <a:fld id="{5BCAD085-E8A6-8845-BD4E-CB4CCA059FC4}" type="datetimeFigureOut">
-              <a:rPr lang="en-US" smtClean="0"/>
-              <a:t>1/27/13</a:t>
-            </a:fld>
-            <a:endParaRPr lang="en-US"/>
-          </a:p>
-        </p:txBody>
-      </p:sp>
-      <p:sp>
-        <p:nvSpPr>
-          <p:cNvPr id="6" name="Footer Placeholder 5"/>
-          <p:cNvSpPr>
-            <a:spLocks noGrp="1"/>
-          </p:cNvSpPr>
-          <p:nvPr>
-            <p:ph type="ftr" sz="quarter" idx="11"/>
+            <a:endParaRPr lang="en-US" dirty="0"/>
+          </a:p>
+        </p:txBody>
+      </p:sp>
+      <p:sp>
+        <p:nvSpPr>
+          <p:cNvPr id="7" name="Slide Number Placeholder 6"/>
+          <p:cNvSpPr>
+            <a:spLocks noGrp="1"/>
+          </p:cNvSpPr>
+          <p:nvPr>
+            <p:ph type="sldNum" sz="quarter" idx="12"/>
           </p:nvPr>
         </p:nvSpPr>
         <p:spPr/>
@@ -2285,39 +2930,46 @@
           <a:bodyPr/>
           <a:lstStyle/>
           <a:p>
-            <a:endParaRPr lang="en-US"/>
-          </a:p>
-        </p:txBody>
-      </p:sp>
-      <p:sp>
-        <p:nvSpPr>
-          <p:cNvPr id="7" name="Slide Number Placeholder 6"/>
-          <p:cNvSpPr>
-            <a:spLocks noGrp="1"/>
-          </p:cNvSpPr>
-          <p:nvPr>
-            <p:ph type="sldNum" sz="quarter" idx="12"/>
-          </p:nvPr>
-        </p:nvSpPr>
-        <p:spPr/>
-        <p:txBody>
-          <a:bodyPr/>
-          <a:lstStyle/>
-          <a:p>
-            <a:fld id="{C1FF6DA9-008F-8B48-92A6-B652298478BF}" type="slidenum">
-              <a:rPr lang="en-US" smtClean="0"/>
+            <a:fld id="{6D22F896-40B5-4ADD-8801-0D06FADFA095}" type="slidenum">
+              <a:rPr lang="en-US" dirty="0"/>
               <a:t>‹#›</a:t>
             </a:fld>
-            <a:endParaRPr lang="en-US"/>
-          </a:p>
-        </p:txBody>
-      </p:sp>
+            <a:endParaRPr lang="en-US" dirty="0"/>
+          </a:p>
+        </p:txBody>
+      </p:sp>
+      <p:cxnSp>
+        <p:nvCxnSpPr>
+          <p:cNvPr id="17" name="Straight Connector 16"/>
+          <p:cNvCxnSpPr/>
+          <p:nvPr/>
+        </p:nvCxnSpPr>
+        <p:spPr>
+          <a:xfrm>
+            <a:off x="1448280" y="3205491"/>
+            <a:ext cx="3269490" cy="0"/>
+          </a:xfrm>
+          <a:prstGeom prst="line">
+            <a:avLst/>
+          </a:prstGeom>
+          <a:ln w="31750"/>
+        </p:spPr>
+        <p:style>
+          <a:lnRef idx="3">
+            <a:schemeClr val="accent1"/>
+          </a:lnRef>
+          <a:fillRef idx="0">
+            <a:schemeClr val="accent1"/>
+          </a:fillRef>
+          <a:effectRef idx="2">
+            <a:schemeClr val="accent1"/>
+          </a:effectRef>
+          <a:fontRef idx="minor">
+            <a:schemeClr val="tx1"/>
+          </a:fontRef>
+        </p:style>
+      </p:cxnSp>
     </p:spTree>
-    <p:extLst>
-      <p:ext uri="{BB962C8B-B14F-4D97-AF65-F5344CB8AC3E}">
-        <p14:creationId xmlns:p14="http://schemas.microsoft.com/office/powerpoint/2010/main" val="1840726560"/>
-      </p:ext>
-    </p:extLst>
   </p:cSld>
   <p:clrMapOvr>
     <a:masterClrMapping/>
@@ -2342,6 +2994,140 @@
           <a:chExt cx="0" cy="0"/>
         </a:xfrm>
       </p:grpSpPr>
+      <p:grpSp>
+        <p:nvGrpSpPr>
+          <p:cNvPr id="8" name="Group 7"/>
+          <p:cNvGrpSpPr/>
+          <p:nvPr/>
+        </p:nvGrpSpPr>
+        <p:grpSpPr>
+          <a:xfrm>
+            <a:off x="7477387" y="482170"/>
+            <a:ext cx="4074533" cy="5149101"/>
+            <a:chOff x="7477387" y="482170"/>
+            <a:chExt cx="4074533" cy="5149101"/>
+          </a:xfrm>
+        </p:grpSpPr>
+        <p:sp>
+          <p:nvSpPr>
+            <p:cNvPr id="18" name="Rectangle 17"/>
+            <p:cNvSpPr/>
+            <p:nvPr/>
+          </p:nvSpPr>
+          <p:spPr bwMode="black">
+            <a:xfrm>
+              <a:off x="7477387" y="482170"/>
+              <a:ext cx="4074533" cy="5149101"/>
+            </a:xfrm>
+            <a:prstGeom prst="rect">
+              <a:avLst/>
+            </a:prstGeom>
+            <a:gradFill>
+              <a:gsLst>
+                <a:gs pos="0">
+                  <a:srgbClr val="000001"/>
+                </a:gs>
+                <a:gs pos="100000">
+                  <a:srgbClr val="191919"/>
+                </a:gs>
+              </a:gsLst>
+            </a:gradFill>
+            <a:ln w="76200" cmpd="sng">
+              <a:noFill/>
+              <a:miter lim="800000"/>
+            </a:ln>
+            <a:effectLst>
+              <a:outerShdw blurRad="127000" dist="228600" dir="4740000" sx="98000" sy="98000" algn="tl" rotWithShape="0">
+                <a:srgbClr val="000000">
+                  <a:alpha val="34000"/>
+                </a:srgbClr>
+              </a:outerShdw>
+            </a:effectLst>
+            <a:scene3d>
+              <a:camera prst="orthographicFront"/>
+              <a:lightRig rig="threePt" dir="t"/>
+            </a:scene3d>
+            <a:sp3d>
+              <a:bevelT w="152400" h="50800" prst="softRound"/>
+            </a:sp3d>
+          </p:spPr>
+          <p:style>
+            <a:lnRef idx="1">
+              <a:schemeClr val="accent1"/>
+            </a:lnRef>
+            <a:fillRef idx="3">
+              <a:schemeClr val="accent1"/>
+            </a:fillRef>
+            <a:effectRef idx="2">
+              <a:schemeClr val="accent1"/>
+            </a:effectRef>
+            <a:fontRef idx="minor">
+              <a:schemeClr val="lt1"/>
+            </a:fontRef>
+          </p:style>
+        </p:sp>
+        <p:sp>
+          <p:nvSpPr>
+            <p:cNvPr id="19" name="Rectangle 18"/>
+            <p:cNvSpPr/>
+            <p:nvPr/>
+          </p:nvSpPr>
+          <p:spPr bwMode="blackWhite">
+            <a:xfrm>
+              <a:off x="7790446" y="812506"/>
+              <a:ext cx="3450289" cy="4466452"/>
+            </a:xfrm>
+            <a:prstGeom prst="rect">
+              <a:avLst/>
+            </a:prstGeom>
+            <a:gradFill>
+              <a:gsLst>
+                <a:gs pos="0">
+                  <a:srgbClr val="DADADA"/>
+                </a:gs>
+                <a:gs pos="100000">
+                  <a:srgbClr val="FFFFFE"/>
+                </a:gs>
+              </a:gsLst>
+              <a:lin ang="16200000" scaled="0"/>
+            </a:gradFill>
+            <a:ln w="50800" cmpd="sng">
+              <a:solidFill>
+                <a:srgbClr val="191919"/>
+              </a:solidFill>
+              <a:miter lim="800000"/>
+            </a:ln>
+            <a:effectLst>
+              <a:innerShdw blurRad="63500" dist="88900" dir="14100000">
+                <a:srgbClr val="000000">
+                  <a:alpha val="30000"/>
+                </a:srgbClr>
+              </a:innerShdw>
+            </a:effectLst>
+            <a:scene3d>
+              <a:camera prst="orthographicFront"/>
+              <a:lightRig rig="threePt" dir="t"/>
+            </a:scene3d>
+            <a:sp3d>
+              <a:bevelT prst="relaxedInset"/>
+            </a:sp3d>
+          </p:spPr>
+          <p:style>
+            <a:lnRef idx="1">
+              <a:schemeClr val="accent1"/>
+            </a:lnRef>
+            <a:fillRef idx="3">
+              <a:schemeClr val="accent1"/>
+            </a:fillRef>
+            <a:effectRef idx="2">
+              <a:schemeClr val="accent1"/>
+            </a:effectRef>
+            <a:fontRef idx="minor">
+              <a:schemeClr val="lt1"/>
+            </a:fontRef>
+          </p:style>
+        </p:sp>
+      </p:grpSp>
       <p:sp>
         <p:nvSpPr>
           <p:cNvPr id="2" name="Title 1"/>
@@ -2354,23 +3140,25 @@
         </p:nvSpPr>
         <p:spPr>
           <a:xfrm>
-            <a:off x="1792288" y="4800600"/>
-            <a:ext cx="5486400" cy="566738"/>
-          </a:xfrm>
-        </p:spPr>
-        <p:txBody>
-          <a:bodyPr anchor="b"/>
+            <a:off x="1451206" y="1129513"/>
+            <a:ext cx="5532328" cy="1830584"/>
+          </a:xfrm>
+        </p:spPr>
+        <p:txBody>
+          <a:bodyPr anchor="b">
+            <a:normAutofit/>
+          </a:bodyPr>
           <a:lstStyle>
-            <a:lvl1pPr algn="l">
-              <a:defRPr sz="2000" b="1"/>
+            <a:lvl1pPr>
+              <a:defRPr sz="3200"/>
             </a:lvl1pPr>
           </a:lstStyle>
           <a:p>
             <a:r>
-              <a:rPr lang="en-US" smtClean="0"/>
+              <a:rPr lang="en-US"/>
               <a:t>Click to edit Master title style</a:t>
             </a:r>
-            <a:endParaRPr lang="en-US"/>
+            <a:endParaRPr lang="en-US" dirty="0"/>
           </a:p>
         </p:txBody>
       </p:sp>
@@ -2378,7 +3166,7 @@
         <p:nvSpPr>
           <p:cNvPr id="3" name="Picture Placeholder 2"/>
           <p:cNvSpPr>
-            <a:spLocks noGrp="1"/>
+            <a:spLocks noGrp="1" noChangeAspect="1"/>
           </p:cNvSpPr>
           <p:nvPr>
             <p:ph type="pic" idx="1"/>
@@ -2386,14 +3174,24 @@
         </p:nvSpPr>
         <p:spPr>
           <a:xfrm>
-            <a:off x="1792288" y="612775"/>
-            <a:ext cx="5486400" cy="4114800"/>
-          </a:xfrm>
-        </p:spPr>
-        <p:txBody>
-          <a:bodyPr/>
+            <a:off x="8124389" y="1122542"/>
+            <a:ext cx="2791171" cy="3866327"/>
+          </a:xfrm>
+          <a:solidFill>
+            <a:schemeClr val="bg1">
+              <a:lumMod val="85000"/>
+            </a:schemeClr>
+          </a:solidFill>
+          <a:ln w="9525" cap="sq">
+            <a:noFill/>
+            <a:miter lim="800000"/>
+          </a:ln>
+          <a:effectLst/>
+        </p:spPr>
+        <p:txBody>
+          <a:bodyPr anchor="t"/>
           <a:lstStyle>
-            <a:lvl1pPr marL="0" indent="0">
+            <a:lvl1pPr marL="0" indent="0" algn="ctr">
               <a:buNone/>
               <a:defRPr sz="3200"/>
             </a:lvl1pPr>
@@ -2431,7 +3229,11 @@
             </a:lvl9pPr>
           </a:lstStyle>
           <a:p>
-            <a:endParaRPr lang="en-US"/>
+            <a:r>
+              <a:rPr lang="en-US"/>
+              <a:t>Click icon to add picture</a:t>
+            </a:r>
+            <a:endParaRPr lang="en-US" dirty="0"/>
           </a:p>
         </p:txBody>
       </p:sp>
@@ -2447,67 +3249,126 @@
         </p:nvSpPr>
         <p:spPr>
           <a:xfrm>
-            <a:off x="1792288" y="5367338"/>
-            <a:ext cx="5486400" cy="804862"/>
+            <a:off x="1450329" y="3145992"/>
+            <a:ext cx="5524404" cy="2003742"/>
+          </a:xfrm>
+        </p:spPr>
+        <p:txBody>
+          <a:bodyPr>
+            <a:normAutofit/>
+          </a:bodyPr>
+          <a:lstStyle>
+            <a:lvl1pPr marL="0" indent="0" algn="l">
+              <a:buNone/>
+              <a:defRPr sz="1800"/>
+            </a:lvl1pPr>
+            <a:lvl2pPr marL="457200" indent="0">
+              <a:buNone/>
+              <a:defRPr sz="1400"/>
+            </a:lvl2pPr>
+            <a:lvl3pPr marL="914400" indent="0">
+              <a:buNone/>
+              <a:defRPr sz="1200"/>
+            </a:lvl3pPr>
+            <a:lvl4pPr marL="1371600" indent="0">
+              <a:buNone/>
+              <a:defRPr sz="1000"/>
+            </a:lvl4pPr>
+            <a:lvl5pPr marL="1828800" indent="0">
+              <a:buNone/>
+              <a:defRPr sz="1000"/>
+            </a:lvl5pPr>
+            <a:lvl6pPr marL="2286000" indent="0">
+              <a:buNone/>
+              <a:defRPr sz="1000"/>
+            </a:lvl6pPr>
+            <a:lvl7pPr marL="2743200" indent="0">
+              <a:buNone/>
+              <a:defRPr sz="1000"/>
+            </a:lvl7pPr>
+            <a:lvl8pPr marL="3200400" indent="0">
+              <a:buNone/>
+              <a:defRPr sz="1000"/>
+            </a:lvl8pPr>
+            <a:lvl9pPr marL="3657600" indent="0">
+              <a:buNone/>
+              <a:defRPr sz="1000"/>
+            </a:lvl9pPr>
+          </a:lstStyle>
+          <a:p>
+            <a:pPr lvl="0"/>
+            <a:r>
+              <a:rPr lang="en-US"/>
+              <a:t>Edit Master text styles</a:t>
+            </a:r>
+          </a:p>
+        </p:txBody>
+      </p:sp>
+      <p:sp>
+        <p:nvSpPr>
+          <p:cNvPr id="5" name="Date Placeholder 4"/>
+          <p:cNvSpPr>
+            <a:spLocks noGrp="1"/>
+          </p:cNvSpPr>
+          <p:nvPr>
+            <p:ph type="dt" sz="half" idx="10"/>
+          </p:nvPr>
+        </p:nvSpPr>
+        <p:spPr>
+          <a:xfrm>
+            <a:off x="1447382" y="5469856"/>
+            <a:ext cx="5527351" cy="320123"/>
           </a:xfrm>
         </p:spPr>
         <p:txBody>
           <a:bodyPr/>
           <a:lstStyle>
-            <a:lvl1pPr marL="0" indent="0">
-              <a:buNone/>
-              <a:defRPr sz="1400"/>
+            <a:lvl1pPr algn="l">
+              <a:defRPr/>
             </a:lvl1pPr>
-            <a:lvl2pPr marL="457200" indent="0">
-              <a:buNone/>
-              <a:defRPr sz="1200"/>
-            </a:lvl2pPr>
-            <a:lvl3pPr marL="914400" indent="0">
-              <a:buNone/>
-              <a:defRPr sz="1000"/>
-            </a:lvl3pPr>
-            <a:lvl4pPr marL="1371600" indent="0">
-              <a:buNone/>
-              <a:defRPr sz="900"/>
-            </a:lvl4pPr>
-            <a:lvl5pPr marL="1828800" indent="0">
-              <a:buNone/>
-              <a:defRPr sz="900"/>
-            </a:lvl5pPr>
-            <a:lvl6pPr marL="2286000" indent="0">
-              <a:buNone/>
-              <a:defRPr sz="900"/>
-            </a:lvl6pPr>
-            <a:lvl7pPr marL="2743200" indent="0">
-              <a:buNone/>
-              <a:defRPr sz="900"/>
-            </a:lvl7pPr>
-            <a:lvl8pPr marL="3200400" indent="0">
-              <a:buNone/>
-              <a:defRPr sz="900"/>
-            </a:lvl8pPr>
-            <a:lvl9pPr marL="3657600" indent="0">
-              <a:buNone/>
-              <a:defRPr sz="900"/>
-            </a:lvl9pPr>
           </a:lstStyle>
           <a:p>
-            <a:pPr lvl="0"/>
-            <a:r>
-              <a:rPr lang="en-US" smtClean="0"/>
-              <a:t>Click to edit Master text styles</a:t>
-            </a:r>
-          </a:p>
-        </p:txBody>
-      </p:sp>
-      <p:sp>
-        <p:nvSpPr>
-          <p:cNvPr id="5" name="Date Placeholder 4"/>
-          <p:cNvSpPr>
-            <a:spLocks noGrp="1"/>
-          </p:cNvSpPr>
-          <p:nvPr>
-            <p:ph type="dt" sz="half" idx="10"/>
+            <a:fld id="{48A87A34-81AB-432B-8DAE-1953F412C126}" type="datetimeFigureOut">
+              <a:rPr lang="en-US" dirty="0"/>
+              <a:pPr/>
+              <a:t>7/1/2022</a:t>
+            </a:fld>
+            <a:endParaRPr lang="en-US" dirty="0"/>
+          </a:p>
+        </p:txBody>
+      </p:sp>
+      <p:sp>
+        <p:nvSpPr>
+          <p:cNvPr id="6" name="Footer Placeholder 5"/>
+          <p:cNvSpPr>
+            <a:spLocks noGrp="1"/>
+          </p:cNvSpPr>
+          <p:nvPr>
+            <p:ph type="ftr" sz="quarter" idx="11"/>
+          </p:nvPr>
+        </p:nvSpPr>
+        <p:spPr>
+          <a:xfrm>
+            <a:off x="1447382" y="318640"/>
+            <a:ext cx="5541004" cy="320931"/>
+          </a:xfrm>
+        </p:spPr>
+        <p:txBody>
+          <a:bodyPr/>
+          <a:lstStyle/>
+          <a:p>
+            <a:endParaRPr lang="en-US" dirty="0"/>
+          </a:p>
+        </p:txBody>
+      </p:sp>
+      <p:sp>
+        <p:nvSpPr>
+          <p:cNvPr id="7" name="Slide Number Placeholder 6"/>
+          <p:cNvSpPr>
+            <a:spLocks noGrp="1"/>
+          </p:cNvSpPr>
+          <p:nvPr>
+            <p:ph type="sldNum" sz="quarter" idx="12"/>
           </p:nvPr>
         </p:nvSpPr>
         <p:spPr/>
@@ -2515,62 +3376,46 @@
           <a:bodyPr/>
           <a:lstStyle/>
           <a:p>
-            <a:fld id="{5BCAD085-E8A6-8845-BD4E-CB4CCA059FC4}" type="datetimeFigureOut">
-              <a:rPr lang="en-US" smtClean="0"/>
-              <a:t>1/27/13</a:t>
-            </a:fld>
-            <a:endParaRPr lang="en-US"/>
-          </a:p>
-        </p:txBody>
-      </p:sp>
-      <p:sp>
-        <p:nvSpPr>
-          <p:cNvPr id="6" name="Footer Placeholder 5"/>
-          <p:cNvSpPr>
-            <a:spLocks noGrp="1"/>
-          </p:cNvSpPr>
-          <p:nvPr>
-            <p:ph type="ftr" sz="quarter" idx="11"/>
-          </p:nvPr>
-        </p:nvSpPr>
-        <p:spPr/>
-        <p:txBody>
-          <a:bodyPr/>
-          <a:lstStyle/>
-          <a:p>
-            <a:endParaRPr lang="en-US"/>
-          </a:p>
-        </p:txBody>
-      </p:sp>
-      <p:sp>
-        <p:nvSpPr>
-          <p:cNvPr id="7" name="Slide Number Placeholder 6"/>
-          <p:cNvSpPr>
-            <a:spLocks noGrp="1"/>
-          </p:cNvSpPr>
-          <p:nvPr>
-            <p:ph type="sldNum" sz="quarter" idx="12"/>
-          </p:nvPr>
-        </p:nvSpPr>
-        <p:spPr/>
-        <p:txBody>
-          <a:bodyPr/>
-          <a:lstStyle/>
-          <a:p>
-            <a:fld id="{C1FF6DA9-008F-8B48-92A6-B652298478BF}" type="slidenum">
-              <a:rPr lang="en-US" smtClean="0"/>
+            <a:fld id="{6D22F896-40B5-4ADD-8801-0D06FADFA095}" type="slidenum">
+              <a:rPr lang="en-US" dirty="0"/>
               <a:t>‹#›</a:t>
             </a:fld>
-            <a:endParaRPr lang="en-US"/>
-          </a:p>
-        </p:txBody>
-      </p:sp>
+            <a:endParaRPr lang="en-US" dirty="0"/>
+          </a:p>
+        </p:txBody>
+      </p:sp>
+      <p:cxnSp>
+        <p:nvCxnSpPr>
+          <p:cNvPr id="31" name="Straight Connector 30"/>
+          <p:cNvCxnSpPr/>
+          <p:nvPr/>
+        </p:nvCxnSpPr>
+        <p:spPr>
+          <a:xfrm>
+            <a:off x="1447382" y="3143605"/>
+            <a:ext cx="5527351" cy="0"/>
+          </a:xfrm>
+          <a:prstGeom prst="line">
+            <a:avLst/>
+          </a:prstGeom>
+          <a:ln w="31750"/>
+        </p:spPr>
+        <p:style>
+          <a:lnRef idx="3">
+            <a:schemeClr val="accent1"/>
+          </a:lnRef>
+          <a:fillRef idx="0">
+            <a:schemeClr val="accent1"/>
+          </a:fillRef>
+          <a:effectRef idx="2">
+            <a:schemeClr val="accent1"/>
+          </a:effectRef>
+          <a:fontRef idx="minor">
+            <a:schemeClr val="tx1"/>
+          </a:fontRef>
+        </p:style>
+      </p:cxnSp>
     </p:spTree>
-    <p:extLst>
-      <p:ext uri="{BB962C8B-B14F-4D97-AF65-F5344CB8AC3E}">
-        <p14:creationId xmlns:p14="http://schemas.microsoft.com/office/powerpoint/2010/main" val="3889236939"/>
-      </p:ext>
-    </p:extLst>
   </p:cSld>
   <p:clrMapOvr>
     <a:masterClrMapping/>
@@ -2582,8 +3427,8 @@
 <p:sldMaster xmlns:a="http://schemas.openxmlformats.org/drawingml/2006/main" xmlns:r="http://schemas.openxmlformats.org/officeDocument/2006/relationships" xmlns:p="http://schemas.openxmlformats.org/presentationml/2006/main">
   <p:cSld>
     <p:bg>
-      <p:bgRef idx="1001">
-        <a:schemeClr val="bg1"/>
+      <p:bgRef idx="1003">
+        <a:schemeClr val="bg2"/>
       </p:bgRef>
     </p:bg>
     <p:spTree>
@@ -2602,56 +3447,133 @@
       </p:grpSpPr>
       <p:sp>
         <p:nvSpPr>
-          <p:cNvPr id="2" name="Title Placeholder 1"/>
-          <p:cNvSpPr>
-            <a:spLocks noGrp="1"/>
-          </p:cNvSpPr>
-          <p:nvPr>
-            <p:ph type="title"/>
-          </p:nvPr>
-        </p:nvSpPr>
-        <p:spPr>
-          <a:xfrm>
-            <a:off x="457200" y="274638"/>
-            <a:ext cx="8229600" cy="1143000"/>
+          <p:cNvPr id="8" name="Rectangle 7"/>
+          <p:cNvSpPr/>
+          <p:nvPr/>
+        </p:nvSpPr>
+        <p:spPr>
+          <a:xfrm>
+            <a:off x="0" y="2019476"/>
+            <a:ext cx="12192000" cy="4105941"/>
           </a:xfrm>
           <a:prstGeom prst="rect">
             <a:avLst/>
           </a:prstGeom>
-        </p:spPr>
-        <p:txBody>
-          <a:bodyPr vert="horz" lIns="91440" tIns="45720" rIns="91440" bIns="45720" rtlCol="0" anchor="ctr">
-            <a:normAutofit/>
-          </a:bodyPr>
-          <a:lstStyle/>
-          <a:p>
-            <a:r>
-              <a:rPr lang="en-US" smtClean="0"/>
-              <a:t>Click to edit Master title style</a:t>
-            </a:r>
-            <a:endParaRPr lang="en-US"/>
-          </a:p>
-        </p:txBody>
-      </p:sp>
-      <p:sp>
-        <p:nvSpPr>
-          <p:cNvPr id="3" name="Text Placeholder 2"/>
-          <p:cNvSpPr>
-            <a:spLocks noGrp="1"/>
-          </p:cNvSpPr>
-          <p:nvPr>
-            <p:ph type="body" idx="1"/>
-          </p:nvPr>
-        </p:nvSpPr>
-        <p:spPr>
-          <a:xfrm>
-            <a:off x="457200" y="1600200"/>
-            <a:ext cx="8229600" cy="4525963"/>
+          <a:gradFill flip="none" rotWithShape="1">
+            <a:gsLst>
+              <a:gs pos="0">
+                <a:schemeClr val="bg2">
+                  <a:alpha val="0"/>
+                </a:schemeClr>
+              </a:gs>
+              <a:gs pos="100000">
+                <a:schemeClr val="bg2"/>
+              </a:gs>
+            </a:gsLst>
+            <a:lin ang="5400000" scaled="0"/>
+            <a:tileRect/>
+          </a:gradFill>
+          <a:ln>
+            <a:noFill/>
+          </a:ln>
+        </p:spPr>
+        <p:style>
+          <a:lnRef idx="2">
+            <a:schemeClr val="accent1">
+              <a:shade val="50000"/>
+            </a:schemeClr>
+          </a:lnRef>
+          <a:fillRef idx="1">
+            <a:schemeClr val="accent1"/>
+          </a:fillRef>
+          <a:effectRef idx="0">
+            <a:schemeClr val="accent1"/>
+          </a:effectRef>
+          <a:fontRef idx="minor">
+            <a:schemeClr val="lt1"/>
+          </a:fontRef>
+        </p:style>
+      </p:sp>
+      <p:pic>
+        <p:nvPicPr>
+          <p:cNvPr id="7" name="Picture 6"/>
+          <p:cNvPicPr>
+            <a:picLocks noChangeAspect="1"/>
+          </p:cNvPicPr>
+          <p:nvPr/>
+        </p:nvPicPr>
+        <p:blipFill rotWithShape="1">
+          <a:blip r:embed="rId14">
+            <a:extLst>
+              <a:ext uri="{28A0092B-C50C-407E-A947-70E740481C1C}">
+                <a14:useLocalDpi xmlns:a14="http://schemas.microsoft.com/office/drawing/2010/main" val="0"/>
+              </a:ext>
+            </a:extLst>
+          </a:blip>
+          <a:srcRect t="1538" b="-1538"/>
+          <a:stretch/>
+        </p:blipFill>
+        <p:spPr bwMode="black">
+          <a:xfrm>
+            <a:off x="0" y="6126480"/>
+            <a:ext cx="12192000" cy="742950"/>
           </a:xfrm>
           <a:prstGeom prst="rect">
             <a:avLst/>
           </a:prstGeom>
         </p:spPr>
+      </p:pic>
+      <p:sp>
+        <p:nvSpPr>
+          <p:cNvPr id="2" name="Title Placeholder 1"/>
+          <p:cNvSpPr>
+            <a:spLocks noGrp="1"/>
+          </p:cNvSpPr>
+          <p:nvPr>
+            <p:ph type="title"/>
+          </p:nvPr>
+        </p:nvSpPr>
+        <p:spPr>
+          <a:xfrm>
+            <a:off x="1451579" y="804519"/>
+            <a:ext cx="9603275" cy="1049235"/>
+          </a:xfrm>
+          <a:prstGeom prst="rect">
+            <a:avLst/>
+          </a:prstGeom>
+        </p:spPr>
+        <p:txBody>
+          <a:bodyPr vert="horz" lIns="91440" tIns="45720" rIns="91440" bIns="45720" rtlCol="0" anchor="t">
+            <a:normAutofit/>
+          </a:bodyPr>
+          <a:lstStyle/>
+          <a:p>
+            <a:r>
+              <a:rPr lang="en-US" dirty="0"/>
+              <a:t>Click to edit Master title style</a:t>
+            </a:r>
+          </a:p>
+        </p:txBody>
+      </p:sp>
+      <p:sp>
+        <p:nvSpPr>
+          <p:cNvPr id="3" name="Text Placeholder 2"/>
+          <p:cNvSpPr>
+            <a:spLocks noGrp="1"/>
+          </p:cNvSpPr>
+          <p:nvPr>
+            <p:ph type="body" idx="1"/>
+          </p:nvPr>
+        </p:nvSpPr>
+        <p:spPr>
+          <a:xfrm>
+            <a:off x="1451579" y="2015732"/>
+            <a:ext cx="9603275" cy="3450613"/>
+          </a:xfrm>
+          <a:prstGeom prst="rect">
+            <a:avLst/>
+          </a:prstGeom>
+        </p:spPr>
         <p:txBody>
           <a:bodyPr vert="horz" lIns="91440" tIns="45720" rIns="91440" bIns="45720" rtlCol="0">
             <a:normAutofit/>
@@ -2660,38 +3582,37 @@
           <a:p>
             <a:pPr lvl="0"/>
             <a:r>
-              <a:rPr lang="en-US" smtClean="0"/>
-              <a:t>Click to edit Master text styles</a:t>
+              <a:rPr lang="en-US" dirty="0"/>
+              <a:t>Edit Master text styles</a:t>
             </a:r>
           </a:p>
           <a:p>
             <a:pPr lvl="1"/>
             <a:r>
-              <a:rPr lang="en-US" smtClean="0"/>
+              <a:rPr lang="en-US" dirty="0"/>
               <a:t>Second level</a:t>
             </a:r>
           </a:p>
           <a:p>
             <a:pPr lvl="2"/>
             <a:r>
-              <a:rPr lang="en-US" smtClean="0"/>
+              <a:rPr lang="en-US" dirty="0"/>
               <a:t>Third level</a:t>
             </a:r>
           </a:p>
           <a:p>
             <a:pPr lvl="3"/>
             <a:r>
-              <a:rPr lang="en-US" smtClean="0"/>
+              <a:rPr lang="en-US" dirty="0"/>
               <a:t>Fourth level</a:t>
             </a:r>
           </a:p>
           <a:p>
             <a:pPr lvl="4"/>
             <a:r>
-              <a:rPr lang="en-US" smtClean="0"/>
+              <a:rPr lang="en-US" dirty="0"/>
               <a:t>Fifth level</a:t>
             </a:r>
-            <a:endParaRPr lang="en-US"/>
           </a:p>
         </p:txBody>
       </p:sp>
@@ -2707,8 +3628,8 @@
         </p:nvSpPr>
         <p:spPr>
           <a:xfrm>
-            <a:off x="457200" y="6356350"/>
-            <a:ext cx="2133600" cy="365125"/>
+            <a:off x="7554138" y="330370"/>
+            <a:ext cx="3500715" cy="309201"/>
           </a:xfrm>
           <a:prstGeom prst="rect">
             <a:avLst/>
@@ -2717,22 +3638,24 @@
         <p:txBody>
           <a:bodyPr vert="horz" lIns="91440" tIns="45720" rIns="91440" bIns="45720" rtlCol="0" anchor="ctr"/>
           <a:lstStyle>
-            <a:lvl1pPr algn="l">
-              <a:defRPr sz="1200">
+            <a:lvl1pPr algn="r">
+              <a:defRPr sz="1000">
                 <a:solidFill>
                   <a:schemeClr val="tx1">
                     <a:tint val="75000"/>
                   </a:schemeClr>
                 </a:solidFill>
+                <a:latin typeface="Georgia" panose="02040502050405020303" pitchFamily="18" charset="0"/>
               </a:defRPr>
             </a:lvl1pPr>
           </a:lstStyle>
           <a:p>
-            <a:fld id="{5BCAD085-E8A6-8845-BD4E-CB4CCA059FC4}" type="datetimeFigureOut">
+            <a:fld id="{48A87A34-81AB-432B-8DAE-1953F412C126}" type="datetimeFigureOut">
               <a:rPr lang="en-US" smtClean="0"/>
-              <a:t>1/27/13</a:t>
+              <a:pPr/>
+              <a:t>7/1/2022</a:t>
             </a:fld>
-            <a:endParaRPr lang="en-US"/>
+            <a:endParaRPr lang="en-US" dirty="0"/>
           </a:p>
         </p:txBody>
       </p:sp>
@@ -2748,8 +3671,8 @@
         </p:nvSpPr>
         <p:spPr>
           <a:xfrm>
-            <a:off x="3124200" y="6356350"/>
-            <a:ext cx="2895600" cy="365125"/>
+            <a:off x="1451579" y="329307"/>
+            <a:ext cx="5938836" cy="309201"/>
           </a:xfrm>
           <a:prstGeom prst="rect">
             <a:avLst/>
@@ -2758,18 +3681,19 @@
         <p:txBody>
           <a:bodyPr vert="horz" lIns="91440" tIns="45720" rIns="91440" bIns="45720" rtlCol="0" anchor="ctr"/>
           <a:lstStyle>
-            <a:lvl1pPr algn="ctr">
-              <a:defRPr sz="1200">
+            <a:lvl1pPr algn="l">
+              <a:defRPr sz="1000">
                 <a:solidFill>
                   <a:schemeClr val="tx1">
                     <a:tint val="75000"/>
                   </a:schemeClr>
                 </a:solidFill>
+                <a:latin typeface="Georgia" panose="02040502050405020303" pitchFamily="18" charset="0"/>
               </a:defRPr>
             </a:lvl1pPr>
           </a:lstStyle>
           <a:p>
-            <a:endParaRPr lang="en-US"/>
+            <a:endParaRPr lang="en-US" dirty="0"/>
           </a:p>
         </p:txBody>
       </p:sp>
@@ -2785,41 +3709,73 @@
         </p:nvSpPr>
         <p:spPr>
           <a:xfrm>
-            <a:off x="6553200" y="6356350"/>
-            <a:ext cx="2133600" cy="365125"/>
+            <a:off x="480060" y="798973"/>
+            <a:ext cx="811019" cy="503578"/>
           </a:xfrm>
           <a:prstGeom prst="rect">
             <a:avLst/>
           </a:prstGeom>
         </p:spPr>
         <p:txBody>
-          <a:bodyPr vert="horz" lIns="91440" tIns="45720" rIns="91440" bIns="45720" rtlCol="0" anchor="ctr"/>
+          <a:bodyPr vert="horz" lIns="91440" tIns="45720" rIns="91440" bIns="45720" rtlCol="0" anchor="t"/>
           <a:lstStyle>
             <a:lvl1pPr algn="r">
-              <a:defRPr sz="1200">
+              <a:defRPr sz="2800">
                 <a:solidFill>
-                  <a:schemeClr val="tx1">
-                    <a:tint val="75000"/>
-                  </a:schemeClr>
+                  <a:schemeClr val="accent1"/>
                 </a:solidFill>
+                <a:latin typeface="Georgia" panose="02040502050405020303" pitchFamily="18" charset="0"/>
               </a:defRPr>
             </a:lvl1pPr>
           </a:lstStyle>
           <a:p>
-            <a:fld id="{C1FF6DA9-008F-8B48-92A6-B652298478BF}" type="slidenum">
+            <a:fld id="{6D22F896-40B5-4ADD-8801-0D06FADFA095}" type="slidenum">
               <a:rPr lang="en-US" smtClean="0"/>
+              <a:pPr/>
               <a:t>‹#›</a:t>
             </a:fld>
-            <a:endParaRPr lang="en-US"/>
-          </a:p>
-        </p:txBody>
-      </p:sp>
+            <a:endParaRPr lang="en-US" dirty="0"/>
+          </a:p>
+        </p:txBody>
+      </p:sp>
+      <p:cxnSp>
+        <p:nvCxnSpPr>
+          <p:cNvPr id="10" name="Straight Connector 9"/>
+          <p:cNvCxnSpPr/>
+          <p:nvPr/>
+        </p:nvCxnSpPr>
+        <p:spPr>
+          <a:xfrm>
+            <a:off x="0" y="6128413"/>
+            <a:ext cx="12192000" cy="0"/>
+          </a:xfrm>
+          <a:prstGeom prst="line">
+            <a:avLst/>
+          </a:prstGeom>
+          <a:ln w="12700">
+            <a:solidFill>
+              <a:srgbClr val="000001">
+                <a:alpha val="20000"/>
+              </a:srgbClr>
+            </a:solidFill>
+          </a:ln>
+        </p:spPr>
+        <p:style>
+          <a:lnRef idx="1">
+            <a:schemeClr val="accent1"/>
+          </a:lnRef>
+          <a:fillRef idx="0">
+            <a:schemeClr val="accent1"/>
+          </a:fillRef>
+          <a:effectRef idx="0">
+            <a:schemeClr val="accent1"/>
+          </a:effectRef>
+          <a:fontRef idx="minor">
+            <a:schemeClr val="tx1"/>
+          </a:fontRef>
+        </p:style>
+      </p:cxnSp>
     </p:spTree>
-    <p:extLst>
-      <p:ext uri="{BB962C8B-B14F-4D97-AF65-F5344CB8AC3E}">
-        <p14:creationId xmlns:p14="http://schemas.microsoft.com/office/powerpoint/2010/main" val="2209977519"/>
-      </p:ext>
-    </p:extLst>
   </p:cSld>
   <p:clrMap bg1="lt1" tx1="dk1" bg2="lt2" tx2="dk2" accent1="accent1" accent2="accent2" accent3="accent3" accent4="accent4" accent5="accent5" accent6="accent6" hlink="hlink" folHlink="folHlink"/>
   <p:sldLayoutIdLst>
@@ -2834,155 +3790,232 @@
     <p:sldLayoutId id="2147483657" r:id="rId9"/>
     <p:sldLayoutId id="2147483658" r:id="rId10"/>
     <p:sldLayoutId id="2147483659" r:id="rId11"/>
+    <p:sldLayoutId id="2147483660" r:id="rId12"/>
   </p:sldLayoutIdLst>
   <p:txStyles>
     <p:titleStyle>
-      <a:lvl1pPr algn="ctr" defTabSz="457200" rtl="0" eaLnBrk="1" latinLnBrk="0" hangingPunct="1">
+      <a:lvl1pPr algn="l" defTabSz="914400" rtl="0" eaLnBrk="1" latinLnBrk="0" hangingPunct="1">
+        <a:lnSpc>
+          <a:spcPct val="90000"/>
+        </a:lnSpc>
         <a:spcBef>
           <a:spcPct val="0"/>
         </a:spcBef>
         <a:buNone/>
-        <a:defRPr sz="4400" kern="1200">
+        <a:defRPr sz="3200" b="0" i="0" kern="1200" cap="all">
           <a:solidFill>
             <a:schemeClr val="tx1"/>
           </a:solidFill>
-          <a:latin typeface="+mj-lt"/>
+          <a:effectLst/>
+          <a:latin typeface="Georgia" panose="02040502050405020303" pitchFamily="18" charset="0"/>
           <a:ea typeface="+mj-ea"/>
           <a:cs typeface="+mj-cs"/>
         </a:defRPr>
       </a:lvl1pPr>
     </p:titleStyle>
     <p:bodyStyle>
-      <a:lvl1pPr marL="342900" indent="-342900" algn="l" defTabSz="457200" rtl="0" eaLnBrk="1" latinLnBrk="0" hangingPunct="1">
+      <a:lvl1pPr marL="228600" indent="-228600" algn="l" defTabSz="914400" rtl="0" eaLnBrk="1" latinLnBrk="0" hangingPunct="1">
+        <a:lnSpc>
+          <a:spcPct val="120000"/>
+        </a:lnSpc>
         <a:spcBef>
-          <a:spcPct val="20000"/>
+          <a:spcPts val="1000"/>
         </a:spcBef>
-        <a:buFont typeface="Arial"/>
-        <a:buChar char="•"/>
-        <a:defRPr sz="3200" kern="1200">
-          <a:solidFill>
-            <a:schemeClr val="tx1"/>
-          </a:solidFill>
-          <a:latin typeface="+mn-lt"/>
-          <a:ea typeface="+mn-ea"/>
-          <a:cs typeface="+mn-cs"/>
-        </a:defRPr>
-      </a:lvl1pPr>
-      <a:lvl2pPr marL="742950" indent="-285750" algn="l" defTabSz="457200" rtl="0" eaLnBrk="1" latinLnBrk="0" hangingPunct="1">
-        <a:spcBef>
-          <a:spcPct val="20000"/>
-        </a:spcBef>
-        <a:buFont typeface="Arial"/>
-        <a:buChar char="–"/>
-        <a:defRPr sz="2800" kern="1200">
-          <a:solidFill>
-            <a:schemeClr val="tx1"/>
-          </a:solidFill>
-          <a:latin typeface="+mn-lt"/>
-          <a:ea typeface="+mn-ea"/>
-          <a:cs typeface="+mn-cs"/>
-        </a:defRPr>
-      </a:lvl2pPr>
-      <a:lvl3pPr marL="1143000" indent="-228600" algn="l" defTabSz="457200" rtl="0" eaLnBrk="1" latinLnBrk="0" hangingPunct="1">
-        <a:spcBef>
-          <a:spcPct val="20000"/>
-        </a:spcBef>
-        <a:buFont typeface="Arial"/>
-        <a:buChar char="•"/>
-        <a:defRPr sz="2400" kern="1200">
-          <a:solidFill>
-            <a:schemeClr val="tx1"/>
-          </a:solidFill>
-          <a:latin typeface="+mn-lt"/>
-          <a:ea typeface="+mn-ea"/>
-          <a:cs typeface="+mn-cs"/>
-        </a:defRPr>
-      </a:lvl3pPr>
-      <a:lvl4pPr marL="1600200" indent="-228600" algn="l" defTabSz="457200" rtl="0" eaLnBrk="1" latinLnBrk="0" hangingPunct="1">
-        <a:spcBef>
-          <a:spcPct val="20000"/>
-        </a:spcBef>
-        <a:buFont typeface="Arial"/>
-        <a:buChar char="–"/>
-        <a:defRPr sz="2000" kern="1200">
-          <a:solidFill>
-            <a:schemeClr val="tx1"/>
-          </a:solidFill>
-          <a:latin typeface="+mn-lt"/>
-          <a:ea typeface="+mn-ea"/>
-          <a:cs typeface="+mn-cs"/>
-        </a:defRPr>
-      </a:lvl4pPr>
-      <a:lvl5pPr marL="2057400" indent="-228600" algn="l" defTabSz="457200" rtl="0" eaLnBrk="1" latinLnBrk="0" hangingPunct="1">
-        <a:spcBef>
-          <a:spcPct val="20000"/>
-        </a:spcBef>
-        <a:buFont typeface="Arial"/>
-        <a:buChar char="»"/>
-        <a:defRPr sz="2000" kern="1200">
-          <a:solidFill>
-            <a:schemeClr val="tx1"/>
-          </a:solidFill>
-          <a:latin typeface="+mn-lt"/>
-          <a:ea typeface="+mn-ea"/>
-          <a:cs typeface="+mn-cs"/>
-        </a:defRPr>
-      </a:lvl5pPr>
-      <a:lvl6pPr marL="2514600" indent="-228600" algn="l" defTabSz="457200" rtl="0" eaLnBrk="1" latinLnBrk="0" hangingPunct="1">
-        <a:spcBef>
-          <a:spcPct val="20000"/>
-        </a:spcBef>
-        <a:buFont typeface="Arial"/>
+        <a:buClr>
+          <a:schemeClr val="accent1"/>
+        </a:buClr>
+        <a:buSzPct val="100000"/>
+        <a:buFont typeface="Arial" panose="020B0604020202020204" pitchFamily="34" charset="0"/>
         <a:buChar char="•"/>
         <a:defRPr sz="2000" kern="1200">
           <a:solidFill>
             <a:schemeClr val="tx1"/>
           </a:solidFill>
+          <a:effectLst/>
+          <a:latin typeface="Georgia" panose="02040502050405020303" pitchFamily="18" charset="0"/>
+          <a:ea typeface="+mn-ea"/>
+          <a:cs typeface="+mn-cs"/>
+        </a:defRPr>
+      </a:lvl1pPr>
+      <a:lvl2pPr marL="685800" indent="-228600" algn="l" defTabSz="914400" rtl="0" eaLnBrk="1" latinLnBrk="0" hangingPunct="1">
+        <a:lnSpc>
+          <a:spcPct val="120000"/>
+        </a:lnSpc>
+        <a:spcBef>
+          <a:spcPts val="500"/>
+        </a:spcBef>
+        <a:buClr>
+          <a:schemeClr val="accent1"/>
+        </a:buClr>
+        <a:buSzPct val="100000"/>
+        <a:buFont typeface="Arial" panose="020B0604020202020204" pitchFamily="34" charset="0"/>
+        <a:buChar char="•"/>
+        <a:defRPr sz="1800" kern="1200" cap="none" baseline="0">
+          <a:solidFill>
+            <a:schemeClr val="tx1"/>
+          </a:solidFill>
+          <a:effectLst/>
+          <a:latin typeface="Georgia" panose="02040502050405020303" pitchFamily="18" charset="0"/>
+          <a:ea typeface="+mn-ea"/>
+          <a:cs typeface="+mn-cs"/>
+        </a:defRPr>
+      </a:lvl2pPr>
+      <a:lvl3pPr marL="1143000" indent="-228600" algn="l" defTabSz="914400" rtl="0" eaLnBrk="1" latinLnBrk="0" hangingPunct="1">
+        <a:lnSpc>
+          <a:spcPct val="120000"/>
+        </a:lnSpc>
+        <a:spcBef>
+          <a:spcPts val="500"/>
+        </a:spcBef>
+        <a:buClr>
+          <a:schemeClr val="accent1"/>
+        </a:buClr>
+        <a:buSzPct val="100000"/>
+        <a:buFont typeface="Arial" panose="020B0604020202020204" pitchFamily="34" charset="0"/>
+        <a:buChar char="•"/>
+        <a:defRPr sz="1600" kern="1200">
+          <a:solidFill>
+            <a:schemeClr val="tx1"/>
+          </a:solidFill>
+          <a:effectLst/>
+          <a:latin typeface="Georgia" panose="02040502050405020303" pitchFamily="18" charset="0"/>
+          <a:ea typeface="+mn-ea"/>
+          <a:cs typeface="+mn-cs"/>
+        </a:defRPr>
+      </a:lvl3pPr>
+      <a:lvl4pPr marL="1600200" indent="-228600" algn="l" defTabSz="914400" rtl="0" eaLnBrk="1" latinLnBrk="0" hangingPunct="1">
+        <a:lnSpc>
+          <a:spcPct val="120000"/>
+        </a:lnSpc>
+        <a:spcBef>
+          <a:spcPts val="500"/>
+        </a:spcBef>
+        <a:buClr>
+          <a:schemeClr val="accent1"/>
+        </a:buClr>
+        <a:buSzPct val="100000"/>
+        <a:buFont typeface="Arial" panose="020B0604020202020204" pitchFamily="34" charset="0"/>
+        <a:buChar char="•"/>
+        <a:defRPr sz="1400" kern="1200" cap="none" baseline="0">
+          <a:solidFill>
+            <a:schemeClr val="tx1"/>
+          </a:solidFill>
+          <a:effectLst/>
+          <a:latin typeface="Georgia" panose="02040502050405020303" pitchFamily="18" charset="0"/>
+          <a:ea typeface="+mn-ea"/>
+          <a:cs typeface="+mn-cs"/>
+        </a:defRPr>
+      </a:lvl4pPr>
+      <a:lvl5pPr marL="2057400" indent="-228600" algn="l" defTabSz="914400" rtl="0" eaLnBrk="1" latinLnBrk="0" hangingPunct="1">
+        <a:lnSpc>
+          <a:spcPct val="120000"/>
+        </a:lnSpc>
+        <a:spcBef>
+          <a:spcPts val="500"/>
+        </a:spcBef>
+        <a:buClr>
+          <a:schemeClr val="accent1"/>
+        </a:buClr>
+        <a:buSzPct val="100000"/>
+        <a:buFont typeface="Arial" panose="020B0604020202020204" pitchFamily="34" charset="0"/>
+        <a:buChar char="•"/>
+        <a:defRPr sz="1200" kern="1200">
+          <a:solidFill>
+            <a:schemeClr val="tx1"/>
+          </a:solidFill>
+          <a:effectLst/>
+          <a:latin typeface="Georgia" panose="02040502050405020303" pitchFamily="18" charset="0"/>
+          <a:ea typeface="+mn-ea"/>
+          <a:cs typeface="+mn-cs"/>
+        </a:defRPr>
+      </a:lvl5pPr>
+      <a:lvl6pPr marL="2514600" indent="-228600" algn="l" defTabSz="914400" rtl="0" eaLnBrk="1" latinLnBrk="0" hangingPunct="1">
+        <a:lnSpc>
+          <a:spcPct val="120000"/>
+        </a:lnSpc>
+        <a:spcBef>
+          <a:spcPts val="500"/>
+        </a:spcBef>
+        <a:buClr>
+          <a:schemeClr val="accent1"/>
+        </a:buClr>
+        <a:buSzPct val="100000"/>
+        <a:buFont typeface="Arial" panose="020B0604020202020204" pitchFamily="34" charset="0"/>
+        <a:buChar char="•"/>
+        <a:defRPr sz="1200" kern="1200">
+          <a:solidFill>
+            <a:schemeClr val="tx1"/>
+          </a:solidFill>
+          <a:effectLst/>
           <a:latin typeface="+mn-lt"/>
           <a:ea typeface="+mn-ea"/>
           <a:cs typeface="+mn-cs"/>
         </a:defRPr>
       </a:lvl6pPr>
-      <a:lvl7pPr marL="2971800" indent="-228600" algn="l" defTabSz="457200" rtl="0" eaLnBrk="1" latinLnBrk="0" hangingPunct="1">
+      <a:lvl7pPr marL="2971800" indent="-228600" algn="l" defTabSz="914400" rtl="0" eaLnBrk="1" latinLnBrk="0" hangingPunct="1">
+        <a:lnSpc>
+          <a:spcPct val="120000"/>
+        </a:lnSpc>
         <a:spcBef>
-          <a:spcPct val="20000"/>
+          <a:spcPts val="500"/>
         </a:spcBef>
-        <a:buFont typeface="Arial"/>
+        <a:buClr>
+          <a:schemeClr val="accent1"/>
+        </a:buClr>
+        <a:buSzPct val="100000"/>
+        <a:buFont typeface="Arial" panose="020B0604020202020204" pitchFamily="34" charset="0"/>
         <a:buChar char="•"/>
-        <a:defRPr sz="2000" kern="1200">
+        <a:defRPr sz="1200" kern="1200">
           <a:solidFill>
             <a:schemeClr val="tx1"/>
           </a:solidFill>
+          <a:effectLst/>
           <a:latin typeface="+mn-lt"/>
           <a:ea typeface="+mn-ea"/>
           <a:cs typeface="+mn-cs"/>
         </a:defRPr>
       </a:lvl7pPr>
-      <a:lvl8pPr marL="3429000" indent="-228600" algn="l" defTabSz="457200" rtl="0" eaLnBrk="1" latinLnBrk="0" hangingPunct="1">
+      <a:lvl8pPr marL="3429000" indent="-228600" algn="l" defTabSz="914400" rtl="0" eaLnBrk="1" latinLnBrk="0" hangingPunct="1">
+        <a:lnSpc>
+          <a:spcPct val="120000"/>
+        </a:lnSpc>
         <a:spcBef>
-          <a:spcPct val="20000"/>
+          <a:spcPts val="500"/>
         </a:spcBef>
-        <a:buFont typeface="Arial"/>
+        <a:buClr>
+          <a:schemeClr val="accent1"/>
+        </a:buClr>
+        <a:buSzPct val="100000"/>
+        <a:buFont typeface="Arial" panose="020B0604020202020204" pitchFamily="34" charset="0"/>
         <a:buChar char="•"/>
-        <a:defRPr sz="2000" kern="1200">
+        <a:defRPr sz="1200" kern="1200" baseline="0">
           <a:solidFill>
             <a:schemeClr val="tx1"/>
           </a:solidFill>
+          <a:effectLst/>
           <a:latin typeface="+mn-lt"/>
           <a:ea typeface="+mn-ea"/>
           <a:cs typeface="+mn-cs"/>
         </a:defRPr>
       </a:lvl8pPr>
-      <a:lvl9pPr marL="3886200" indent="-228600" algn="l" defTabSz="457200" rtl="0" eaLnBrk="1" latinLnBrk="0" hangingPunct="1">
+      <a:lvl9pPr marL="3886200" indent="-228600" algn="l" defTabSz="914400" rtl="0" eaLnBrk="1" latinLnBrk="0" hangingPunct="1">
+        <a:lnSpc>
+          <a:spcPct val="120000"/>
+        </a:lnSpc>
         <a:spcBef>
-          <a:spcPct val="20000"/>
+          <a:spcPts val="500"/>
         </a:spcBef>
-        <a:buFont typeface="Arial"/>
+        <a:buClr>
+          <a:schemeClr val="accent1"/>
+        </a:buClr>
+        <a:buSzPct val="100000"/>
+        <a:buFont typeface="Arial" panose="020B0604020202020204" pitchFamily="34" charset="0"/>
         <a:buChar char="•"/>
-        <a:defRPr sz="2000" kern="1200">
+        <a:defRPr sz="1200" kern="1200" baseline="0">
           <a:solidFill>
             <a:schemeClr val="tx1"/>
           </a:solidFill>
+          <a:effectLst/>
           <a:latin typeface="+mn-lt"/>
           <a:ea typeface="+mn-ea"/>
           <a:cs typeface="+mn-cs"/>
@@ -2993,7 +4026,7 @@
       <a:defPPr>
         <a:defRPr lang="en-US"/>
       </a:defPPr>
-      <a:lvl1pPr marL="0" algn="l" defTabSz="457200" rtl="0" eaLnBrk="1" latinLnBrk="0" hangingPunct="1">
+      <a:lvl1pPr marL="0" algn="l" defTabSz="914400" rtl="0" eaLnBrk="1" latinLnBrk="0" hangingPunct="1">
         <a:defRPr sz="1800" kern="1200">
           <a:solidFill>
             <a:schemeClr val="tx1"/>
@@ -3003,7 +4036,7 @@
           <a:cs typeface="+mn-cs"/>
         </a:defRPr>
       </a:lvl1pPr>
-      <a:lvl2pPr marL="457200" algn="l" defTabSz="457200" rtl="0" eaLnBrk="1" latinLnBrk="0" hangingPunct="1">
+      <a:lvl2pPr marL="457200" algn="l" defTabSz="914400" rtl="0" eaLnBrk="1" latinLnBrk="0" hangingPunct="1">
         <a:defRPr sz="1800" kern="1200">
           <a:solidFill>
             <a:schemeClr val="tx1"/>
@@ -3013,7 +4046,7 @@
           <a:cs typeface="+mn-cs"/>
         </a:defRPr>
       </a:lvl2pPr>
-      <a:lvl3pPr marL="914400" algn="l" defTabSz="457200" rtl="0" eaLnBrk="1" latinLnBrk="0" hangingPunct="1">
+      <a:lvl3pPr marL="914400" algn="l" defTabSz="914400" rtl="0" eaLnBrk="1" latinLnBrk="0" hangingPunct="1">
         <a:defRPr sz="1800" kern="1200">
           <a:solidFill>
             <a:schemeClr val="tx1"/>
@@ -3023,7 +4056,7 @@
           <a:cs typeface="+mn-cs"/>
         </a:defRPr>
       </a:lvl3pPr>
-      <a:lvl4pPr marL="1371600" algn="l" defTabSz="457200" rtl="0" eaLnBrk="1" latinLnBrk="0" hangingPunct="1">
+      <a:lvl4pPr marL="1371600" algn="l" defTabSz="914400" rtl="0" eaLnBrk="1" latinLnBrk="0" hangingPunct="1">
         <a:defRPr sz="1800" kern="1200">
           <a:solidFill>
             <a:schemeClr val="tx1"/>
@@ -3033,7 +4066,7 @@
           <a:cs typeface="+mn-cs"/>
         </a:defRPr>
       </a:lvl4pPr>
-      <a:lvl5pPr marL="1828800" algn="l" defTabSz="457200" rtl="0" eaLnBrk="1" latinLnBrk="0" hangingPunct="1">
+      <a:lvl5pPr marL="1828800" algn="l" defTabSz="914400" rtl="0" eaLnBrk="1" latinLnBrk="0" hangingPunct="1">
         <a:defRPr sz="1800" kern="1200">
           <a:solidFill>
             <a:schemeClr val="tx1"/>
@@ -3043,7 +4076,7 @@
           <a:cs typeface="+mn-cs"/>
         </a:defRPr>
       </a:lvl5pPr>
-      <a:lvl6pPr marL="2286000" algn="l" defTabSz="457200" rtl="0" eaLnBrk="1" latinLnBrk="0" hangingPunct="1">
+      <a:lvl6pPr marL="2286000" algn="l" defTabSz="914400" rtl="0" eaLnBrk="1" latinLnBrk="0" hangingPunct="1">
         <a:defRPr sz="1800" kern="1200">
           <a:solidFill>
             <a:schemeClr val="tx1"/>
@@ -3053,7 +4086,7 @@
           <a:cs typeface="+mn-cs"/>
         </a:defRPr>
       </a:lvl6pPr>
-      <a:lvl7pPr marL="2743200" algn="l" defTabSz="457200" rtl="0" eaLnBrk="1" latinLnBrk="0" hangingPunct="1">
+      <a:lvl7pPr marL="2743200" algn="l" defTabSz="914400" rtl="0" eaLnBrk="1" latinLnBrk="0" hangingPunct="1">
         <a:defRPr sz="1800" kern="1200">
           <a:solidFill>
             <a:schemeClr val="tx1"/>
@@ -3063,7 +4096,7 @@
           <a:cs typeface="+mn-cs"/>
         </a:defRPr>
       </a:lvl7pPr>
-      <a:lvl8pPr marL="3200400" algn="l" defTabSz="457200" rtl="0" eaLnBrk="1" latinLnBrk="0" hangingPunct="1">
+      <a:lvl8pPr marL="3200400" algn="l" defTabSz="914400" rtl="0" eaLnBrk="1" latinLnBrk="0" hangingPunct="1">
         <a:defRPr sz="1800" kern="1200">
           <a:solidFill>
             <a:schemeClr val="tx1"/>
@@ -3073,7 +4106,7 @@
           <a:cs typeface="+mn-cs"/>
         </a:defRPr>
       </a:lvl8pPr>
-      <a:lvl9pPr marL="3657600" algn="l" defTabSz="457200" rtl="0" eaLnBrk="1" latinLnBrk="0" hangingPunct="1">
+      <a:lvl9pPr marL="3657600" algn="l" defTabSz="914400" rtl="0" eaLnBrk="1" latinLnBrk="0" hangingPunct="1">
         <a:defRPr sz="1800" kern="1200">
           <a:solidFill>
             <a:schemeClr val="tx1"/>
@@ -3098,128 +4131,107 @@
         <p:nvPr/>
       </p:nvGrpSpPr>
       <p:grpSpPr/>
-      <p:pic>
-        <p:nvPicPr>
-          <p:cNvPr id="2" name="Picture 1" descr="image1.jpg"/>
-          <p:cNvPicPr>
-            <a:picLocks noChangeAspect="1"/>
-          </p:cNvPicPr>
-          <p:nvPr/>
-        </p:nvPicPr>
-        <p:blipFill>
-          <a:blip r:embed="rId2"/>
-          <a:stretch>
-            <a:fillRect/>
-          </a:stretch>
-        </p:blipFill>
-        <p:spPr>
-          <a:xfrm>
-            <a:off x="0" y="6126480"/>
-            <a:ext cx="12192000" cy="742950"/>
-          </a:xfrm>
-          <a:prstGeom prst="rect">
-            <a:avLst/>
-          </a:prstGeom>
-        </p:spPr>
-      </p:pic>
-      <p:pic>
-        <p:nvPicPr>
-          <p:cNvPr id="3" name="Picture 2" descr="image2.png"/>
-          <p:cNvPicPr>
-            <a:picLocks noChangeAspect="1"/>
-          </p:cNvPicPr>
-          <p:nvPr/>
-        </p:nvPicPr>
-        <p:blipFill>
-          <a:blip r:embed="rId3"/>
-          <a:stretch>
-            <a:fillRect/>
-          </a:stretch>
-        </p:blipFill>
-        <p:spPr>
-          <a:xfrm>
-            <a:off x="0" y="0"/>
-            <a:ext cx="12192000" cy="6858000"/>
-          </a:xfrm>
-          <a:prstGeom prst="rect">
-            <a:avLst/>
-          </a:prstGeom>
-        </p:spPr>
-      </p:pic>
-      <p:sp>
-        <p:nvSpPr>
-          <p:cNvPr id="4" name="Rectangle 3"/>
-          <p:cNvSpPr/>
-          <p:nvPr/>
-        </p:nvSpPr>
-        <p:spPr>
-          <a:xfrm>
-            <a:off x="2420471" y="887991"/>
-            <a:ext cx="8624048" cy="2541431"/>
-          </a:xfrm>
-          <a:prstGeom prst="rect">
-            <a:avLst/>
-          </a:prstGeom>
-        </p:spPr>
-        <p:style>
-          <a:lnRef idx="1">
-            <a:schemeClr val="accent1"/>
-          </a:lnRef>
-          <a:fillRef idx="3">
-            <a:schemeClr val="accent1"/>
-          </a:fillRef>
-          <a:effectRef idx="2">
-            <a:schemeClr val="accent1"/>
-          </a:effectRef>
-          <a:fontRef idx="minor">
-            <a:schemeClr val="lt1"/>
-          </a:fontRef>
-        </p:style>
-        <p:txBody>
-          <a:bodyPr rtlCol="0" anchor="ctr"/>
-          <a:lstStyle/>
-          <a:p>
-            <a:r>
-              <a:t>The Saint Luke GuildCheckout.com Requested Info</a:t>
-            </a:r>
-          </a:p>
-        </p:txBody>
-      </p:sp>
-      <p:sp>
-        <p:nvSpPr>
-          <p:cNvPr id="5" name="Rectangle 4"/>
-          <p:cNvSpPr/>
-          <p:nvPr/>
-        </p:nvSpPr>
-        <p:spPr>
-          <a:xfrm>
-            <a:off x="5087501" y="4508825"/>
-            <a:ext cx="7104499" cy="1605104"/>
-          </a:xfrm>
-          <a:prstGeom prst="rect">
-            <a:avLst/>
-          </a:prstGeom>
-        </p:spPr>
-        <p:style>
-          <a:lnRef idx="1">
-            <a:schemeClr val="accent1"/>
-          </a:lnRef>
-          <a:fillRef idx="3">
-            <a:schemeClr val="accent1"/>
-          </a:fillRef>
-          <a:effectRef idx="2">
-            <a:schemeClr val="accent1"/>
-          </a:effectRef>
-          <a:fontRef idx="minor">
-            <a:schemeClr val="lt1"/>
-          </a:fontRef>
-        </p:style>
-        <p:txBody>
-          <a:bodyPr rtlCol="0" anchor="ctr"/>
-          <a:lstStyle/>
-          <a:p>
-            <a:r>
-              <a:t>Douglas CoombsJuly 1, 2022, Rev. 1</a:t>
+      <p:sp>
+        <p:nvSpPr>
+          <p:cNvPr id="2" name="Title 1"/>
+          <p:cNvSpPr>
+            <a:spLocks noGrp="1"/>
+          </p:cNvSpPr>
+          <p:nvPr>
+            <p:ph type="ctrTitle"/>
+          </p:nvPr>
+        </p:nvSpPr>
+        <p:spPr>
+          <a:xfrm>
+            <a:off x="2420508" y="887974"/>
+            <a:ext cx="8624072" cy="2541392"/>
+          </a:xfrm>
+        </p:spPr>
+        <p:txBody>
+          <a:bodyPr>
+            <a:normAutofit fontScale="90000"/>
+          </a:bodyPr>
+          <a:lstStyle/>
+          <a:p>
+            <a:r>
+              <a:rPr cap="none">
+                <a:latin typeface="+mn-lt"/>
+                <a:cs typeface="Apple Chancery"/>
+              </a:rPr>
+              <a:t>The Saint Luke Guild</a:t>
+            </a:r>
+            <a:br>
+              <a:rPr cap="none">
+                <a:latin typeface="+mn-lt"/>
+                <a:cs typeface="Apple Chancery"/>
+              </a:rPr>
+            </a:br>
+            <a:r>
+              <a:rPr cap="none">
+                <a:latin typeface="+mn-lt"/>
+                <a:cs typeface="Apple Chancery"/>
+              </a:rPr>
+              <a:t>Checkout.com </a:t>
+            </a:r>
+            <a:br>
+              <a:rPr cap="none">
+                <a:latin typeface="+mn-lt"/>
+                <a:cs typeface="Apple Chancery"/>
+              </a:rPr>
+            </a:br>
+            <a:r>
+              <a:rPr cap="none">
+                <a:latin typeface="+mn-lt"/>
+                <a:cs typeface="Apple Chancery"/>
+              </a:rPr>
+              <a:t>Requested Info</a:t>
+            </a:r>
+          </a:p>
+        </p:txBody>
+      </p:sp>
+      <p:sp>
+        <p:nvSpPr>
+          <p:cNvPr id="3" name="Subtitle 2"/>
+          <p:cNvSpPr>
+            <a:spLocks noGrp="1"/>
+          </p:cNvSpPr>
+          <p:nvPr>
+            <p:ph type="subTitle" idx="1"/>
+          </p:nvPr>
+        </p:nvSpPr>
+        <p:spPr>
+          <a:xfrm>
+            <a:off x="5087539" y="4508815"/>
+            <a:ext cx="7104522" cy="1605138"/>
+          </a:xfrm>
+        </p:spPr>
+        <p:txBody>
+          <a:bodyPr>
+            <a:normAutofit/>
+          </a:bodyPr>
+          <a:lstStyle/>
+          <a:p>
+            <a:pPr lvl="0"/>
+            <a:r>
+              <a:rPr cap="none" sz="2400">
+                <a:cs typeface="Apple Chancery"/>
+              </a:rPr>
+              <a:t>Douglas Coombs</a:t>
+            </a:r>
+          </a:p>
+          <a:p>
+            <a:pPr lvl="0"/>
+            <a:r>
+              <a:rPr cap="none" sz="2400">
+                <a:cs typeface="Apple Chancery"/>
+              </a:rPr>
+              <a:t>July 1, </a:t>
+            </a:r>
+            <a:r>
+              <a:rPr cap="none" sz="2400">
+                <a:cs typeface="Apple Chancery"/>
+              </a:rPr>
+              <a:t>2022, Rev. 1</a:t>
             </a:r>
           </a:p>
         </p:txBody>
@@ -3244,38 +4256,23 @@
       <p:grpSpPr/>
       <p:sp>
         <p:nvSpPr>
-          <p:cNvPr id="2" name="Rectangle 1"/>
-          <p:cNvSpPr/>
-          <p:nvPr/>
-        </p:nvSpPr>
-        <p:spPr>
-          <a:xfrm>
-            <a:off x="318053" y="1"/>
-            <a:ext cx="10736802" cy="868705"/>
-          </a:xfrm>
-          <a:prstGeom prst="rect">
-            <a:avLst/>
-          </a:prstGeom>
-        </p:spPr>
-        <p:style>
-          <a:lnRef idx="1">
-            <a:schemeClr val="accent1"/>
-          </a:lnRef>
-          <a:fillRef idx="3">
-            <a:schemeClr val="accent1"/>
-          </a:fillRef>
-          <a:effectRef idx="2">
-            <a:schemeClr val="accent1"/>
-          </a:effectRef>
-          <a:fontRef idx="minor">
-            <a:schemeClr val="lt1"/>
-          </a:fontRef>
-        </p:style>
-        <p:txBody>
-          <a:bodyPr rtlCol="0" anchor="ctr"/>
-          <a:lstStyle/>
-          <a:p>
-            <a:r>
+          <p:cNvPr id="2" name="Title 1"/>
+          <p:cNvSpPr>
+            <a:spLocks noGrp="1"/>
+          </p:cNvSpPr>
+          <p:nvPr>
+            <p:ph type="title"/>
+          </p:nvPr>
+        </p:nvSpPr>
+        <p:spPr/>
+        <p:txBody>
+          <a:bodyPr>
+            <a:normAutofit/>
+          </a:bodyPr>
+          <a:lstStyle/>
+          <a:p>
+            <a:r>
+              <a:rPr/>
               <a:t>Regulatory Documents</a:t>
             </a:r>
           </a:p>
@@ -3283,39 +4280,95 @@
       </p:sp>
       <p:sp>
         <p:nvSpPr>
-          <p:cNvPr id="3" name="Rectangle 2"/>
-          <p:cNvSpPr/>
-          <p:nvPr/>
-        </p:nvSpPr>
-        <p:spPr>
-          <a:xfrm>
-            <a:off x="480061" y="938440"/>
-            <a:ext cx="10386722" cy="5687646"/>
-          </a:xfrm>
-          <a:prstGeom prst="rect">
-            <a:avLst/>
-          </a:prstGeom>
-        </p:spPr>
-        <p:style>
-          <a:lnRef idx="1">
-            <a:schemeClr val="accent1"/>
-          </a:lnRef>
-          <a:fillRef idx="3">
-            <a:schemeClr val="accent1"/>
-          </a:fillRef>
-          <a:effectRef idx="2">
-            <a:schemeClr val="accent1"/>
-          </a:effectRef>
-          <a:fontRef idx="minor">
-            <a:schemeClr val="lt1"/>
-          </a:fontRef>
-        </p:style>
-        <p:txBody>
-          <a:bodyPr rtlCol="0" anchor="ctr"/>
-          <a:lstStyle/>
-          <a:p>
-            <a:r>
-              <a:t>License required to operate the businessNM_SoS_InitialReport_2016917025-502856.pdfNM_ArticlesOfIncorporation_AoI_Approved.pdfLicenses for all jurisdictions in which you intend to provide your services.Starting in NM.  Other locations unknown, so far.  Copy of AML/KYC policy and proceduresNot sure what this would look like.  Are there examples?Completed AML QuestionnaireHas this been done?</a:t>
+          <p:cNvPr id="3" name="Content Placeholder 2"/>
+          <p:cNvSpPr>
+            <a:spLocks noGrp="1"/>
+          </p:cNvSpPr>
+          <p:nvPr>
+            <p:ph type="obj" idx="1"/>
+          </p:nvPr>
+        </p:nvSpPr>
+        <p:spPr/>
+        <p:txBody>
+          <a:bodyPr wrap="square"/>
+          <a:lstStyle/>
+          <a:p>
+            <a:pPr lvl="0"/>
+            <a:r>
+              <a:t>License required to operate the business</a:t>
+            </a:r>
+          </a:p>
+          <a:p>
+            <a:pPr lvl="1"/>
+            <a:r>
+              <a:rPr>
+                <a:solidFill>
+                  <a:schemeClr val="accent6"/>
+                </a:solidFill>
+              </a:rPr>
+              <a:t>NM_SoS_InitialReport_2016917025-502856.pdf</a:t>
+            </a:r>
+          </a:p>
+          <a:p>
+            <a:pPr lvl="1"/>
+            <a:r>
+              <a:rPr>
+                <a:solidFill>
+                  <a:schemeClr val="accent6"/>
+                </a:solidFill>
+              </a:rPr>
+              <a:t>NM_ArticlesOfIncorporation_AoI_Approved.pdf</a:t>
+            </a:r>
+          </a:p>
+          <a:p>
+            <a:pPr lvl="0"/>
+            <a:r>
+              <a:t>Licenses for all jurisdictions in which you intend to provide your services.</a:t>
+            </a:r>
+          </a:p>
+          <a:p>
+            <a:pPr lvl="1"/>
+            <a:r>
+              <a:rPr>
+                <a:solidFill>
+                  <a:schemeClr val="accent6"/>
+                </a:solidFill>
+              </a:rPr>
+              <a:t>Starting in NM.  Other locations unknown, so far.</a:t>
+            </a:r>
+          </a:p>
+          <a:p>
+            <a:pPr lvl="0"/>
+            <a:r>
+              <a:t>Copy of AML/KYC policy and procedures</a:t>
+            </a:r>
+          </a:p>
+          <a:p>
+            <a:pPr lvl="1"/>
+            <a:r>
+              <a:rPr>
+                <a:solidFill>
+                  <a:schemeClr val="accent6"/>
+                </a:solidFill>
+              </a:rPr>
+              <a:t>Not sure what this would look like.  Are there examples?</a:t>
+            </a:r>
+          </a:p>
+          <a:p>
+            <a:pPr lvl="0"/>
+            <a:r>
+              <a:t>Completed AML Questionnaire</a:t>
+            </a:r>
+          </a:p>
+          <a:p>
+            <a:pPr lvl="1"/>
+            <a:r>
+              <a:rPr>
+                <a:solidFill>
+                  <a:schemeClr val="accent6"/>
+                </a:solidFill>
+              </a:rPr>
+              <a:t>Has this been done?</a:t>
             </a:r>
           </a:p>
         </p:txBody>
@@ -3340,38 +4393,23 @@
       <p:grpSpPr/>
       <p:sp>
         <p:nvSpPr>
-          <p:cNvPr id="2" name="Rectangle 1"/>
-          <p:cNvSpPr/>
-          <p:nvPr/>
-        </p:nvSpPr>
-        <p:spPr>
-          <a:xfrm>
-            <a:off x="318053" y="1"/>
-            <a:ext cx="10736802" cy="868705"/>
-          </a:xfrm>
-          <a:prstGeom prst="rect">
-            <a:avLst/>
-          </a:prstGeom>
-        </p:spPr>
-        <p:style>
-          <a:lnRef idx="1">
-            <a:schemeClr val="accent1"/>
-          </a:lnRef>
-          <a:fillRef idx="3">
-            <a:schemeClr val="accent1"/>
-          </a:fillRef>
-          <a:effectRef idx="2">
-            <a:schemeClr val="accent1"/>
-          </a:effectRef>
-          <a:fontRef idx="minor">
-            <a:schemeClr val="lt1"/>
-          </a:fontRef>
-        </p:style>
-        <p:txBody>
-          <a:bodyPr rtlCol="0" anchor="ctr"/>
-          <a:lstStyle/>
-          <a:p>
-            <a:r>
+          <p:cNvPr id="2" name="Title 1"/>
+          <p:cNvSpPr>
+            <a:spLocks noGrp="1"/>
+          </p:cNvSpPr>
+          <p:nvPr>
+            <p:ph type="title"/>
+          </p:nvPr>
+        </p:nvSpPr>
+        <p:spPr/>
+        <p:txBody>
+          <a:bodyPr>
+            <a:normAutofit/>
+          </a:bodyPr>
+          <a:lstStyle/>
+          <a:p>
+            <a:r>
+              <a:rPr/>
               <a:t>Corporate Documents</a:t>
             </a:r>
           </a:p>
@@ -3379,39 +4417,55 @@
       </p:sp>
       <p:sp>
         <p:nvSpPr>
-          <p:cNvPr id="3" name="Rectangle 2"/>
-          <p:cNvSpPr/>
-          <p:nvPr/>
-        </p:nvSpPr>
-        <p:spPr>
-          <a:xfrm>
-            <a:off x="480061" y="938440"/>
-            <a:ext cx="10386722" cy="5687646"/>
-          </a:xfrm>
-          <a:prstGeom prst="rect">
-            <a:avLst/>
-          </a:prstGeom>
-        </p:spPr>
-        <p:style>
-          <a:lnRef idx="1">
-            <a:schemeClr val="accent1"/>
-          </a:lnRef>
-          <a:fillRef idx="3">
-            <a:schemeClr val="accent1"/>
-          </a:fillRef>
-          <a:effectRef idx="2">
-            <a:schemeClr val="accent1"/>
-          </a:effectRef>
-          <a:fontRef idx="minor">
-            <a:schemeClr val="lt1"/>
-          </a:fontRef>
-        </p:style>
-        <p:txBody>
-          <a:bodyPr rtlCol="0" anchor="ctr"/>
-          <a:lstStyle/>
-          <a:p>
-            <a:r>
-              <a:t>Please provide 501c3 document to confirm tax exempt statusThe following are attachedIRS_f1023ez_SaintLukeGuild_20210711_AsSubmitted.pdfIRS_fSS4_EIN_Letter_CP575Notice_1622224687610.pdf</a:t>
+          <p:cNvPr id="3" name="Content Placeholder 2"/>
+          <p:cNvSpPr>
+            <a:spLocks noGrp="1"/>
+          </p:cNvSpPr>
+          <p:nvPr>
+            <p:ph type="obj" idx="1"/>
+          </p:nvPr>
+        </p:nvSpPr>
+        <p:spPr/>
+        <p:txBody>
+          <a:bodyPr wrap="square"/>
+          <a:lstStyle/>
+          <a:p>
+            <a:pPr lvl="0"/>
+            <a:r>
+              <a:t>Please provide 501c3 document to confirm tax exempt status</a:t>
+            </a:r>
+          </a:p>
+          <a:p>
+            <a:pPr lvl="0"/>
+            <a:r>
+              <a:rPr>
+                <a:solidFill>
+                  <a:schemeClr val="accent6"/>
+                </a:solidFill>
+              </a:rPr>
+              <a:t>The following are attached</a:t>
+            </a:r>
+          </a:p>
+          <a:p>
+            <a:pPr lvl="1"/>
+            <a:r>
+              <a:rPr>
+                <a:solidFill>
+                  <a:schemeClr val="accent6"/>
+                </a:solidFill>
+              </a:rPr>
+              <a:t>IRS_f1023ez_SaintLukeGuild_20210711_AsSubmitted.pdf</a:t>
+            </a:r>
+          </a:p>
+          <a:p>
+            <a:pPr lvl="1"/>
+            <a:r>
+              <a:rPr>
+                <a:solidFill>
+                  <a:schemeClr val="accent6"/>
+                </a:solidFill>
+              </a:rPr>
+              <a:t>IRS_fSS4_EIN_Letter_CP575Notice_1622224687610.pdf</a:t>
             </a:r>
           </a:p>
         </p:txBody>
@@ -3436,78 +4490,163 @@
       <p:grpSpPr/>
       <p:sp>
         <p:nvSpPr>
-          <p:cNvPr id="2" name="Rectangle 1"/>
-          <p:cNvSpPr/>
-          <p:nvPr/>
-        </p:nvSpPr>
-        <p:spPr>
-          <a:xfrm>
-            <a:off x="318053" y="1"/>
-            <a:ext cx="10736802" cy="868705"/>
-          </a:xfrm>
-          <a:prstGeom prst="rect">
-            <a:avLst/>
-          </a:prstGeom>
-        </p:spPr>
-        <p:style>
-          <a:lnRef idx="1">
-            <a:schemeClr val="accent1"/>
-          </a:lnRef>
-          <a:fillRef idx="3">
-            <a:schemeClr val="accent1"/>
-          </a:fillRef>
-          <a:effectRef idx="2">
-            <a:schemeClr val="accent1"/>
-          </a:effectRef>
-          <a:fontRef idx="minor">
-            <a:schemeClr val="lt1"/>
-          </a:fontRef>
-        </p:style>
-        <p:txBody>
-          <a:bodyPr rtlCol="0" anchor="ctr"/>
-          <a:lstStyle/>
-          <a:p>
-            <a:r>
-              <a:t>Transaction InformationData Request</a:t>
-            </a:r>
-          </a:p>
-        </p:txBody>
-      </p:sp>
-      <p:sp>
-        <p:nvSpPr>
-          <p:cNvPr id="3" name="Rectangle 2"/>
-          <p:cNvSpPr/>
-          <p:nvPr/>
-        </p:nvSpPr>
-        <p:spPr>
-          <a:xfrm>
-            <a:off x="480061" y="938440"/>
-            <a:ext cx="11496786" cy="5687646"/>
-          </a:xfrm>
-          <a:prstGeom prst="rect">
-            <a:avLst/>
-          </a:prstGeom>
-        </p:spPr>
-        <p:style>
-          <a:lnRef idx="1">
-            <a:schemeClr val="accent1"/>
-          </a:lnRef>
-          <a:fillRef idx="3">
-            <a:schemeClr val="accent1"/>
-          </a:fillRef>
-          <a:effectRef idx="2">
-            <a:schemeClr val="accent1"/>
-          </a:effectRef>
-          <a:fontRef idx="minor">
-            <a:schemeClr val="lt1"/>
-          </a:fontRef>
-        </p:style>
-        <p:txBody>
-          <a:bodyPr rtlCol="0" anchor="ctr"/>
-          <a:lstStyle/>
-          <a:p>
-            <a:r>
-              <a:t>A payment flow to properly understand what Checkout.com is exactly processing for.See the next slidePlease provide further details on what the merchant will be accepting payments for.We are accepting donations to fundArt displays at schoolsProjects to help schools in the selection of art (e.g., a timeline/database of art masterpieces)Costs to attend educational conferences and educate schools on the value of art reproductionsPlease provide the URL where payments will be accepted. Please also provide demo or Test login details to verify the websitewww.saintlukeguild.com/projects (this will be updated when we begin taking payments)Please confirm the annual processing volumeMaybe $5k-$10k/year to begin.  It is hard to say.  We currently bring in around $20k/year in large checks.  Most larger donors will probably still choose to give via check.</a:t>
+          <p:cNvPr id="2" name="Title 1"/>
+          <p:cNvSpPr>
+            <a:spLocks noGrp="1"/>
+          </p:cNvSpPr>
+          <p:nvPr>
+            <p:ph type="title"/>
+          </p:nvPr>
+        </p:nvSpPr>
+        <p:spPr/>
+        <p:txBody>
+          <a:bodyPr>
+            <a:normAutofit fontScale="90000"/>
+          </a:bodyPr>
+          <a:lstStyle/>
+          <a:p>
+            <a:r>
+              <a:rPr/>
+              <a:t>Transaction Information</a:t>
+            </a:r>
+            <a:br/>
+            <a:r>
+              <a:rPr/>
+              <a:t>Data Request</a:t>
+            </a:r>
+            <a:br/>
+          </a:p>
+        </p:txBody>
+      </p:sp>
+      <p:sp>
+        <p:nvSpPr>
+          <p:cNvPr id="3" name="Content Placeholder 2"/>
+          <p:cNvSpPr>
+            <a:spLocks noGrp="1"/>
+          </p:cNvSpPr>
+          <p:nvPr>
+            <p:ph type="obj" idx="1"/>
+          </p:nvPr>
+        </p:nvSpPr>
+        <p:spPr>
+          <a:xfrm>
+            <a:off x="480060" y="938449"/>
+            <a:ext cx="11496751" cy="5687659"/>
+          </a:xfrm>
+        </p:spPr>
+        <p:txBody>
+          <a:bodyPr wrap="square">
+            <a:normAutofit/>
+          </a:bodyPr>
+          <a:lstStyle/>
+          <a:p>
+            <a:pPr lvl="0"/>
+            <a:r>
+              <a:t>A payment flow to properly understand what Checkout.com is exactly processing for.</a:t>
+            </a:r>
+          </a:p>
+          <a:p>
+            <a:pPr lvl="1"/>
+            <a:r>
+              <a:rPr>
+                <a:solidFill>
+                  <a:schemeClr val="accent6"/>
+                </a:solidFill>
+              </a:rPr>
+              <a:t>See the next slide</a:t>
+            </a:r>
+          </a:p>
+          <a:p>
+            <a:pPr lvl="0"/>
+            <a:r>
+              <a:t>Please provide further details on what the merchant will be accepting payments for.</a:t>
+            </a:r>
+          </a:p>
+          <a:p>
+            <a:pPr lvl="1"/>
+            <a:r>
+              <a:rPr>
+                <a:solidFill>
+                  <a:schemeClr val="accent6"/>
+                </a:solidFill>
+              </a:rPr>
+              <a:t>We are accepting donations to fund</a:t>
+            </a:r>
+          </a:p>
+          <a:p>
+            <a:pPr lvl="2"/>
+            <a:r>
+              <a:rPr>
+                <a:solidFill>
+                  <a:schemeClr val="accent6"/>
+                </a:solidFill>
+              </a:rPr>
+              <a:t>Art displays at schools</a:t>
+            </a:r>
+          </a:p>
+          <a:p>
+            <a:pPr lvl="2"/>
+            <a:r>
+              <a:rPr>
+                <a:solidFill>
+                  <a:schemeClr val="accent6"/>
+                </a:solidFill>
+              </a:rPr>
+              <a:t>Projects to help schools in the selection of art (e.g., a timeline/database of art masterpieces)</a:t>
+            </a:r>
+          </a:p>
+          <a:p>
+            <a:pPr lvl="2"/>
+            <a:r>
+              <a:rPr>
+                <a:solidFill>
+                  <a:schemeClr val="accent6"/>
+                </a:solidFill>
+              </a:rPr>
+              <a:t>Costs to attend educational conferences and educate schools on the value of art reproductions</a:t>
+            </a:r>
+          </a:p>
+          <a:p>
+            <a:pPr lvl="0"/>
+            <a:r>
+              <a:t>Please provide the URL where payments will be accepted. Please also provide demo or Test login details to verify the website</a:t>
+            </a:r>
+          </a:p>
+          <a:p>
+            <a:pPr lvl="1"/>
+            <a:r>
+              <a:rPr>
+                <a:solidFill>
+                  <a:schemeClr val="accent6"/>
+                </a:solidFill>
+                <a:hlinkClick r:id="rId2"/>
+              </a:rPr>
+              <a:t>www.saintlukeguild.com/projects</a:t>
+            </a:r>
+            <a:r>
+              <a:rPr>
+                <a:solidFill>
+                  <a:schemeClr val="accent6"/>
+                </a:solidFill>
+              </a:rPr>
+              <a:t> (this will be updated when we begin taking payments)</a:t>
+            </a:r>
+          </a:p>
+          <a:p>
+            <a:pPr lvl="0"/>
+            <a:r>
+              <a:t>Please confirm the annual processing volume</a:t>
+            </a:r>
+          </a:p>
+          <a:p>
+            <a:pPr lvl="1"/>
+            <a:r>
+              <a:rPr>
+                <a:solidFill>
+                  <a:schemeClr val="accent6"/>
+                </a:solidFill>
+              </a:rPr>
+              <a:t>Maybe $5k-$10k/year to begin.  It is hard to say.  We currently bring in around $20k/year in large checks.  Most larger donors will probably still choose to give via check.</a:t>
             </a:r>
           </a:p>
         </p:txBody>
@@ -3530,59 +4669,102 @@
         <p:nvPr/>
       </p:nvGrpSpPr>
       <p:grpSpPr/>
-      <p:cxnSp>
-        <p:nvCxnSpPr>
-          <p:cNvPr id="2" name="Connector 1"/>
-          <p:cNvCxnSpPr/>
+      <p:sp>
+        <p:nvSpPr>
+          <p:cNvPr id="2" name="Title 1"/>
+          <p:cNvSpPr>
+            <a:spLocks noGrp="1"/>
+          </p:cNvSpPr>
+          <p:nvPr>
+            <p:ph type="title"/>
+          </p:nvPr>
+        </p:nvSpPr>
+        <p:spPr>
+          <a:xfrm>
+            <a:off x="110825" y="46177"/>
+            <a:ext cx="12081144" cy="876727"/>
+          </a:xfrm>
+        </p:spPr>
+        <p:txBody>
+          <a:bodyPr>
+            <a:normAutofit/>
+          </a:bodyPr>
+          <a:lstStyle/>
+          <a:p>
+            <a:r>
+              <a:rPr/>
+              <a:t>Transaction Flow Chart for Website Donor Funds</a:t>
+            </a:r>
+          </a:p>
+        </p:txBody>
+      </p:sp>
+      <p:sp>
+        <p:nvSpPr>
+          <p:cNvPr id="3" name="Content Placeholder 2"/>
+          <p:cNvSpPr>
+            <a:spLocks noGrp="1"/>
+          </p:cNvSpPr>
+          <p:nvPr>
+            <p:ph type="obj" idx="1"/>
+          </p:nvPr>
+        </p:nvSpPr>
+        <p:spPr>
+          <a:xfrm>
+            <a:off x="110825" y="4590288"/>
+            <a:ext cx="5541630" cy="1519184"/>
+          </a:xfrm>
+        </p:spPr>
+        <p:txBody>
+          <a:bodyPr wrap="square">
+            <a:normAutofit fontScale="92500" lnSpcReduction="20000"/>
+          </a:bodyPr>
+          <a:lstStyle/>
+          <a:p>
+            <a:pPr lvl="0"/>
+            <a:r>
+              <a:rPr sz="2800"/>
+              <a:t>General support projects are not </a:t>
+            </a:r>
+            <a:br/>
+            <a:r>
+              <a:rPr sz="2800"/>
+              <a:t>specific to any school</a:t>
+            </a:r>
+          </a:p>
+          <a:p>
+            <a:pPr lvl="0"/>
+            <a:r>
+              <a:rPr sz="2800"/>
+              <a:t>Project costs are school specific</a:t>
+            </a:r>
+          </a:p>
+        </p:txBody>
+      </p:sp>
+      <p:sp>
+        <p:nvSpPr>
+          <p:cNvPr id="4" name="Rounded Rectangle 3"/>
+          <p:cNvSpPr/>
           <p:nvPr/>
-        </p:nvCxnSpPr>
-        <p:spPr>
-          <a:xfrm>
-            <a:off x="6539551" y="2438050"/>
-            <a:ext cx="1726089" cy="2954840"/>
-          </a:xfrm>
-          <a:prstGeom prst="bentConnector3">
+        </p:nvSpPr>
+        <p:spPr>
+          <a:xfrm>
+            <a:off x="110825" y="2712476"/>
+            <a:ext cx="2932572" cy="1750344"/>
+          </a:xfrm>
+          <a:prstGeom prst="roundRect">
             <a:avLst/>
           </a:prstGeom>
         </p:spPr>
         <p:style>
           <a:lnRef idx="2">
-            <a:schemeClr val="accent1"/>
+            <a:schemeClr val="accent1">
+              <a:shade val="50000"/>
+            </a:schemeClr>
           </a:lnRef>
-          <a:fillRef idx="0">
+          <a:fillRef idx="1">
             <a:schemeClr val="accent1"/>
           </a:fillRef>
-          <a:effectRef idx="1">
-            <a:schemeClr val="accent1"/>
-          </a:effectRef>
-          <a:fontRef idx="minor">
-            <a:schemeClr val="tx1"/>
-          </a:fontRef>
-        </p:style>
-      </p:cxnSp>
-      <p:sp>
-        <p:nvSpPr>
-          <p:cNvPr id="3" name="Rectangle 2"/>
-          <p:cNvSpPr/>
-          <p:nvPr/>
-        </p:nvSpPr>
-        <p:spPr>
-          <a:xfrm>
-            <a:off x="110836" y="46180"/>
-            <a:ext cx="12081164" cy="876687"/>
-          </a:xfrm>
-          <a:prstGeom prst="rect">
-            <a:avLst/>
-          </a:prstGeom>
-        </p:spPr>
-        <p:style>
-          <a:lnRef idx="1">
-            <a:schemeClr val="accent1"/>
-          </a:lnRef>
-          <a:fillRef idx="3">
-            <a:schemeClr val="accent1"/>
-          </a:fillRef>
-          <a:effectRef idx="2">
+          <a:effectRef idx="0">
             <a:schemeClr val="accent1"/>
           </a:effectRef>
           <a:fontRef idx="minor">
@@ -3590,38 +4772,44 @@
           </a:fontRef>
         </p:style>
         <p:txBody>
-          <a:bodyPr rtlCol="0" anchor="ctr"/>
-          <a:lstStyle/>
-          <a:p>
-            <a:r>
-              <a:t>Transaction Flow Chart for Website Donor Funds</a:t>
-            </a:r>
-          </a:p>
-        </p:txBody>
-      </p:sp>
-      <p:sp>
-        <p:nvSpPr>
-          <p:cNvPr id="4" name="Rectangle 3"/>
+          <a:bodyPr rtlCol="0" anchor="ctr" wrap="square"/>
+          <a:lstStyle/>
+          <a:p>
+            <a:pPr algn="ctr">
+              <a:buNone/>
+            </a:pPr>
+            <a:r>
+              <a:rPr/>
+              <a:t>Donors give to either a school project (restricted), a general support project, (restricted) or general funds (unrestricted)</a:t>
+            </a:r>
+          </a:p>
+        </p:txBody>
+      </p:sp>
+      <p:sp>
+        <p:nvSpPr>
+          <p:cNvPr id="5" name="Rounded Rectangle 4"/>
           <p:cNvSpPr/>
           <p:nvPr/>
         </p:nvSpPr>
         <p:spPr>
           <a:xfrm>
-            <a:off x="110836" y="4590252"/>
-            <a:ext cx="5541614" cy="1519145"/>
-          </a:xfrm>
-          <a:prstGeom prst="rect">
+            <a:off x="8265627" y="4676424"/>
+            <a:ext cx="2932572" cy="1433047"/>
+          </a:xfrm>
+          <a:prstGeom prst="roundRect">
             <a:avLst/>
           </a:prstGeom>
         </p:spPr>
         <p:style>
-          <a:lnRef idx="1">
-            <a:schemeClr val="accent1"/>
+          <a:lnRef idx="2">
+            <a:schemeClr val="accent1">
+              <a:shade val="50000"/>
+            </a:schemeClr>
           </a:lnRef>
-          <a:fillRef idx="3">
+          <a:fillRef idx="1">
             <a:schemeClr val="accent1"/>
           </a:fillRef>
-          <a:effectRef idx="2">
+          <a:effectRef idx="0">
             <a:schemeClr val="accent1"/>
           </a:effectRef>
           <a:fontRef idx="minor">
@@ -3629,38 +4817,44 @@
           </a:fontRef>
         </p:style>
         <p:txBody>
-          <a:bodyPr rtlCol="0" anchor="ctr"/>
-          <a:lstStyle/>
-          <a:p>
-            <a:r>
-              <a:t>General support projects are not specific to any school Project costs are school specific</a:t>
-            </a:r>
-          </a:p>
-        </p:txBody>
-      </p:sp>
-      <p:sp>
-        <p:nvSpPr>
-          <p:cNvPr id="5" name="Rounded Rectangle 4"/>
+          <a:bodyPr rtlCol="0" anchor="ctr" wrap="square"/>
+          <a:lstStyle/>
+          <a:p>
+            <a:pPr algn="ctr">
+              <a:buNone/>
+            </a:pPr>
+            <a:r>
+              <a:rPr/>
+              <a:t> Project costs are spent 100% on school art projects for specific schools</a:t>
+            </a:r>
+          </a:p>
+        </p:txBody>
+      </p:sp>
+      <p:sp>
+        <p:nvSpPr>
+          <p:cNvPr id="6" name="Rounded Rectangle 5"/>
           <p:cNvSpPr/>
           <p:nvPr/>
         </p:nvSpPr>
         <p:spPr>
           <a:xfrm>
-            <a:off x="110836" y="2712492"/>
-            <a:ext cx="2932615" cy="1750326"/>
+            <a:off x="3606942" y="1721540"/>
+            <a:ext cx="2932572" cy="1433047"/>
           </a:xfrm>
           <a:prstGeom prst="roundRect">
             <a:avLst/>
           </a:prstGeom>
         </p:spPr>
         <p:style>
-          <a:lnRef idx="1">
-            <a:schemeClr val="accent1"/>
+          <a:lnRef idx="2">
+            <a:schemeClr val="accent1">
+              <a:shade val="50000"/>
+            </a:schemeClr>
           </a:lnRef>
-          <a:fillRef idx="3">
+          <a:fillRef idx="1">
             <a:schemeClr val="accent1"/>
           </a:fillRef>
-          <a:effectRef idx="2">
+          <a:effectRef idx="0">
             <a:schemeClr val="accent1"/>
           </a:effectRef>
           <a:fontRef idx="minor">
@@ -3668,38 +4862,44 @@
           </a:fontRef>
         </p:style>
         <p:txBody>
-          <a:bodyPr rtlCol="0" anchor="ctr"/>
-          <a:lstStyle/>
-          <a:p>
-            <a:r>
-              <a:t>Donors give to either a school project (restricted), a general support project, (restricted) or general funds (unrestricted)</a:t>
-            </a:r>
-          </a:p>
-        </p:txBody>
-      </p:sp>
-      <p:sp>
-        <p:nvSpPr>
-          <p:cNvPr id="6" name="Rounded Rectangle 5"/>
+          <a:bodyPr rtlCol="0" anchor="ctr" wrap="square"/>
+          <a:lstStyle/>
+          <a:p>
+            <a:pPr algn="ctr">
+              <a:buNone/>
+            </a:pPr>
+            <a:r>
+              <a:rPr/>
+              <a:t>General funds are discretionary and can cover either overhead or project costs</a:t>
+            </a:r>
+          </a:p>
+        </p:txBody>
+      </p:sp>
+      <p:sp>
+        <p:nvSpPr>
+          <p:cNvPr id="7" name="Rounded Rectangle 6"/>
           <p:cNvSpPr/>
           <p:nvPr/>
         </p:nvSpPr>
         <p:spPr>
           <a:xfrm>
-            <a:off x="8265640" y="4676382"/>
-            <a:ext cx="2932615" cy="1433015"/>
+            <a:off x="8265627" y="1101211"/>
+            <a:ext cx="2932572" cy="1433047"/>
           </a:xfrm>
           <a:prstGeom prst="roundRect">
             <a:avLst/>
           </a:prstGeom>
         </p:spPr>
         <p:style>
-          <a:lnRef idx="1">
-            <a:schemeClr val="accent1"/>
+          <a:lnRef idx="2">
+            <a:schemeClr val="accent1">
+              <a:shade val="50000"/>
+            </a:schemeClr>
           </a:lnRef>
-          <a:fillRef idx="3">
+          <a:fillRef idx="1">
             <a:schemeClr val="accent1"/>
           </a:fillRef>
-          <a:effectRef idx="2">
+          <a:effectRef idx="0">
             <a:schemeClr val="accent1"/>
           </a:effectRef>
           <a:fontRef idx="minor">
@@ -3707,38 +4907,44 @@
           </a:fontRef>
         </p:style>
         <p:txBody>
-          <a:bodyPr rtlCol="0" anchor="ctr"/>
-          <a:lstStyle/>
-          <a:p>
-            <a:r>
-              <a:t>Project costs are spent 100% on school art projects for specific schools</a:t>
-            </a:r>
-          </a:p>
-        </p:txBody>
-      </p:sp>
-      <p:sp>
-        <p:nvSpPr>
-          <p:cNvPr id="7" name="Rounded Rectangle 6"/>
+          <a:bodyPr rtlCol="0" anchor="ctr" wrap="square"/>
+          <a:lstStyle/>
+          <a:p>
+            <a:pPr algn="ctr">
+              <a:buNone/>
+            </a:pPr>
+            <a:r>
+              <a:rPr/>
+              <a:t>Overhead costs are things like PO box and website fees</a:t>
+            </a:r>
+          </a:p>
+        </p:txBody>
+      </p:sp>
+      <p:sp>
+        <p:nvSpPr>
+          <p:cNvPr id="8" name="Rounded Rectangle 7"/>
           <p:cNvSpPr/>
           <p:nvPr/>
         </p:nvSpPr>
         <p:spPr>
           <a:xfrm>
-            <a:off x="3606936" y="1721542"/>
-            <a:ext cx="2932615" cy="1433015"/>
+            <a:off x="8265627" y="2888772"/>
+            <a:ext cx="2932572" cy="1433047"/>
           </a:xfrm>
           <a:prstGeom prst="roundRect">
             <a:avLst/>
           </a:prstGeom>
         </p:spPr>
         <p:style>
-          <a:lnRef idx="1">
-            <a:schemeClr val="accent1"/>
+          <a:lnRef idx="2">
+            <a:schemeClr val="accent1">
+              <a:shade val="50000"/>
+            </a:schemeClr>
           </a:lnRef>
-          <a:fillRef idx="3">
+          <a:fillRef idx="1">
             <a:schemeClr val="accent1"/>
           </a:fillRef>
-          <a:effectRef idx="2">
+          <a:effectRef idx="0">
             <a:schemeClr val="accent1"/>
           </a:effectRef>
           <a:fontRef idx="minor">
@@ -3746,29 +4952,41 @@
           </a:fontRef>
         </p:style>
         <p:txBody>
-          <a:bodyPr rtlCol="0" anchor="ctr"/>
-          <a:lstStyle/>
-          <a:p>
-            <a:r>
-              <a:t>General funds are discretionary and can cover either overhead or project costs</a:t>
+          <a:bodyPr rtlCol="0" anchor="ctr" wrap="square"/>
+          <a:lstStyle/>
+          <a:p>
+            <a:pPr algn="ctr">
+              <a:buNone/>
+            </a:pPr>
+            <a:r>
+              <a:rPr/>
+              <a:t>General support project costs are for things like an art timeline database to help schools select art for their hallways</a:t>
             </a:r>
           </a:p>
         </p:txBody>
       </p:sp>
       <p:cxnSp>
         <p:nvCxnSpPr>
-          <p:cNvPr id="8" name="Connector 7"/>
-          <p:cNvCxnSpPr/>
+          <p:cNvPr id="9" name="Connector 8"/>
+          <p:cNvCxnSpPr>
+            <a:stCxn id="6" idx="3"/>
+            <a:endCxn id="5" idx="1"/>
+          </p:cNvCxnSpPr>
           <p:nvPr/>
         </p:nvCxnSpPr>
         <p:spPr>
           <a:xfrm>
-            <a:off x="3043451" y="3587655"/>
-            <a:ext cx="5222189" cy="1805235"/>
+            <a:off x="6539514" y="2438064"/>
+            <a:ext cx="1726113" cy="2954884"/>
           </a:xfrm>
           <a:prstGeom prst="bentConnector3">
-            <a:avLst/>
+            <a:avLst>
+              <a:gd name="adj1" fmla="val 39613"/>
+            </a:avLst>
           </a:prstGeom>
+          <a:ln w="38100">
+            <a:tailEnd type="triangle" w="lg" len="lg"/>
+          </a:ln>
         </p:spPr>
         <p:style>
           <a:lnRef idx="2">
@@ -3787,18 +5005,30 @@
       </p:cxnSp>
       <p:cxnSp>
         <p:nvCxnSpPr>
-          <p:cNvPr id="9" name="Connector 8"/>
-          <p:cNvCxnSpPr/>
+          <p:cNvPr id="10" name="Connector 9"/>
+          <p:cNvCxnSpPr>
+            <a:stCxn id="4" idx="3"/>
+            <a:endCxn id="5" idx="1"/>
+          </p:cNvCxnSpPr>
           <p:nvPr/>
         </p:nvCxnSpPr>
         <p:spPr>
-          <a:xfrm flipV="1">
-            <a:off x="3043451" y="2438050"/>
-            <a:ext cx="563485" cy="1149605"/>
+          <a:xfrm>
+            <a:off x="3043397" y="3587648"/>
+            <a:ext cx="5222230" cy="1805300"/>
           </a:xfrm>
           <a:prstGeom prst="bentConnector3">
             <a:avLst/>
           </a:prstGeom>
+          <a:ln w="38100">
+            <a:solidFill>
+              <a:schemeClr val="accent2">
+                <a:lumMod val="60000"/>
+                <a:lumOff val="40000"/>
+              </a:schemeClr>
+            </a:solidFill>
+            <a:tailEnd type="triangle" w="lg" len="lg"/>
+          </a:ln>
         </p:spPr>
         <p:style>
           <a:lnRef idx="2">
@@ -3815,98 +5045,70 @@
           </a:fontRef>
         </p:style>
       </p:cxnSp>
-      <p:sp>
-        <p:nvSpPr>
-          <p:cNvPr id="10" name="Rounded Rectangle 9"/>
-          <p:cNvSpPr/>
+      <p:cxnSp>
+        <p:nvCxnSpPr>
+          <p:cNvPr id="11" name="Connector 10"/>
+          <p:cNvCxnSpPr>
+            <a:stCxn id="4" idx="3"/>
+            <a:endCxn id="6" idx="1"/>
+          </p:cNvCxnSpPr>
           <p:nvPr/>
-        </p:nvSpPr>
-        <p:spPr>
-          <a:xfrm>
-            <a:off x="8265641" y="1101172"/>
-            <a:ext cx="2932615" cy="1433015"/>
-          </a:xfrm>
-          <a:prstGeom prst="roundRect">
+        </p:nvCxnSpPr>
+        <p:spPr>
+          <a:xfrm flipV="1">
+            <a:off x="3043397" y="2438064"/>
+            <a:ext cx="563545" cy="1149585"/>
+          </a:xfrm>
+          <a:prstGeom prst="bentConnector3">
             <a:avLst/>
           </a:prstGeom>
+          <a:ln w="38100">
+            <a:solidFill>
+              <a:schemeClr val="accent2">
+                <a:lumMod val="60000"/>
+                <a:lumOff val="40000"/>
+              </a:schemeClr>
+            </a:solidFill>
+            <a:tailEnd type="triangle" w="lg" len="lg"/>
+          </a:ln>
         </p:spPr>
         <p:style>
-          <a:lnRef idx="1">
+          <a:lnRef idx="2">
             <a:schemeClr val="accent1"/>
           </a:lnRef>
-          <a:fillRef idx="3">
+          <a:fillRef idx="0">
             <a:schemeClr val="accent1"/>
           </a:fillRef>
-          <a:effectRef idx="2">
+          <a:effectRef idx="1">
             <a:schemeClr val="accent1"/>
           </a:effectRef>
           <a:fontRef idx="minor">
-            <a:schemeClr val="lt1"/>
+            <a:schemeClr val="tx1"/>
           </a:fontRef>
         </p:style>
-        <p:txBody>
-          <a:bodyPr rtlCol="0" anchor="ctr"/>
-          <a:lstStyle/>
-          <a:p>
-            <a:r>
-              <a:t>Overhead costs are things like PO box and website fees</a:t>
-            </a:r>
-          </a:p>
-        </p:txBody>
-      </p:sp>
-      <p:sp>
-        <p:nvSpPr>
-          <p:cNvPr id="11" name="Rounded Rectangle 10"/>
-          <p:cNvSpPr/>
-          <p:nvPr/>
-        </p:nvSpPr>
-        <p:spPr>
-          <a:xfrm>
-            <a:off x="8265640" y="2888777"/>
-            <a:ext cx="2932615" cy="1433015"/>
-          </a:xfrm>
-          <a:prstGeom prst="roundRect">
-            <a:avLst/>
-          </a:prstGeom>
-        </p:spPr>
-        <p:style>
-          <a:lnRef idx="1">
-            <a:schemeClr val="accent1"/>
-          </a:lnRef>
-          <a:fillRef idx="3">
-            <a:schemeClr val="accent1"/>
-          </a:fillRef>
-          <a:effectRef idx="2">
-            <a:schemeClr val="accent1"/>
-          </a:effectRef>
-          <a:fontRef idx="minor">
-            <a:schemeClr val="lt1"/>
-          </a:fontRef>
-        </p:style>
-        <p:txBody>
-          <a:bodyPr rtlCol="0" anchor="ctr"/>
-          <a:lstStyle/>
-          <a:p>
-            <a:r>
-              <a:t>General support project costs are for things like an art timeline database to help schools select art for their hallways</a:t>
-            </a:r>
-          </a:p>
-        </p:txBody>
-      </p:sp>
+      </p:cxnSp>
       <p:cxnSp>
         <p:nvCxnSpPr>
           <p:cNvPr id="12" name="Connector 11"/>
-          <p:cNvCxnSpPr/>
+          <p:cNvCxnSpPr>
+            <a:stCxn id="6" idx="3"/>
+            <a:endCxn id="7" idx="1"/>
+          </p:cNvCxnSpPr>
           <p:nvPr/>
         </p:nvCxnSpPr>
         <p:spPr>
           <a:xfrm flipV="1">
-            <a:off x="6539551" y="1798030"/>
-            <a:ext cx="1761934" cy="640020"/>
+            <a:off x="6539514" y="1817735"/>
+            <a:ext cx="1726113" cy="620330"/>
           </a:xfrm>
           <a:prstGeom prst="bentConnector3">
-            <a:avLst/>
+            <a:avLst>
+              <a:gd name="adj1" fmla="val 62211"/>
+            </a:avLst>
           </a:prstGeom>
+          <a:ln w="38100">
+            <a:tailEnd type="triangle" w="lg" len="lg"/>
+          </a:ln>
         </p:spPr>
         <p:style>
           <a:lnRef idx="2">
@@ -3926,17 +5128,25 @@
       <p:cxnSp>
         <p:nvCxnSpPr>
           <p:cNvPr id="13" name="Connector 12"/>
-          <p:cNvCxnSpPr/>
+          <p:cNvCxnSpPr>
+            <a:stCxn id="6" idx="3"/>
+            <a:endCxn id="8" idx="1"/>
+          </p:cNvCxnSpPr>
           <p:nvPr/>
         </p:nvCxnSpPr>
         <p:spPr>
           <a:xfrm>
-            <a:off x="6539551" y="2438050"/>
-            <a:ext cx="1726089" cy="1167235"/>
+            <a:off x="6539514" y="2438064"/>
+            <a:ext cx="1726113" cy="1167232"/>
           </a:xfrm>
           <a:prstGeom prst="bentConnector3">
-            <a:avLst/>
+            <a:avLst>
+              <a:gd name="adj1" fmla="val 52077"/>
+            </a:avLst>
           </a:prstGeom>
+          <a:ln w="38100">
+            <a:tailEnd type="triangle" w="lg" len="lg"/>
+          </a:ln>
         </p:spPr>
         <p:style>
           <a:lnRef idx="2">
@@ -3956,17 +5166,29 @@
       <p:cxnSp>
         <p:nvCxnSpPr>
           <p:cNvPr id="14" name="Connector 13"/>
-          <p:cNvCxnSpPr/>
+          <p:cNvCxnSpPr>
+            <a:stCxn id="4" idx="3"/>
+            <a:endCxn id="8" idx="1"/>
+          </p:cNvCxnSpPr>
           <p:nvPr/>
         </p:nvCxnSpPr>
         <p:spPr>
           <a:xfrm>
-            <a:off x="3043451" y="3587655"/>
-            <a:ext cx="5222189" cy="17630"/>
+            <a:off x="3043397" y="3587648"/>
+            <a:ext cx="5222230" cy="17648"/>
           </a:xfrm>
           <a:prstGeom prst="straightConnector1">
             <a:avLst/>
           </a:prstGeom>
+          <a:ln w="38100">
+            <a:solidFill>
+              <a:schemeClr val="accent2">
+                <a:lumMod val="60000"/>
+                <a:lumOff val="40000"/>
+              </a:schemeClr>
+            </a:solidFill>
+            <a:tailEnd type="triangle" w="lg" len="lg"/>
+          </a:ln>
         </p:spPr>
         <p:style>
           <a:lnRef idx="2">
@@ -4003,27 +5225,104 @@
       <p:grpSpPr/>
       <p:sp>
         <p:nvSpPr>
-          <p:cNvPr id="2" name="Rectangle 1"/>
+          <p:cNvPr id="2" name="Title 1"/>
+          <p:cNvSpPr>
+            <a:spLocks noGrp="1"/>
+          </p:cNvSpPr>
+          <p:nvPr>
+            <p:ph type="title"/>
+          </p:nvPr>
+        </p:nvSpPr>
+        <p:spPr>
+          <a:xfrm>
+            <a:off x="110825" y="46177"/>
+            <a:ext cx="12081144" cy="876727"/>
+          </a:xfrm>
+        </p:spPr>
+        <p:txBody>
+          <a:bodyPr>
+            <a:normAutofit fontScale="90000"/>
+          </a:bodyPr>
+          <a:lstStyle/>
+          <a:p>
+            <a:r>
+              <a:rPr/>
+              <a:t>Website Donor Forms</a:t>
+            </a:r>
+            <a:br/>
+            <a:r>
+              <a:rPr/>
+              <a:t>Entry Point for Project Funding</a:t>
+            </a:r>
+          </a:p>
+        </p:txBody>
+      </p:sp>
+      <p:sp>
+        <p:nvSpPr>
+          <p:cNvPr id="3" name="Content Placeholder 2"/>
+          <p:cNvSpPr>
+            <a:spLocks noGrp="1"/>
+          </p:cNvSpPr>
+          <p:nvPr>
+            <p:ph type="obj" idx="1"/>
+          </p:nvPr>
+        </p:nvSpPr>
+        <p:spPr>
+          <a:xfrm>
+            <a:off x="253655" y="938449"/>
+            <a:ext cx="4869089" cy="3597707"/>
+          </a:xfrm>
+        </p:spPr>
+        <p:txBody>
+          <a:bodyPr wrap="square">
+            <a:normAutofit lnSpcReduction="10000"/>
+          </a:bodyPr>
+          <a:lstStyle/>
+          <a:p>
+            <a:pPr lvl="0"/>
+            <a:r>
+              <a:t>Simple Donate Button next to each project on website takes donors to a common donation form with a drop down menu to select a project</a:t>
+            </a:r>
+          </a:p>
+          <a:p>
+            <a:pPr lvl="0"/>
+            <a:r>
+              <a:t>The Saint Luke Guild should be able to add projects to the list</a:t>
+            </a:r>
+          </a:p>
+          <a:p>
+            <a:pPr lvl="0"/>
+            <a:r>
+              <a:t>All form information should be communicated to the Saint Luke Guild along with money</a:t>
+            </a:r>
+          </a:p>
+        </p:txBody>
+      </p:sp>
+      <p:sp>
+        <p:nvSpPr>
+          <p:cNvPr id="4" name="Rounded Rectangle 3"/>
           <p:cNvSpPr/>
           <p:nvPr/>
         </p:nvSpPr>
         <p:spPr>
           <a:xfrm>
-            <a:off x="110836" y="46180"/>
-            <a:ext cx="12081164" cy="876687"/>
-          </a:xfrm>
-          <a:prstGeom prst="rect">
+            <a:off x="1728947" y="4731928"/>
+            <a:ext cx="1918411" cy="703722"/>
+          </a:xfrm>
+          <a:prstGeom prst="roundRect">
             <a:avLst/>
           </a:prstGeom>
         </p:spPr>
         <p:style>
-          <a:lnRef idx="1">
-            <a:schemeClr val="accent1"/>
+          <a:lnRef idx="2">
+            <a:schemeClr val="accent1">
+              <a:shade val="50000"/>
+            </a:schemeClr>
           </a:lnRef>
-          <a:fillRef idx="3">
+          <a:fillRef idx="1">
             <a:schemeClr val="accent1"/>
           </a:fillRef>
-          <a:effectRef idx="2">
+          <a:effectRef idx="0">
             <a:schemeClr val="accent1"/>
           </a:effectRef>
           <a:fontRef idx="minor">
@@ -4031,38 +5330,50 @@
           </a:fontRef>
         </p:style>
         <p:txBody>
-          <a:bodyPr rtlCol="0" anchor="ctr"/>
-          <a:lstStyle/>
-          <a:p>
-            <a:r>
-              <a:t>Website Donor FormsEntry Point for Project Funding</a:t>
-            </a:r>
-          </a:p>
-        </p:txBody>
-      </p:sp>
-      <p:sp>
-        <p:nvSpPr>
-          <p:cNvPr id="3" name="Rectangle 2"/>
+          <a:bodyPr rtlCol="0" anchor="ctr" wrap="square"/>
+          <a:lstStyle/>
+          <a:p>
+            <a:pPr algn="ctr">
+              <a:buNone/>
+            </a:pPr>
+            <a:r>
+              <a:rPr/>
+              <a:t>Donate Now</a:t>
+            </a:r>
+          </a:p>
+        </p:txBody>
+      </p:sp>
+      <p:sp>
+        <p:nvSpPr>
+          <p:cNvPr id="5" name="Rounded Rectangle 4"/>
           <p:cNvSpPr/>
           <p:nvPr/>
         </p:nvSpPr>
         <p:spPr>
           <a:xfrm>
-            <a:off x="253639" y="938439"/>
-            <a:ext cx="4869072" cy="3597702"/>
-          </a:xfrm>
-          <a:prstGeom prst="rect">
+            <a:off x="5570982" y="1042964"/>
+            <a:ext cx="5970483" cy="5513557"/>
+          </a:xfrm>
+          <a:prstGeom prst="roundRect">
             <a:avLst/>
           </a:prstGeom>
+          <a:solidFill>
+            <a:schemeClr val="accent1">
+              <a:lumMod val="20000"/>
+              <a:lumOff val="80000"/>
+            </a:schemeClr>
+          </a:solidFill>
         </p:spPr>
         <p:style>
-          <a:lnRef idx="1">
-            <a:schemeClr val="accent1"/>
+          <a:lnRef idx="2">
+            <a:schemeClr val="accent1">
+              <a:shade val="50000"/>
+            </a:schemeClr>
           </a:lnRef>
-          <a:fillRef idx="3">
+          <a:fillRef idx="1">
             <a:schemeClr val="accent1"/>
           </a:fillRef>
-          <a:effectRef idx="2">
+          <a:effectRef idx="0">
             <a:schemeClr val="accent1"/>
           </a:effectRef>
           <a:fontRef idx="minor">
@@ -4073,123 +5384,127 @@
           <a:bodyPr rtlCol="0" anchor="ctr"/>
           <a:lstStyle/>
           <a:p>
-            <a:r>
-              <a:t>Simple Donate Button next to each project on website takes donors to a common donation form with a drop down menu to select a projectThe Saint Luke Guild should be able to add projects to the listAll form information should be communicated to the Saint Luke Guild along with money</a:t>
-            </a:r>
-          </a:p>
-        </p:txBody>
-      </p:sp>
-      <p:sp>
-        <p:nvSpPr>
-          <p:cNvPr id="4" name="Rounded Rectangle 3"/>
-          <p:cNvSpPr/>
+            <a:pPr algn="ctr"/>
+          </a:p>
+        </p:txBody>
+      </p:sp>
+      <p:sp>
+        <p:nvSpPr>
+          <p:cNvPr id="6" name="TextBox 5"/>
+          <p:cNvSpPr txBox="1"/>
           <p:nvPr/>
         </p:nvSpPr>
         <p:spPr>
           <a:xfrm>
-            <a:off x="1728951" y="4731972"/>
-            <a:ext cx="1918447" cy="703729"/>
-          </a:xfrm>
-          <a:prstGeom prst="roundRect">
-            <a:avLst/>
-          </a:prstGeom>
-        </p:spPr>
-        <p:style>
-          <a:lnRef idx="1">
-            <a:schemeClr val="accent1"/>
-          </a:lnRef>
-          <a:fillRef idx="3">
-            <a:schemeClr val="accent1"/>
-          </a:fillRef>
-          <a:effectRef idx="2">
-            <a:schemeClr val="accent1"/>
-          </a:effectRef>
-          <a:fontRef idx="minor">
-            <a:schemeClr val="lt1"/>
-          </a:fontRef>
-        </p:style>
-        <p:txBody>
-          <a:bodyPr rtlCol="0" anchor="ctr"/>
-          <a:lstStyle/>
-          <a:p>
-            <a:r>
-              <a:t>Donate Now</a:t>
-            </a:r>
-          </a:p>
-        </p:txBody>
-      </p:sp>
-      <p:sp>
-        <p:nvSpPr>
-          <p:cNvPr id="5" name="Rounded Rectangle 4"/>
-          <p:cNvSpPr/>
-          <p:nvPr/>
-        </p:nvSpPr>
-        <p:spPr>
-          <a:xfrm>
-            <a:off x="5122711" y="1473267"/>
-            <a:ext cx="5970494" cy="5513521"/>
-          </a:xfrm>
-          <a:prstGeom prst="roundRect">
-            <a:avLst/>
-          </a:prstGeom>
-        </p:spPr>
-        <p:style>
-          <a:lnRef idx="1">
-            <a:schemeClr val="accent1"/>
-          </a:lnRef>
-          <a:fillRef idx="3">
-            <a:schemeClr val="accent1"/>
-          </a:fillRef>
-          <a:effectRef idx="2">
-            <a:schemeClr val="accent1"/>
-          </a:effectRef>
-          <a:fontRef idx="minor">
-            <a:schemeClr val="lt1"/>
-          </a:fontRef>
-        </p:style>
-        <p:txBody>
-          <a:bodyPr rtlCol="0" anchor="ctr"/>
-          <a:lstStyle/>
-          <a:p>
-            <a:pPr algn="ctr"/>
-          </a:p>
-        </p:txBody>
-      </p:sp>
-      <p:sp>
-        <p:nvSpPr>
-          <p:cNvPr id="6" name="Rectangle 5"/>
-          <p:cNvSpPr/>
-          <p:nvPr/>
-        </p:nvSpPr>
-        <p:spPr>
-          <a:xfrm>
-            <a:off x="5673421" y="1474189"/>
-            <a:ext cx="5419783" cy="5512599"/>
+            <a:off x="6121633" y="1043879"/>
+            <a:ext cx="5419740" cy="5512643"/>
           </a:xfrm>
           <a:prstGeom prst="rect">
             <a:avLst/>
           </a:prstGeom>
-        </p:spPr>
-        <p:style>
-          <a:lnRef idx="1">
-            <a:schemeClr val="accent1"/>
-          </a:lnRef>
-          <a:fillRef idx="3">
-            <a:schemeClr val="accent1"/>
-          </a:fillRef>
-          <a:effectRef idx="2">
-            <a:schemeClr val="accent1"/>
-          </a:effectRef>
-          <a:fontRef idx="minor">
-            <a:schemeClr val="lt1"/>
-          </a:fontRef>
-        </p:style>
-        <p:txBody>
-          <a:bodyPr rtlCol="0" anchor="ctr"/>
-          <a:lstStyle/>
-          <a:p>
-            <a:r>
-              <a:t>First Name: _______________________Last Name: _______________________Address: _________________________City: ____________________________State:  [Drop Down ]         Zip: ___________  Keep me anonymous to project schools.Project: [Drop Down List]Pledge Amount: $  ___________Credit Card Info</a:t>
+          <a:noFill/>
+        </p:spPr>
+        <p:txBody>
+          <a:bodyPr wrap="square">
+            <a:spAutoFit/>
+          </a:bodyPr>
+          <a:lstStyle/>
+          <a:p>
+            <a:pPr lvl="0">
+              <a:lnSpc>
+                <a:spcPct val="200000"/>
+              </a:lnSpc>
+              <a:buNone/>
+            </a:pPr>
+            <a:r>
+              <a:t>First Name: _______________________</a:t>
+            </a:r>
+          </a:p>
+          <a:p>
+            <a:pPr lvl="0">
+              <a:lnSpc>
+                <a:spcPct val="200000"/>
+              </a:lnSpc>
+              <a:buNone/>
+            </a:pPr>
+            <a:r>
+              <a:t>Last Name: _______________________</a:t>
+            </a:r>
+          </a:p>
+          <a:p>
+            <a:pPr lvl="0">
+              <a:lnSpc>
+                <a:spcPct val="200000"/>
+              </a:lnSpc>
+              <a:buNone/>
+            </a:pPr>
+            <a:r>
+              <a:t>Address: _________________________</a:t>
+            </a:r>
+          </a:p>
+          <a:p>
+            <a:pPr lvl="0">
+              <a:lnSpc>
+                <a:spcPct val="200000"/>
+              </a:lnSpc>
+              <a:buNone/>
+            </a:pPr>
+            <a:r>
+              <a:t>City: ____________________________</a:t>
+            </a:r>
+          </a:p>
+          <a:p>
+            <a:pPr lvl="0">
+              <a:lnSpc>
+                <a:spcPct val="200000"/>
+              </a:lnSpc>
+              <a:buNone/>
+            </a:pPr>
+            <a:r>
+              <a:t>State:  [Drop Down ]         Zip: ___________</a:t>
+            </a:r>
+          </a:p>
+          <a:p>
+            <a:pPr lvl="0">
+              <a:lnSpc>
+                <a:spcPct val="250000"/>
+              </a:lnSpc>
+              <a:buNone/>
+            </a:pPr>
+            <a:r>
+              <a:rPr>
+                <a:sym typeface="Symbol"/>
+              </a:rPr>
+              <a:t></a:t>
+            </a:r>
+            <a:r>
+              <a:t>  Keep me anonymous to project schools.</a:t>
+            </a:r>
+            <a:br/>
+            <a:r>
+              <a:t>Project: [Drop Down List]</a:t>
+            </a:r>
+          </a:p>
+          <a:p>
+            <a:pPr lvl="0">
+              <a:lnSpc>
+                <a:spcPct val="250000"/>
+              </a:lnSpc>
+              <a:buNone/>
+            </a:pPr>
+            <a:r>
+              <a:t>Pledge Amount: $  ___________</a:t>
+            </a:r>
+          </a:p>
+          <a:p>
+            <a:pPr lvl="0">
+              <a:lnSpc>
+                <a:spcPct val="250000"/>
+              </a:lnSpc>
+              <a:buNone/>
+            </a:pPr>
+            <a:r>
+              <a:t>Credit Card Info</a:t>
             </a:r>
           </a:p>
         </p:txBody>
@@ -4202,21 +5517,29 @@
         </p:nvSpPr>
         <p:spPr>
           <a:xfrm>
-            <a:off x="4087905" y="4840244"/>
-            <a:ext cx="932325" cy="487183"/>
+            <a:off x="4087916" y="4840284"/>
+            <a:ext cx="932322" cy="487192"/>
           </a:xfrm>
           <a:prstGeom prst="rightArrow">
             <a:avLst/>
           </a:prstGeom>
+          <a:solidFill>
+            <a:schemeClr val="accent1">
+              <a:lumMod val="20000"/>
+              <a:lumOff val="80000"/>
+            </a:schemeClr>
+          </a:solidFill>
         </p:spPr>
         <p:style>
-          <a:lnRef idx="1">
-            <a:schemeClr val="accent1"/>
+          <a:lnRef idx="2">
+            <a:schemeClr val="accent1">
+              <a:shade val="50000"/>
+            </a:schemeClr>
           </a:lnRef>
-          <a:fillRef idx="3">
+          <a:fillRef idx="1">
             <a:schemeClr val="accent1"/>
           </a:fillRef>
-          <a:effectRef idx="2">
+          <a:effectRef idx="0">
             <a:schemeClr val="accent1"/>
           </a:effectRef>
           <a:fontRef idx="minor">
@@ -4251,27 +5574,110 @@
       <p:grpSpPr/>
       <p:sp>
         <p:nvSpPr>
-          <p:cNvPr id="2" name="Rectangle 1"/>
+          <p:cNvPr id="2" name="Title 1"/>
+          <p:cNvSpPr>
+            <a:spLocks noGrp="1"/>
+          </p:cNvSpPr>
+          <p:nvPr>
+            <p:ph type="title"/>
+          </p:nvPr>
+        </p:nvSpPr>
+        <p:spPr>
+          <a:xfrm>
+            <a:off x="110825" y="46177"/>
+            <a:ext cx="12081144" cy="876727"/>
+          </a:xfrm>
+        </p:spPr>
+        <p:txBody>
+          <a:bodyPr>
+            <a:normAutofit fontScale="90000"/>
+          </a:bodyPr>
+          <a:lstStyle/>
+          <a:p>
+            <a:r>
+              <a:rPr/>
+              <a:t>Website Donor Forms</a:t>
+            </a:r>
+            <a:br/>
+            <a:r>
+              <a:rPr/>
+              <a:t>Ideal Point</a:t>
+            </a:r>
+          </a:p>
+        </p:txBody>
+      </p:sp>
+      <p:sp>
+        <p:nvSpPr>
+          <p:cNvPr id="3" name="Content Placeholder 2"/>
+          <p:cNvSpPr>
+            <a:spLocks noGrp="1"/>
+          </p:cNvSpPr>
+          <p:nvPr>
+            <p:ph type="obj" idx="1"/>
+          </p:nvPr>
+        </p:nvSpPr>
+        <p:spPr>
+          <a:xfrm>
+            <a:off x="253655" y="938449"/>
+            <a:ext cx="4869089" cy="3597707"/>
+          </a:xfrm>
+        </p:spPr>
+        <p:txBody>
+          <a:bodyPr wrap="square">
+            <a:normAutofit lnSpcReduction="10000"/>
+          </a:bodyPr>
+          <a:lstStyle/>
+          <a:p>
+            <a:pPr lvl="0"/>
+            <a:r>
+              <a:t>In an ideal world, we would be able to have bar graphs showing how much money has been donated to a given project</a:t>
+            </a:r>
+          </a:p>
+          <a:p>
+            <a:pPr lvl="1"/>
+            <a:r>
+              <a:t>Similar to Kickstarter</a:t>
+            </a:r>
+          </a:p>
+          <a:p>
+            <a:pPr lvl="0"/>
+            <a:r>
+              <a:t>SLG staff would be able to enter check donations to move the bar</a:t>
+            </a:r>
+          </a:p>
+          <a:p>
+            <a:pPr lvl="0"/>
+            <a:r>
+              <a:t>This would mean each project would have a standalone donor form.</a:t>
+            </a:r>
+          </a:p>
+        </p:txBody>
+      </p:sp>
+      <p:sp>
+        <p:nvSpPr>
+          <p:cNvPr id="4" name="Rounded Rectangle 3"/>
           <p:cNvSpPr/>
           <p:nvPr/>
         </p:nvSpPr>
         <p:spPr>
           <a:xfrm>
-            <a:off x="110836" y="46180"/>
-            <a:ext cx="12081164" cy="876687"/>
-          </a:xfrm>
-          <a:prstGeom prst="rect">
+            <a:off x="1201247" y="5276088"/>
+            <a:ext cx="1918411" cy="703722"/>
+          </a:xfrm>
+          <a:prstGeom prst="roundRect">
             <a:avLst/>
           </a:prstGeom>
         </p:spPr>
         <p:style>
-          <a:lnRef idx="1">
-            <a:schemeClr val="accent1"/>
+          <a:lnRef idx="2">
+            <a:schemeClr val="accent1">
+              <a:shade val="50000"/>
+            </a:schemeClr>
           </a:lnRef>
-          <a:fillRef idx="3">
+          <a:fillRef idx="1">
             <a:schemeClr val="accent1"/>
           </a:fillRef>
-          <a:effectRef idx="2">
+          <a:effectRef idx="0">
             <a:schemeClr val="accent1"/>
           </a:effectRef>
           <a:fontRef idx="minor">
@@ -4279,38 +5685,50 @@
           </a:fontRef>
         </p:style>
         <p:txBody>
-          <a:bodyPr rtlCol="0" anchor="ctr"/>
-          <a:lstStyle/>
-          <a:p>
-            <a:r>
-              <a:t>Website Donor FormsIdeal Point</a:t>
-            </a:r>
-          </a:p>
-        </p:txBody>
-      </p:sp>
-      <p:sp>
-        <p:nvSpPr>
-          <p:cNvPr id="3" name="Rectangle 2"/>
+          <a:bodyPr rtlCol="0" anchor="ctr" wrap="square"/>
+          <a:lstStyle/>
+          <a:p>
+            <a:pPr algn="ctr">
+              <a:buNone/>
+            </a:pPr>
+            <a:r>
+              <a:rPr/>
+              <a:t>Donate Now</a:t>
+            </a:r>
+          </a:p>
+        </p:txBody>
+      </p:sp>
+      <p:sp>
+        <p:nvSpPr>
+          <p:cNvPr id="5" name="Rounded Rectangle 4"/>
           <p:cNvSpPr/>
           <p:nvPr/>
         </p:nvSpPr>
         <p:spPr>
           <a:xfrm>
-            <a:off x="253639" y="938439"/>
-            <a:ext cx="4869072" cy="3597702"/>
-          </a:xfrm>
-          <a:prstGeom prst="rect">
+            <a:off x="5893673" y="1544970"/>
+            <a:ext cx="5970483" cy="5236494"/>
+          </a:xfrm>
+          <a:prstGeom prst="roundRect">
             <a:avLst/>
           </a:prstGeom>
+          <a:solidFill>
+            <a:schemeClr val="accent1">
+              <a:lumMod val="20000"/>
+              <a:lumOff val="80000"/>
+            </a:schemeClr>
+          </a:solidFill>
         </p:spPr>
         <p:style>
-          <a:lnRef idx="1">
-            <a:schemeClr val="accent1"/>
+          <a:lnRef idx="2">
+            <a:schemeClr val="accent1">
+              <a:shade val="50000"/>
+            </a:schemeClr>
           </a:lnRef>
-          <a:fillRef idx="3">
+          <a:fillRef idx="1">
             <a:schemeClr val="accent1"/>
           </a:fillRef>
-          <a:effectRef idx="2">
+          <a:effectRef idx="0">
             <a:schemeClr val="accent1"/>
           </a:effectRef>
           <a:fontRef idx="minor">
@@ -4321,35 +5739,170 @@
           <a:bodyPr rtlCol="0" anchor="ctr"/>
           <a:lstStyle/>
           <a:p>
-            <a:r>
-              <a:t>In an ideal world, we would be able to have bar graphs showing how much money has been donated to a given projectSimilar to KickstarterSLG staff would be able to enter check donations to move the barThis would mean each project would have a standalone donor form.</a:t>
-            </a:r>
-          </a:p>
-        </p:txBody>
-      </p:sp>
-      <p:sp>
-        <p:nvSpPr>
-          <p:cNvPr id="4" name="Rounded Rectangle 3"/>
+            <a:pPr algn="ctr"/>
+          </a:p>
+        </p:txBody>
+      </p:sp>
+      <p:sp>
+        <p:nvSpPr>
+          <p:cNvPr id="6" name="TextBox 5"/>
+          <p:cNvSpPr txBox="1"/>
+          <p:nvPr/>
+        </p:nvSpPr>
+        <p:spPr>
+          <a:xfrm>
+            <a:off x="6444325" y="1545884"/>
+            <a:ext cx="4869088" cy="5235580"/>
+          </a:xfrm>
+          <a:prstGeom prst="rect">
+            <a:avLst/>
+          </a:prstGeom>
+          <a:noFill/>
+        </p:spPr>
+        <p:txBody>
+          <a:bodyPr wrap="square">
+            <a:spAutoFit/>
+          </a:bodyPr>
+          <a:lstStyle/>
+          <a:p>
+            <a:pPr lvl="0">
+              <a:lnSpc>
+                <a:spcPct val="200000"/>
+              </a:lnSpc>
+              <a:buNone/>
+            </a:pPr>
+            <a:r>
+              <a:rPr b="1"/>
+              <a:t>Project: Holy Child Catholic School</a:t>
+            </a:r>
+          </a:p>
+          <a:p>
+            <a:pPr lvl="0">
+              <a:lnSpc>
+                <a:spcPct val="200000"/>
+              </a:lnSpc>
+              <a:buNone/>
+            </a:pPr>
+            <a:r>
+              <a:t>First Name: _______________________</a:t>
+            </a:r>
+          </a:p>
+          <a:p>
+            <a:pPr lvl="0">
+              <a:lnSpc>
+                <a:spcPct val="200000"/>
+              </a:lnSpc>
+              <a:buNone/>
+            </a:pPr>
+            <a:r>
+              <a:t>Last Name: _______________________</a:t>
+            </a:r>
+          </a:p>
+          <a:p>
+            <a:pPr lvl="0">
+              <a:lnSpc>
+                <a:spcPct val="200000"/>
+              </a:lnSpc>
+              <a:buNone/>
+            </a:pPr>
+            <a:r>
+              <a:t>Address: _________________________</a:t>
+            </a:r>
+          </a:p>
+          <a:p>
+            <a:pPr lvl="0">
+              <a:lnSpc>
+                <a:spcPct val="200000"/>
+              </a:lnSpc>
+              <a:buNone/>
+            </a:pPr>
+            <a:r>
+              <a:t>City: ____________________________</a:t>
+            </a:r>
+          </a:p>
+          <a:p>
+            <a:pPr lvl="0">
+              <a:lnSpc>
+                <a:spcPct val="200000"/>
+              </a:lnSpc>
+              <a:buNone/>
+            </a:pPr>
+            <a:r>
+              <a:t>State:  [Drop Down ]         Zip: ___________</a:t>
+            </a:r>
+          </a:p>
+          <a:p>
+            <a:pPr lvl="0">
+              <a:lnSpc>
+                <a:spcPct val="200000"/>
+              </a:lnSpc>
+              <a:buNone/>
+            </a:pPr>
+            <a:r>
+              <a:rPr>
+                <a:sym typeface="Symbol"/>
+              </a:rPr>
+              <a:t> </a:t>
+            </a:r>
+            <a:r>
+              <a:t>Keep me anonymous to the above school.</a:t>
+            </a:r>
+          </a:p>
+          <a:p>
+            <a:pPr lvl="0">
+              <a:lnSpc>
+                <a:spcPct val="250000"/>
+              </a:lnSpc>
+              <a:buNone/>
+            </a:pPr>
+            <a:r>
+              <a:t>Pledge Amount: $  ___________</a:t>
+            </a:r>
+          </a:p>
+          <a:p>
+            <a:pPr lvl="0">
+              <a:lnSpc>
+                <a:spcPct val="250000"/>
+              </a:lnSpc>
+              <a:buNone/>
+            </a:pPr>
+            <a:r>
+              <a:t>Credit Card Info</a:t>
+            </a:r>
+          </a:p>
+        </p:txBody>
+      </p:sp>
+      <p:sp>
+        <p:nvSpPr>
+          <p:cNvPr id="7" name="Right Arrow 6"/>
           <p:cNvSpPr/>
           <p:nvPr/>
         </p:nvSpPr>
         <p:spPr>
           <a:xfrm>
-            <a:off x="1201275" y="5276081"/>
-            <a:ext cx="1918447" cy="703729"/>
-          </a:xfrm>
-          <a:prstGeom prst="roundRect">
+            <a:off x="4255343" y="5334609"/>
+            <a:ext cx="932322" cy="487192"/>
+          </a:xfrm>
+          <a:prstGeom prst="rightArrow">
             <a:avLst/>
           </a:prstGeom>
+          <a:solidFill>
+            <a:schemeClr val="accent1">
+              <a:lumMod val="20000"/>
+              <a:lumOff val="80000"/>
+            </a:schemeClr>
+          </a:solidFill>
         </p:spPr>
         <p:style>
-          <a:lnRef idx="1">
-            <a:schemeClr val="accent1"/>
+          <a:lnRef idx="2">
+            <a:schemeClr val="accent1">
+              <a:shade val="50000"/>
+            </a:schemeClr>
           </a:lnRef>
-          <a:fillRef idx="3">
+          <a:fillRef idx="1">
             <a:schemeClr val="accent1"/>
           </a:fillRef>
-          <a:effectRef idx="2">
+          <a:effectRef idx="0">
             <a:schemeClr val="accent1"/>
           </a:effectRef>
           <a:fontRef idx="minor">
@@ -4360,35 +5913,44 @@
           <a:bodyPr rtlCol="0" anchor="ctr"/>
           <a:lstStyle/>
           <a:p>
-            <a:r>
-              <a:t>Donate Now</a:t>
-            </a:r>
-          </a:p>
-        </p:txBody>
-      </p:sp>
-      <p:sp>
-        <p:nvSpPr>
-          <p:cNvPr id="5" name="Rounded Rectangle 4"/>
+            <a:pPr algn="ctr"/>
+          </a:p>
+        </p:txBody>
+      </p:sp>
+      <p:sp>
+        <p:nvSpPr>
+          <p:cNvPr id="8" name="Oval 7"/>
           <p:cNvSpPr/>
           <p:nvPr/>
         </p:nvSpPr>
         <p:spPr>
           <a:xfrm>
-            <a:off x="5122711" y="1473267"/>
-            <a:ext cx="5970494" cy="5236522"/>
-          </a:xfrm>
-          <a:prstGeom prst="roundRect">
+            <a:off x="119420" y="4608941"/>
+            <a:ext cx="594360" cy="594360"/>
+          </a:xfrm>
+          <a:prstGeom prst="ellipse">
             <a:avLst/>
           </a:prstGeom>
+          <a:solidFill>
+            <a:schemeClr val="accent1">
+              <a:lumMod val="20000"/>
+              <a:lumOff val="80000"/>
+            </a:schemeClr>
+          </a:solidFill>
+          <a:ln>
+            <a:noFill/>
+          </a:ln>
         </p:spPr>
         <p:style>
-          <a:lnRef idx="1">
-            <a:schemeClr val="accent1"/>
+          <a:lnRef idx="2">
+            <a:schemeClr val="accent1">
+              <a:shade val="50000"/>
+            </a:schemeClr>
           </a:lnRef>
-          <a:fillRef idx="3">
+          <a:fillRef idx="1">
             <a:schemeClr val="accent1"/>
           </a:fillRef>
-          <a:effectRef idx="2">
+          <a:effectRef idx="0">
             <a:schemeClr val="accent1"/>
           </a:effectRef>
           <a:fontRef idx="minor">
@@ -4405,27 +5967,38 @@
       </p:sp>
       <p:sp>
         <p:nvSpPr>
-          <p:cNvPr id="6" name="Rectangle 5"/>
+          <p:cNvPr id="9" name="Rectangle 8"/>
           <p:cNvSpPr/>
           <p:nvPr/>
         </p:nvSpPr>
         <p:spPr>
           <a:xfrm>
-            <a:off x="5673422" y="1474189"/>
-            <a:ext cx="4869072" cy="5235600"/>
+            <a:off x="397306" y="4745278"/>
+            <a:ext cx="1882566" cy="321594"/>
           </a:xfrm>
           <a:prstGeom prst="rect">
             <a:avLst/>
           </a:prstGeom>
+          <a:solidFill>
+            <a:schemeClr val="accent1">
+              <a:lumMod val="20000"/>
+              <a:lumOff val="80000"/>
+            </a:schemeClr>
+          </a:solidFill>
+          <a:ln>
+            <a:noFill/>
+          </a:ln>
         </p:spPr>
         <p:style>
-          <a:lnRef idx="1">
-            <a:schemeClr val="accent1"/>
+          <a:lnRef idx="2">
+            <a:schemeClr val="accent1">
+              <a:shade val="50000"/>
+            </a:schemeClr>
           </a:lnRef>
-          <a:fillRef idx="3">
+          <a:fillRef idx="1">
             <a:schemeClr val="accent1"/>
           </a:fillRef>
-          <a:effectRef idx="2">
+          <a:effectRef idx="0">
             <a:schemeClr val="accent1"/>
           </a:effectRef>
           <a:fontRef idx="minor">
@@ -4436,35 +6009,41 @@
           <a:bodyPr rtlCol="0" anchor="ctr"/>
           <a:lstStyle/>
           <a:p>
-            <a:r>
-              <a:t>Project: Holy Child Catholic SchoolFirst Name: _______________________Last Name: _______________________Address: _________________________City: ____________________________State:  [Drop Down ]         Zip: ___________ Keep me anonymous to the above school.Pledge Amount: $  ___________Credit Card Info</a:t>
-            </a:r>
-          </a:p>
-        </p:txBody>
-      </p:sp>
-      <p:sp>
-        <p:nvSpPr>
-          <p:cNvPr id="7" name="Right Arrow 6"/>
+            <a:pPr algn="ctr"/>
+          </a:p>
+        </p:txBody>
+      </p:sp>
+      <p:sp>
+        <p:nvSpPr>
+          <p:cNvPr id="10" name="Rectangle 9"/>
           <p:cNvSpPr/>
           <p:nvPr/>
         </p:nvSpPr>
         <p:spPr>
           <a:xfrm>
-            <a:off x="4255368" y="5334618"/>
-            <a:ext cx="932325" cy="487183"/>
-          </a:xfrm>
-          <a:prstGeom prst="rightArrow">
+            <a:off x="2145365" y="4745278"/>
+            <a:ext cx="1828800" cy="321594"/>
+          </a:xfrm>
+          <a:prstGeom prst="rect">
             <a:avLst/>
           </a:prstGeom>
+          <a:solidFill>
+            <a:schemeClr val="bg1"/>
+          </a:solidFill>
+          <a:ln>
+            <a:noFill/>
+          </a:ln>
         </p:spPr>
         <p:style>
-          <a:lnRef idx="1">
-            <a:schemeClr val="accent1"/>
+          <a:lnRef idx="2">
+            <a:schemeClr val="accent1">
+              <a:shade val="50000"/>
+            </a:schemeClr>
           </a:lnRef>
-          <a:fillRef idx="3">
+          <a:fillRef idx="1">
             <a:schemeClr val="accent1"/>
           </a:fillRef>
-          <a:effectRef idx="2">
+          <a:effectRef idx="0">
             <a:schemeClr val="accent1"/>
           </a:effectRef>
           <a:fontRef idx="minor">
@@ -4481,27 +6060,72 @@
       </p:sp>
       <p:sp>
         <p:nvSpPr>
-          <p:cNvPr id="8" name="Oval 7"/>
+          <p:cNvPr id="11" name="TextBox 10"/>
+          <p:cNvSpPr txBox="1"/>
+          <p:nvPr/>
+        </p:nvSpPr>
+        <p:spPr>
+          <a:xfrm>
+            <a:off x="3974165" y="4551700"/>
+            <a:ext cx="1890339" cy="646297"/>
+          </a:xfrm>
+          <a:prstGeom prst="rect">
+            <a:avLst/>
+          </a:prstGeom>
+          <a:noFill/>
+        </p:spPr>
+        <p:txBody>
+          <a:bodyPr wrap="square">
+            <a:spAutoFit/>
+          </a:bodyPr>
+          <a:lstStyle/>
+          <a:p>
+            <a:pPr>
+              <a:buNone/>
+            </a:pPr>
+            <a:r>
+              <a:rPr b="1">
+                <a:latin typeface="Times New Roman"/>
+              </a:rPr>
+              <a:t>$15,250 of $30,000 Raised </a:t>
+            </a:r>
+          </a:p>
+        </p:txBody>
+      </p:sp>
+      <p:sp>
+        <p:nvSpPr>
+          <p:cNvPr id="12" name="Oval 11"/>
           <p:cNvSpPr/>
           <p:nvPr/>
         </p:nvSpPr>
         <p:spPr>
           <a:xfrm>
-            <a:off x="6060142" y="914404"/>
+            <a:off x="6113952" y="950153"/>
             <a:ext cx="594360" cy="594360"/>
           </a:xfrm>
           <a:prstGeom prst="ellipse">
             <a:avLst/>
           </a:prstGeom>
+          <a:solidFill>
+            <a:schemeClr val="accent1">
+              <a:lumMod val="20000"/>
+              <a:lumOff val="80000"/>
+            </a:schemeClr>
+          </a:solidFill>
+          <a:ln>
+            <a:noFill/>
+          </a:ln>
         </p:spPr>
         <p:style>
-          <a:lnRef idx="1">
-            <a:schemeClr val="accent1"/>
+          <a:lnRef idx="2">
+            <a:schemeClr val="accent1">
+              <a:shade val="50000"/>
+            </a:schemeClr>
           </a:lnRef>
-          <a:fillRef idx="3">
+          <a:fillRef idx="1">
             <a:schemeClr val="accent1"/>
           </a:fillRef>
-          <a:effectRef idx="2">
+          <a:effectRef idx="0">
             <a:schemeClr val="accent1"/>
           </a:effectRef>
           <a:fontRef idx="minor">
@@ -4518,27 +6142,38 @@
       </p:sp>
       <p:sp>
         <p:nvSpPr>
-          <p:cNvPr id="9" name="Rectangle 8"/>
+          <p:cNvPr id="13" name="Rectangle 12"/>
           <p:cNvSpPr/>
           <p:nvPr/>
         </p:nvSpPr>
         <p:spPr>
           <a:xfrm>
-            <a:off x="6338048" y="1050772"/>
-            <a:ext cx="1882588" cy="321624"/>
+            <a:off x="6391838" y="1086490"/>
+            <a:ext cx="1882566" cy="321594"/>
           </a:xfrm>
           <a:prstGeom prst="rect">
             <a:avLst/>
           </a:prstGeom>
+          <a:solidFill>
+            <a:schemeClr val="accent1">
+              <a:lumMod val="20000"/>
+              <a:lumOff val="80000"/>
+            </a:schemeClr>
+          </a:solidFill>
+          <a:ln>
+            <a:noFill/>
+          </a:ln>
         </p:spPr>
         <p:style>
-          <a:lnRef idx="1">
-            <a:schemeClr val="accent1"/>
+          <a:lnRef idx="2">
+            <a:schemeClr val="accent1">
+              <a:shade val="50000"/>
+            </a:schemeClr>
           </a:lnRef>
-          <a:fillRef idx="3">
+          <a:fillRef idx="1">
             <a:schemeClr val="accent1"/>
           </a:fillRef>
-          <a:effectRef idx="2">
+          <a:effectRef idx="0">
             <a:schemeClr val="accent1"/>
           </a:effectRef>
           <a:fontRef idx="minor">
@@ -4555,27 +6190,35 @@
       </p:sp>
       <p:sp>
         <p:nvSpPr>
-          <p:cNvPr id="10" name="Rectangle 9"/>
+          <p:cNvPr id="14" name="Rectangle 13"/>
           <p:cNvSpPr/>
           <p:nvPr/>
         </p:nvSpPr>
         <p:spPr>
           <a:xfrm>
-            <a:off x="8086165" y="1050772"/>
-            <a:ext cx="1828800" cy="321624"/>
+            <a:off x="8139897" y="1086490"/>
+            <a:ext cx="1828800" cy="321594"/>
           </a:xfrm>
           <a:prstGeom prst="rect">
             <a:avLst/>
           </a:prstGeom>
+          <a:solidFill>
+            <a:schemeClr val="bg1"/>
+          </a:solidFill>
+          <a:ln>
+            <a:noFill/>
+          </a:ln>
         </p:spPr>
         <p:style>
-          <a:lnRef idx="1">
-            <a:schemeClr val="accent1"/>
+          <a:lnRef idx="2">
+            <a:schemeClr val="accent1">
+              <a:shade val="50000"/>
+            </a:schemeClr>
           </a:lnRef>
-          <a:fillRef idx="3">
+          <a:fillRef idx="1">
             <a:schemeClr val="accent1"/>
           </a:fillRef>
-          <a:effectRef idx="2">
+          <a:effectRef idx="0">
             <a:schemeClr val="accent1"/>
           </a:effectRef>
           <a:fontRef idx="minor">
@@ -4592,189 +6235,34 @@
       </p:sp>
       <p:sp>
         <p:nvSpPr>
-          <p:cNvPr id="11" name="Rectangle 10"/>
-          <p:cNvSpPr/>
+          <p:cNvPr id="15" name="TextBox 14"/>
+          <p:cNvSpPr txBox="1"/>
           <p:nvPr/>
         </p:nvSpPr>
         <p:spPr>
           <a:xfrm>
-            <a:off x="9914965" y="857186"/>
-            <a:ext cx="1890320" cy="646331"/>
+            <a:off x="9968697" y="892911"/>
+            <a:ext cx="1890339" cy="646297"/>
           </a:xfrm>
           <a:prstGeom prst="rect">
             <a:avLst/>
           </a:prstGeom>
-        </p:spPr>
-        <p:style>
-          <a:lnRef idx="1">
-            <a:schemeClr val="accent1"/>
-          </a:lnRef>
-          <a:fillRef idx="3">
-            <a:schemeClr val="accent1"/>
-          </a:fillRef>
-          <a:effectRef idx="2">
-            <a:schemeClr val="accent1"/>
-          </a:effectRef>
-          <a:fontRef idx="minor">
-            <a:schemeClr val="lt1"/>
-          </a:fontRef>
-        </p:style>
-        <p:txBody>
-          <a:bodyPr rtlCol="0" anchor="ctr"/>
-          <a:lstStyle/>
-          <a:p>
-            <a:r>
-              <a:t>$15,250 of $30,000 Raised</a:t>
-            </a:r>
-          </a:p>
-        </p:txBody>
-      </p:sp>
-      <p:sp>
-        <p:nvSpPr>
-          <p:cNvPr id="12" name="Oval 11"/>
-          <p:cNvSpPr/>
-          <p:nvPr/>
-        </p:nvSpPr>
-        <p:spPr>
-          <a:xfrm>
-            <a:off x="6060142" y="914404"/>
-            <a:ext cx="594360" cy="594360"/>
-          </a:xfrm>
-          <a:prstGeom prst="ellipse">
-            <a:avLst/>
-          </a:prstGeom>
-        </p:spPr>
-        <p:style>
-          <a:lnRef idx="1">
-            <a:schemeClr val="accent1"/>
-          </a:lnRef>
-          <a:fillRef idx="3">
-            <a:schemeClr val="accent1"/>
-          </a:fillRef>
-          <a:effectRef idx="2">
-            <a:schemeClr val="accent1"/>
-          </a:effectRef>
-          <a:fontRef idx="minor">
-            <a:schemeClr val="lt1"/>
-          </a:fontRef>
-        </p:style>
-        <p:txBody>
-          <a:bodyPr rtlCol="0" anchor="ctr"/>
-          <a:lstStyle/>
-          <a:p>
-            <a:pPr algn="ctr"/>
-          </a:p>
-        </p:txBody>
-      </p:sp>
-      <p:sp>
-        <p:nvSpPr>
-          <p:cNvPr id="13" name="Rectangle 12"/>
-          <p:cNvSpPr/>
-          <p:nvPr/>
-        </p:nvSpPr>
-        <p:spPr>
-          <a:xfrm>
-            <a:off x="6338048" y="1050772"/>
-            <a:ext cx="1882588" cy="321624"/>
-          </a:xfrm>
-          <a:prstGeom prst="rect">
-            <a:avLst/>
-          </a:prstGeom>
-        </p:spPr>
-        <p:style>
-          <a:lnRef idx="1">
-            <a:schemeClr val="accent1"/>
-          </a:lnRef>
-          <a:fillRef idx="3">
-            <a:schemeClr val="accent1"/>
-          </a:fillRef>
-          <a:effectRef idx="2">
-            <a:schemeClr val="accent1"/>
-          </a:effectRef>
-          <a:fontRef idx="minor">
-            <a:schemeClr val="lt1"/>
-          </a:fontRef>
-        </p:style>
-        <p:txBody>
-          <a:bodyPr rtlCol="0" anchor="ctr"/>
-          <a:lstStyle/>
-          <a:p>
-            <a:pPr algn="ctr"/>
-          </a:p>
-        </p:txBody>
-      </p:sp>
-      <p:sp>
-        <p:nvSpPr>
-          <p:cNvPr id="14" name="Rectangle 13"/>
-          <p:cNvSpPr/>
-          <p:nvPr/>
-        </p:nvSpPr>
-        <p:spPr>
-          <a:xfrm>
-            <a:off x="8086165" y="1050772"/>
-            <a:ext cx="1828800" cy="321624"/>
-          </a:xfrm>
-          <a:prstGeom prst="rect">
-            <a:avLst/>
-          </a:prstGeom>
-        </p:spPr>
-        <p:style>
-          <a:lnRef idx="1">
-            <a:schemeClr val="accent1"/>
-          </a:lnRef>
-          <a:fillRef idx="3">
-            <a:schemeClr val="accent1"/>
-          </a:fillRef>
-          <a:effectRef idx="2">
-            <a:schemeClr val="accent1"/>
-          </a:effectRef>
-          <a:fontRef idx="minor">
-            <a:schemeClr val="lt1"/>
-          </a:fontRef>
-        </p:style>
-        <p:txBody>
-          <a:bodyPr rtlCol="0" anchor="ctr"/>
-          <a:lstStyle/>
-          <a:p>
-            <a:pPr algn="ctr"/>
-          </a:p>
-        </p:txBody>
-      </p:sp>
-      <p:sp>
-        <p:nvSpPr>
-          <p:cNvPr id="15" name="Rectangle 14"/>
-          <p:cNvSpPr/>
-          <p:nvPr/>
-        </p:nvSpPr>
-        <p:spPr>
-          <a:xfrm>
-            <a:off x="9914965" y="857186"/>
-            <a:ext cx="1890320" cy="646331"/>
-          </a:xfrm>
-          <a:prstGeom prst="rect">
-            <a:avLst/>
-          </a:prstGeom>
-        </p:spPr>
-        <p:style>
-          <a:lnRef idx="1">
-            <a:schemeClr val="accent1"/>
-          </a:lnRef>
-          <a:fillRef idx="3">
-            <a:schemeClr val="accent1"/>
-          </a:fillRef>
-          <a:effectRef idx="2">
-            <a:schemeClr val="accent1"/>
-          </a:effectRef>
-          <a:fontRef idx="minor">
-            <a:schemeClr val="lt1"/>
-          </a:fontRef>
-        </p:style>
-        <p:txBody>
-          <a:bodyPr rtlCol="0" anchor="ctr"/>
-          <a:lstStyle/>
-          <a:p>
-            <a:r>
-              <a:t>$15,250 of $30,000 Raised</a:t>
+          <a:noFill/>
+        </p:spPr>
+        <p:txBody>
+          <a:bodyPr wrap="square">
+            <a:spAutoFit/>
+          </a:bodyPr>
+          <a:lstStyle/>
+          <a:p>
+            <a:pPr>
+              <a:buNone/>
+            </a:pPr>
+            <a:r>
+              <a:rPr b="1">
+                <a:latin typeface="Times New Roman"/>
+              </a:rPr>
+              <a:t>$15,250 of $30,000 Raised </a:t>
             </a:r>
           </a:p>
         </p:txBody>
@@ -4799,38 +6287,21 @@
       <p:grpSpPr/>
       <p:sp>
         <p:nvSpPr>
-          <p:cNvPr id="2" name="Rectangle 1"/>
-          <p:cNvSpPr/>
-          <p:nvPr/>
-        </p:nvSpPr>
-        <p:spPr>
-          <a:xfrm>
-            <a:off x="318053" y="1"/>
-            <a:ext cx="10736802" cy="868705"/>
-          </a:xfrm>
-          <a:prstGeom prst="rect">
-            <a:avLst/>
-          </a:prstGeom>
-        </p:spPr>
-        <p:style>
-          <a:lnRef idx="1">
-            <a:schemeClr val="accent1"/>
-          </a:lnRef>
-          <a:fillRef idx="3">
-            <a:schemeClr val="accent1"/>
-          </a:fillRef>
-          <a:effectRef idx="2">
-            <a:schemeClr val="accent1"/>
-          </a:effectRef>
-          <a:fontRef idx="minor">
-            <a:schemeClr val="lt1"/>
-          </a:fontRef>
-        </p:style>
-        <p:txBody>
-          <a:bodyPr rtlCol="0" anchor="ctr"/>
-          <a:lstStyle/>
-          <a:p>
-            <a:r>
+          <p:cNvPr id="2" name="Title 1"/>
+          <p:cNvSpPr>
+            <a:spLocks noGrp="1"/>
+          </p:cNvSpPr>
+          <p:nvPr>
+            <p:ph type="title"/>
+          </p:nvPr>
+        </p:nvSpPr>
+        <p:spPr/>
+        <p:txBody>
+          <a:bodyPr/>
+          <a:lstStyle/>
+          <a:p>
+            <a:r>
+              <a:rPr/>
               <a:t>Bank Account Info</a:t>
             </a:r>
           </a:p>
@@ -4838,39 +6309,45 @@
       </p:sp>
       <p:sp>
         <p:nvSpPr>
-          <p:cNvPr id="3" name="Rectangle 2"/>
-          <p:cNvSpPr/>
-          <p:nvPr/>
-        </p:nvSpPr>
-        <p:spPr>
-          <a:xfrm>
-            <a:off x="129981" y="938440"/>
-            <a:ext cx="4459948" cy="5687646"/>
-          </a:xfrm>
-          <a:prstGeom prst="rect">
-            <a:avLst/>
-          </a:prstGeom>
-        </p:spPr>
-        <p:style>
-          <a:lnRef idx="1">
-            <a:schemeClr val="accent1"/>
-          </a:lnRef>
-          <a:fillRef idx="3">
-            <a:schemeClr val="accent1"/>
-          </a:fillRef>
-          <a:effectRef idx="2">
-            <a:schemeClr val="accent1"/>
-          </a:effectRef>
-          <a:fontRef idx="minor">
-            <a:schemeClr val="lt1"/>
-          </a:fontRef>
-        </p:style>
-        <p:txBody>
-          <a:bodyPr rtlCol="0" anchor="ctr"/>
-          <a:lstStyle/>
-          <a:p>
-            <a:r>
-              <a:t>Routing #: 307083911Auto WD and Direct Deposit #: 9225000161Account #: 10422500-9001Not used for electronic transactions</a:t>
+          <p:cNvPr id="3" name="Content Placeholder 2"/>
+          <p:cNvSpPr>
+            <a:spLocks noGrp="1"/>
+          </p:cNvSpPr>
+          <p:nvPr>
+            <p:ph type="obj" idx="1"/>
+          </p:nvPr>
+        </p:nvSpPr>
+        <p:spPr>
+          <a:xfrm>
+            <a:off x="129936" y="938449"/>
+            <a:ext cx="4459986" cy="5687659"/>
+          </a:xfrm>
+        </p:spPr>
+        <p:txBody>
+          <a:bodyPr wrap="square"/>
+          <a:lstStyle/>
+          <a:p>
+            <a:pPr lvl="0"/>
+            <a:r>
+              <a:t>Routing #: 307083911</a:t>
+            </a:r>
+          </a:p>
+          <a:p>
+            <a:pPr lvl="0"/>
+            <a:r>
+              <a:t>Auto WD and Direct Deposit #: 9225000161</a:t>
+            </a:r>
+          </a:p>
+          <a:p>
+            <a:pPr lvl="0"/>
+            <a:r>
+              <a:t>Account #: 10422500-9001</a:t>
+            </a:r>
+          </a:p>
+          <a:p>
+            <a:pPr lvl="1"/>
+            <a:r>
+              <a:t>Not used for electronic transactions</a:t>
             </a:r>
           </a:p>
         </p:txBody>
@@ -4891,8 +6368,8 @@
         </p:blipFill>
         <p:spPr>
           <a:xfrm>
-            <a:off x="4762187" y="926471"/>
-            <a:ext cx="7111760" cy="5896834"/>
+            <a:off x="4762195" y="926470"/>
+            <a:ext cx="7111746" cy="5896874"/>
           </a:xfrm>
           <a:prstGeom prst="rect">
             <a:avLst/>
@@ -4919,78 +6396,52 @@
       <p:grpSpPr/>
       <p:sp>
         <p:nvSpPr>
-          <p:cNvPr id="2" name="Rectangle 1"/>
-          <p:cNvSpPr/>
-          <p:nvPr/>
-        </p:nvSpPr>
-        <p:spPr>
-          <a:xfrm>
-            <a:off x="318053" y="1"/>
-            <a:ext cx="10736802" cy="868705"/>
-          </a:xfrm>
-          <a:prstGeom prst="rect">
-            <a:avLst/>
-          </a:prstGeom>
-        </p:spPr>
-        <p:style>
-          <a:lnRef idx="1">
-            <a:schemeClr val="accent1"/>
-          </a:lnRef>
-          <a:fillRef idx="3">
-            <a:schemeClr val="accent1"/>
-          </a:fillRef>
-          <a:effectRef idx="2">
-            <a:schemeClr val="accent1"/>
-          </a:effectRef>
-          <a:fontRef idx="minor">
-            <a:schemeClr val="lt1"/>
-          </a:fontRef>
-        </p:style>
-        <p:txBody>
-          <a:bodyPr rtlCol="0" anchor="ctr"/>
-          <a:lstStyle/>
-          <a:p>
-            <a:r>
+          <p:cNvPr id="2" name="Title 1"/>
+          <p:cNvSpPr>
+            <a:spLocks noGrp="1"/>
+          </p:cNvSpPr>
+          <p:nvPr>
+            <p:ph type="title"/>
+          </p:nvPr>
+        </p:nvSpPr>
+        <p:spPr/>
+        <p:txBody>
+          <a:bodyPr>
+            <a:normAutofit fontScale="90000"/>
+          </a:bodyPr>
+          <a:lstStyle/>
+          <a:p>
+            <a:r>
+              <a:rPr/>
               <a:t>KYC documentation</a:t>
             </a:r>
-          </a:p>
-        </p:txBody>
-      </p:sp>
-      <p:sp>
-        <p:nvSpPr>
-          <p:cNvPr id="3" name="Rectangle 2"/>
-          <p:cNvSpPr/>
-          <p:nvPr/>
-        </p:nvSpPr>
-        <p:spPr>
-          <a:xfrm>
-            <a:off x="480061" y="938440"/>
-            <a:ext cx="10386722" cy="675207"/>
-          </a:xfrm>
-          <a:prstGeom prst="rect">
-            <a:avLst/>
-          </a:prstGeom>
-        </p:spPr>
-        <p:style>
-          <a:lnRef idx="1">
-            <a:schemeClr val="accent1"/>
-          </a:lnRef>
-          <a:fillRef idx="3">
-            <a:schemeClr val="accent1"/>
-          </a:fillRef>
-          <a:effectRef idx="2">
-            <a:schemeClr val="accent1"/>
-          </a:effectRef>
-          <a:fontRef idx="minor">
-            <a:schemeClr val="lt1"/>
-          </a:fontRef>
-        </p:style>
-        <p:txBody>
-          <a:bodyPr rtlCol="0" anchor="ctr"/>
-          <a:lstStyle/>
-          <a:p>
-            <a:r>
-              <a:t>Passport/Driver’s License for Douglas Coombs</a:t>
+            <a:br/>
+          </a:p>
+        </p:txBody>
+      </p:sp>
+      <p:sp>
+        <p:nvSpPr>
+          <p:cNvPr id="3" name="Content Placeholder 2"/>
+          <p:cNvSpPr>
+            <a:spLocks noGrp="1"/>
+          </p:cNvSpPr>
+          <p:nvPr>
+            <p:ph type="obj" idx="1"/>
+          </p:nvPr>
+        </p:nvSpPr>
+        <p:spPr>
+          <a:xfrm>
+            <a:off x="480060" y="938449"/>
+            <a:ext cx="10386761" cy="675193"/>
+          </a:xfrm>
+        </p:spPr>
+        <p:txBody>
+          <a:bodyPr wrap="square"/>
+          <a:lstStyle/>
+          <a:p>
+            <a:pPr lvl="0"/>
+            <a:r>
+              <a:t>Passport/Driver's License for Douglas Coombs</a:t>
             </a:r>
           </a:p>
         </p:txBody>
@@ -5005,14 +6456,15 @@
         </p:nvPicPr>
         <p:blipFill>
           <a:blip r:embed="rId2"/>
+          <a:srcRect l="6551" r="6053" b="13693"/>
           <a:stretch>
             <a:fillRect/>
           </a:stretch>
         </p:blipFill>
         <p:spPr>
           <a:xfrm>
-            <a:off x="67047" y="1683381"/>
-            <a:ext cx="6042212" cy="3729317"/>
+            <a:off x="67025" y="1683410"/>
+            <a:ext cx="6042172" cy="3729288"/>
           </a:xfrm>
           <a:prstGeom prst="rect">
             <a:avLst/>
@@ -5029,14 +6481,15 @@
         </p:nvPicPr>
         <p:blipFill>
           <a:blip r:embed="rId3"/>
+          <a:srcRect l="15460" r="15520" b="27705"/>
           <a:stretch>
             <a:fillRect/>
           </a:stretch>
         </p:blipFill>
         <p:spPr>
           <a:xfrm>
-            <a:off x="6220216" y="1689847"/>
-            <a:ext cx="5923677" cy="3722851"/>
+            <a:off x="6220206" y="1689811"/>
+            <a:ext cx="5923666" cy="3722888"/>
           </a:xfrm>
           <a:prstGeom prst="rect">
             <a:avLst/>
@@ -5063,38 +6516,21 @@
       <p:grpSpPr/>
       <p:sp>
         <p:nvSpPr>
-          <p:cNvPr id="2" name="Rectangle 1"/>
-          <p:cNvSpPr/>
-          <p:nvPr/>
-        </p:nvSpPr>
-        <p:spPr>
-          <a:xfrm>
-            <a:off x="318053" y="1"/>
-            <a:ext cx="10736802" cy="868705"/>
-          </a:xfrm>
-          <a:prstGeom prst="rect">
-            <a:avLst/>
-          </a:prstGeom>
-        </p:spPr>
-        <p:style>
-          <a:lnRef idx="1">
-            <a:schemeClr val="accent1"/>
-          </a:lnRef>
-          <a:fillRef idx="3">
-            <a:schemeClr val="accent1"/>
-          </a:fillRef>
-          <a:effectRef idx="2">
-            <a:schemeClr val="accent1"/>
-          </a:effectRef>
-          <a:fontRef idx="minor">
-            <a:schemeClr val="lt1"/>
-          </a:fontRef>
-        </p:style>
-        <p:txBody>
-          <a:bodyPr rtlCol="0" anchor="ctr"/>
-          <a:lstStyle/>
-          <a:p>
-            <a:r>
+          <p:cNvPr id="2" name="Title 1"/>
+          <p:cNvSpPr>
+            <a:spLocks noGrp="1"/>
+          </p:cNvSpPr>
+          <p:nvPr>
+            <p:ph type="title"/>
+          </p:nvPr>
+        </p:nvSpPr>
+        <p:spPr/>
+        <p:txBody>
+          <a:bodyPr/>
+          <a:lstStyle/>
+          <a:p>
+            <a:r>
+              <a:rPr/>
               <a:t>Legalese on Website</a:t>
             </a:r>
           </a:p>
@@ -5102,39 +6538,185 @@
       </p:sp>
       <p:sp>
         <p:nvSpPr>
-          <p:cNvPr id="3" name="Rectangle 2"/>
-          <p:cNvSpPr/>
-          <p:nvPr/>
-        </p:nvSpPr>
-        <p:spPr>
-          <a:xfrm>
-            <a:off x="480060" y="938440"/>
-            <a:ext cx="11052297" cy="5687646"/>
-          </a:xfrm>
-          <a:prstGeom prst="rect">
-            <a:avLst/>
-          </a:prstGeom>
-        </p:spPr>
-        <p:style>
-          <a:lnRef idx="1">
-            <a:schemeClr val="accent1"/>
-          </a:lnRef>
-          <a:fillRef idx="3">
-            <a:schemeClr val="accent1"/>
-          </a:fillRef>
-          <a:effectRef idx="2">
-            <a:schemeClr val="accent1"/>
-          </a:effectRef>
-          <a:fontRef idx="minor">
-            <a:schemeClr val="lt1"/>
-          </a:fontRef>
-        </p:style>
-        <p:txBody>
-          <a:bodyPr rtlCol="0" anchor="ctr"/>
-          <a:lstStyle/>
-          <a:p>
-            <a:r>
-              <a:t>Legal entity name: The Saint Luke GuildGoverning jurisdiction: New MexicoMerchant registered business address: 2718 University Blvd NE, Albuquerque, NM 87107Privacy PolicySee next slideRefund/Cancellation/Return PolicySee next slideSee www.SaintLukeGuild.com/About-UsTo be moved to www.SaintLukeGuild.com/Legalese at a future date</a:t>
+          <p:cNvPr id="3" name="Content Placeholder 2"/>
+          <p:cNvSpPr>
+            <a:spLocks noGrp="1"/>
+          </p:cNvSpPr>
+          <p:nvPr>
+            <p:ph type="obj" idx="1"/>
+          </p:nvPr>
+        </p:nvSpPr>
+        <p:spPr>
+          <a:xfrm>
+            <a:off x="480060" y="938449"/>
+            <a:ext cx="11052261" cy="5687659"/>
+          </a:xfrm>
+        </p:spPr>
+        <p:txBody>
+          <a:bodyPr wrap="square"/>
+          <a:lstStyle/>
+          <a:p>
+            <a:pPr lvl="0"/>
+            <a:r>
+              <a:rPr>
+                <a:solidFill>
+                  <a:srgbClr val="222222"/>
+                </a:solidFill>
+                <a:latin typeface="Arial"/>
+              </a:rPr>
+              <a:t>Legal entity name: </a:t>
+            </a:r>
+            <a:r>
+              <a:rPr>
+                <a:solidFill>
+                  <a:schemeClr val="accent6"/>
+                </a:solidFill>
+                <a:latin typeface="Arial"/>
+              </a:rPr>
+              <a:t>The Saint Luke Guild</a:t>
+            </a:r>
+          </a:p>
+          <a:p>
+            <a:pPr lvl="0"/>
+            <a:r>
+              <a:rPr>
+                <a:solidFill>
+                  <a:srgbClr val="222222"/>
+                </a:solidFill>
+                <a:latin typeface="Arial"/>
+              </a:rPr>
+              <a:t>Governing jurisdiction: </a:t>
+            </a:r>
+            <a:r>
+              <a:rPr>
+                <a:solidFill>
+                  <a:schemeClr val="accent6"/>
+                </a:solidFill>
+                <a:latin typeface="Arial"/>
+              </a:rPr>
+              <a:t>New Mexico</a:t>
+            </a:r>
+          </a:p>
+          <a:p>
+            <a:pPr lvl="0"/>
+            <a:r>
+              <a:rPr>
+                <a:solidFill>
+                  <a:srgbClr val="222222"/>
+                </a:solidFill>
+                <a:latin typeface="Arial"/>
+              </a:rPr>
+              <a:t>Merchant registered business address: </a:t>
+            </a:r>
+            <a:r>
+              <a:rPr>
+                <a:solidFill>
+                  <a:schemeClr val="accent6"/>
+                </a:solidFill>
+                <a:latin typeface="Arial"/>
+              </a:rPr>
+              <a:t>2718 University Blvd NE, Albuquerque, NM 87107</a:t>
+            </a:r>
+          </a:p>
+          <a:p>
+            <a:pPr lvl="0"/>
+            <a:r>
+              <a:rPr>
+                <a:solidFill>
+                  <a:srgbClr val="222222"/>
+                </a:solidFill>
+                <a:latin typeface="Arial"/>
+              </a:rPr>
+              <a:t>Privacy Policy</a:t>
+            </a:r>
+          </a:p>
+          <a:p>
+            <a:pPr lvl="1"/>
+            <a:r>
+              <a:rPr>
+                <a:solidFill>
+                  <a:schemeClr val="accent6"/>
+                </a:solidFill>
+                <a:latin typeface="Arial"/>
+              </a:rPr>
+              <a:t>See next slide</a:t>
+            </a:r>
+          </a:p>
+          <a:p>
+            <a:pPr lvl="0"/>
+            <a:r>
+              <a:rPr>
+                <a:solidFill>
+                  <a:srgbClr val="222222"/>
+                </a:solidFill>
+                <a:latin typeface="Arial"/>
+              </a:rPr>
+              <a:t>Refund/Cancellation/Return Policy</a:t>
+            </a:r>
+          </a:p>
+          <a:p>
+            <a:pPr lvl="1"/>
+            <a:r>
+              <a:rPr>
+                <a:solidFill>
+                  <a:schemeClr val="accent6"/>
+                </a:solidFill>
+                <a:latin typeface="Arial"/>
+              </a:rPr>
+              <a:t>See next slide</a:t>
+            </a:r>
+          </a:p>
+          <a:p>
+            <a:pPr lvl="0"/>
+            <a:r>
+              <a:rPr>
+                <a:solidFill>
+                  <a:srgbClr val="222222"/>
+                </a:solidFill>
+                <a:latin typeface="Arial"/>
+              </a:rPr>
+              <a:t>See </a:t>
+            </a:r>
+            <a:r>
+              <a:rPr>
+                <a:solidFill>
+                  <a:srgbClr val="222222"/>
+                </a:solidFill>
+                <a:latin typeface="Arial"/>
+                <a:hlinkClick r:id="rId2"/>
+              </a:rPr>
+              <a:t>www.SaintLukeGuild.com/About-Us</a:t>
+            </a:r>
+          </a:p>
+          <a:p>
+            <a:pPr lvl="1"/>
+            <a:r>
+              <a:rPr>
+                <a:solidFill>
+                  <a:srgbClr val="222222"/>
+                </a:solidFill>
+                <a:latin typeface="Arial"/>
+              </a:rPr>
+              <a:t>To be moved to </a:t>
+            </a:r>
+            <a:r>
+              <a:rPr>
+                <a:solidFill>
+                  <a:srgbClr val="222222"/>
+                </a:solidFill>
+                <a:latin typeface="Arial"/>
+                <a:hlinkClick r:id="rId3"/>
+              </a:rPr>
+              <a:t>www.SaintLukeGuild.com/Legalese</a:t>
+            </a:r>
+            <a:r>
+              <a:rPr>
+                <a:solidFill>
+                  <a:srgbClr val="222222"/>
+                </a:solidFill>
+                <a:latin typeface="Arial"/>
+              </a:rPr>
+              <a:t> at a future date</a:t>
             </a:r>
           </a:p>
         </p:txBody>
@@ -5159,38 +6741,21 @@
       <p:grpSpPr/>
       <p:sp>
         <p:nvSpPr>
-          <p:cNvPr id="2" name="Rectangle 1"/>
-          <p:cNvSpPr/>
-          <p:nvPr/>
-        </p:nvSpPr>
-        <p:spPr>
-          <a:xfrm>
-            <a:off x="318053" y="1"/>
-            <a:ext cx="10736802" cy="868705"/>
-          </a:xfrm>
-          <a:prstGeom prst="rect">
-            <a:avLst/>
-          </a:prstGeom>
-        </p:spPr>
-        <p:style>
-          <a:lnRef idx="1">
-            <a:schemeClr val="accent1"/>
-          </a:lnRef>
-          <a:fillRef idx="3">
-            <a:schemeClr val="accent1"/>
-          </a:fillRef>
-          <a:effectRef idx="2">
-            <a:schemeClr val="accent1"/>
-          </a:effectRef>
-          <a:fontRef idx="minor">
-            <a:schemeClr val="lt1"/>
-          </a:fontRef>
-        </p:style>
-        <p:txBody>
-          <a:bodyPr rtlCol="0" anchor="ctr"/>
-          <a:lstStyle/>
-          <a:p>
-            <a:r>
+          <p:cNvPr id="2" name="Title 1"/>
+          <p:cNvSpPr>
+            <a:spLocks noGrp="1"/>
+          </p:cNvSpPr>
+          <p:nvPr>
+            <p:ph type="title"/>
+          </p:nvPr>
+        </p:nvSpPr>
+        <p:spPr/>
+        <p:txBody>
+          <a:bodyPr/>
+          <a:lstStyle/>
+          <a:p>
+            <a:r>
+              <a:rPr/>
               <a:t>Privacy and Refund Policy</a:t>
             </a:r>
           </a:p>
@@ -5198,39 +6763,83 @@
       </p:sp>
       <p:sp>
         <p:nvSpPr>
-          <p:cNvPr id="3" name="Rectangle 2"/>
-          <p:cNvSpPr/>
-          <p:nvPr/>
-        </p:nvSpPr>
-        <p:spPr>
-          <a:xfrm>
-            <a:off x="318052" y="938439"/>
-            <a:ext cx="11425713" cy="5193419"/>
-          </a:xfrm>
-          <a:prstGeom prst="rect">
-            <a:avLst/>
-          </a:prstGeom>
-        </p:spPr>
-        <p:style>
-          <a:lnRef idx="1">
-            <a:schemeClr val="accent1"/>
-          </a:lnRef>
-          <a:fillRef idx="3">
-            <a:schemeClr val="accent1"/>
-          </a:fillRef>
-          <a:effectRef idx="2">
-            <a:schemeClr val="accent1"/>
-          </a:effectRef>
-          <a:fontRef idx="minor">
-            <a:schemeClr val="lt1"/>
-          </a:fontRef>
-        </p:style>
-        <p:txBody>
-          <a:bodyPr rtlCol="0" anchor="ctr"/>
-          <a:lstStyle/>
-          <a:p>
-            <a:r>
-              <a:t>https://www.saintlukeguild.com/about-usRefund PolicyThe Saint Luke Guild does not deliver products to individuals; therefore cancellations and returns are not applicable.  Also, donor refunds are not generally offered.  Refunds will be considered on a case-by-case basis before money is distributed to the designated project (e.g., if someone accidentally entered the wrong donation amount and contact is made within one business day).  To request a refund, contact us at refunds@saintlukeguild.com.Privacy PolicyThe Saint Luke Guild takes donor information and privacy very seriously.  We will never sell donor information to a third party for any reason.Donor information will only be shared with outside businesses as necessary to deliver services (e.g., processing credit card donations, etc.).The exception is when donors choose a specific school project to donate to.  When this occurs, donor information will typically be shared with the specified school, so that they can know to whom they should be grateful.  Donors may opt out of information sharing on the donor form.</a:t>
+          <p:cNvPr id="3" name="Content Placeholder 2"/>
+          <p:cNvSpPr>
+            <a:spLocks noGrp="1"/>
+          </p:cNvSpPr>
+          <p:nvPr>
+            <p:ph type="obj" idx="1"/>
+          </p:nvPr>
+        </p:nvSpPr>
+        <p:spPr>
+          <a:xfrm>
+            <a:off x="318028" y="938449"/>
+            <a:ext cx="11425702" cy="5193426"/>
+          </a:xfrm>
+        </p:spPr>
+        <p:txBody>
+          <a:bodyPr wrap="square">
+            <a:normAutofit fontScale="92500" lnSpcReduction="20000"/>
+          </a:bodyPr>
+          <a:lstStyle/>
+          <a:p>
+            <a:pPr lvl="0">
+              <a:buNone/>
+            </a:pPr>
+            <a:r>
+              <a:rPr>
+                <a:hlinkClick r:id="rId2"/>
+              </a:rPr>
+              <a:t>https://www.saintlukeguild.com/about-us</a:t>
+            </a:r>
+          </a:p>
+          <a:p>
+            <a:pPr lvl="0">
+              <a:buNone/>
+            </a:pPr>
+            <a:r>
+              <a:t>Refund Policy</a:t>
+            </a:r>
+          </a:p>
+          <a:p>
+            <a:pPr lvl="0"/>
+            <a:r>
+              <a:t>The Saint Luke Guild does not deliver products to individuals; therefore cancellations and returns are not applicable.  Also, donor refunds are not generally offered.  Refunds will be considered on a case-by-case basis before money is distributed to the designated project (e.g., if someone accidentally entered the wrong donation amount and contact is made within one business day).  To request a refund, contact us at </a:t>
+            </a:r>
+            <a:r>
+              <a:rPr>
+                <a:hlinkClick r:id="rId3"/>
+              </a:rPr>
+              <a:t>refunds@saintlukeguild.com</a:t>
+            </a:r>
+            <a:r>
+              <a:t>.</a:t>
+            </a:r>
+          </a:p>
+          <a:p>
+            <a:pPr lvl="0">
+              <a:buNone/>
+            </a:pPr>
+            <a:r>
+              <a:t>Privacy Policy</a:t>
+            </a:r>
+          </a:p>
+          <a:p>
+            <a:pPr lvl="0"/>
+            <a:r>
+              <a:t>The Saint Luke Guild takes donor information and privacy very seriously.  We will never sell donor information to a third party for any reason.</a:t>
+            </a:r>
+          </a:p>
+          <a:p>
+            <a:pPr lvl="0"/>
+            <a:r>
+              <a:t>Donor information will only be shared with outside businesses as necessary to deliver services (e.g., processing credit card donations, etc.).</a:t>
+            </a:r>
+          </a:p>
+          <a:p>
+            <a:pPr lvl="1"/>
+            <a:r>
+              <a:t>The exception is when donors choose a specific school project to donate to.  When this occurs, donor information will typically be shared with the specified school, so that they can know to whom they should be grateful.  Donors may opt out of information sharing on the donor form.</a:t>
             </a:r>
           </a:p>
         </p:txBody>
@@ -5244,9 +6853,9 @@
 </file>
 
 <file path=ppt/theme/theme1.xml><?xml version="1.0" encoding="utf-8"?>
-<a:theme xmlns:a="http://schemas.openxmlformats.org/drawingml/2006/main" name="Office Theme">
+<a:theme xmlns:a="http://schemas.openxmlformats.org/drawingml/2006/main" name="Gallery">
   <a:themeElements>
-    <a:clrScheme name="Office">
+    <a:clrScheme name="Gallery">
       <a:dk1>
         <a:sysClr val="windowText" lastClr="000000"/>
       </a:dk1>
@@ -5254,44 +6863,79 @@
         <a:sysClr val="window" lastClr="FFFFFF"/>
       </a:lt1>
       <a:dk2>
-        <a:srgbClr val="1F497D"/>
+        <a:srgbClr val="454545"/>
       </a:dk2>
       <a:lt2>
-        <a:srgbClr val="EEECE1"/>
+        <a:srgbClr val="DFDBD5"/>
       </a:lt2>
       <a:accent1>
-        <a:srgbClr val="4F81BD"/>
+        <a:srgbClr val="B71E42"/>
       </a:accent1>
       <a:accent2>
-        <a:srgbClr val="C0504D"/>
+        <a:srgbClr val="DE478E"/>
       </a:accent2>
       <a:accent3>
-        <a:srgbClr val="9BBB59"/>
+        <a:srgbClr val="BC72F0"/>
       </a:accent3>
       <a:accent4>
-        <a:srgbClr val="8064A2"/>
+        <a:srgbClr val="795FAF"/>
       </a:accent4>
       <a:accent5>
-        <a:srgbClr val="4BACC6"/>
+        <a:srgbClr val="586EA6"/>
       </a:accent5>
       <a:accent6>
-        <a:srgbClr val="F79646"/>
+        <a:srgbClr val="6892A0"/>
       </a:accent6>
       <a:hlink>
-        <a:srgbClr val="0000FF"/>
+        <a:srgbClr val="FA2B5C"/>
       </a:hlink>
       <a:folHlink>
-        <a:srgbClr val="800080"/>
+        <a:srgbClr val="BC658E"/>
       </a:folHlink>
     </a:clrScheme>
-    <a:fontScheme name="Office">
+    <a:fontScheme name="Civic">
       <a:majorFont>
-        <a:latin typeface="Calibri"/>
+        <a:latin typeface="Georgia"/>
         <a:ea typeface=""/>
         <a:cs typeface=""/>
         <a:font script="Jpan" typeface="ＭＳ Ｐゴシック"/>
-        <a:font script="Hang" typeface="맑은 고딕"/>
-        <a:font script="Hans" typeface="宋体"/>
+        <a:font script="Hang" typeface="돋움"/>
+        <a:font script="Hans" typeface="方正舒体"/>
+        <a:font script="Hant" typeface="微軟正黑體"/>
+        <a:font script="Arab" typeface="Arial"/>
+        <a:font script="Hebr" typeface="Arial"/>
+        <a:font script="Thai" typeface="Cordia New"/>
+        <a:font script="Ethi" typeface="Nyala"/>
+        <a:font script="Beng" typeface="Vrinda"/>
+        <a:font script="Gujr" typeface="Shruti"/>
+        <a:font script="Khmr" typeface="DaunPenh"/>
+        <a:font script="Knda" typeface="Tunga"/>
+        <a:font script="Guru" typeface="Raavi"/>
+        <a:font script="Cans" typeface="Euphemia"/>
+        <a:font script="Cher" typeface="Plantagenet Cherokee"/>
+        <a:font script="Yiii" typeface="Microsoft Yi Baiti"/>
+        <a:font script="Tibt" typeface="Microsoft Himalaya"/>
+        <a:font script="Thaa" typeface="MV Boli"/>
+        <a:font script="Deva" typeface="Mangal"/>
+        <a:font script="Telu" typeface="Gautami"/>
+        <a:font script="Taml" typeface="Latha"/>
+        <a:font script="Syrc" typeface="Estrangelo Edessa"/>
+        <a:font script="Orya" typeface="Kalinga"/>
+        <a:font script="Mlym" typeface="Kartika"/>
+        <a:font script="Laoo" typeface="DokChampa"/>
+        <a:font script="Sinh" typeface="Iskoola Pota"/>
+        <a:font script="Mong" typeface="Mongolian Baiti"/>
+        <a:font script="Viet" typeface="Arial"/>
+        <a:font script="Uigh" typeface="Microsoft Uighur"/>
+        <a:font script="Geor" typeface="Sylfaen"/>
+      </a:majorFont>
+      <a:minorFont>
+        <a:latin typeface="Georgia"/>
+        <a:ea typeface=""/>
+        <a:cs typeface=""/>
+        <a:font script="Jpan" typeface="ＭＳ Ｐ明朝"/>
+        <a:font script="Hang" typeface="바탕"/>
+        <a:font script="Hans" typeface="方正舒体"/>
         <a:font script="Hant" typeface="新細明體"/>
         <a:font script="Arab" typeface="Times New Roman"/>
         <a:font script="Hebr" typeface="Times New Roman"/>
@@ -5319,14 +6963,249 @@
         <a:font script="Viet" typeface="Times New Roman"/>
         <a:font script="Uigh" typeface="Microsoft Uighur"/>
         <a:font script="Geor" typeface="Sylfaen"/>
+      </a:minorFont>
+    </a:fontScheme>
+    <a:fmtScheme name="Gallery">
+      <a:fillStyleLst>
+        <a:solidFill>
+          <a:schemeClr val="phClr"/>
+        </a:solidFill>
+        <a:gradFill rotWithShape="1">
+          <a:gsLst>
+            <a:gs pos="0">
+              <a:schemeClr val="phClr">
+                <a:tint val="54000"/>
+                <a:alpha val="100000"/>
+                <a:satMod val="105000"/>
+                <a:lumMod val="110000"/>
+              </a:schemeClr>
+            </a:gs>
+            <a:gs pos="100000">
+              <a:schemeClr val="phClr">
+                <a:tint val="78000"/>
+                <a:alpha val="92000"/>
+                <a:satMod val="109000"/>
+                <a:lumMod val="100000"/>
+              </a:schemeClr>
+            </a:gs>
+          </a:gsLst>
+          <a:lin ang="5400000" scaled="0"/>
+        </a:gradFill>
+        <a:gradFill rotWithShape="1">
+          <a:gsLst>
+            <a:gs pos="0">
+              <a:schemeClr val="phClr">
+                <a:tint val="98000"/>
+                <a:satMod val="110000"/>
+                <a:lumMod val="104000"/>
+              </a:schemeClr>
+            </a:gs>
+            <a:gs pos="69000">
+              <a:schemeClr val="phClr">
+                <a:shade val="88000"/>
+                <a:satMod val="130000"/>
+                <a:lumMod val="92000"/>
+              </a:schemeClr>
+            </a:gs>
+            <a:gs pos="100000">
+              <a:schemeClr val="phClr">
+                <a:shade val="78000"/>
+                <a:satMod val="130000"/>
+                <a:lumMod val="92000"/>
+              </a:schemeClr>
+            </a:gs>
+          </a:gsLst>
+          <a:lin ang="5400000" scaled="0"/>
+        </a:gradFill>
+      </a:fillStyleLst>
+      <a:lnStyleLst>
+        <a:ln w="9525" cap="flat" cmpd="sng" algn="ctr">
+          <a:solidFill>
+            <a:schemeClr val="phClr"/>
+          </a:solidFill>
+          <a:prstDash val="solid"/>
+        </a:ln>
+        <a:ln w="15875" cap="flat" cmpd="sng" algn="ctr">
+          <a:solidFill>
+            <a:schemeClr val="phClr"/>
+          </a:solidFill>
+          <a:prstDash val="solid"/>
+        </a:ln>
+        <a:ln w="22225" cap="flat" cmpd="sng" algn="ctr">
+          <a:solidFill>
+            <a:schemeClr val="phClr"/>
+          </a:solidFill>
+          <a:prstDash val="solid"/>
+        </a:ln>
+      </a:lnStyleLst>
+      <a:effectStyleLst>
+        <a:effectStyle>
+          <a:effectLst/>
+        </a:effectStyle>
+        <a:effectStyle>
+          <a:effectLst/>
+        </a:effectStyle>
+        <a:effectStyle>
+          <a:effectLst>
+            <a:outerShdw blurRad="50800" dist="50800" dir="5400000" sx="96000" sy="96000" rotWithShape="0">
+              <a:srgbClr val="000000">
+                <a:alpha val="48000"/>
+              </a:srgbClr>
+            </a:outerShdw>
+          </a:effectLst>
+          <a:scene3d>
+            <a:camera prst="orthographicFront">
+              <a:rot lat="0" lon="0" rev="0"/>
+            </a:camera>
+            <a:lightRig rig="balanced" dir="t">
+              <a:rot lat="0" lon="0" rev="1080000"/>
+            </a:lightRig>
+          </a:scene3d>
+          <a:sp3d>
+            <a:bevelT w="38100" h="12700" prst="softRound"/>
+          </a:sp3d>
+        </a:effectStyle>
+      </a:effectStyleLst>
+      <a:bgFillStyleLst>
+        <a:solidFill>
+          <a:schemeClr val="phClr"/>
+        </a:solidFill>
+        <a:solidFill>
+          <a:schemeClr val="phClr"/>
+        </a:solidFill>
+        <a:gradFill rotWithShape="1">
+          <a:gsLst>
+            <a:gs pos="0">
+              <a:schemeClr val="phClr">
+                <a:tint val="94000"/>
+                <a:satMod val="80000"/>
+                <a:lumMod val="106000"/>
+              </a:schemeClr>
+            </a:gs>
+            <a:gs pos="100000">
+              <a:schemeClr val="phClr">
+                <a:shade val="80000"/>
+              </a:schemeClr>
+            </a:gs>
+          </a:gsLst>
+          <a:path path="circle">
+            <a:fillToRect l="50000" t="50000" r="50000" b="50000"/>
+          </a:path>
+        </a:gradFill>
+      </a:bgFillStyleLst>
+    </a:fmtScheme>
+  </a:themeElements>
+  <a:objectDefaults/>
+  <a:extraClrSchemeLst/>
+  <a:extLst>
+    <a:ext uri="{05A4C25C-085E-4340-85A3-A5531E510DB2}">
+      <thm15:themeFamily xmlns:thm15="http://schemas.microsoft.com/office/thememl/2012/main" name="Gallery" id="{BBFCD31E-59A1-489D-B089-A3EAD7CAE12E}" vid="{F5E91637-A7B6-4E27-B710-77DA7014EE1E}"/>
+    </a:ext>
+  </a:extLst>
+</a:theme>
+</file>
+
+<file path=ppt/theme/theme2.xml><?xml version="1.0" encoding="utf-8"?>
+<a:theme xmlns:a="http://schemas.openxmlformats.org/drawingml/2006/main" name="Office Theme">
+  <a:themeElements>
+    <a:clrScheme name="Office">
+      <a:dk1>
+        <a:sysClr val="windowText" lastClr="000000"/>
+      </a:dk1>
+      <a:lt1>
+        <a:sysClr val="window" lastClr="FFFFFF"/>
+      </a:lt1>
+      <a:dk2>
+        <a:srgbClr val="44546A"/>
+      </a:dk2>
+      <a:lt2>
+        <a:srgbClr val="E7E6E6"/>
+      </a:lt2>
+      <a:accent1>
+        <a:srgbClr val="4472C4"/>
+      </a:accent1>
+      <a:accent2>
+        <a:srgbClr val="ED7D31"/>
+      </a:accent2>
+      <a:accent3>
+        <a:srgbClr val="A5A5A5"/>
+      </a:accent3>
+      <a:accent4>
+        <a:srgbClr val="FFC000"/>
+      </a:accent4>
+      <a:accent5>
+        <a:srgbClr val="5B9BD5"/>
+      </a:accent5>
+      <a:accent6>
+        <a:srgbClr val="70AD47"/>
+      </a:accent6>
+      <a:hlink>
+        <a:srgbClr val="0563C1"/>
+      </a:hlink>
+      <a:folHlink>
+        <a:srgbClr val="954F72"/>
+      </a:folHlink>
+    </a:clrScheme>
+    <a:fontScheme name="Office">
+      <a:majorFont>
+        <a:latin typeface="Calibri Light" panose="020F0302020204030204"/>
+        <a:ea typeface=""/>
+        <a:cs typeface=""/>
+        <a:font script="Jpan" typeface="游ゴシック Light"/>
+        <a:font script="Hang" typeface="맑은 고딕"/>
+        <a:font script="Hans" typeface="等线 Light"/>
+        <a:font script="Hant" typeface="新細明體"/>
+        <a:font script="Arab" typeface="Times New Roman"/>
+        <a:font script="Hebr" typeface="Times New Roman"/>
+        <a:font script="Thai" typeface="Angsana New"/>
+        <a:font script="Ethi" typeface="Nyala"/>
+        <a:font script="Beng" typeface="Vrinda"/>
+        <a:font script="Gujr" typeface="Shruti"/>
+        <a:font script="Khmr" typeface="MoolBoran"/>
+        <a:font script="Knda" typeface="Tunga"/>
+        <a:font script="Guru" typeface="Raavi"/>
+        <a:font script="Cans" typeface="Euphemia"/>
+        <a:font script="Cher" typeface="Plantagenet Cherokee"/>
+        <a:font script="Yiii" typeface="Microsoft Yi Baiti"/>
+        <a:font script="Tibt" typeface="Microsoft Himalaya"/>
+        <a:font script="Thaa" typeface="MV Boli"/>
+        <a:font script="Deva" typeface="Mangal"/>
+        <a:font script="Telu" typeface="Gautami"/>
+        <a:font script="Taml" typeface="Latha"/>
+        <a:font script="Syrc" typeface="Estrangelo Edessa"/>
+        <a:font script="Orya" typeface="Kalinga"/>
+        <a:font script="Mlym" typeface="Kartika"/>
+        <a:font script="Laoo" typeface="DokChampa"/>
+        <a:font script="Sinh" typeface="Iskoola Pota"/>
+        <a:font script="Mong" typeface="Mongolian Baiti"/>
+        <a:font script="Viet" typeface="Times New Roman"/>
+        <a:font script="Uigh" typeface="Microsoft Uighur"/>
+        <a:font script="Geor" typeface="Sylfaen"/>
+        <a:font script="Armn" typeface="Arial"/>
+        <a:font script="Bugi" typeface="Leelawadee UI"/>
+        <a:font script="Bopo" typeface="Microsoft JhengHei"/>
+        <a:font script="Java" typeface="Javanese Text"/>
+        <a:font script="Lisu" typeface="Segoe UI"/>
+        <a:font script="Mymr" typeface="Myanmar Text"/>
+        <a:font script="Nkoo" typeface="Ebrima"/>
+        <a:font script="Olck" typeface="Nirmala UI"/>
+        <a:font script="Osma" typeface="Ebrima"/>
+        <a:font script="Phag" typeface="Phagspa"/>
+        <a:font script="Syrn" typeface="Estrangelo Edessa"/>
+        <a:font script="Syrj" typeface="Estrangelo Edessa"/>
+        <a:font script="Syre" typeface="Estrangelo Edessa"/>
+        <a:font script="Sora" typeface="Nirmala UI"/>
+        <a:font script="Tale" typeface="Microsoft Tai Le"/>
+        <a:font script="Talu" typeface="Microsoft New Tai Lue"/>
+        <a:font script="Tfng" typeface="Ebrima"/>
       </a:majorFont>
       <a:minorFont>
-        <a:latin typeface="Calibri"/>
+        <a:latin typeface="Calibri" panose="020F0502020204030204"/>
         <a:ea typeface=""/>
         <a:cs typeface=""/>
-        <a:font script="Jpan" typeface="ＭＳ Ｐゴシック"/>
+        <a:font script="Jpan" typeface="游ゴシック"/>
         <a:font script="Hang" typeface="맑은 고딕"/>
-        <a:font script="Hans" typeface="宋体"/>
+        <a:font script="Hans" typeface="等线"/>
         <a:font script="Hant" typeface="新細明體"/>
         <a:font script="Arab" typeface="Arial"/>
         <a:font script="Hebr" typeface="Arial"/>
@@ -5354,6 +7233,23 @@
         <a:font script="Viet" typeface="Arial"/>
         <a:font script="Uigh" typeface="Microsoft Uighur"/>
         <a:font script="Geor" typeface="Sylfaen"/>
+        <a:font script="Armn" typeface="Arial"/>
+        <a:font script="Bugi" typeface="Leelawadee UI"/>
+        <a:font script="Bopo" typeface="Microsoft JhengHei"/>
+        <a:font script="Java" typeface="Javanese Text"/>
+        <a:font script="Lisu" typeface="Segoe UI"/>
+        <a:font script="Mymr" typeface="Myanmar Text"/>
+        <a:font script="Nkoo" typeface="Ebrima"/>
+        <a:font script="Olck" typeface="Nirmala UI"/>
+        <a:font script="Osma" typeface="Ebrima"/>
+        <a:font script="Phag" typeface="Phagspa"/>
+        <a:font script="Syrn" typeface="Estrangelo Edessa"/>
+        <a:font script="Syrj" typeface="Estrangelo Edessa"/>
+        <a:font script="Syre" typeface="Estrangelo Edessa"/>
+        <a:font script="Sora" typeface="Nirmala UI"/>
+        <a:font script="Tale" typeface="Microsoft Tai Le"/>
+        <a:font script="Talu" typeface="Microsoft New Tai Lue"/>
+        <a:font script="Tfng" typeface="Ebrima"/>
       </a:minorFont>
     </a:fontScheme>
     <a:fmtScheme name="Office">
@@ -5365,200 +7261,141 @@
           <a:gsLst>
             <a:gs pos="0">
               <a:schemeClr val="phClr">
-                <a:tint val="50000"/>
-                <a:satMod val="300000"/>
+                <a:lumMod val="110000"/>
+                <a:satMod val="105000"/>
+                <a:tint val="67000"/>
               </a:schemeClr>
             </a:gs>
-            <a:gs pos="35000">
+            <a:gs pos="50000">
               <a:schemeClr val="phClr">
-                <a:tint val="37000"/>
-                <a:satMod val="300000"/>
+                <a:lumMod val="105000"/>
+                <a:satMod val="103000"/>
+                <a:tint val="73000"/>
               </a:schemeClr>
             </a:gs>
             <a:gs pos="100000">
               <a:schemeClr val="phClr">
-                <a:tint val="15000"/>
-                <a:satMod val="350000"/>
+                <a:lumMod val="105000"/>
+                <a:satMod val="109000"/>
+                <a:tint val="81000"/>
               </a:schemeClr>
             </a:gs>
           </a:gsLst>
-          <a:lin ang="16200000" scaled="1"/>
+          <a:lin ang="5400000" scaled="0"/>
         </a:gradFill>
         <a:gradFill rotWithShape="1">
           <a:gsLst>
             <a:gs pos="0">
               <a:schemeClr val="phClr">
-                <a:tint val="100000"/>
+                <a:satMod val="103000"/>
+                <a:lumMod val="102000"/>
+                <a:tint val="94000"/>
+              </a:schemeClr>
+            </a:gs>
+            <a:gs pos="50000">
+              <a:schemeClr val="phClr">
+                <a:satMod val="110000"/>
+                <a:lumMod val="100000"/>
                 <a:shade val="100000"/>
-                <a:satMod val="130000"/>
               </a:schemeClr>
             </a:gs>
             <a:gs pos="100000">
               <a:schemeClr val="phClr">
-                <a:tint val="50000"/>
-                <a:shade val="100000"/>
-                <a:satMod val="350000"/>
+                <a:lumMod val="99000"/>
+                <a:satMod val="120000"/>
+                <a:shade val="78000"/>
               </a:schemeClr>
             </a:gs>
           </a:gsLst>
-          <a:lin ang="16200000" scaled="0"/>
+          <a:lin ang="5400000" scaled="0"/>
         </a:gradFill>
       </a:fillStyleLst>
       <a:lnStyleLst>
-        <a:ln w="9525" cap="flat" cmpd="sng" algn="ctr">
-          <a:solidFill>
-            <a:schemeClr val="phClr">
-              <a:shade val="95000"/>
-              <a:satMod val="105000"/>
-            </a:schemeClr>
-          </a:solidFill>
-          <a:prstDash val="solid"/>
-        </a:ln>
-        <a:ln w="25400" cap="flat" cmpd="sng" algn="ctr">
+        <a:ln w="6350" cap="flat" cmpd="sng" algn="ctr">
           <a:solidFill>
             <a:schemeClr val="phClr"/>
           </a:solidFill>
           <a:prstDash val="solid"/>
+          <a:miter lim="800000"/>
         </a:ln>
-        <a:ln w="38100" cap="flat" cmpd="sng" algn="ctr">
+        <a:ln w="12700" cap="flat" cmpd="sng" algn="ctr">
           <a:solidFill>
             <a:schemeClr val="phClr"/>
           </a:solidFill>
           <a:prstDash val="solid"/>
+          <a:miter lim="800000"/>
+        </a:ln>
+        <a:ln w="19050" cap="flat" cmpd="sng" algn="ctr">
+          <a:solidFill>
+            <a:schemeClr val="phClr"/>
+          </a:solidFill>
+          <a:prstDash val="solid"/>
+          <a:miter lim="800000"/>
         </a:ln>
       </a:lnStyleLst>
       <a:effectStyleLst>
         <a:effectStyle>
+          <a:effectLst/>
+        </a:effectStyle>
+        <a:effectStyle>
+          <a:effectLst/>
+        </a:effectStyle>
+        <a:effectStyle>
           <a:effectLst>
-            <a:outerShdw blurRad="40000" dist="20000" dir="5400000" rotWithShape="0">
+            <a:outerShdw blurRad="57150" dist="19050" dir="5400000" algn="ctr" rotWithShape="0">
               <a:srgbClr val="000000">
-                <a:alpha val="38000"/>
+                <a:alpha val="63000"/>
               </a:srgbClr>
             </a:outerShdw>
           </a:effectLst>
-        </a:effectStyle>
-        <a:effectStyle>
-          <a:effectLst>
-            <a:outerShdw blurRad="40000" dist="23000" dir="5400000" rotWithShape="0">
-              <a:srgbClr val="000000">
-                <a:alpha val="35000"/>
-              </a:srgbClr>
-            </a:outerShdw>
-          </a:effectLst>
-        </a:effectStyle>
-        <a:effectStyle>
-          <a:effectLst>
-            <a:outerShdw blurRad="40000" dist="23000" dir="5400000" rotWithShape="0">
-              <a:srgbClr val="000000">
-                <a:alpha val="35000"/>
-              </a:srgbClr>
-            </a:outerShdw>
-          </a:effectLst>
-          <a:scene3d>
-            <a:camera prst="orthographicFront">
-              <a:rot lat="0" lon="0" rev="0"/>
-            </a:camera>
-            <a:lightRig rig="threePt" dir="t">
-              <a:rot lat="0" lon="0" rev="1200000"/>
-            </a:lightRig>
-          </a:scene3d>
-          <a:sp3d>
-            <a:bevelT w="63500" h="25400"/>
-          </a:sp3d>
         </a:effectStyle>
       </a:effectStyleLst>
       <a:bgFillStyleLst>
         <a:solidFill>
           <a:schemeClr val="phClr"/>
         </a:solidFill>
+        <a:solidFill>
+          <a:schemeClr val="phClr">
+            <a:tint val="95000"/>
+            <a:satMod val="170000"/>
+          </a:schemeClr>
+        </a:solidFill>
         <a:gradFill rotWithShape="1">
           <a:gsLst>
             <a:gs pos="0">
               <a:schemeClr val="phClr">
-                <a:tint val="40000"/>
-                <a:satMod val="350000"/>
+                <a:tint val="93000"/>
+                <a:satMod val="150000"/>
+                <a:shade val="98000"/>
+                <a:lumMod val="102000"/>
               </a:schemeClr>
             </a:gs>
-            <a:gs pos="40000">
+            <a:gs pos="50000">
               <a:schemeClr val="phClr">
-                <a:tint val="45000"/>
-                <a:shade val="99000"/>
-                <a:satMod val="350000"/>
+                <a:tint val="98000"/>
+                <a:satMod val="130000"/>
+                <a:shade val="90000"/>
+                <a:lumMod val="103000"/>
               </a:schemeClr>
             </a:gs>
             <a:gs pos="100000">
               <a:schemeClr val="phClr">
-                <a:shade val="20000"/>
-                <a:satMod val="255000"/>
+                <a:shade val="63000"/>
+                <a:satMod val="120000"/>
               </a:schemeClr>
             </a:gs>
           </a:gsLst>
-          <a:path path="circle">
-            <a:fillToRect l="50000" t="-80000" r="50000" b="180000"/>
-          </a:path>
-        </a:gradFill>
-        <a:gradFill rotWithShape="1">
-          <a:gsLst>
-            <a:gs pos="0">
-              <a:schemeClr val="phClr">
-                <a:tint val="80000"/>
-                <a:satMod val="300000"/>
-              </a:schemeClr>
-            </a:gs>
-            <a:gs pos="100000">
-              <a:schemeClr val="phClr">
-                <a:shade val="30000"/>
-                <a:satMod val="200000"/>
-              </a:schemeClr>
-            </a:gs>
-          </a:gsLst>
-          <a:path path="circle">
-            <a:fillToRect l="50000" t="50000" r="50000" b="50000"/>
-          </a:path>
+          <a:lin ang="5400000" scaled="0"/>
         </a:gradFill>
       </a:bgFillStyleLst>
     </a:fmtScheme>
   </a:themeElements>
-  <a:objectDefaults>
-    <a:spDef>
-      <a:spPr/>
-      <a:bodyPr/>
-      <a:lstStyle/>
-      <a:style>
-        <a:lnRef idx="1">
-          <a:schemeClr val="accent1"/>
-        </a:lnRef>
-        <a:fillRef idx="3">
-          <a:schemeClr val="accent1"/>
-        </a:fillRef>
-        <a:effectRef idx="2">
-          <a:schemeClr val="accent1"/>
-        </a:effectRef>
-        <a:fontRef idx="minor">
-          <a:schemeClr val="lt1"/>
-        </a:fontRef>
-      </a:style>
-    </a:spDef>
-    <a:lnDef>
-      <a:spPr/>
-      <a:bodyPr/>
-      <a:lstStyle/>
-      <a:style>
-        <a:lnRef idx="2">
-          <a:schemeClr val="accent1"/>
-        </a:lnRef>
-        <a:fillRef idx="0">
-          <a:schemeClr val="accent1"/>
-        </a:fillRef>
-        <a:effectRef idx="1">
-          <a:schemeClr val="accent1"/>
-        </a:effectRef>
-        <a:fontRef idx="minor">
-          <a:schemeClr val="tx1"/>
-        </a:fontRef>
-      </a:style>
-    </a:lnDef>
-  </a:objectDefaults>
+  <a:objectDefaults/>
   <a:extraClrSchemeLst/>
+  <a:extLst>
+    <a:ext uri="{05A4C25C-085E-4340-85A3-A5531E510DB2}">
+      <thm15:themeFamily xmlns:thm15="http://schemas.microsoft.com/office/thememl/2012/main" name="Office Theme" id="{62F939B6-93AF-4DB8-9C6B-D6C7DFDC589F}" vid="{4A3C46E8-61CC-4603-A589-7422A47A8E4A}"/>
+    </a:ext>
+  </a:extLst>
 </a:theme>
 </file>